--- a/goodco-project-overview.pptx
+++ b/goodco-project-overview.pptx
@@ -9,7 +9,6 @@
     <p:sldId id="257" r:id="rId8"/>
     <p:sldId id="258" r:id="rId9"/>
     <p:sldId id="259" r:id="rId10"/>
-    <p:sldId id="260" r:id="rId11"/>
   </p:sldIdLst>
   <p:sldSz cx="12191695" cy="6858000" type="screen4x3"/>
   <p:notesSz cx="6858000" cy="9144000"/>
@@ -3088,7 +3087,7 @@
     <p:bg>
       <p:bgPr>
         <a:solidFill>
-          <a:srgbClr val="0F2227"/>
+          <a:srgbClr val="0D2226"/>
         </a:solidFill>
         <a:effectLst/>
       </p:bgPr>
@@ -3108,18 +3107,18 @@
         </p:nvSpPr>
         <p:spPr>
           <a:xfrm>
-            <a:off x="685800" y="530352"/>
-            <a:ext cx="1097280" cy="292608"/>
+            <a:off x="658368" y="502920"/>
+            <a:ext cx="1115568" cy="310896"/>
           </a:xfrm>
           <a:prstGeom prst="roundRect">
             <a:avLst/>
           </a:prstGeom>
           <a:solidFill>
-            <a:srgbClr val="E8F3EE"/>
+            <a:srgbClr val="FFFFFF"/>
           </a:solidFill>
           <a:ln>
             <a:solidFill>
-              <a:srgbClr val="D2E0DC"/>
+              <a:srgbClr val="CCDED8"/>
             </a:solidFill>
           </a:ln>
         </p:spPr>
@@ -3145,7 +3144,7 @@
             <a:r>
               <a:rPr sz="850" b="1">
                 <a:solidFill>
-                  <a:srgbClr val="005B52"/>
+                  <a:srgbClr val="005A52"/>
                 </a:solidFill>
                 <a:latin typeface="Aptos"/>
               </a:rPr>
@@ -3162,8 +3161,8 @@
         </p:nvSpPr>
         <p:spPr>
           <a:xfrm>
-            <a:off x="685800" y="1005840"/>
-            <a:ext cx="8595360" cy="822960"/>
+            <a:off x="658368" y="1024128"/>
+            <a:ext cx="6309360" cy="868680"/>
           </a:xfrm>
           <a:prstGeom prst="rect">
             <a:avLst/>
@@ -3177,13 +3176,13 @@
           <a:lstStyle/>
           <a:p>
             <a:r>
-              <a:rPr sz="3200" b="1">
+              <a:rPr sz="3100" b="1">
                 <a:solidFill>
                   <a:srgbClr val="FFFFFF"/>
                 </a:solidFill>
                 <a:latin typeface="Aptos"/>
               </a:rPr>
-              <a:t>One platform for pantry inventory and lateral food movement.</a:t>
+              <a:t>Pantries cannot rebalance food they cannot see.</a:t>
             </a:r>
           </a:p>
         </p:txBody>
@@ -3196,8 +3195,8 @@
         </p:nvSpPr>
         <p:spPr>
           <a:xfrm>
-            <a:off x="731520" y="1993392"/>
-            <a:ext cx="7498079" cy="530352"/>
+            <a:off x="685800" y="1984248"/>
+            <a:ext cx="6080760" cy="530352"/>
           </a:xfrm>
           <a:prstGeom prst="rect">
             <a:avLst/>
@@ -3211,13 +3210,13 @@
           <a:lstStyle/>
           <a:p>
             <a:r>
-              <a:rPr sz="1500" b="0">
-                <a:solidFill>
-                  <a:srgbClr val="CBDEDA"/>
+              <a:rPr sz="1420" b="0">
+                <a:solidFill>
+                  <a:srgbClr val="CADEDA"/>
                 </a:solidFill>
                 <a:latin typeface="Aptos"/>
               </a:rPr>
-              <a:t>Hub-and-spoke food networks need the hub. But efficiency improves when spokes can also see and move eligible surplus between each other.</a:t>
+              <a:t>Food banks are strong hubs. The weak point is the last-mile network: pantry inventory, surplus, and urgency usually stay local.</a:t>
             </a:r>
           </a:p>
         </p:txBody>
@@ -3230,8 +3229,8 @@
         </p:nvSpPr>
         <p:spPr>
           <a:xfrm>
-            <a:off x="8138160" y="1051560"/>
-            <a:ext cx="1005840" cy="1005840"/>
+            <a:off x="8823960" y="1143000"/>
+            <a:ext cx="960120" cy="960120"/>
           </a:xfrm>
           <a:prstGeom prst="ellipse">
             <a:avLst/>
@@ -3284,8 +3283,8 @@
         </p:nvSpPr>
         <p:spPr>
           <a:xfrm>
-            <a:off x="6766560" y="3063240"/>
-            <a:ext cx="585216" cy="585216"/>
+            <a:off x="7452360" y="2880360"/>
+            <a:ext cx="603504" cy="603504"/>
           </a:xfrm>
           <a:prstGeom prst="ellipse">
             <a:avLst/>
@@ -3319,9 +3318,9 @@
           <a:p>
             <a:pPr algn="ctr"/>
             <a:r>
-              <a:rPr sz="860" b="1">
-                <a:solidFill>
-                  <a:srgbClr val="0F2227"/>
+              <a:rPr sz="850" b="1">
+                <a:solidFill>
+                  <a:srgbClr val="0D2226"/>
                 </a:solidFill>
                 <a:latin typeface="Aptos"/>
               </a:rPr>
@@ -3338,15 +3337,15 @@
         </p:nvCxnSpPr>
         <p:spPr>
           <a:xfrm flipH="1">
-            <a:off x="7059168" y="1947672"/>
-            <a:ext cx="1581912" cy="1115568"/>
+            <a:off x="7754112" y="2075688"/>
+            <a:ext cx="1554480" cy="804672"/>
           </a:xfrm>
           <a:prstGeom prst="line">
             <a:avLst/>
           </a:prstGeom>
           <a:ln w="12700">
             <a:solidFill>
-              <a:srgbClr val="49676A"/>
+              <a:srgbClr val="587678"/>
             </a:solidFill>
           </a:ln>
         </p:spPr>
@@ -3373,8 +3372,8 @@
         </p:nvSpPr>
         <p:spPr>
           <a:xfrm>
-            <a:off x="8412480" y="4480560"/>
-            <a:ext cx="585216" cy="585216"/>
+            <a:off x="10012680" y="2880360"/>
+            <a:ext cx="603504" cy="603504"/>
           </a:xfrm>
           <a:prstGeom prst="ellipse">
             <a:avLst/>
@@ -3408,9 +3407,9 @@
           <a:p>
             <a:pPr algn="ctr"/>
             <a:r>
-              <a:rPr sz="860" b="1">
-                <a:solidFill>
-                  <a:srgbClr val="0F2227"/>
+              <a:rPr sz="850" b="1">
+                <a:solidFill>
+                  <a:srgbClr val="0D2226"/>
                 </a:solidFill>
                 <a:latin typeface="Aptos"/>
               </a:rPr>
@@ -3427,15 +3426,15 @@
         </p:nvCxnSpPr>
         <p:spPr>
           <a:xfrm>
-            <a:off x="8641080" y="1947672"/>
-            <a:ext cx="64008" cy="2532888"/>
+            <a:off x="9308592" y="2075688"/>
+            <a:ext cx="1005840" cy="804672"/>
           </a:xfrm>
           <a:prstGeom prst="line">
             <a:avLst/>
           </a:prstGeom>
           <a:ln w="12700">
             <a:solidFill>
-              <a:srgbClr val="49676A"/>
+              <a:srgbClr val="587678"/>
             </a:solidFill>
           </a:ln>
         </p:spPr>
@@ -3462,8 +3461,8 @@
         </p:nvSpPr>
         <p:spPr>
           <a:xfrm>
-            <a:off x="10012680" y="3154680"/>
-            <a:ext cx="585216" cy="585216"/>
+            <a:off x="7726679" y="4645152"/>
+            <a:ext cx="603504" cy="603504"/>
           </a:xfrm>
           <a:prstGeom prst="ellipse">
             <a:avLst/>
@@ -3497,13 +3496,13 @@
           <a:p>
             <a:pPr algn="ctr"/>
             <a:r>
-              <a:rPr sz="860" b="1">
-                <a:solidFill>
-                  <a:srgbClr val="0F2227"/>
+              <a:rPr sz="850" b="1">
+                <a:solidFill>
+                  <a:srgbClr val="0D2226"/>
                 </a:solidFill>
                 <a:latin typeface="Aptos"/>
               </a:rPr>
-              <a:t>SJ</a:t>
+              <a:t>Marin</a:t>
             </a:r>
           </a:p>
         </p:txBody>
@@ -3515,16 +3514,16 @@
           <p:nvPr/>
         </p:nvCxnSpPr>
         <p:spPr>
-          <a:xfrm>
-            <a:off x="8641080" y="1947672"/>
-            <a:ext cx="1664208" cy="1207008"/>
+          <a:xfrm flipH="1">
+            <a:off x="8028431" y="2075688"/>
+            <a:ext cx="1280161" cy="2569464"/>
           </a:xfrm>
           <a:prstGeom prst="line">
             <a:avLst/>
           </a:prstGeom>
           <a:ln w="12700">
             <a:solidFill>
-              <a:srgbClr val="49676A"/>
+              <a:srgbClr val="587678"/>
             </a:solidFill>
           </a:ln>
         </p:spPr>
@@ -3551,8 +3550,8 @@
         </p:nvSpPr>
         <p:spPr>
           <a:xfrm>
-            <a:off x="10287000" y="4892040"/>
-            <a:ext cx="585216" cy="585216"/>
+            <a:off x="10287000" y="4645152"/>
+            <a:ext cx="603504" cy="603504"/>
           </a:xfrm>
           <a:prstGeom prst="ellipse">
             <a:avLst/>
@@ -3586,13 +3585,13 @@
           <a:p>
             <a:pPr algn="ctr"/>
             <a:r>
-              <a:rPr sz="860" b="1">
-                <a:solidFill>
-                  <a:srgbClr val="0F2227"/>
+              <a:rPr sz="850" b="1">
+                <a:solidFill>
+                  <a:srgbClr val="0D2226"/>
                 </a:solidFill>
                 <a:latin typeface="Aptos"/>
               </a:rPr>
-              <a:t>Marin</a:t>
+              <a:t>SJ</a:t>
             </a:r>
           </a:p>
         </p:txBody>
@@ -3605,15 +3604,15 @@
         </p:nvCxnSpPr>
         <p:spPr>
           <a:xfrm>
-            <a:off x="8641080" y="1947672"/>
-            <a:ext cx="1938528" cy="2944368"/>
+            <a:off x="9308592" y="2075688"/>
+            <a:ext cx="1280160" cy="2569464"/>
           </a:xfrm>
           <a:prstGeom prst="line">
             <a:avLst/>
           </a:prstGeom>
           <a:ln w="12700">
             <a:solidFill>
-              <a:srgbClr val="49676A"/>
+              <a:srgbClr val="587678"/>
             </a:solidFill>
           </a:ln>
         </p:spPr>
@@ -3632,60 +3631,41 @@
           </a:fontRef>
         </p:style>
       </p:cxnSp>
-      <p:sp>
-        <p:nvSpPr>
-          <p:cNvPr id="14" name="Oval 13"/>
-          <p:cNvSpPr/>
-          <p:nvPr/>
-        </p:nvSpPr>
-        <p:spPr>
-          <a:xfrm>
-            <a:off x="6492240" y="4800600"/>
-            <a:ext cx="585216" cy="585216"/>
-          </a:xfrm>
-          <a:prstGeom prst="ellipse">
-            <a:avLst/>
-          </a:prstGeom>
-          <a:solidFill>
-            <a:srgbClr val="FFFFFF"/>
-          </a:solidFill>
-          <a:ln>
+      <p:cxnSp>
+        <p:nvCxnSpPr>
+          <p:cNvPr id="14" name="Connector 13"/>
+          <p:cNvCxnSpPr/>
+          <p:nvPr/>
+        </p:nvCxnSpPr>
+        <p:spPr>
+          <a:xfrm>
+            <a:off x="8055864" y="3182112"/>
+            <a:ext cx="1956816" cy="0"/>
+          </a:xfrm>
+          <a:prstGeom prst="line">
+            <a:avLst/>
+          </a:prstGeom>
+          <a:ln w="40640">
             <a:solidFill>
-              <a:srgbClr val="FFFFFF"/>
+              <a:srgbClr val="F4B146"/>
             </a:solidFill>
           </a:ln>
         </p:spPr>
         <p:style>
-          <a:lnRef idx="1">
+          <a:lnRef idx="2">
             <a:schemeClr val="accent1"/>
           </a:lnRef>
-          <a:fillRef idx="3">
+          <a:fillRef idx="0">
             <a:schemeClr val="accent1"/>
           </a:fillRef>
-          <a:effectRef idx="2">
+          <a:effectRef idx="1">
             <a:schemeClr val="accent1"/>
           </a:effectRef>
           <a:fontRef idx="minor">
-            <a:schemeClr val="lt1"/>
+            <a:schemeClr val="tx1"/>
           </a:fontRef>
         </p:style>
-        <p:txBody>
-          <a:bodyPr rtlCol="0" anchor="ctr"/>
-          <a:lstStyle/>
-          <a:p>
-            <a:pPr algn="ctr"/>
-            <a:r>
-              <a:rPr sz="860" b="1">
-                <a:solidFill>
-                  <a:srgbClr val="0F2227"/>
-                </a:solidFill>
-                <a:latin typeface="Aptos"/>
-              </a:rPr>
-              <a:t>East</a:t>
-            </a:r>
-          </a:p>
-        </p:txBody>
-      </p:sp>
+      </p:cxnSp>
       <p:cxnSp>
         <p:nvCxnSpPr>
           <p:cNvPr id="15" name="Connector 14"/>
@@ -3693,16 +3673,16 @@
           <p:nvPr/>
         </p:nvCxnSpPr>
         <p:spPr>
-          <a:xfrm flipH="1">
-            <a:off x="6784848" y="1947672"/>
-            <a:ext cx="1856232" cy="2852928"/>
+          <a:xfrm>
+            <a:off x="8028431" y="4956048"/>
+            <a:ext cx="2258569" cy="0"/>
           </a:xfrm>
           <a:prstGeom prst="line">
             <a:avLst/>
           </a:prstGeom>
-          <a:ln w="12700">
+          <a:ln w="40640">
             <a:solidFill>
-              <a:srgbClr val="49676A"/>
+              <a:srgbClr val="F4B146"/>
             </a:solidFill>
           </a:ln>
         </p:spPr>
@@ -3729,15 +3709,15 @@
         </p:nvCxnSpPr>
         <p:spPr>
           <a:xfrm>
-            <a:off x="7059168" y="3355848"/>
-            <a:ext cx="2953512" cy="100584"/>
+            <a:off x="7744968" y="3483864"/>
+            <a:ext cx="283463" cy="1161288"/>
           </a:xfrm>
           <a:prstGeom prst="line">
             <a:avLst/>
           </a:prstGeom>
-          <a:ln w="38100">
+          <a:ln w="30480">
             <a:solidFill>
-              <a:srgbClr val="F6B74A"/>
+              <a:srgbClr val="F4B146"/>
             </a:solidFill>
           </a:ln>
         </p:spPr>
@@ -3756,86 +3736,16 @@
           </a:fontRef>
         </p:style>
       </p:cxnSp>
-      <p:cxnSp>
-        <p:nvCxnSpPr>
-          <p:cNvPr id="17" name="Connector 16"/>
-          <p:cNvCxnSpPr/>
-          <p:nvPr/>
-        </p:nvCxnSpPr>
-        <p:spPr>
-          <a:xfrm flipV="1">
-            <a:off x="6793992" y="4773168"/>
-            <a:ext cx="1618488" cy="301752"/>
-          </a:xfrm>
-          <a:prstGeom prst="line">
-            <a:avLst/>
-          </a:prstGeom>
-          <a:ln w="38100">
-            <a:solidFill>
-              <a:srgbClr val="F6B74A"/>
-            </a:solidFill>
-          </a:ln>
-        </p:spPr>
-        <p:style>
-          <a:lnRef idx="2">
-            <a:schemeClr val="accent1"/>
-          </a:lnRef>
-          <a:fillRef idx="0">
-            <a:schemeClr val="accent1"/>
-          </a:fillRef>
-          <a:effectRef idx="1">
-            <a:schemeClr val="accent1"/>
-          </a:effectRef>
-          <a:fontRef idx="minor">
-            <a:schemeClr val="tx1"/>
-          </a:fontRef>
-        </p:style>
-      </p:cxnSp>
-      <p:cxnSp>
-        <p:nvCxnSpPr>
-          <p:cNvPr id="18" name="Connector 17"/>
-          <p:cNvCxnSpPr/>
-          <p:nvPr/>
-        </p:nvCxnSpPr>
-        <p:spPr>
-          <a:xfrm>
-            <a:off x="8997696" y="4736592"/>
-            <a:ext cx="1289304" cy="402336"/>
-          </a:xfrm>
-          <a:prstGeom prst="line">
-            <a:avLst/>
-          </a:prstGeom>
-          <a:ln w="38100">
-            <a:solidFill>
-              <a:srgbClr val="F6B74A"/>
-            </a:solidFill>
-          </a:ln>
-        </p:spPr>
-        <p:style>
-          <a:lnRef idx="2">
-            <a:schemeClr val="accent1"/>
-          </a:lnRef>
-          <a:fillRef idx="0">
-            <a:schemeClr val="accent1"/>
-          </a:fillRef>
-          <a:effectRef idx="1">
-            <a:schemeClr val="accent1"/>
-          </a:effectRef>
-          <a:fontRef idx="minor">
-            <a:schemeClr val="tx1"/>
-          </a:fontRef>
-        </p:style>
-      </p:cxnSp>
-      <p:sp>
-        <p:nvSpPr>
-          <p:cNvPr id="19" name="Rounded Rectangle 18"/>
+      <p:sp>
+        <p:nvSpPr>
+          <p:cNvPr id="17" name="Rounded Rectangle 16"/>
           <p:cNvSpPr/>
           <p:nvPr/>
         </p:nvSpPr>
         <p:spPr>
           <a:xfrm>
-            <a:off x="749808" y="4160520"/>
-            <a:ext cx="1965960" cy="960120"/>
+            <a:off x="713232" y="4041648"/>
+            <a:ext cx="2057400" cy="941832"/>
           </a:xfrm>
           <a:prstGeom prst="roundRect">
             <a:avLst/>
@@ -3845,7 +3755,7 @@
           </a:solidFill>
           <a:ln w="12700">
             <a:solidFill>
-              <a:srgbClr val="D2E0DC"/>
+              <a:srgbClr val="CCDED8"/>
             </a:solidFill>
           </a:ln>
         </p:spPr>
@@ -3873,14 +3783,14 @@
       </p:sp>
       <p:sp>
         <p:nvSpPr>
-          <p:cNvPr id="20" name="TextBox 19"/>
+          <p:cNvPr id="18" name="TextBox 17"/>
           <p:cNvSpPr txBox="1"/>
           <p:nvPr/>
         </p:nvSpPr>
         <p:spPr>
           <a:xfrm>
-            <a:off x="914400" y="4288536"/>
-            <a:ext cx="1691639" cy="292608"/>
+            <a:off x="877824" y="4169663"/>
+            <a:ext cx="1764792" cy="292608"/>
           </a:xfrm>
           <a:prstGeom prst="rect">
             <a:avLst/>
@@ -3896,7 +3806,7 @@
             <a:r>
               <a:rPr sz="2200" b="1">
                 <a:solidFill>
-                  <a:srgbClr val="F6B74A"/>
+                  <a:srgbClr val="F4B146"/>
                 </a:solidFill>
                 <a:latin typeface="Aptos"/>
               </a:rPr>
@@ -3907,14 +3817,14 @@
       </p:sp>
       <p:sp>
         <p:nvSpPr>
-          <p:cNvPr id="21" name="TextBox 20"/>
+          <p:cNvPr id="19" name="TextBox 18"/>
           <p:cNvSpPr txBox="1"/>
           <p:nvPr/>
         </p:nvSpPr>
         <p:spPr>
           <a:xfrm>
-            <a:off x="914400" y="4672583"/>
-            <a:ext cx="1673351" cy="292608"/>
+            <a:off x="877824" y="4553712"/>
+            <a:ext cx="1746504" cy="292608"/>
           </a:xfrm>
           <a:prstGeom prst="rect">
             <a:avLst/>
@@ -3928,27 +3838,27 @@
           <a:lstStyle/>
           <a:p>
             <a:r>
-              <a:rPr sz="819" b="0">
-                <a:solidFill>
-                  <a:srgbClr val="5C6C72"/>
+              <a:rPr sz="840" b="0">
+                <a:solidFill>
+                  <a:srgbClr val="58696F"/>
                 </a:solidFill>
                 <a:latin typeface="Aptos"/>
               </a:rPr>
-              <a:t>U.S. pantry/meal-program network scale</a:t>
-            </a:r>
-          </a:p>
-        </p:txBody>
-      </p:sp>
-      <p:sp>
-        <p:nvSpPr>
-          <p:cNvPr id="22" name="Rounded Rectangle 21"/>
+              <a:t>U.S. pantry and meal-program network scale</a:t>
+            </a:r>
+          </a:p>
+        </p:txBody>
+      </p:sp>
+      <p:sp>
+        <p:nvSpPr>
+          <p:cNvPr id="20" name="Rounded Rectangle 19"/>
           <p:cNvSpPr/>
           <p:nvPr/>
         </p:nvSpPr>
         <p:spPr>
           <a:xfrm>
-            <a:off x="2907792" y="4160520"/>
-            <a:ext cx="1965960" cy="960120"/>
+            <a:off x="2944368" y="4041648"/>
+            <a:ext cx="2057400" cy="941832"/>
           </a:xfrm>
           <a:prstGeom prst="roundRect">
             <a:avLst/>
@@ -3958,7 +3868,7 @@
           </a:solidFill>
           <a:ln w="12700">
             <a:solidFill>
-              <a:srgbClr val="D2E0DC"/>
+              <a:srgbClr val="CCDED8"/>
             </a:solidFill>
           </a:ln>
         </p:spPr>
@@ -3986,14 +3896,14 @@
       </p:sp>
       <p:sp>
         <p:nvSpPr>
-          <p:cNvPr id="23" name="TextBox 22"/>
+          <p:cNvPr id="21" name="TextBox 20"/>
           <p:cNvSpPr txBox="1"/>
           <p:nvPr/>
         </p:nvSpPr>
         <p:spPr>
           <a:xfrm>
-            <a:off x="3072384" y="4288536"/>
-            <a:ext cx="1691639" cy="292608"/>
+            <a:off x="3108960" y="4169663"/>
+            <a:ext cx="1764792" cy="292608"/>
           </a:xfrm>
           <a:prstGeom prst="rect">
             <a:avLst/>
@@ -4009,7 +3919,7 @@
             <a:r>
               <a:rPr sz="2200" b="1">
                 <a:solidFill>
-                  <a:srgbClr val="F6B74A"/>
+                  <a:srgbClr val="F4B146"/>
                 </a:solidFill>
                 <a:latin typeface="Aptos"/>
               </a:rPr>
@@ -4020,14 +3930,14 @@
       </p:sp>
       <p:sp>
         <p:nvSpPr>
-          <p:cNvPr id="24" name="TextBox 23"/>
+          <p:cNvPr id="22" name="TextBox 21"/>
           <p:cNvSpPr txBox="1"/>
           <p:nvPr/>
         </p:nvSpPr>
         <p:spPr>
           <a:xfrm>
-            <a:off x="3072384" y="4672583"/>
-            <a:ext cx="1673351" cy="292608"/>
+            <a:off x="3108960" y="4553712"/>
+            <a:ext cx="1746504" cy="292608"/>
           </a:xfrm>
           <a:prstGeom prst="rect">
             <a:avLst/>
@@ -4041,27 +3951,27 @@
           <a:lstStyle/>
           <a:p>
             <a:r>
-              <a:rPr sz="819" b="0">
-                <a:solidFill>
-                  <a:srgbClr val="5C6C72"/>
+              <a:rPr sz="840" b="0">
+                <a:solidFill>
+                  <a:srgbClr val="58696F"/>
                 </a:solidFill>
                 <a:latin typeface="Aptos"/>
               </a:rPr>
-              <a:t>ACCFB Alameda partner agencies</a:t>
-            </a:r>
-          </a:p>
-        </p:txBody>
-      </p:sp>
-      <p:sp>
-        <p:nvSpPr>
-          <p:cNvPr id="25" name="Rounded Rectangle 24"/>
+              <a:t>Alameda County partner agencies</a:t>
+            </a:r>
+          </a:p>
+        </p:txBody>
+      </p:sp>
+      <p:sp>
+        <p:nvSpPr>
+          <p:cNvPr id="23" name="Rounded Rectangle 22"/>
           <p:cNvSpPr/>
           <p:nvPr/>
         </p:nvSpPr>
         <p:spPr>
           <a:xfrm>
-            <a:off x="5065776" y="4160520"/>
-            <a:ext cx="1965960" cy="960120"/>
+            <a:off x="5175504" y="4041648"/>
+            <a:ext cx="2057400" cy="941832"/>
           </a:xfrm>
           <a:prstGeom prst="roundRect">
             <a:avLst/>
@@ -4071,7 +3981,7 @@
           </a:solidFill>
           <a:ln w="12700">
             <a:solidFill>
-              <a:srgbClr val="D2E0DC"/>
+              <a:srgbClr val="CCDED8"/>
             </a:solidFill>
           </a:ln>
         </p:spPr>
@@ -4099,14 +4009,14 @@
       </p:sp>
       <p:sp>
         <p:nvSpPr>
-          <p:cNvPr id="26" name="TextBox 25"/>
+          <p:cNvPr id="24" name="TextBox 23"/>
           <p:cNvSpPr txBox="1"/>
           <p:nvPr/>
         </p:nvSpPr>
         <p:spPr>
           <a:xfrm>
-            <a:off x="5230368" y="4288536"/>
-            <a:ext cx="1691639" cy="292608"/>
+            <a:off x="5340096" y="4169663"/>
+            <a:ext cx="1764792" cy="292608"/>
           </a:xfrm>
           <a:prstGeom prst="rect">
             <a:avLst/>
@@ -4122,7 +4032,7 @@
             <a:r>
               <a:rPr sz="2200" b="1">
                 <a:solidFill>
-                  <a:srgbClr val="F6B74A"/>
+                  <a:srgbClr val="F4B146"/>
                 </a:solidFill>
                 <a:latin typeface="Aptos"/>
               </a:rPr>
@@ -4133,14 +4043,14 @@
       </p:sp>
       <p:sp>
         <p:nvSpPr>
-          <p:cNvPr id="27" name="TextBox 26"/>
+          <p:cNvPr id="25" name="TextBox 24"/>
           <p:cNvSpPr txBox="1"/>
           <p:nvPr/>
         </p:nvSpPr>
         <p:spPr>
           <a:xfrm>
-            <a:off x="5230368" y="4672583"/>
-            <a:ext cx="1673351" cy="292608"/>
+            <a:off x="5340096" y="4553712"/>
+            <a:ext cx="1746504" cy="292608"/>
           </a:xfrm>
           <a:prstGeom prst="rect">
             <a:avLst/>
@@ -4154,9 +4064,9 @@
           <a:lstStyle/>
           <a:p>
             <a:r>
-              <a:rPr sz="819" b="0">
-                <a:solidFill>
-                  <a:srgbClr val="5C6C72"/>
+              <a:rPr sz="840" b="0">
+                <a:solidFill>
+                  <a:srgbClr val="58696F"/>
                 </a:solidFill>
                 <a:latin typeface="Aptos"/>
               </a:rPr>
@@ -4167,14 +4077,14 @@
       </p:sp>
       <p:sp>
         <p:nvSpPr>
-          <p:cNvPr id="28" name="TextBox 27"/>
+          <p:cNvPr id="26" name="TextBox 25"/>
           <p:cNvSpPr txBox="1"/>
           <p:nvPr/>
         </p:nvSpPr>
         <p:spPr>
           <a:xfrm>
-            <a:off x="749808" y="5715000"/>
-            <a:ext cx="7863840" cy="301752"/>
+            <a:off x="713232" y="5669280"/>
+            <a:ext cx="7498079" cy="310896"/>
           </a:xfrm>
           <a:prstGeom prst="rect">
             <a:avLst/>
@@ -4188,27 +4098,27 @@
           <a:lstStyle/>
           <a:p>
             <a:r>
-              <a:rPr sz="1600" b="1">
+              <a:rPr sz="1550" b="1">
                 <a:solidFill>
                   <a:srgbClr val="FFFFFF"/>
                 </a:solidFill>
                 <a:latin typeface="Aptos"/>
               </a:rPr>
-              <a:t>Thesis: lateral visibility turns isolated spokes into a coordinated mesh.</a:t>
-            </a:r>
-          </a:p>
-        </p:txBody>
-      </p:sp>
-      <p:sp>
-        <p:nvSpPr>
-          <p:cNvPr id="29" name="TextBox 28"/>
+              <a:t>GoodCo adds the missing lateral layer: inventory visibility plus governed pantry-to-pantry movement.</a:t>
+            </a:r>
+          </a:p>
+        </p:txBody>
+      </p:sp>
+      <p:sp>
+        <p:nvSpPr>
+          <p:cNvPr id="27" name="TextBox 26"/>
           <p:cNvSpPr txBox="1"/>
           <p:nvPr/>
         </p:nvSpPr>
         <p:spPr>
           <a:xfrm>
-            <a:off x="685800" y="6473952"/>
-            <a:ext cx="8686800" cy="164592"/>
+            <a:off x="658368" y="6473952"/>
+            <a:ext cx="8778240" cy="164592"/>
           </a:xfrm>
           <a:prstGeom prst="rect">
             <a:avLst/>
@@ -4222,27 +4132,27 @@
           <a:lstStyle/>
           <a:p>
             <a:r>
-              <a:rPr sz="660" b="0">
-                <a:solidFill>
-                  <a:srgbClr val="5C6C72"/>
+              <a:rPr sz="650" b="0">
+                <a:solidFill>
+                  <a:srgbClr val="58696F"/>
                 </a:solidFill>
                 <a:latin typeface="Aptos"/>
               </a:rPr>
-              <a:t>Sources: Feeding America, ACCFB, Second Harvest Silicon Valley</a:t>
-            </a:r>
-          </a:p>
-        </p:txBody>
-      </p:sp>
-      <p:sp>
-        <p:nvSpPr>
-          <p:cNvPr id="30" name="TextBox 29"/>
+              <a:t>Sources: Feeding America, Alameda County Community Food Bank, Second Harvest Silicon Valley</a:t>
+            </a:r>
+          </a:p>
+        </p:txBody>
+      </p:sp>
+      <p:sp>
+        <p:nvSpPr>
+          <p:cNvPr id="28" name="TextBox 27"/>
           <p:cNvSpPr txBox="1"/>
           <p:nvPr/>
         </p:nvSpPr>
         <p:spPr>
           <a:xfrm>
-            <a:off x="10972800" y="6473952"/>
-            <a:ext cx="640080" cy="164592"/>
+            <a:off x="10927080" y="6473952"/>
+            <a:ext cx="658368" cy="164592"/>
           </a:xfrm>
           <a:prstGeom prst="rect">
             <a:avLst/>
@@ -4259,11 +4169,11 @@
             <a:r>
               <a:rPr sz="750" b="0">
                 <a:solidFill>
-                  <a:srgbClr val="5C6C72"/>
+                  <a:srgbClr val="58696F"/>
                 </a:solidFill>
                 <a:latin typeface="Aptos"/>
               </a:rPr>
-              <a:t>01 / 05</a:t>
+              <a:t>01 / 04</a:t>
             </a:r>
           </a:p>
         </p:txBody>
@@ -4302,18 +4212,18 @@
         </p:nvSpPr>
         <p:spPr>
           <a:xfrm>
-            <a:off x="658368" y="420624"/>
-            <a:ext cx="1371600" cy="292608"/>
+            <a:off x="658368" y="438912"/>
+            <a:ext cx="1417320" cy="310896"/>
           </a:xfrm>
           <a:prstGeom prst="roundRect">
             <a:avLst/>
           </a:prstGeom>
           <a:solidFill>
-            <a:srgbClr val="E8F3EE"/>
+            <a:srgbClr val="E5F3EE"/>
           </a:solidFill>
           <a:ln>
             <a:solidFill>
-              <a:srgbClr val="D2E0DC"/>
+              <a:srgbClr val="CCDED8"/>
             </a:solidFill>
           </a:ln>
         </p:spPr>
@@ -4339,11 +4249,11 @@
             <a:r>
               <a:rPr sz="850" b="1">
                 <a:solidFill>
-                  <a:srgbClr val="005B52"/>
+                  <a:srgbClr val="005A52"/>
                 </a:solidFill>
                 <a:latin typeface="Aptos"/>
               </a:rPr>
-              <a:t>PROBLEM FIT</a:t>
+              <a:t>TRACK FIT</a:t>
             </a:r>
           </a:p>
         </p:txBody>
@@ -4356,8 +4266,8 @@
         </p:nvSpPr>
         <p:spPr>
           <a:xfrm>
-            <a:off x="658368" y="822960"/>
-            <a:ext cx="9601200" cy="566928"/>
+            <a:off x="658368" y="896112"/>
+            <a:ext cx="9052560" cy="658368"/>
           </a:xfrm>
           <a:prstGeom prst="rect">
             <a:avLst/>
@@ -4371,13 +4281,13 @@
           <a:lstStyle/>
           <a:p>
             <a:r>
-              <a:rPr sz="2500" b="1">
+              <a:rPr sz="2800" b="1">
                 <a:solidFill>
                   <a:srgbClr val="121F23"/>
                 </a:solidFill>
                 <a:latin typeface="Aptos"/>
               </a:rPr>
-              <a:t>Which of the 35 problems are we addressing?</a:t>
+              <a:t>We are solving one movement problem deeply.</a:t>
             </a:r>
           </a:p>
         </p:txBody>
@@ -4390,8 +4300,8 @@
         </p:nvSpPr>
         <p:spPr>
           <a:xfrm>
-            <a:off x="676656" y="1417320"/>
-            <a:ext cx="9692640" cy="329184"/>
+            <a:off x="685800" y="1581912"/>
+            <a:ext cx="8686800" cy="402336"/>
           </a:xfrm>
           <a:prstGeom prst="rect">
             <a:avLst/>
@@ -4405,13 +4315,13 @@
           <a:lstStyle/>
           <a:p>
             <a:r>
-              <a:rPr sz="1250" b="0">
-                <a:solidFill>
-                  <a:srgbClr val="5C6C72"/>
+              <a:rPr sz="1320" b="0">
+                <a:solidFill>
+                  <a:srgbClr val="58696F"/>
                 </a:solidFill>
                 <a:latin typeface="Aptos"/>
               </a:rPr>
-              <a:t>Primary fit is the movement problem; inventory intelligence is the required foundation.</a:t>
+              <a:t>The inventory work is not a side quest. It is the trust layer required before pantries can share food.</a:t>
             </a:r>
           </a:p>
         </p:txBody>
@@ -4424,8 +4334,8 @@
         </p:nvSpPr>
         <p:spPr>
           <a:xfrm>
-            <a:off x="749808" y="1920240"/>
-            <a:ext cx="5230368" cy="3456432"/>
+            <a:off x="777240" y="1965960"/>
+            <a:ext cx="5120640" cy="3246120"/>
           </a:xfrm>
           <a:prstGeom prst="roundRect">
             <a:avLst/>
@@ -4435,7 +4345,7 @@
           </a:solidFill>
           <a:ln w="12700">
             <a:solidFill>
-              <a:srgbClr val="D2E0DC"/>
+              <a:srgbClr val="CCDED8"/>
             </a:solidFill>
           </a:ln>
         </p:spPr>
@@ -4469,8 +4379,8 @@
         </p:nvSpPr>
         <p:spPr>
           <a:xfrm>
-            <a:off x="1005840" y="2212848"/>
-            <a:ext cx="4572000" cy="256032"/>
+            <a:off x="1024128" y="2231136"/>
+            <a:ext cx="4389120" cy="256032"/>
           </a:xfrm>
           <a:prstGeom prst="rect">
             <a:avLst/>
@@ -4484,13 +4394,13 @@
           <a:lstStyle/>
           <a:p>
             <a:r>
-              <a:rPr sz="1700" b="1">
+              <a:rPr sz="1400" b="1">
                 <a:solidFill>
                   <a:srgbClr val="00897B"/>
                 </a:solidFill>
                 <a:latin typeface="Aptos"/>
               </a:rPr>
-              <a:t>Primary: Theme 7, Problem 34</a:t>
+              <a:t>Primary fit</a:t>
             </a:r>
           </a:p>
         </p:txBody>
@@ -4503,8 +4413,8 @@
         </p:nvSpPr>
         <p:spPr>
           <a:xfrm>
-            <a:off x="1005840" y="2633472"/>
-            <a:ext cx="4572000" cy="457200"/>
+            <a:off x="1024128" y="2633472"/>
+            <a:ext cx="4389120" cy="292608"/>
           </a:xfrm>
           <a:prstGeom prst="rect">
             <a:avLst/>
@@ -4518,13 +4428,13 @@
           <a:lstStyle/>
           <a:p>
             <a:r>
-              <a:rPr sz="1500" b="1">
+              <a:rPr sz="2100" b="1">
                 <a:solidFill>
                   <a:srgbClr val="121F23"/>
                 </a:solidFill>
                 <a:latin typeface="Aptos"/>
               </a:rPr>
-              <a:t>Problem 34: Match one food bank's surplus to another's shortage before product ages out.</a:t>
+              <a:t>Theme 7, Problem 34</a:t>
             </a:r>
           </a:p>
         </p:txBody>
@@ -4537,8 +4447,42 @@
         </p:nvSpPr>
         <p:spPr>
           <a:xfrm>
-            <a:off x="1005840" y="3401568"/>
-            <a:ext cx="4480560" cy="914400"/>
+            <a:off x="1024128" y="3090672"/>
+            <a:ext cx="4251960" cy="329184"/>
+          </a:xfrm>
+          <a:prstGeom prst="rect">
+            <a:avLst/>
+          </a:prstGeom>
+          <a:noFill/>
+        </p:spPr>
+        <p:txBody>
+          <a:bodyPr wrap="square" lIns="18288" rIns="18288" tIns="18288" bIns="18288">
+            <a:spAutoFit/>
+          </a:bodyPr>
+          <a:lstStyle/>
+          <a:p>
+            <a:r>
+              <a:rPr sz="1500" b="1">
+                <a:solidFill>
+                  <a:srgbClr val="121F23"/>
+                </a:solidFill>
+                <a:latin typeface="Aptos"/>
+              </a:rPr>
+              <a:t>Match surplus to shortage before product ages out.</a:t>
+            </a:r>
+          </a:p>
+        </p:txBody>
+      </p:sp>
+      <p:sp>
+        <p:nvSpPr>
+          <p:cNvPr id="9" name="TextBox 8"/>
+          <p:cNvSpPr txBox="1"/>
+          <p:nvPr/>
+        </p:nvSpPr>
+        <p:spPr>
+          <a:xfrm>
+            <a:off x="1024128" y="3675887"/>
+            <a:ext cx="4206240" cy="914400"/>
           </a:xfrm>
           <a:prstGeom prst="rect">
             <a:avLst/>
@@ -4553,9 +4497,9 @@
           <a:p>
             <a:pPr>
               <a:spcAft>
-                <a:spcPts val="500"/>
+                <a:spcPts val="600"/>
               </a:spcAft>
-              <a:defRPr sz="1150">
+              <a:defRPr sz="1170">
                 <a:solidFill>
                   <a:srgbClr val="121F23"/>
                 </a:solidFill>
@@ -4563,15 +4507,15 @@
               </a:defRPr>
             </a:pPr>
             <a:r>
-              <a:t>GoodCo applies this at the pantry/spoke layer.</a:t>
+              <a:t>GoodCo applies this at the pantry level.</a:t>
             </a:r>
           </a:p>
           <a:p>
             <a:pPr>
               <a:spcAft>
-                <a:spcPts val="500"/>
+                <a:spcPts val="600"/>
               </a:spcAft>
-              <a:defRPr sz="1150">
+              <a:defRPr sz="1170">
                 <a:solidFill>
                   <a:srgbClr val="121F23"/>
                 </a:solidFill>
@@ -4579,15 +4523,15 @@
               </a:defRPr>
             </a:pPr>
             <a:r>
-              <a:t>A pantry publishes real eligible surplus.</a:t>
+              <a:t>Pantries publish eligible surplus.</a:t>
             </a:r>
           </a:p>
           <a:p>
             <a:pPr>
               <a:spcAft>
-                <a:spcPts val="500"/>
+                <a:spcPts val="600"/>
               </a:spcAft>
-              <a:defRPr sz="1150">
+              <a:defRPr sz="1170">
                 <a:solidFill>
                   <a:srgbClr val="121F23"/>
                 </a:solidFill>
@@ -4595,21 +4539,21 @@
               </a:defRPr>
             </a:pPr>
             <a:r>
-              <a:t>Another pantry requests it before it expires or sits idle.</a:t>
-            </a:r>
-          </a:p>
-        </p:txBody>
-      </p:sp>
-      <p:sp>
-        <p:nvSpPr>
-          <p:cNvPr id="9" name="Rounded Rectangle 8"/>
+              <a:t>Other pantries request it before it expires or sits idle.</a:t>
+            </a:r>
+          </a:p>
+        </p:txBody>
+      </p:sp>
+      <p:sp>
+        <p:nvSpPr>
+          <p:cNvPr id="10" name="Rounded Rectangle 9"/>
           <p:cNvSpPr/>
           <p:nvPr/>
         </p:nvSpPr>
         <p:spPr>
           <a:xfrm>
-            <a:off x="6327648" y="1920240"/>
-            <a:ext cx="5230368" cy="3456432"/>
+            <a:off x="6291072" y="1965960"/>
+            <a:ext cx="5120640" cy="3246120"/>
           </a:xfrm>
           <a:prstGeom prst="roundRect">
             <a:avLst/>
@@ -4619,7 +4563,7 @@
           </a:solidFill>
           <a:ln w="12700">
             <a:solidFill>
-              <a:srgbClr val="D2E0DC"/>
+              <a:srgbClr val="CCDED8"/>
             </a:solidFill>
           </a:ln>
         </p:spPr>
@@ -4647,14 +4591,14 @@
       </p:sp>
       <p:sp>
         <p:nvSpPr>
-          <p:cNvPr id="10" name="TextBox 9"/>
+          <p:cNvPr id="11" name="TextBox 10"/>
           <p:cNvSpPr txBox="1"/>
           <p:nvPr/>
         </p:nvSpPr>
         <p:spPr>
           <a:xfrm>
-            <a:off x="6583680" y="2212848"/>
-            <a:ext cx="4572000" cy="256032"/>
+            <a:off x="6537960" y="2231136"/>
+            <a:ext cx="4389120" cy="256032"/>
           </a:xfrm>
           <a:prstGeom prst="rect">
             <a:avLst/>
@@ -4668,27 +4612,61 @@
           <a:lstStyle/>
           <a:p>
             <a:r>
-              <a:rPr sz="1700" b="1">
+              <a:rPr sz="1400" b="1">
                 <a:solidFill>
                   <a:srgbClr val="00897B"/>
                 </a:solidFill>
                 <a:latin typeface="Aptos"/>
               </a:rPr>
-              <a:t>Supporting: Theme 2, Problems 6, 9, 10</a:t>
-            </a:r>
-          </a:p>
-        </p:txBody>
-      </p:sp>
-      <p:sp>
-        <p:nvSpPr>
-          <p:cNvPr id="11" name="TextBox 10"/>
+              <a:t>Supporting fit</a:t>
+            </a:r>
+          </a:p>
+        </p:txBody>
+      </p:sp>
+      <p:sp>
+        <p:nvSpPr>
+          <p:cNvPr id="12" name="TextBox 11"/>
           <p:cNvSpPr txBox="1"/>
           <p:nvPr/>
         </p:nvSpPr>
         <p:spPr>
           <a:xfrm>
-            <a:off x="6583680" y="2724912"/>
-            <a:ext cx="4480560" cy="1417320"/>
+            <a:off x="6537960" y="2633472"/>
+            <a:ext cx="4389120" cy="292608"/>
+          </a:xfrm>
+          <a:prstGeom prst="rect">
+            <a:avLst/>
+          </a:prstGeom>
+          <a:noFill/>
+        </p:spPr>
+        <p:txBody>
+          <a:bodyPr wrap="square" lIns="18288" rIns="18288" tIns="18288" bIns="18288">
+            <a:spAutoFit/>
+          </a:bodyPr>
+          <a:lstStyle/>
+          <a:p>
+            <a:r>
+              <a:rPr sz="2100" b="1">
+                <a:solidFill>
+                  <a:srgbClr val="121F23"/>
+                </a:solidFill>
+                <a:latin typeface="Aptos"/>
+              </a:rPr>
+              <a:t>Theme 2, Problems 6, 9, 10</a:t>
+            </a:r>
+          </a:p>
+        </p:txBody>
+      </p:sp>
+      <p:sp>
+        <p:nvSpPr>
+          <p:cNvPr id="13" name="TextBox 12"/>
+          <p:cNvSpPr txBox="1"/>
+          <p:nvPr/>
+        </p:nvSpPr>
+        <p:spPr>
+          <a:xfrm>
+            <a:off x="6537960" y="3136392"/>
+            <a:ext cx="4160520" cy="1298448"/>
           </a:xfrm>
           <a:prstGeom prst="rect">
             <a:avLst/>
@@ -4703,9 +4681,9 @@
           <a:p>
             <a:pPr>
               <a:spcAft>
-                <a:spcPts val="500"/>
+                <a:spcPts val="600"/>
               </a:spcAft>
-              <a:defRPr sz="1150">
+              <a:defRPr sz="1170">
                 <a:solidFill>
                   <a:srgbClr val="121F23"/>
                 </a:solidFill>
@@ -4713,15 +4691,15 @@
               </a:defRPr>
             </a:pPr>
             <a:r>
-              <a:t>6: scanner/receiving creates the trusted lot</a:t>
+              <a:t>6: receiving creates the trusted lot.</a:t>
             </a:r>
           </a:p>
           <a:p>
             <a:pPr>
               <a:spcAft>
-                <a:spcPts val="500"/>
+                <a:spcPts val="600"/>
               </a:spcAft>
-              <a:defRPr sz="1150">
+              <a:defRPr sz="1170">
                 <a:solidFill>
                   <a:srgbClr val="121F23"/>
                 </a:solidFill>
@@ -4729,15 +4707,15 @@
               </a:defRPr>
             </a:pPr>
             <a:r>
-              <a:t>9: date and shelf-life capture at receiving</a:t>
+              <a:t>9: date and shelf-life capture at receiving.</a:t>
             </a:r>
           </a:p>
           <a:p>
             <a:pPr>
               <a:spcAft>
-                <a:spcPts val="500"/>
+                <a:spcPts val="600"/>
               </a:spcAft>
-              <a:defRPr sz="1150">
+              <a:defRPr sz="1170">
                 <a:solidFill>
                   <a:srgbClr val="121F23"/>
                 </a:solidFill>
@@ -4745,15 +4723,15 @@
               </a:defRPr>
             </a:pPr>
             <a:r>
-              <a:t>10: expiring view warns what must move</a:t>
+              <a:t>10: expiring view shows what should move.</a:t>
             </a:r>
           </a:p>
           <a:p>
             <a:pPr>
               <a:spcAft>
-                <a:spcPts val="500"/>
+                <a:spcPts val="600"/>
               </a:spcAft>
-              <a:defRPr sz="1150">
+              <a:defRPr sz="1170">
                 <a:solidFill>
                   <a:srgbClr val="121F23"/>
                 </a:solidFill>
@@ -4761,21 +4739,21 @@
               </a:defRPr>
             </a:pPr>
             <a:r>
-              <a:t>These make the marketplace safe enough to trust.</a:t>
-            </a:r>
-          </a:p>
-        </p:txBody>
-      </p:sp>
-      <p:sp>
-        <p:nvSpPr>
-          <p:cNvPr id="12" name="TextBox 11"/>
+              <a:t>Together, these stop the marketplace from becoming fake or stale.</a:t>
+            </a:r>
+          </a:p>
+        </p:txBody>
+      </p:sp>
+      <p:sp>
+        <p:nvSpPr>
+          <p:cNvPr id="14" name="TextBox 13"/>
           <p:cNvSpPr txBox="1"/>
           <p:nvPr/>
         </p:nvSpPr>
         <p:spPr>
           <a:xfrm>
-            <a:off x="914400" y="5779008"/>
-            <a:ext cx="9966960" cy="347472"/>
+            <a:off x="914400" y="5833872"/>
+            <a:ext cx="10058400" cy="310896"/>
           </a:xfrm>
           <a:prstGeom prst="rect">
             <a:avLst/>
@@ -4790,27 +4768,27 @@
           <a:p>
             <a:pPr algn="ctr"/>
             <a:r>
-              <a:rPr sz="1500" b="1">
+              <a:rPr sz="1550" b="1">
                 <a:solidFill>
                   <a:srgbClr val="121F23"/>
                 </a:solidFill>
                 <a:latin typeface="Aptos"/>
               </a:rPr>
-              <a:t>We are not trying to solve all 35. We solve one movement problem deeply, with the minimum inventory layer needed to make it real.</a:t>
-            </a:r>
-          </a:p>
-        </p:txBody>
-      </p:sp>
-      <p:sp>
-        <p:nvSpPr>
-          <p:cNvPr id="13" name="TextBox 12"/>
+              <a:t>Positioning: not a broad food-bank AI system, not all 35 problems, and not a generic marketplace.</a:t>
+            </a:r>
+          </a:p>
+        </p:txBody>
+      </p:sp>
+      <p:sp>
+        <p:nvSpPr>
+          <p:cNvPr id="15" name="TextBox 14"/>
           <p:cNvSpPr txBox="1"/>
           <p:nvPr/>
         </p:nvSpPr>
         <p:spPr>
           <a:xfrm>
-            <a:off x="685800" y="6473952"/>
-            <a:ext cx="8686800" cy="164592"/>
+            <a:off x="658368" y="6473952"/>
+            <a:ext cx="8778240" cy="164592"/>
           </a:xfrm>
           <a:prstGeom prst="rect">
             <a:avLst/>
@@ -4824,27 +4802,27 @@
           <a:lstStyle/>
           <a:p>
             <a:r>
-              <a:rPr sz="660" b="0">
-                <a:solidFill>
-                  <a:srgbClr val="5C6C72"/>
+              <a:rPr sz="650" b="0">
+                <a:solidFill>
+                  <a:srgbClr val="58696F"/>
                 </a:solidFill>
                 <a:latin typeface="Aptos"/>
               </a:rPr>
-              <a:t>Track mapping from local hackathon research: Theme 7 Problem 34; Theme 2 Problems 6, 9, 10.</a:t>
-            </a:r>
-          </a:p>
-        </p:txBody>
-      </p:sp>
-      <p:sp>
-        <p:nvSpPr>
-          <p:cNvPr id="14" name="TextBox 13"/>
+              <a:t>Track mapping from local hackathon problem list: Theme 7 Problem 34; Theme 2 Problems 6, 9, 10.</a:t>
+            </a:r>
+          </a:p>
+        </p:txBody>
+      </p:sp>
+      <p:sp>
+        <p:nvSpPr>
+          <p:cNvPr id="16" name="TextBox 15"/>
           <p:cNvSpPr txBox="1"/>
           <p:nvPr/>
         </p:nvSpPr>
         <p:spPr>
           <a:xfrm>
-            <a:off x="10972800" y="6473952"/>
-            <a:ext cx="640080" cy="164592"/>
+            <a:off x="10927080" y="6473952"/>
+            <a:ext cx="658368" cy="164592"/>
           </a:xfrm>
           <a:prstGeom prst="rect">
             <a:avLst/>
@@ -4861,11 +4839,11 @@
             <a:r>
               <a:rPr sz="750" b="0">
                 <a:solidFill>
-                  <a:srgbClr val="5C6C72"/>
+                  <a:srgbClr val="58696F"/>
                 </a:solidFill>
                 <a:latin typeface="Aptos"/>
               </a:rPr>
-              <a:t>02 / 05</a:t>
+              <a:t>02 / 04</a:t>
             </a:r>
           </a:p>
         </p:txBody>
@@ -4904,18 +4882,18 @@
         </p:nvSpPr>
         <p:spPr>
           <a:xfrm>
-            <a:off x="658368" y="420624"/>
-            <a:ext cx="1371600" cy="292608"/>
+            <a:off x="658368" y="438912"/>
+            <a:ext cx="1417320" cy="310896"/>
           </a:xfrm>
           <a:prstGeom prst="roundRect">
             <a:avLst/>
           </a:prstGeom>
           <a:solidFill>
-            <a:srgbClr val="E8F3EE"/>
+            <a:srgbClr val="E5F3EE"/>
           </a:solidFill>
           <a:ln>
             <a:solidFill>
-              <a:srgbClr val="D2E0DC"/>
+              <a:srgbClr val="CCDED8"/>
             </a:solidFill>
           </a:ln>
         </p:spPr>
@@ -4941,7 +4919,7 @@
             <a:r>
               <a:rPr sz="850" b="1">
                 <a:solidFill>
-                  <a:srgbClr val="005B52"/>
+                  <a:srgbClr val="005A52"/>
                 </a:solidFill>
                 <a:latin typeface="Aptos"/>
               </a:rPr>
@@ -4958,8 +4936,8 @@
         </p:nvSpPr>
         <p:spPr>
           <a:xfrm>
-            <a:off x="658368" y="822960"/>
-            <a:ext cx="9601200" cy="566928"/>
+            <a:off x="658368" y="896112"/>
+            <a:ext cx="9052560" cy="658368"/>
           </a:xfrm>
           <a:prstGeom prst="rect">
             <a:avLst/>
@@ -4973,13 +4951,13 @@
           <a:lstStyle/>
           <a:p>
             <a:r>
-              <a:rPr sz="2500" b="1">
+              <a:rPr sz="2800" b="1">
                 <a:solidFill>
                   <a:srgbClr val="121F23"/>
                 </a:solidFill>
                 <a:latin typeface="Aptos"/>
               </a:rPr>
-              <a:t>What GoodCo actually does.</a:t>
+              <a:t>GoodCo creates inventory-backed transfer listings.</a:t>
             </a:r>
           </a:p>
         </p:txBody>
@@ -4992,8 +4970,8 @@
         </p:nvSpPr>
         <p:spPr>
           <a:xfrm>
-            <a:off x="676656" y="1417320"/>
-            <a:ext cx="9692640" cy="329184"/>
+            <a:off x="685800" y="1581912"/>
+            <a:ext cx="8686800" cy="402336"/>
           </a:xfrm>
           <a:prstGeom prst="rect">
             <a:avLst/>
@@ -5007,13 +4985,13 @@
           <a:lstStyle/>
           <a:p>
             <a:r>
-              <a:rPr sz="1250" b="0">
-                <a:solidFill>
-                  <a:srgbClr val="5C6C72"/>
+              <a:rPr sz="1320" b="0">
+                <a:solidFill>
+                  <a:srgbClr val="58696F"/>
                 </a:solidFill>
                 <a:latin typeface="Aptos"/>
               </a:rPr>
-              <a:t>It is not a generic marketplace. Listings must come from confirmed inventory lots.</a:t>
+              <a:t>Every marketplace listing starts as a reviewed pantry inventory lot.</a:t>
             </a:r>
           </a:p>
         </p:txBody>
@@ -5026,8 +5004,8 @@
         </p:nvSpPr>
         <p:spPr>
           <a:xfrm>
-            <a:off x="658368" y="2148840"/>
-            <a:ext cx="1536192" cy="1078992"/>
+            <a:off x="822960" y="2057400"/>
+            <a:ext cx="2395728" cy="987552"/>
           </a:xfrm>
           <a:prstGeom prst="roundRect">
             <a:avLst/>
@@ -5037,7 +5015,7 @@
           </a:solidFill>
           <a:ln w="12700">
             <a:solidFill>
-              <a:srgbClr val="D2E0DC"/>
+              <a:srgbClr val="CCDED8"/>
             </a:solidFill>
           </a:ln>
         </p:spPr>
@@ -5065,14 +5043,68 @@
       </p:sp>
       <p:sp>
         <p:nvSpPr>
-          <p:cNvPr id="6" name="TextBox 5"/>
+          <p:cNvPr id="6" name="Oval 5"/>
+          <p:cNvSpPr/>
+          <p:nvPr/>
+        </p:nvSpPr>
+        <p:spPr>
+          <a:xfrm>
+            <a:off x="987552" y="2313432"/>
+            <a:ext cx="438912" cy="438912"/>
+          </a:xfrm>
+          <a:prstGeom prst="ellipse">
+            <a:avLst/>
+          </a:prstGeom>
+          <a:solidFill>
+            <a:srgbClr val="E5F3EE"/>
+          </a:solidFill>
+          <a:ln>
+            <a:solidFill>
+              <a:srgbClr val="E5F3EE"/>
+            </a:solidFill>
+          </a:ln>
+        </p:spPr>
+        <p:style>
+          <a:lnRef idx="1">
+            <a:schemeClr val="accent1"/>
+          </a:lnRef>
+          <a:fillRef idx="3">
+            <a:schemeClr val="accent1"/>
+          </a:fillRef>
+          <a:effectRef idx="2">
+            <a:schemeClr val="accent1"/>
+          </a:effectRef>
+          <a:fontRef idx="minor">
+            <a:schemeClr val="lt1"/>
+          </a:fontRef>
+        </p:style>
+        <p:txBody>
+          <a:bodyPr rtlCol="0" anchor="ctr"/>
+          <a:lstStyle/>
+          <a:p>
+            <a:pPr algn="ctr"/>
+            <a:r>
+              <a:rPr sz="1000" b="1">
+                <a:solidFill>
+                  <a:srgbClr val="005A52"/>
+                </a:solidFill>
+                <a:latin typeface="Aptos"/>
+              </a:rPr>
+              <a:t>1</a:t>
+            </a:r>
+          </a:p>
+        </p:txBody>
+      </p:sp>
+      <p:sp>
+        <p:nvSpPr>
+          <p:cNvPr id="7" name="TextBox 6"/>
           <p:cNvSpPr txBox="1"/>
           <p:nvPr/>
         </p:nvSpPr>
         <p:spPr>
           <a:xfrm>
-            <a:off x="804672" y="2313432"/>
-            <a:ext cx="274320" cy="228600"/>
+            <a:off x="1536192" y="2258568"/>
+            <a:ext cx="1481328" cy="228600"/>
           </a:xfrm>
           <a:prstGeom prst="rect">
             <a:avLst/>
@@ -5086,27 +5118,27 @@
           <a:lstStyle/>
           <a:p>
             <a:r>
-              <a:rPr sz="1300" b="1">
-                <a:solidFill>
-                  <a:srgbClr val="00897B"/>
+              <a:rPr sz="1350" b="1">
+                <a:solidFill>
+                  <a:srgbClr val="121F23"/>
                 </a:solidFill>
                 <a:latin typeface="Aptos"/>
               </a:rPr>
-              <a:t>1</a:t>
-            </a:r>
-          </a:p>
-        </p:txBody>
-      </p:sp>
-      <p:sp>
-        <p:nvSpPr>
-          <p:cNvPr id="7" name="TextBox 6"/>
+              <a:t>Receive</a:t>
+            </a:r>
+          </a:p>
+        </p:txBody>
+      </p:sp>
+      <p:sp>
+        <p:nvSpPr>
+          <p:cNvPr id="8" name="TextBox 7"/>
           <p:cNvSpPr txBox="1"/>
           <p:nvPr/>
         </p:nvSpPr>
         <p:spPr>
           <a:xfrm>
-            <a:off x="1097280" y="2286000"/>
-            <a:ext cx="914400" cy="228600"/>
+            <a:off x="1536192" y="2624328"/>
+            <a:ext cx="1481328" cy="219456"/>
           </a:xfrm>
           <a:prstGeom prst="rect">
             <a:avLst/>
@@ -5120,27 +5152,126 @@
           <a:lstStyle/>
           <a:p>
             <a:r>
-              <a:rPr sz="1220" b="1">
-                <a:solidFill>
-                  <a:srgbClr val="121F23"/>
+              <a:rPr sz="919" b="0">
+                <a:solidFill>
+                  <a:srgbClr val="58696F"/>
                 </a:solidFill>
                 <a:latin typeface="Aptos"/>
               </a:rPr>
-              <a:t>Receive</a:t>
-            </a:r>
-          </a:p>
-        </p:txBody>
-      </p:sp>
-      <p:sp>
-        <p:nvSpPr>
-          <p:cNvPr id="8" name="TextBox 7"/>
+              <a:t>Scan, type, photo, or speak item details.</a:t>
+            </a:r>
+          </a:p>
+        </p:txBody>
+      </p:sp>
+      <p:sp>
+        <p:nvSpPr>
+          <p:cNvPr id="9" name="Rounded Rectangle 8"/>
+          <p:cNvSpPr/>
+          <p:nvPr/>
+        </p:nvSpPr>
+        <p:spPr>
+          <a:xfrm>
+            <a:off x="3456432" y="2057400"/>
+            <a:ext cx="2395728" cy="987552"/>
+          </a:xfrm>
+          <a:prstGeom prst="roundRect">
+            <a:avLst/>
+          </a:prstGeom>
+          <a:solidFill>
+            <a:srgbClr val="FFFFFF"/>
+          </a:solidFill>
+          <a:ln w="12700">
+            <a:solidFill>
+              <a:srgbClr val="CCDED8"/>
+            </a:solidFill>
+          </a:ln>
+        </p:spPr>
+        <p:style>
+          <a:lnRef idx="1">
+            <a:schemeClr val="accent1"/>
+          </a:lnRef>
+          <a:fillRef idx="3">
+            <a:schemeClr val="accent1"/>
+          </a:fillRef>
+          <a:effectRef idx="2">
+            <a:schemeClr val="accent1"/>
+          </a:effectRef>
+          <a:fontRef idx="minor">
+            <a:schemeClr val="lt1"/>
+          </a:fontRef>
+        </p:style>
+        <p:txBody>
+          <a:bodyPr rtlCol="0" anchor="ctr"/>
+          <a:lstStyle/>
+          <a:p>
+            <a:pPr algn="ctr"/>
+          </a:p>
+        </p:txBody>
+      </p:sp>
+      <p:sp>
+        <p:nvSpPr>
+          <p:cNvPr id="10" name="Oval 9"/>
+          <p:cNvSpPr/>
+          <p:nvPr/>
+        </p:nvSpPr>
+        <p:spPr>
+          <a:xfrm>
+            <a:off x="3621024" y="2313432"/>
+            <a:ext cx="438912" cy="438912"/>
+          </a:xfrm>
+          <a:prstGeom prst="ellipse">
+            <a:avLst/>
+          </a:prstGeom>
+          <a:solidFill>
+            <a:srgbClr val="E5F3EE"/>
+          </a:solidFill>
+          <a:ln>
+            <a:solidFill>
+              <a:srgbClr val="E5F3EE"/>
+            </a:solidFill>
+          </a:ln>
+        </p:spPr>
+        <p:style>
+          <a:lnRef idx="1">
+            <a:schemeClr val="accent1"/>
+          </a:lnRef>
+          <a:fillRef idx="3">
+            <a:schemeClr val="accent1"/>
+          </a:fillRef>
+          <a:effectRef idx="2">
+            <a:schemeClr val="accent1"/>
+          </a:effectRef>
+          <a:fontRef idx="minor">
+            <a:schemeClr val="lt1"/>
+          </a:fontRef>
+        </p:style>
+        <p:txBody>
+          <a:bodyPr rtlCol="0" anchor="ctr"/>
+          <a:lstStyle/>
+          <a:p>
+            <a:pPr algn="ctr"/>
+            <a:r>
+              <a:rPr sz="1000" b="1">
+                <a:solidFill>
+                  <a:srgbClr val="005A52"/>
+                </a:solidFill>
+                <a:latin typeface="Aptos"/>
+              </a:rPr>
+              <a:t>2</a:t>
+            </a:r>
+          </a:p>
+        </p:txBody>
+      </p:sp>
+      <p:sp>
+        <p:nvSpPr>
+          <p:cNvPr id="11" name="TextBox 10"/>
           <p:cNvSpPr txBox="1"/>
           <p:nvPr/>
         </p:nvSpPr>
         <p:spPr>
           <a:xfrm>
-            <a:off x="822959" y="2697480"/>
-            <a:ext cx="1143000" cy="228600"/>
+            <a:off x="4169663" y="2258568"/>
+            <a:ext cx="1481328" cy="228600"/>
           </a:xfrm>
           <a:prstGeom prst="rect">
             <a:avLst/>
@@ -5154,32 +5285,400 @@
           <a:lstStyle/>
           <a:p>
             <a:r>
-              <a:rPr sz="850" b="0">
-                <a:solidFill>
-                  <a:srgbClr val="5C6C72"/>
+              <a:rPr sz="1350" b="1">
+                <a:solidFill>
+                  <a:srgbClr val="121F23"/>
                 </a:solidFill>
                 <a:latin typeface="Aptos"/>
               </a:rPr>
-              <a:t>scan / manual / photo / voice</a:t>
+              <a:t>Review</a:t>
+            </a:r>
+          </a:p>
+        </p:txBody>
+      </p:sp>
+      <p:sp>
+        <p:nvSpPr>
+          <p:cNvPr id="12" name="TextBox 11"/>
+          <p:cNvSpPr txBox="1"/>
+          <p:nvPr/>
+        </p:nvSpPr>
+        <p:spPr>
+          <a:xfrm>
+            <a:off x="4169663" y="2624328"/>
+            <a:ext cx="1481328" cy="219456"/>
+          </a:xfrm>
+          <a:prstGeom prst="rect">
+            <a:avLst/>
+          </a:prstGeom>
+          <a:noFill/>
+        </p:spPr>
+        <p:txBody>
+          <a:bodyPr wrap="square" lIns="18288" rIns="18288" tIns="18288" bIns="18288">
+            <a:spAutoFit/>
+          </a:bodyPr>
+          <a:lstStyle/>
+          <a:p>
+            <a:r>
+              <a:rPr sz="919" b="0">
+                <a:solidFill>
+                  <a:srgbClr val="58696F"/>
+                </a:solidFill>
+                <a:latin typeface="Aptos"/>
+              </a:rPr>
+              <a:t>Confirm category, date, source, quantity.</a:t>
+            </a:r>
+          </a:p>
+        </p:txBody>
+      </p:sp>
+      <p:sp>
+        <p:nvSpPr>
+          <p:cNvPr id="13" name="Rounded Rectangle 12"/>
+          <p:cNvSpPr/>
+          <p:nvPr/>
+        </p:nvSpPr>
+        <p:spPr>
+          <a:xfrm>
+            <a:off x="6089904" y="2057400"/>
+            <a:ext cx="2395728" cy="987552"/>
+          </a:xfrm>
+          <a:prstGeom prst="roundRect">
+            <a:avLst/>
+          </a:prstGeom>
+          <a:solidFill>
+            <a:srgbClr val="FFFFFF"/>
+          </a:solidFill>
+          <a:ln w="12700">
+            <a:solidFill>
+              <a:srgbClr val="CCDED8"/>
+            </a:solidFill>
+          </a:ln>
+        </p:spPr>
+        <p:style>
+          <a:lnRef idx="1">
+            <a:schemeClr val="accent1"/>
+          </a:lnRef>
+          <a:fillRef idx="3">
+            <a:schemeClr val="accent1"/>
+          </a:fillRef>
+          <a:effectRef idx="2">
+            <a:schemeClr val="accent1"/>
+          </a:effectRef>
+          <a:fontRef idx="minor">
+            <a:schemeClr val="lt1"/>
+          </a:fontRef>
+        </p:style>
+        <p:txBody>
+          <a:bodyPr rtlCol="0" anchor="ctr"/>
+          <a:lstStyle/>
+          <a:p>
+            <a:pPr algn="ctr"/>
+          </a:p>
+        </p:txBody>
+      </p:sp>
+      <p:sp>
+        <p:nvSpPr>
+          <p:cNvPr id="14" name="Oval 13"/>
+          <p:cNvSpPr/>
+          <p:nvPr/>
+        </p:nvSpPr>
+        <p:spPr>
+          <a:xfrm>
+            <a:off x="6254496" y="2313432"/>
+            <a:ext cx="438912" cy="438912"/>
+          </a:xfrm>
+          <a:prstGeom prst="ellipse">
+            <a:avLst/>
+          </a:prstGeom>
+          <a:solidFill>
+            <a:srgbClr val="E5F3EE"/>
+          </a:solidFill>
+          <a:ln>
+            <a:solidFill>
+              <a:srgbClr val="E5F3EE"/>
+            </a:solidFill>
+          </a:ln>
+        </p:spPr>
+        <p:style>
+          <a:lnRef idx="1">
+            <a:schemeClr val="accent1"/>
+          </a:lnRef>
+          <a:fillRef idx="3">
+            <a:schemeClr val="accent1"/>
+          </a:fillRef>
+          <a:effectRef idx="2">
+            <a:schemeClr val="accent1"/>
+          </a:effectRef>
+          <a:fontRef idx="minor">
+            <a:schemeClr val="lt1"/>
+          </a:fontRef>
+        </p:style>
+        <p:txBody>
+          <a:bodyPr rtlCol="0" anchor="ctr"/>
+          <a:lstStyle/>
+          <a:p>
+            <a:pPr algn="ctr"/>
+            <a:r>
+              <a:rPr sz="1000" b="1">
+                <a:solidFill>
+                  <a:srgbClr val="005A52"/>
+                </a:solidFill>
+                <a:latin typeface="Aptos"/>
+              </a:rPr>
+              <a:t>3</a:t>
+            </a:r>
+          </a:p>
+        </p:txBody>
+      </p:sp>
+      <p:sp>
+        <p:nvSpPr>
+          <p:cNvPr id="15" name="TextBox 14"/>
+          <p:cNvSpPr txBox="1"/>
+          <p:nvPr/>
+        </p:nvSpPr>
+        <p:spPr>
+          <a:xfrm>
+            <a:off x="6803136" y="2258568"/>
+            <a:ext cx="1481328" cy="228600"/>
+          </a:xfrm>
+          <a:prstGeom prst="rect">
+            <a:avLst/>
+          </a:prstGeom>
+          <a:noFill/>
+        </p:spPr>
+        <p:txBody>
+          <a:bodyPr wrap="square" lIns="18288" rIns="18288" tIns="18288" bIns="18288">
+            <a:spAutoFit/>
+          </a:bodyPr>
+          <a:lstStyle/>
+          <a:p>
+            <a:r>
+              <a:rPr sz="1350" b="1">
+                <a:solidFill>
+                  <a:srgbClr val="121F23"/>
+                </a:solidFill>
+                <a:latin typeface="Aptos"/>
+              </a:rPr>
+              <a:t>Publish</a:t>
+            </a:r>
+          </a:p>
+        </p:txBody>
+      </p:sp>
+      <p:sp>
+        <p:nvSpPr>
+          <p:cNvPr id="16" name="TextBox 15"/>
+          <p:cNvSpPr txBox="1"/>
+          <p:nvPr/>
+        </p:nvSpPr>
+        <p:spPr>
+          <a:xfrm>
+            <a:off x="6803136" y="2624328"/>
+            <a:ext cx="1481328" cy="219456"/>
+          </a:xfrm>
+          <a:prstGeom prst="rect">
+            <a:avLst/>
+          </a:prstGeom>
+          <a:noFill/>
+        </p:spPr>
+        <p:txBody>
+          <a:bodyPr wrap="square" lIns="18288" rIns="18288" tIns="18288" bIns="18288">
+            <a:spAutoFit/>
+          </a:bodyPr>
+          <a:lstStyle/>
+          <a:p>
+            <a:r>
+              <a:rPr sz="919" b="0">
+                <a:solidFill>
+                  <a:srgbClr val="58696F"/>
+                </a:solidFill>
+                <a:latin typeface="Aptos"/>
+              </a:rPr>
+              <a:t>List only eligible, redistributable lots.</a:t>
+            </a:r>
+          </a:p>
+        </p:txBody>
+      </p:sp>
+      <p:sp>
+        <p:nvSpPr>
+          <p:cNvPr id="17" name="Rounded Rectangle 16"/>
+          <p:cNvSpPr/>
+          <p:nvPr/>
+        </p:nvSpPr>
+        <p:spPr>
+          <a:xfrm>
+            <a:off x="8723376" y="2057400"/>
+            <a:ext cx="2395728" cy="987552"/>
+          </a:xfrm>
+          <a:prstGeom prst="roundRect">
+            <a:avLst/>
+          </a:prstGeom>
+          <a:solidFill>
+            <a:srgbClr val="FFFFFF"/>
+          </a:solidFill>
+          <a:ln w="12700">
+            <a:solidFill>
+              <a:srgbClr val="CCDED8"/>
+            </a:solidFill>
+          </a:ln>
+        </p:spPr>
+        <p:style>
+          <a:lnRef idx="1">
+            <a:schemeClr val="accent1"/>
+          </a:lnRef>
+          <a:fillRef idx="3">
+            <a:schemeClr val="accent1"/>
+          </a:fillRef>
+          <a:effectRef idx="2">
+            <a:schemeClr val="accent1"/>
+          </a:effectRef>
+          <a:fontRef idx="minor">
+            <a:schemeClr val="lt1"/>
+          </a:fontRef>
+        </p:style>
+        <p:txBody>
+          <a:bodyPr rtlCol="0" anchor="ctr"/>
+          <a:lstStyle/>
+          <a:p>
+            <a:pPr algn="ctr"/>
+          </a:p>
+        </p:txBody>
+      </p:sp>
+      <p:sp>
+        <p:nvSpPr>
+          <p:cNvPr id="18" name="Oval 17"/>
+          <p:cNvSpPr/>
+          <p:nvPr/>
+        </p:nvSpPr>
+        <p:spPr>
+          <a:xfrm>
+            <a:off x="8887967" y="2313432"/>
+            <a:ext cx="438912" cy="438912"/>
+          </a:xfrm>
+          <a:prstGeom prst="ellipse">
+            <a:avLst/>
+          </a:prstGeom>
+          <a:solidFill>
+            <a:srgbClr val="E5F3EE"/>
+          </a:solidFill>
+          <a:ln>
+            <a:solidFill>
+              <a:srgbClr val="E5F3EE"/>
+            </a:solidFill>
+          </a:ln>
+        </p:spPr>
+        <p:style>
+          <a:lnRef idx="1">
+            <a:schemeClr val="accent1"/>
+          </a:lnRef>
+          <a:fillRef idx="3">
+            <a:schemeClr val="accent1"/>
+          </a:fillRef>
+          <a:effectRef idx="2">
+            <a:schemeClr val="accent1"/>
+          </a:effectRef>
+          <a:fontRef idx="minor">
+            <a:schemeClr val="lt1"/>
+          </a:fontRef>
+        </p:style>
+        <p:txBody>
+          <a:bodyPr rtlCol="0" anchor="ctr"/>
+          <a:lstStyle/>
+          <a:p>
+            <a:pPr algn="ctr"/>
+            <a:r>
+              <a:rPr sz="1000" b="1">
+                <a:solidFill>
+                  <a:srgbClr val="005A52"/>
+                </a:solidFill>
+                <a:latin typeface="Aptos"/>
+              </a:rPr>
+              <a:t>4</a:t>
+            </a:r>
+          </a:p>
+        </p:txBody>
+      </p:sp>
+      <p:sp>
+        <p:nvSpPr>
+          <p:cNvPr id="19" name="TextBox 18"/>
+          <p:cNvSpPr txBox="1"/>
+          <p:nvPr/>
+        </p:nvSpPr>
+        <p:spPr>
+          <a:xfrm>
+            <a:off x="9436607" y="2258568"/>
+            <a:ext cx="1481328" cy="228600"/>
+          </a:xfrm>
+          <a:prstGeom prst="rect">
+            <a:avLst/>
+          </a:prstGeom>
+          <a:noFill/>
+        </p:spPr>
+        <p:txBody>
+          <a:bodyPr wrap="square" lIns="18288" rIns="18288" tIns="18288" bIns="18288">
+            <a:spAutoFit/>
+          </a:bodyPr>
+          <a:lstStyle/>
+          <a:p>
+            <a:r>
+              <a:rPr sz="1350" b="1">
+                <a:solidFill>
+                  <a:srgbClr val="121F23"/>
+                </a:solidFill>
+                <a:latin typeface="Aptos"/>
+              </a:rPr>
+              <a:t>Transfer</a:t>
+            </a:r>
+          </a:p>
+        </p:txBody>
+      </p:sp>
+      <p:sp>
+        <p:nvSpPr>
+          <p:cNvPr id="20" name="TextBox 19"/>
+          <p:cNvSpPr txBox="1"/>
+          <p:nvPr/>
+        </p:nvSpPr>
+        <p:spPr>
+          <a:xfrm>
+            <a:off x="9436607" y="2624328"/>
+            <a:ext cx="1481328" cy="219456"/>
+          </a:xfrm>
+          <a:prstGeom prst="rect">
+            <a:avLst/>
+          </a:prstGeom>
+          <a:noFill/>
+        </p:spPr>
+        <p:txBody>
+          <a:bodyPr wrap="square" lIns="18288" rIns="18288" tIns="18288" bIns="18288">
+            <a:spAutoFit/>
+          </a:bodyPr>
+          <a:lstStyle/>
+          <a:p>
+            <a:r>
+              <a:rPr sz="919" b="0">
+                <a:solidFill>
+                  <a:srgbClr val="58696F"/>
+                </a:solidFill>
+                <a:latin typeface="Aptos"/>
+              </a:rPr>
+              <a:t>Request, reserve, hand off, audit.</a:t>
             </a:r>
           </a:p>
         </p:txBody>
       </p:sp>
       <p:cxnSp>
         <p:nvCxnSpPr>
-          <p:cNvPr id="9" name="Connector 8"/>
+          <p:cNvPr id="21" name="Connector 20"/>
           <p:cNvCxnSpPr/>
           <p:nvPr/>
         </p:nvCxnSpPr>
         <p:spPr>
           <a:xfrm>
-            <a:off x="2212848" y="2688336"/>
-            <a:ext cx="301752" cy="0"/>
+            <a:off x="3218688" y="2551176"/>
+            <a:ext cx="219456" cy="0"/>
           </a:xfrm>
           <a:prstGeom prst="line">
             <a:avLst/>
           </a:prstGeom>
-          <a:ln w="20320">
+          <a:ln w="27940">
             <a:solidFill>
               <a:srgbClr val="00897B"/>
             </a:solidFill>
@@ -5200,168 +5699,21 @@
           </a:fontRef>
         </p:style>
       </p:cxnSp>
-      <p:sp>
-        <p:nvSpPr>
-          <p:cNvPr id="10" name="Rounded Rectangle 9"/>
-          <p:cNvSpPr/>
-          <p:nvPr/>
-        </p:nvSpPr>
-        <p:spPr>
-          <a:xfrm>
-            <a:off x="2532887" y="2148840"/>
-            <a:ext cx="1536192" cy="1078992"/>
-          </a:xfrm>
-          <a:prstGeom prst="roundRect">
-            <a:avLst/>
-          </a:prstGeom>
-          <a:solidFill>
-            <a:srgbClr val="FFFFFF"/>
-          </a:solidFill>
-          <a:ln w="12700">
-            <a:solidFill>
-              <a:srgbClr val="D2E0DC"/>
-            </a:solidFill>
-          </a:ln>
-        </p:spPr>
-        <p:style>
-          <a:lnRef idx="1">
-            <a:schemeClr val="accent1"/>
-          </a:lnRef>
-          <a:fillRef idx="3">
-            <a:schemeClr val="accent1"/>
-          </a:fillRef>
-          <a:effectRef idx="2">
-            <a:schemeClr val="accent1"/>
-          </a:effectRef>
-          <a:fontRef idx="minor">
-            <a:schemeClr val="lt1"/>
-          </a:fontRef>
-        </p:style>
-        <p:txBody>
-          <a:bodyPr rtlCol="0" anchor="ctr"/>
-          <a:lstStyle/>
-          <a:p>
-            <a:pPr algn="ctr"/>
-          </a:p>
-        </p:txBody>
-      </p:sp>
-      <p:sp>
-        <p:nvSpPr>
-          <p:cNvPr id="11" name="TextBox 10"/>
-          <p:cNvSpPr txBox="1"/>
-          <p:nvPr/>
-        </p:nvSpPr>
-        <p:spPr>
-          <a:xfrm>
-            <a:off x="2679191" y="2313432"/>
-            <a:ext cx="274320" cy="228600"/>
-          </a:xfrm>
-          <a:prstGeom prst="rect">
-            <a:avLst/>
-          </a:prstGeom>
-          <a:noFill/>
-        </p:spPr>
-        <p:txBody>
-          <a:bodyPr wrap="square" lIns="18288" rIns="18288" tIns="18288" bIns="18288">
-            <a:spAutoFit/>
-          </a:bodyPr>
-          <a:lstStyle/>
-          <a:p>
-            <a:r>
-              <a:rPr sz="1300" b="1">
-                <a:solidFill>
-                  <a:srgbClr val="00897B"/>
-                </a:solidFill>
-                <a:latin typeface="Aptos"/>
-              </a:rPr>
-              <a:t>2</a:t>
-            </a:r>
-          </a:p>
-        </p:txBody>
-      </p:sp>
-      <p:sp>
-        <p:nvSpPr>
-          <p:cNvPr id="12" name="TextBox 11"/>
-          <p:cNvSpPr txBox="1"/>
-          <p:nvPr/>
-        </p:nvSpPr>
-        <p:spPr>
-          <a:xfrm>
-            <a:off x="2971799" y="2286000"/>
-            <a:ext cx="914400" cy="228600"/>
-          </a:xfrm>
-          <a:prstGeom prst="rect">
-            <a:avLst/>
-          </a:prstGeom>
-          <a:noFill/>
-        </p:spPr>
-        <p:txBody>
-          <a:bodyPr wrap="square" lIns="18288" rIns="18288" tIns="18288" bIns="18288">
-            <a:spAutoFit/>
-          </a:bodyPr>
-          <a:lstStyle/>
-          <a:p>
-            <a:r>
-              <a:rPr sz="1220" b="1">
-                <a:solidFill>
-                  <a:srgbClr val="121F23"/>
-                </a:solidFill>
-                <a:latin typeface="Aptos"/>
-              </a:rPr>
-              <a:t>Review</a:t>
-            </a:r>
-          </a:p>
-        </p:txBody>
-      </p:sp>
-      <p:sp>
-        <p:nvSpPr>
-          <p:cNvPr id="13" name="TextBox 12"/>
-          <p:cNvSpPr txBox="1"/>
-          <p:nvPr/>
-        </p:nvSpPr>
-        <p:spPr>
-          <a:xfrm>
-            <a:off x="2697479" y="2697480"/>
-            <a:ext cx="1143000" cy="228600"/>
-          </a:xfrm>
-          <a:prstGeom prst="rect">
-            <a:avLst/>
-          </a:prstGeom>
-          <a:noFill/>
-        </p:spPr>
-        <p:txBody>
-          <a:bodyPr wrap="square" lIns="18288" rIns="18288" tIns="18288" bIns="18288">
-            <a:spAutoFit/>
-          </a:bodyPr>
-          <a:lstStyle/>
-          <a:p>
-            <a:r>
-              <a:rPr sz="850" b="0">
-                <a:solidFill>
-                  <a:srgbClr val="5C6C72"/>
-                </a:solidFill>
-                <a:latin typeface="Aptos"/>
-              </a:rPr>
-              <a:t>category + date + source</a:t>
-            </a:r>
-          </a:p>
-        </p:txBody>
-      </p:sp>
       <p:cxnSp>
         <p:nvCxnSpPr>
-          <p:cNvPr id="14" name="Connector 13"/>
+          <p:cNvPr id="22" name="Connector 21"/>
           <p:cNvCxnSpPr/>
           <p:nvPr/>
         </p:nvCxnSpPr>
         <p:spPr>
           <a:xfrm>
-            <a:off x="4087368" y="2688336"/>
-            <a:ext cx="301751" cy="0"/>
+            <a:off x="5852160" y="2551176"/>
+            <a:ext cx="219456" cy="0"/>
           </a:xfrm>
           <a:prstGeom prst="line">
             <a:avLst/>
           </a:prstGeom>
-          <a:ln w="20320">
+          <a:ln w="27940">
             <a:solidFill>
               <a:srgbClr val="00897B"/>
             </a:solidFill>
@@ -5382,168 +5734,21 @@
           </a:fontRef>
         </p:style>
       </p:cxnSp>
-      <p:sp>
-        <p:nvSpPr>
-          <p:cNvPr id="15" name="Rounded Rectangle 14"/>
-          <p:cNvSpPr/>
-          <p:nvPr/>
-        </p:nvSpPr>
-        <p:spPr>
-          <a:xfrm>
-            <a:off x="4407407" y="2148840"/>
-            <a:ext cx="1536192" cy="1078992"/>
-          </a:xfrm>
-          <a:prstGeom prst="roundRect">
-            <a:avLst/>
-          </a:prstGeom>
-          <a:solidFill>
-            <a:srgbClr val="FFFFFF"/>
-          </a:solidFill>
-          <a:ln w="12700">
-            <a:solidFill>
-              <a:srgbClr val="D2E0DC"/>
-            </a:solidFill>
-          </a:ln>
-        </p:spPr>
-        <p:style>
-          <a:lnRef idx="1">
-            <a:schemeClr val="accent1"/>
-          </a:lnRef>
-          <a:fillRef idx="3">
-            <a:schemeClr val="accent1"/>
-          </a:fillRef>
-          <a:effectRef idx="2">
-            <a:schemeClr val="accent1"/>
-          </a:effectRef>
-          <a:fontRef idx="minor">
-            <a:schemeClr val="lt1"/>
-          </a:fontRef>
-        </p:style>
-        <p:txBody>
-          <a:bodyPr rtlCol="0" anchor="ctr"/>
-          <a:lstStyle/>
-          <a:p>
-            <a:pPr algn="ctr"/>
-          </a:p>
-        </p:txBody>
-      </p:sp>
-      <p:sp>
-        <p:nvSpPr>
-          <p:cNvPr id="16" name="TextBox 15"/>
-          <p:cNvSpPr txBox="1"/>
-          <p:nvPr/>
-        </p:nvSpPr>
-        <p:spPr>
-          <a:xfrm>
-            <a:off x="4553712" y="2313432"/>
-            <a:ext cx="274320" cy="228600"/>
-          </a:xfrm>
-          <a:prstGeom prst="rect">
-            <a:avLst/>
-          </a:prstGeom>
-          <a:noFill/>
-        </p:spPr>
-        <p:txBody>
-          <a:bodyPr wrap="square" lIns="18288" rIns="18288" tIns="18288" bIns="18288">
-            <a:spAutoFit/>
-          </a:bodyPr>
-          <a:lstStyle/>
-          <a:p>
-            <a:r>
-              <a:rPr sz="1300" b="1">
-                <a:solidFill>
-                  <a:srgbClr val="00897B"/>
-                </a:solidFill>
-                <a:latin typeface="Aptos"/>
-              </a:rPr>
-              <a:t>3</a:t>
-            </a:r>
-          </a:p>
-        </p:txBody>
-      </p:sp>
-      <p:sp>
-        <p:nvSpPr>
-          <p:cNvPr id="17" name="TextBox 16"/>
-          <p:cNvSpPr txBox="1"/>
-          <p:nvPr/>
-        </p:nvSpPr>
-        <p:spPr>
-          <a:xfrm>
-            <a:off x="4846319" y="2286000"/>
-            <a:ext cx="914400" cy="228600"/>
-          </a:xfrm>
-          <a:prstGeom prst="rect">
-            <a:avLst/>
-          </a:prstGeom>
-          <a:noFill/>
-        </p:spPr>
-        <p:txBody>
-          <a:bodyPr wrap="square" lIns="18288" rIns="18288" tIns="18288" bIns="18288">
-            <a:spAutoFit/>
-          </a:bodyPr>
-          <a:lstStyle/>
-          <a:p>
-            <a:r>
-              <a:rPr sz="1220" b="1">
-                <a:solidFill>
-                  <a:srgbClr val="121F23"/>
-                </a:solidFill>
-                <a:latin typeface="Aptos"/>
-              </a:rPr>
-              <a:t>Publish</a:t>
-            </a:r>
-          </a:p>
-        </p:txBody>
-      </p:sp>
-      <p:sp>
-        <p:nvSpPr>
-          <p:cNvPr id="18" name="TextBox 17"/>
-          <p:cNvSpPr txBox="1"/>
-          <p:nvPr/>
-        </p:nvSpPr>
-        <p:spPr>
-          <a:xfrm>
-            <a:off x="4571999" y="2697480"/>
-            <a:ext cx="1143000" cy="228600"/>
-          </a:xfrm>
-          <a:prstGeom prst="rect">
-            <a:avLst/>
-          </a:prstGeom>
-          <a:noFill/>
-        </p:spPr>
-        <p:txBody>
-          <a:bodyPr wrap="square" lIns="18288" rIns="18288" tIns="18288" bIns="18288">
-            <a:spAutoFit/>
-          </a:bodyPr>
-          <a:lstStyle/>
-          <a:p>
-            <a:r>
-              <a:rPr sz="850" b="0">
-                <a:solidFill>
-                  <a:srgbClr val="5C6C72"/>
-                </a:solidFill>
-                <a:latin typeface="Aptos"/>
-              </a:rPr>
-              <a:t>eligible lot only</a:t>
-            </a:r>
-          </a:p>
-        </p:txBody>
-      </p:sp>
       <p:cxnSp>
         <p:nvCxnSpPr>
-          <p:cNvPr id="19" name="Connector 18"/>
+          <p:cNvPr id="23" name="Connector 22"/>
           <p:cNvCxnSpPr/>
           <p:nvPr/>
         </p:nvCxnSpPr>
         <p:spPr>
           <a:xfrm>
-            <a:off x="5961888" y="2688336"/>
-            <a:ext cx="301752" cy="0"/>
+            <a:off x="8485632" y="2551176"/>
+            <a:ext cx="219456" cy="0"/>
           </a:xfrm>
           <a:prstGeom prst="line">
             <a:avLst/>
           </a:prstGeom>
-          <a:ln w="20320">
+          <a:ln w="27940">
             <a:solidFill>
               <a:srgbClr val="00897B"/>
             </a:solidFill>
@@ -5566,14 +5771,14 @@
       </p:cxnSp>
       <p:sp>
         <p:nvSpPr>
-          <p:cNvPr id="20" name="Rounded Rectangle 19"/>
+          <p:cNvPr id="24" name="Rounded Rectangle 23"/>
           <p:cNvSpPr/>
           <p:nvPr/>
         </p:nvSpPr>
         <p:spPr>
           <a:xfrm>
-            <a:off x="6281927" y="2148840"/>
-            <a:ext cx="1536192" cy="1078992"/>
+            <a:off x="822960" y="3886200"/>
+            <a:ext cx="3246120" cy="1261872"/>
           </a:xfrm>
           <a:prstGeom prst="roundRect">
             <a:avLst/>
@@ -5583,7 +5788,7 @@
           </a:solidFill>
           <a:ln w="12700">
             <a:solidFill>
-              <a:srgbClr val="D2E0DC"/>
+              <a:srgbClr val="CCDED8"/>
             </a:solidFill>
           </a:ln>
         </p:spPr>
@@ -5611,14 +5816,14 @@
       </p:sp>
       <p:sp>
         <p:nvSpPr>
-          <p:cNvPr id="21" name="TextBox 20"/>
+          <p:cNvPr id="25" name="TextBox 24"/>
           <p:cNvSpPr txBox="1"/>
           <p:nvPr/>
         </p:nvSpPr>
         <p:spPr>
           <a:xfrm>
-            <a:off x="6428231" y="2313432"/>
-            <a:ext cx="274320" cy="228600"/>
+            <a:off x="1078992" y="4133087"/>
+            <a:ext cx="2560320" cy="228600"/>
           </a:xfrm>
           <a:prstGeom prst="rect">
             <a:avLst/>
@@ -5632,27 +5837,27 @@
           <a:lstStyle/>
           <a:p>
             <a:r>
-              <a:rPr sz="1300" b="1">
+              <a:rPr sz="1500" b="1">
                 <a:solidFill>
                   <a:srgbClr val="00897B"/>
                 </a:solidFill>
                 <a:latin typeface="Aptos"/>
               </a:rPr>
-              <a:t>4</a:t>
-            </a:r>
-          </a:p>
-        </p:txBody>
-      </p:sp>
-      <p:sp>
-        <p:nvSpPr>
-          <p:cNvPr id="22" name="TextBox 21"/>
+              <a:t>Trust guardrails</a:t>
+            </a:r>
+          </a:p>
+        </p:txBody>
+      </p:sp>
+      <p:sp>
+        <p:nvSpPr>
+          <p:cNvPr id="26" name="TextBox 25"/>
           <p:cNvSpPr txBox="1"/>
           <p:nvPr/>
         </p:nvSpPr>
         <p:spPr>
           <a:xfrm>
-            <a:off x="6720840" y="2286000"/>
-            <a:ext cx="914400" cy="228600"/>
+            <a:off x="1078992" y="4498848"/>
+            <a:ext cx="2560320" cy="502920"/>
           </a:xfrm>
           <a:prstGeom prst="rect">
             <a:avLst/>
@@ -5660,102 +5865,86 @@
           <a:noFill/>
         </p:spPr>
         <p:txBody>
-          <a:bodyPr wrap="square" lIns="18288" rIns="18288" tIns="18288" bIns="18288">
+          <a:bodyPr wrap="square">
             <a:spAutoFit/>
           </a:bodyPr>
           <a:lstStyle/>
           <a:p>
-            <a:r>
-              <a:rPr sz="1220" b="1">
+            <a:pPr>
+              <a:spcAft>
+                <a:spcPts val="600"/>
+              </a:spcAft>
+              <a:defRPr sz="1060">
                 <a:solidFill>
                   <a:srgbClr val="121F23"/>
                 </a:solidFill>
                 <a:latin typeface="Aptos"/>
-              </a:rPr>
-              <a:t>Request</a:t>
-            </a:r>
-          </a:p>
-        </p:txBody>
-      </p:sp>
-      <p:sp>
-        <p:nvSpPr>
-          <p:cNvPr id="23" name="TextBox 22"/>
-          <p:cNvSpPr txBox="1"/>
-          <p:nvPr/>
-        </p:nvSpPr>
-        <p:spPr>
-          <a:xfrm>
-            <a:off x="6446519" y="2697480"/>
-            <a:ext cx="1143000" cy="228600"/>
-          </a:xfrm>
-          <a:prstGeom prst="rect">
-            <a:avLst/>
-          </a:prstGeom>
-          <a:noFill/>
-        </p:spPr>
-        <p:txBody>
-          <a:bodyPr wrap="square" lIns="18288" rIns="18288" tIns="18288" bIns="18288">
-            <a:spAutoFit/>
-          </a:bodyPr>
-          <a:lstStyle/>
-          <a:p>
-            <a:r>
-              <a:rPr sz="850" b="0">
-                <a:solidFill>
-                  <a:srgbClr val="5C6C72"/>
-                </a:solidFill>
-                <a:latin typeface="Aptos"/>
-              </a:rPr>
-              <a:t>another pantry claims</a:t>
-            </a:r>
-          </a:p>
-        </p:txBody>
-      </p:sp>
-      <p:cxnSp>
-        <p:nvCxnSpPr>
-          <p:cNvPr id="24" name="Connector 23"/>
-          <p:cNvCxnSpPr/>
-          <p:nvPr/>
-        </p:nvCxnSpPr>
-        <p:spPr>
-          <a:xfrm>
-            <a:off x="7836407" y="2688336"/>
-            <a:ext cx="301752" cy="0"/>
-          </a:xfrm>
-          <a:prstGeom prst="line">
-            <a:avLst/>
-          </a:prstGeom>
-          <a:ln w="20320">
-            <a:solidFill>
-              <a:srgbClr val="00897B"/>
-            </a:solidFill>
-          </a:ln>
-        </p:spPr>
-        <p:style>
-          <a:lnRef idx="2">
-            <a:schemeClr val="accent1"/>
-          </a:lnRef>
-          <a:fillRef idx="0">
-            <a:schemeClr val="accent1"/>
-          </a:fillRef>
-          <a:effectRef idx="1">
-            <a:schemeClr val="accent1"/>
-          </a:effectRef>
-          <a:fontRef idx="minor">
-            <a:schemeClr val="tx1"/>
-          </a:fontRef>
-        </p:style>
-      </p:cxnSp>
-      <p:sp>
-        <p:nvSpPr>
-          <p:cNvPr id="25" name="Rounded Rectangle 24"/>
+              </a:defRPr>
+            </a:pPr>
+            <a:r>
+              <a:t>Confirmed lot required.</a:t>
+            </a:r>
+          </a:p>
+          <a:p>
+            <a:pPr>
+              <a:spcAft>
+                <a:spcPts val="600"/>
+              </a:spcAft>
+              <a:defRPr sz="1060">
+                <a:solidFill>
+                  <a:srgbClr val="121F23"/>
+                </a:solidFill>
+                <a:latin typeface="Aptos"/>
+              </a:defRPr>
+            </a:pPr>
+            <a:r>
+              <a:t>Redistribution flag required.</a:t>
+            </a:r>
+          </a:p>
+          <a:p>
+            <a:pPr>
+              <a:spcAft>
+                <a:spcPts val="600"/>
+              </a:spcAft>
+              <a:defRPr sz="1060">
+                <a:solidFill>
+                  <a:srgbClr val="121F23"/>
+                </a:solidFill>
+                <a:latin typeface="Aptos"/>
+              </a:defRPr>
+            </a:pPr>
+            <a:r>
+              <a:t>TEFAP blocked by default.</a:t>
+            </a:r>
+          </a:p>
+          <a:p>
+            <a:pPr>
+              <a:spcAft>
+                <a:spcPts val="600"/>
+              </a:spcAft>
+              <a:defRPr sz="1060">
+                <a:solidFill>
+                  <a:srgbClr val="121F23"/>
+                </a:solidFill>
+                <a:latin typeface="Aptos"/>
+              </a:defRPr>
+            </a:pPr>
+            <a:r>
+              <a:t>No payment in MVP.</a:t>
+            </a:r>
+          </a:p>
+        </p:txBody>
+      </p:sp>
+      <p:sp>
+        <p:nvSpPr>
+          <p:cNvPr id="27" name="Rounded Rectangle 26"/>
           <p:cNvSpPr/>
           <p:nvPr/>
         </p:nvSpPr>
         <p:spPr>
           <a:xfrm>
-            <a:off x="8156448" y="2148840"/>
-            <a:ext cx="1536192" cy="1078992"/>
+            <a:off x="4462272" y="3886200"/>
+            <a:ext cx="3246120" cy="1261872"/>
           </a:xfrm>
           <a:prstGeom prst="roundRect">
             <a:avLst/>
@@ -5765,7 +5954,7 @@
           </a:solidFill>
           <a:ln w="12700">
             <a:solidFill>
-              <a:srgbClr val="D2E0DC"/>
+              <a:srgbClr val="CCDED8"/>
             </a:solidFill>
           </a:ln>
         </p:spPr>
@@ -5793,14 +5982,14 @@
       </p:sp>
       <p:sp>
         <p:nvSpPr>
-          <p:cNvPr id="26" name="TextBox 25"/>
+          <p:cNvPr id="28" name="TextBox 27"/>
           <p:cNvSpPr txBox="1"/>
           <p:nvPr/>
         </p:nvSpPr>
         <p:spPr>
           <a:xfrm>
-            <a:off x="8302752" y="2313432"/>
-            <a:ext cx="274320" cy="228600"/>
+            <a:off x="4718304" y="4133087"/>
+            <a:ext cx="2560320" cy="228600"/>
           </a:xfrm>
           <a:prstGeom prst="rect">
             <a:avLst/>
@@ -5814,27 +6003,27 @@
           <a:lstStyle/>
           <a:p>
             <a:r>
-              <a:rPr sz="1300" b="1">
+              <a:rPr sz="1500" b="1">
                 <a:solidFill>
                   <a:srgbClr val="00897B"/>
                 </a:solidFill>
                 <a:latin typeface="Aptos"/>
               </a:rPr>
-              <a:t>5</a:t>
-            </a:r>
-          </a:p>
-        </p:txBody>
-      </p:sp>
-      <p:sp>
-        <p:nvSpPr>
-          <p:cNvPr id="27" name="TextBox 26"/>
+              <a:t>AI role</a:t>
+            </a:r>
+          </a:p>
+        </p:txBody>
+      </p:sp>
+      <p:sp>
+        <p:nvSpPr>
+          <p:cNvPr id="29" name="TextBox 28"/>
           <p:cNvSpPr txBox="1"/>
           <p:nvPr/>
         </p:nvSpPr>
         <p:spPr>
           <a:xfrm>
-            <a:off x="8595360" y="2286000"/>
-            <a:ext cx="914400" cy="228600"/>
+            <a:off x="4718304" y="4498848"/>
+            <a:ext cx="2560320" cy="502920"/>
           </a:xfrm>
           <a:prstGeom prst="rect">
             <a:avLst/>
@@ -5842,92 +6031,76 @@
           <a:noFill/>
         </p:spPr>
         <p:txBody>
-          <a:bodyPr wrap="square" lIns="18288" rIns="18288" tIns="18288" bIns="18288">
+          <a:bodyPr wrap="square">
             <a:spAutoFit/>
           </a:bodyPr>
           <a:lstStyle/>
           <a:p>
-            <a:r>
-              <a:rPr sz="1220" b="1">
+            <a:pPr>
+              <a:spcAft>
+                <a:spcPts val="600"/>
+              </a:spcAft>
+              <a:defRPr sz="1060">
                 <a:solidFill>
                   <a:srgbClr val="121F23"/>
                 </a:solidFill>
                 <a:latin typeface="Aptos"/>
-              </a:rPr>
-              <a:t>Reserve</a:t>
-            </a:r>
-          </a:p>
-        </p:txBody>
-      </p:sp>
-      <p:sp>
-        <p:nvSpPr>
-          <p:cNvPr id="28" name="TextBox 27"/>
-          <p:cNvSpPr txBox="1"/>
-          <p:nvPr/>
-        </p:nvSpPr>
-        <p:spPr>
-          <a:xfrm>
-            <a:off x="8321040" y="2697480"/>
-            <a:ext cx="1143000" cy="228600"/>
-          </a:xfrm>
-          <a:prstGeom prst="rect">
-            <a:avLst/>
-          </a:prstGeom>
-          <a:noFill/>
-        </p:spPr>
-        <p:txBody>
-          <a:bodyPr wrap="square" lIns="18288" rIns="18288" tIns="18288" bIns="18288">
-            <a:spAutoFit/>
-          </a:bodyPr>
-          <a:lstStyle/>
-          <a:p>
-            <a:r>
-              <a:rPr sz="850" b="0">
-                <a:solidFill>
-                  <a:srgbClr val="5C6C72"/>
-                </a:solidFill>
-                <a:latin typeface="Aptos"/>
-              </a:rPr>
-              <a:t>available qty drops</a:t>
-            </a:r>
-          </a:p>
-        </p:txBody>
-      </p:sp>
-      <p:cxnSp>
-        <p:nvCxnSpPr>
-          <p:cNvPr id="29" name="Connector 28"/>
-          <p:cNvCxnSpPr/>
-          <p:nvPr/>
-        </p:nvCxnSpPr>
-        <p:spPr>
-          <a:xfrm>
-            <a:off x="9710928" y="2688336"/>
-            <a:ext cx="301752" cy="0"/>
-          </a:xfrm>
-          <a:prstGeom prst="line">
-            <a:avLst/>
-          </a:prstGeom>
-          <a:ln w="20320">
-            <a:solidFill>
-              <a:srgbClr val="00897B"/>
-            </a:solidFill>
-          </a:ln>
-        </p:spPr>
-        <p:style>
-          <a:lnRef idx="2">
-            <a:schemeClr val="accent1"/>
-          </a:lnRef>
-          <a:fillRef idx="0">
-            <a:schemeClr val="accent1"/>
-          </a:fillRef>
-          <a:effectRef idx="1">
-            <a:schemeClr val="accent1"/>
-          </a:effectRef>
-          <a:fontRef idx="minor">
-            <a:schemeClr val="tx1"/>
-          </a:fontRef>
-        </p:style>
-      </p:cxnSp>
+              </a:defRPr>
+            </a:pPr>
+            <a:r>
+              <a:t>Barcode lookup first.</a:t>
+            </a:r>
+          </a:p>
+          <a:p>
+            <a:pPr>
+              <a:spcAft>
+                <a:spcPts val="600"/>
+              </a:spcAft>
+              <a:defRPr sz="1060">
+                <a:solidFill>
+                  <a:srgbClr val="121F23"/>
+                </a:solidFill>
+                <a:latin typeface="Aptos"/>
+              </a:defRPr>
+            </a:pPr>
+            <a:r>
+              <a:t>OCR and voice draft fields.</a:t>
+            </a:r>
+          </a:p>
+          <a:p>
+            <a:pPr>
+              <a:spcAft>
+                <a:spcPts val="600"/>
+              </a:spcAft>
+              <a:defRPr sz="1060">
+                <a:solidFill>
+                  <a:srgbClr val="121F23"/>
+                </a:solidFill>
+                <a:latin typeface="Aptos"/>
+              </a:defRPr>
+            </a:pPr>
+            <a:r>
+              <a:t>LLM only for uncertain parsing.</a:t>
+            </a:r>
+          </a:p>
+          <a:p>
+            <a:pPr>
+              <a:spcAft>
+                <a:spcPts val="600"/>
+              </a:spcAft>
+              <a:defRPr sz="1060">
+                <a:solidFill>
+                  <a:srgbClr val="121F23"/>
+                </a:solidFill>
+                <a:latin typeface="Aptos"/>
+              </a:defRPr>
+            </a:pPr>
+            <a:r>
+              <a:t>Human confirms before save.</a:t>
+            </a:r>
+          </a:p>
+        </p:txBody>
+      </p:sp>
       <p:sp>
         <p:nvSpPr>
           <p:cNvPr id="30" name="Rounded Rectangle 29"/>
@@ -5936,8 +6109,8 @@
         </p:nvSpPr>
         <p:spPr>
           <a:xfrm>
-            <a:off x="10030968" y="2148840"/>
-            <a:ext cx="1536192" cy="1078992"/>
+            <a:off x="8101583" y="3886200"/>
+            <a:ext cx="3246120" cy="1261872"/>
           </a:xfrm>
           <a:prstGeom prst="roundRect">
             <a:avLst/>
@@ -5947,7 +6120,7 @@
           </a:solidFill>
           <a:ln w="12700">
             <a:solidFill>
-              <a:srgbClr val="D2E0DC"/>
+              <a:srgbClr val="CCDED8"/>
             </a:solidFill>
           </a:ln>
         </p:spPr>
@@ -5981,8 +6154,8 @@
         </p:nvSpPr>
         <p:spPr>
           <a:xfrm>
-            <a:off x="10177272" y="2313432"/>
-            <a:ext cx="274320" cy="228600"/>
+            <a:off x="8357616" y="4133087"/>
+            <a:ext cx="2560320" cy="228600"/>
           </a:xfrm>
           <a:prstGeom prst="rect">
             <a:avLst/>
@@ -5996,13 +6169,13 @@
           <a:lstStyle/>
           <a:p>
             <a:r>
-              <a:rPr sz="1300" b="1">
+              <a:rPr sz="1500" b="1">
                 <a:solidFill>
                   <a:srgbClr val="00897B"/>
                 </a:solidFill>
                 <a:latin typeface="Aptos"/>
               </a:rPr>
-              <a:t>6</a:t>
+              <a:t>Live demo state</a:t>
             </a:r>
           </a:p>
         </p:txBody>
@@ -6015,8 +6188,95 @@
         </p:nvSpPr>
         <p:spPr>
           <a:xfrm>
-            <a:off x="10469880" y="2286000"/>
-            <a:ext cx="914400" cy="228600"/>
+            <a:off x="8357616" y="4498848"/>
+            <a:ext cx="2560320" cy="502920"/>
+          </a:xfrm>
+          <a:prstGeom prst="rect">
+            <a:avLst/>
+          </a:prstGeom>
+          <a:noFill/>
+        </p:spPr>
+        <p:txBody>
+          <a:bodyPr wrap="square">
+            <a:spAutoFit/>
+          </a:bodyPr>
+          <a:lstStyle/>
+          <a:p>
+            <a:pPr>
+              <a:spcAft>
+                <a:spcPts val="600"/>
+              </a:spcAft>
+              <a:defRPr sz="1060">
+                <a:solidFill>
+                  <a:srgbClr val="121F23"/>
+                </a:solidFill>
+                <a:latin typeface="Aptos"/>
+              </a:defRPr>
+            </a:pPr>
+            <a:r>
+              <a:t>149 inventory lots.</a:t>
+            </a:r>
+          </a:p>
+          <a:p>
+            <a:pPr>
+              <a:spcAft>
+                <a:spcPts val="600"/>
+              </a:spcAft>
+              <a:defRPr sz="1060">
+                <a:solidFill>
+                  <a:srgbClr val="121F23"/>
+                </a:solidFill>
+                <a:latin typeface="Aptos"/>
+              </a:defRPr>
+            </a:pPr>
+            <a:r>
+              <a:t>73 active listings.</a:t>
+            </a:r>
+          </a:p>
+          <a:p>
+            <a:pPr>
+              <a:spcAft>
+                <a:spcPts val="600"/>
+              </a:spcAft>
+              <a:defRPr sz="1060">
+                <a:solidFill>
+                  <a:srgbClr val="121F23"/>
+                </a:solidFill>
+                <a:latin typeface="Aptos"/>
+              </a:defRPr>
+            </a:pPr>
+            <a:r>
+              <a:t>13 pantry profiles.</a:t>
+            </a:r>
+          </a:p>
+          <a:p>
+            <a:pPr>
+              <a:spcAft>
+                <a:spcPts val="600"/>
+              </a:spcAft>
+              <a:defRPr sz="1060">
+                <a:solidFill>
+                  <a:srgbClr val="121F23"/>
+                </a:solidFill>
+                <a:latin typeface="Aptos"/>
+              </a:defRPr>
+            </a:pPr>
+            <a:r>
+              <a:t>0 payments required.</a:t>
+            </a:r>
+          </a:p>
+        </p:txBody>
+      </p:sp>
+      <p:sp>
+        <p:nvSpPr>
+          <p:cNvPr id="33" name="TextBox 32"/>
+          <p:cNvSpPr txBox="1"/>
+          <p:nvPr/>
+        </p:nvSpPr>
+        <p:spPr>
+          <a:xfrm>
+            <a:off x="914400" y="5779008"/>
+            <a:ext cx="10012680" cy="310896"/>
           </a:xfrm>
           <a:prstGeom prst="rect">
             <a:avLst/>
@@ -6029,28 +6289,29 @@
           </a:bodyPr>
           <a:lstStyle/>
           <a:p>
-            <a:r>
-              <a:rPr sz="1220" b="1">
+            <a:pPr algn="ctr"/>
+            <a:r>
+              <a:rPr sz="1550" b="1">
                 <a:solidFill>
                   <a:srgbClr val="121F23"/>
                 </a:solidFill>
                 <a:latin typeface="Aptos"/>
               </a:rPr>
-              <a:t>Transfer</a:t>
-            </a:r>
-          </a:p>
-        </p:txBody>
-      </p:sp>
-      <p:sp>
-        <p:nvSpPr>
-          <p:cNvPr id="33" name="TextBox 32"/>
+              <a:t>Important logic: publishing does not reduce stock; requesting reserves stock; transfer decrements stock.</a:t>
+            </a:r>
+          </a:p>
+        </p:txBody>
+      </p:sp>
+      <p:sp>
+        <p:nvSpPr>
+          <p:cNvPr id="34" name="TextBox 33"/>
           <p:cNvSpPr txBox="1"/>
           <p:nvPr/>
         </p:nvSpPr>
         <p:spPr>
           <a:xfrm>
-            <a:off x="10195560" y="2697480"/>
-            <a:ext cx="1143000" cy="228600"/>
+            <a:off x="658368" y="6473952"/>
+            <a:ext cx="8778240" cy="164592"/>
           </a:xfrm>
           <a:prstGeom prst="rect">
             <a:avLst/>
@@ -6064,59 +6325,14 @@
           <a:lstStyle/>
           <a:p>
             <a:r>
-              <a:rPr sz="850" b="0">
-                <a:solidFill>
-                  <a:srgbClr val="5C6C72"/>
+              <a:rPr sz="650" b="0">
+                <a:solidFill>
+                  <a:srgbClr val="58696F"/>
                 </a:solidFill>
                 <a:latin typeface="Aptos"/>
               </a:rPr>
-              <a:t>traceable handoff</a:t>
-            </a:r>
-          </a:p>
-        </p:txBody>
-      </p:sp>
-      <p:sp>
-        <p:nvSpPr>
-          <p:cNvPr id="34" name="Rounded Rectangle 33"/>
-          <p:cNvSpPr/>
-          <p:nvPr/>
-        </p:nvSpPr>
-        <p:spPr>
-          <a:xfrm>
-            <a:off x="1051560" y="3977639"/>
-            <a:ext cx="4343400" cy="1234440"/>
-          </a:xfrm>
-          <a:prstGeom prst="roundRect">
-            <a:avLst/>
-          </a:prstGeom>
-          <a:solidFill>
-            <a:srgbClr val="FFFFFF"/>
-          </a:solidFill>
-          <a:ln w="12700">
-            <a:solidFill>
-              <a:srgbClr val="D2E0DC"/>
-            </a:solidFill>
-          </a:ln>
-        </p:spPr>
-        <p:style>
-          <a:lnRef idx="1">
-            <a:schemeClr val="accent1"/>
-          </a:lnRef>
-          <a:fillRef idx="3">
-            <a:schemeClr val="accent1"/>
-          </a:fillRef>
-          <a:effectRef idx="2">
-            <a:schemeClr val="accent1"/>
-          </a:effectRef>
-          <a:fontRef idx="minor">
-            <a:schemeClr val="lt1"/>
-          </a:fontRef>
-        </p:style>
-        <p:txBody>
-          <a:bodyPr rtlCol="0" anchor="ctr"/>
-          <a:lstStyle/>
-          <a:p>
-            <a:pPr algn="ctr"/>
+              <a:t>Live demo counts queried from Supabase on July 17, 2026.</a:t>
+            </a:r>
           </a:p>
         </p:txBody>
       </p:sp>
@@ -6128,8 +6344,8 @@
         </p:nvSpPr>
         <p:spPr>
           <a:xfrm>
-            <a:off x="1298448" y="4224528"/>
-            <a:ext cx="3200400" cy="228600"/>
+            <a:off x="10927080" y="6473952"/>
+            <a:ext cx="658368" cy="164592"/>
           </a:xfrm>
           <a:prstGeom prst="rect">
             <a:avLst/>
@@ -6142,788 +6358,15 @@
           </a:bodyPr>
           <a:lstStyle/>
           <a:p>
-            <a:r>
-              <a:rPr sz="1500" b="1">
-                <a:solidFill>
-                  <a:srgbClr val="00897B"/>
+            <a:pPr algn="r"/>
+            <a:r>
+              <a:rPr sz="750" b="0">
+                <a:solidFill>
+                  <a:srgbClr val="58696F"/>
                 </a:solidFill>
                 <a:latin typeface="Aptos"/>
               </a:rPr>
-              <a:t>Trust rules</a:t>
-            </a:r>
-          </a:p>
-        </p:txBody>
-      </p:sp>
-      <p:sp>
-        <p:nvSpPr>
-          <p:cNvPr id="36" name="TextBox 35"/>
-          <p:cNvSpPr txBox="1"/>
-          <p:nvPr/>
-        </p:nvSpPr>
-        <p:spPr>
-          <a:xfrm>
-            <a:off x="1298448" y="4572000"/>
-            <a:ext cx="3657600" cy="502920"/>
-          </a:xfrm>
-          <a:prstGeom prst="rect">
-            <a:avLst/>
-          </a:prstGeom>
-          <a:noFill/>
-        </p:spPr>
-        <p:txBody>
-          <a:bodyPr wrap="square">
-            <a:spAutoFit/>
-          </a:bodyPr>
-          <a:lstStyle/>
-          <a:p>
-            <a:pPr>
-              <a:spcAft>
-                <a:spcPts val="500"/>
-              </a:spcAft>
-              <a:defRPr sz="1019">
-                <a:solidFill>
-                  <a:srgbClr val="121F23"/>
-                </a:solidFill>
-                <a:latin typeface="Aptos"/>
-              </a:defRPr>
-            </a:pPr>
-            <a:r>
-              <a:t>confirmed lot</a:t>
-            </a:r>
-          </a:p>
-          <a:p>
-            <a:pPr>
-              <a:spcAft>
-                <a:spcPts val="500"/>
-              </a:spcAft>
-              <a:defRPr sz="1019">
-                <a:solidFill>
-                  <a:srgbClr val="121F23"/>
-                </a:solidFill>
-                <a:latin typeface="Aptos"/>
-              </a:defRPr>
-            </a:pPr>
-            <a:r>
-              <a:t>redistribution allowed</a:t>
-            </a:r>
-          </a:p>
-          <a:p>
-            <a:pPr>
-              <a:spcAft>
-                <a:spcPts val="500"/>
-              </a:spcAft>
-              <a:defRPr sz="1019">
-                <a:solidFill>
-                  <a:srgbClr val="121F23"/>
-                </a:solidFill>
-                <a:latin typeface="Aptos"/>
-              </a:defRPr>
-            </a:pPr>
-            <a:r>
-              <a:t>TEFAP blocked by default</a:t>
-            </a:r>
-          </a:p>
-          <a:p>
-            <a:pPr>
-              <a:spcAft>
-                <a:spcPts val="500"/>
-              </a:spcAft>
-              <a:defRPr sz="1019">
-                <a:solidFill>
-                  <a:srgbClr val="121F23"/>
-                </a:solidFill>
-                <a:latin typeface="Aptos"/>
-              </a:defRPr>
-            </a:pPr>
-            <a:r>
-              <a:t>payment disabled in MVP</a:t>
-            </a:r>
-          </a:p>
-        </p:txBody>
-      </p:sp>
-      <p:sp>
-        <p:nvSpPr>
-          <p:cNvPr id="37" name="Rounded Rectangle 36"/>
-          <p:cNvSpPr/>
-          <p:nvPr/>
-        </p:nvSpPr>
-        <p:spPr>
-          <a:xfrm>
-            <a:off x="6537960" y="3977639"/>
-            <a:ext cx="4343400" cy="1234440"/>
-          </a:xfrm>
-          <a:prstGeom prst="roundRect">
-            <a:avLst/>
-          </a:prstGeom>
-          <a:solidFill>
-            <a:srgbClr val="FFFFFF"/>
-          </a:solidFill>
-          <a:ln w="12700">
-            <a:solidFill>
-              <a:srgbClr val="D2E0DC"/>
-            </a:solidFill>
-          </a:ln>
-        </p:spPr>
-        <p:style>
-          <a:lnRef idx="1">
-            <a:schemeClr val="accent1"/>
-          </a:lnRef>
-          <a:fillRef idx="3">
-            <a:schemeClr val="accent1"/>
-          </a:fillRef>
-          <a:effectRef idx="2">
-            <a:schemeClr val="accent1"/>
-          </a:effectRef>
-          <a:fontRef idx="minor">
-            <a:schemeClr val="lt1"/>
-          </a:fontRef>
-        </p:style>
-        <p:txBody>
-          <a:bodyPr rtlCol="0" anchor="ctr"/>
-          <a:lstStyle/>
-          <a:p>
-            <a:pPr algn="ctr"/>
-          </a:p>
-        </p:txBody>
-      </p:sp>
-      <p:sp>
-        <p:nvSpPr>
-          <p:cNvPr id="38" name="TextBox 37"/>
-          <p:cNvSpPr txBox="1"/>
-          <p:nvPr/>
-        </p:nvSpPr>
-        <p:spPr>
-          <a:xfrm>
-            <a:off x="6784848" y="4224528"/>
-            <a:ext cx="3200400" cy="228600"/>
-          </a:xfrm>
-          <a:prstGeom prst="rect">
-            <a:avLst/>
-          </a:prstGeom>
-          <a:noFill/>
-        </p:spPr>
-        <p:txBody>
-          <a:bodyPr wrap="square" lIns="18288" rIns="18288" tIns="18288" bIns="18288">
-            <a:spAutoFit/>
-          </a:bodyPr>
-          <a:lstStyle/>
-          <a:p>
-            <a:r>
-              <a:rPr sz="1500" b="1">
-                <a:solidFill>
-                  <a:srgbClr val="00897B"/>
-                </a:solidFill>
-                <a:latin typeface="Aptos"/>
-              </a:rPr>
-              <a:t>AI use</a:t>
-            </a:r>
-          </a:p>
-        </p:txBody>
-      </p:sp>
-      <p:sp>
-        <p:nvSpPr>
-          <p:cNvPr id="39" name="TextBox 38"/>
-          <p:cNvSpPr txBox="1"/>
-          <p:nvPr/>
-        </p:nvSpPr>
-        <p:spPr>
-          <a:xfrm>
-            <a:off x="6784848" y="4572000"/>
-            <a:ext cx="3657600" cy="502920"/>
-          </a:xfrm>
-          <a:prstGeom prst="rect">
-            <a:avLst/>
-          </a:prstGeom>
-          <a:noFill/>
-        </p:spPr>
-        <p:txBody>
-          <a:bodyPr wrap="square">
-            <a:spAutoFit/>
-          </a:bodyPr>
-          <a:lstStyle/>
-          <a:p>
-            <a:pPr>
-              <a:spcAft>
-                <a:spcPts val="500"/>
-              </a:spcAft>
-              <a:defRPr sz="1019">
-                <a:solidFill>
-                  <a:srgbClr val="121F23"/>
-                </a:solidFill>
-                <a:latin typeface="Aptos"/>
-              </a:defRPr>
-            </a:pPr>
-            <a:r>
-              <a:t>barcode lookup first</a:t>
-            </a:r>
-          </a:p>
-          <a:p>
-            <a:pPr>
-              <a:spcAft>
-                <a:spcPts val="500"/>
-              </a:spcAft>
-              <a:defRPr sz="1019">
-                <a:solidFill>
-                  <a:srgbClr val="121F23"/>
-                </a:solidFill>
-                <a:latin typeface="Aptos"/>
-              </a:defRPr>
-            </a:pPr>
-            <a:r>
-              <a:t>OCR/voice for dates</a:t>
-            </a:r>
-          </a:p>
-          <a:p>
-            <a:pPr>
-              <a:spcAft>
-                <a:spcPts val="500"/>
-              </a:spcAft>
-              <a:defRPr sz="1019">
-                <a:solidFill>
-                  <a:srgbClr val="121F23"/>
-                </a:solidFill>
-                <a:latin typeface="Aptos"/>
-              </a:defRPr>
-            </a:pPr>
-            <a:r>
-              <a:t>LLM only fallback</a:t>
-            </a:r>
-          </a:p>
-          <a:p>
-            <a:pPr>
-              <a:spcAft>
-                <a:spcPts val="500"/>
-              </a:spcAft>
-              <a:defRPr sz="1019">
-                <a:solidFill>
-                  <a:srgbClr val="121F23"/>
-                </a:solidFill>
-                <a:latin typeface="Aptos"/>
-              </a:defRPr>
-            </a:pPr>
-            <a:r>
-              <a:t>human confirmation before save</a:t>
-            </a:r>
-          </a:p>
-        </p:txBody>
-      </p:sp>
-      <p:sp>
-        <p:nvSpPr>
-          <p:cNvPr id="40" name="Rounded Rectangle 39"/>
-          <p:cNvSpPr/>
-          <p:nvPr/>
-        </p:nvSpPr>
-        <p:spPr>
-          <a:xfrm>
-            <a:off x="1280160" y="5559552"/>
-            <a:ext cx="1828800" cy="960120"/>
-          </a:xfrm>
-          <a:prstGeom prst="roundRect">
-            <a:avLst/>
-          </a:prstGeom>
-          <a:solidFill>
-            <a:srgbClr val="FFFFFF"/>
-          </a:solidFill>
-          <a:ln w="12700">
-            <a:solidFill>
-              <a:srgbClr val="D2E0DC"/>
-            </a:solidFill>
-          </a:ln>
-        </p:spPr>
-        <p:style>
-          <a:lnRef idx="1">
-            <a:schemeClr val="accent1"/>
-          </a:lnRef>
-          <a:fillRef idx="3">
-            <a:schemeClr val="accent1"/>
-          </a:fillRef>
-          <a:effectRef idx="2">
-            <a:schemeClr val="accent1"/>
-          </a:effectRef>
-          <a:fontRef idx="minor">
-            <a:schemeClr val="lt1"/>
-          </a:fontRef>
-        </p:style>
-        <p:txBody>
-          <a:bodyPr rtlCol="0" anchor="ctr"/>
-          <a:lstStyle/>
-          <a:p>
-            <a:pPr algn="ctr"/>
-          </a:p>
-        </p:txBody>
-      </p:sp>
-      <p:sp>
-        <p:nvSpPr>
-          <p:cNvPr id="41" name="TextBox 40"/>
-          <p:cNvSpPr txBox="1"/>
-          <p:nvPr/>
-        </p:nvSpPr>
-        <p:spPr>
-          <a:xfrm>
-            <a:off x="1444751" y="5687568"/>
-            <a:ext cx="1554480" cy="292608"/>
-          </a:xfrm>
-          <a:prstGeom prst="rect">
-            <a:avLst/>
-          </a:prstGeom>
-          <a:noFill/>
-        </p:spPr>
-        <p:txBody>
-          <a:bodyPr wrap="square" lIns="18288" rIns="18288" tIns="18288" bIns="18288">
-            <a:spAutoFit/>
-          </a:bodyPr>
-          <a:lstStyle/>
-          <a:p>
-            <a:r>
-              <a:rPr sz="2200" b="1">
-                <a:solidFill>
-                  <a:srgbClr val="25638C"/>
-                </a:solidFill>
-                <a:latin typeface="Aptos"/>
-              </a:rPr>
-              <a:t>149</a:t>
-            </a:r>
-          </a:p>
-        </p:txBody>
-      </p:sp>
-      <p:sp>
-        <p:nvSpPr>
-          <p:cNvPr id="42" name="TextBox 41"/>
-          <p:cNvSpPr txBox="1"/>
-          <p:nvPr/>
-        </p:nvSpPr>
-        <p:spPr>
-          <a:xfrm>
-            <a:off x="1444751" y="6071616"/>
-            <a:ext cx="1536192" cy="292608"/>
-          </a:xfrm>
-          <a:prstGeom prst="rect">
-            <a:avLst/>
-          </a:prstGeom>
-          <a:noFill/>
-        </p:spPr>
-        <p:txBody>
-          <a:bodyPr wrap="square" lIns="18288" rIns="18288" tIns="18288" bIns="18288">
-            <a:spAutoFit/>
-          </a:bodyPr>
-          <a:lstStyle/>
-          <a:p>
-            <a:r>
-              <a:rPr sz="819" b="0">
-                <a:solidFill>
-                  <a:srgbClr val="5C6C72"/>
-                </a:solidFill>
-                <a:latin typeface="Aptos"/>
-              </a:rPr>
-              <a:t>live inventory lots in demo</a:t>
-            </a:r>
-          </a:p>
-        </p:txBody>
-      </p:sp>
-      <p:sp>
-        <p:nvSpPr>
-          <p:cNvPr id="43" name="Rounded Rectangle 42"/>
-          <p:cNvSpPr/>
-          <p:nvPr/>
-        </p:nvSpPr>
-        <p:spPr>
-          <a:xfrm>
-            <a:off x="3337560" y="5559552"/>
-            <a:ext cx="1828800" cy="960120"/>
-          </a:xfrm>
-          <a:prstGeom prst="roundRect">
-            <a:avLst/>
-          </a:prstGeom>
-          <a:solidFill>
-            <a:srgbClr val="FFFFFF"/>
-          </a:solidFill>
-          <a:ln w="12700">
-            <a:solidFill>
-              <a:srgbClr val="D2E0DC"/>
-            </a:solidFill>
-          </a:ln>
-        </p:spPr>
-        <p:style>
-          <a:lnRef idx="1">
-            <a:schemeClr val="accent1"/>
-          </a:lnRef>
-          <a:fillRef idx="3">
-            <a:schemeClr val="accent1"/>
-          </a:fillRef>
-          <a:effectRef idx="2">
-            <a:schemeClr val="accent1"/>
-          </a:effectRef>
-          <a:fontRef idx="minor">
-            <a:schemeClr val="lt1"/>
-          </a:fontRef>
-        </p:style>
-        <p:txBody>
-          <a:bodyPr rtlCol="0" anchor="ctr"/>
-          <a:lstStyle/>
-          <a:p>
-            <a:pPr algn="ctr"/>
-          </a:p>
-        </p:txBody>
-      </p:sp>
-      <p:sp>
-        <p:nvSpPr>
-          <p:cNvPr id="44" name="TextBox 43"/>
-          <p:cNvSpPr txBox="1"/>
-          <p:nvPr/>
-        </p:nvSpPr>
-        <p:spPr>
-          <a:xfrm>
-            <a:off x="3502152" y="5687568"/>
-            <a:ext cx="1554480" cy="292608"/>
-          </a:xfrm>
-          <a:prstGeom prst="rect">
-            <a:avLst/>
-          </a:prstGeom>
-          <a:noFill/>
-        </p:spPr>
-        <p:txBody>
-          <a:bodyPr wrap="square" lIns="18288" rIns="18288" tIns="18288" bIns="18288">
-            <a:spAutoFit/>
-          </a:bodyPr>
-          <a:lstStyle/>
-          <a:p>
-            <a:r>
-              <a:rPr sz="2200" b="1">
-                <a:solidFill>
-                  <a:srgbClr val="25638C"/>
-                </a:solidFill>
-                <a:latin typeface="Aptos"/>
-              </a:rPr>
-              <a:t>73</a:t>
-            </a:r>
-          </a:p>
-        </p:txBody>
-      </p:sp>
-      <p:sp>
-        <p:nvSpPr>
-          <p:cNvPr id="45" name="TextBox 44"/>
-          <p:cNvSpPr txBox="1"/>
-          <p:nvPr/>
-        </p:nvSpPr>
-        <p:spPr>
-          <a:xfrm>
-            <a:off x="3502152" y="6071616"/>
-            <a:ext cx="1536192" cy="292608"/>
-          </a:xfrm>
-          <a:prstGeom prst="rect">
-            <a:avLst/>
-          </a:prstGeom>
-          <a:noFill/>
-        </p:spPr>
-        <p:txBody>
-          <a:bodyPr wrap="square" lIns="18288" rIns="18288" tIns="18288" bIns="18288">
-            <a:spAutoFit/>
-          </a:bodyPr>
-          <a:lstStyle/>
-          <a:p>
-            <a:r>
-              <a:rPr sz="819" b="0">
-                <a:solidFill>
-                  <a:srgbClr val="5C6C72"/>
-                </a:solidFill>
-                <a:latin typeface="Aptos"/>
-              </a:rPr>
-              <a:t>active listings in demo</a:t>
-            </a:r>
-          </a:p>
-        </p:txBody>
-      </p:sp>
-      <p:sp>
-        <p:nvSpPr>
-          <p:cNvPr id="46" name="Rounded Rectangle 45"/>
-          <p:cNvSpPr/>
-          <p:nvPr/>
-        </p:nvSpPr>
-        <p:spPr>
-          <a:xfrm>
-            <a:off x="5394960" y="5559552"/>
-            <a:ext cx="1828800" cy="960120"/>
-          </a:xfrm>
-          <a:prstGeom prst="roundRect">
-            <a:avLst/>
-          </a:prstGeom>
-          <a:solidFill>
-            <a:srgbClr val="FFFFFF"/>
-          </a:solidFill>
-          <a:ln w="12700">
-            <a:solidFill>
-              <a:srgbClr val="D2E0DC"/>
-            </a:solidFill>
-          </a:ln>
-        </p:spPr>
-        <p:style>
-          <a:lnRef idx="1">
-            <a:schemeClr val="accent1"/>
-          </a:lnRef>
-          <a:fillRef idx="3">
-            <a:schemeClr val="accent1"/>
-          </a:fillRef>
-          <a:effectRef idx="2">
-            <a:schemeClr val="accent1"/>
-          </a:effectRef>
-          <a:fontRef idx="minor">
-            <a:schemeClr val="lt1"/>
-          </a:fontRef>
-        </p:style>
-        <p:txBody>
-          <a:bodyPr rtlCol="0" anchor="ctr"/>
-          <a:lstStyle/>
-          <a:p>
-            <a:pPr algn="ctr"/>
-          </a:p>
-        </p:txBody>
-      </p:sp>
-      <p:sp>
-        <p:nvSpPr>
-          <p:cNvPr id="47" name="TextBox 46"/>
-          <p:cNvSpPr txBox="1"/>
-          <p:nvPr/>
-        </p:nvSpPr>
-        <p:spPr>
-          <a:xfrm>
-            <a:off x="5559552" y="5687568"/>
-            <a:ext cx="1554480" cy="292608"/>
-          </a:xfrm>
-          <a:prstGeom prst="rect">
-            <a:avLst/>
-          </a:prstGeom>
-          <a:noFill/>
-        </p:spPr>
-        <p:txBody>
-          <a:bodyPr wrap="square" lIns="18288" rIns="18288" tIns="18288" bIns="18288">
-            <a:spAutoFit/>
-          </a:bodyPr>
-          <a:lstStyle/>
-          <a:p>
-            <a:r>
-              <a:rPr sz="2200" b="1">
-                <a:solidFill>
-                  <a:srgbClr val="25638C"/>
-                </a:solidFill>
-                <a:latin typeface="Aptos"/>
-              </a:rPr>
-              <a:t>13</a:t>
-            </a:r>
-          </a:p>
-        </p:txBody>
-      </p:sp>
-      <p:sp>
-        <p:nvSpPr>
-          <p:cNvPr id="48" name="TextBox 47"/>
-          <p:cNvSpPr txBox="1"/>
-          <p:nvPr/>
-        </p:nvSpPr>
-        <p:spPr>
-          <a:xfrm>
-            <a:off x="5559552" y="6071616"/>
-            <a:ext cx="1536192" cy="292608"/>
-          </a:xfrm>
-          <a:prstGeom prst="rect">
-            <a:avLst/>
-          </a:prstGeom>
-          <a:noFill/>
-        </p:spPr>
-        <p:txBody>
-          <a:bodyPr wrap="square" lIns="18288" rIns="18288" tIns="18288" bIns="18288">
-            <a:spAutoFit/>
-          </a:bodyPr>
-          <a:lstStyle/>
-          <a:p>
-            <a:r>
-              <a:rPr sz="819" b="0">
-                <a:solidFill>
-                  <a:srgbClr val="5C6C72"/>
-                </a:solidFill>
-                <a:latin typeface="Aptos"/>
-              </a:rPr>
-              <a:t>pantry profiles in demo</a:t>
-            </a:r>
-          </a:p>
-        </p:txBody>
-      </p:sp>
-      <p:sp>
-        <p:nvSpPr>
-          <p:cNvPr id="49" name="Rounded Rectangle 48"/>
-          <p:cNvSpPr/>
-          <p:nvPr/>
-        </p:nvSpPr>
-        <p:spPr>
-          <a:xfrm>
-            <a:off x="7452360" y="5559552"/>
-            <a:ext cx="1828800" cy="960120"/>
-          </a:xfrm>
-          <a:prstGeom prst="roundRect">
-            <a:avLst/>
-          </a:prstGeom>
-          <a:solidFill>
-            <a:srgbClr val="FFFFFF"/>
-          </a:solidFill>
-          <a:ln w="12700">
-            <a:solidFill>
-              <a:srgbClr val="D2E0DC"/>
-            </a:solidFill>
-          </a:ln>
-        </p:spPr>
-        <p:style>
-          <a:lnRef idx="1">
-            <a:schemeClr val="accent1"/>
-          </a:lnRef>
-          <a:fillRef idx="3">
-            <a:schemeClr val="accent1"/>
-          </a:fillRef>
-          <a:effectRef idx="2">
-            <a:schemeClr val="accent1"/>
-          </a:effectRef>
-          <a:fontRef idx="minor">
-            <a:schemeClr val="lt1"/>
-          </a:fontRef>
-        </p:style>
-        <p:txBody>
-          <a:bodyPr rtlCol="0" anchor="ctr"/>
-          <a:lstStyle/>
-          <a:p>
-            <a:pPr algn="ctr"/>
-          </a:p>
-        </p:txBody>
-      </p:sp>
-      <p:sp>
-        <p:nvSpPr>
-          <p:cNvPr id="50" name="TextBox 49"/>
-          <p:cNvSpPr txBox="1"/>
-          <p:nvPr/>
-        </p:nvSpPr>
-        <p:spPr>
-          <a:xfrm>
-            <a:off x="7616952" y="5687568"/>
-            <a:ext cx="1554480" cy="292608"/>
-          </a:xfrm>
-          <a:prstGeom prst="rect">
-            <a:avLst/>
-          </a:prstGeom>
-          <a:noFill/>
-        </p:spPr>
-        <p:txBody>
-          <a:bodyPr wrap="square" lIns="18288" rIns="18288" tIns="18288" bIns="18288">
-            <a:spAutoFit/>
-          </a:bodyPr>
-          <a:lstStyle/>
-          <a:p>
-            <a:r>
-              <a:rPr sz="2200" b="1">
-                <a:solidFill>
-                  <a:srgbClr val="25638C"/>
-                </a:solidFill>
-                <a:latin typeface="Aptos"/>
-              </a:rPr>
-              <a:t>0</a:t>
-            </a:r>
-          </a:p>
-        </p:txBody>
-      </p:sp>
-      <p:sp>
-        <p:nvSpPr>
-          <p:cNvPr id="51" name="TextBox 50"/>
-          <p:cNvSpPr txBox="1"/>
-          <p:nvPr/>
-        </p:nvSpPr>
-        <p:spPr>
-          <a:xfrm>
-            <a:off x="7616952" y="6071616"/>
-            <a:ext cx="1536192" cy="292608"/>
-          </a:xfrm>
-          <a:prstGeom prst="rect">
-            <a:avLst/>
-          </a:prstGeom>
-          <a:noFill/>
-        </p:spPr>
-        <p:txBody>
-          <a:bodyPr wrap="square" lIns="18288" rIns="18288" tIns="18288" bIns="18288">
-            <a:spAutoFit/>
-          </a:bodyPr>
-          <a:lstStyle/>
-          <a:p>
-            <a:r>
-              <a:rPr sz="819" b="0">
-                <a:solidFill>
-                  <a:srgbClr val="5C6C72"/>
-                </a:solidFill>
-                <a:latin typeface="Aptos"/>
-              </a:rPr>
-              <a:t>payments required</a:t>
-            </a:r>
-          </a:p>
-        </p:txBody>
-      </p:sp>
-      <p:sp>
-        <p:nvSpPr>
-          <p:cNvPr id="52" name="TextBox 51"/>
-          <p:cNvSpPr txBox="1"/>
-          <p:nvPr/>
-        </p:nvSpPr>
-        <p:spPr>
-          <a:xfrm>
-            <a:off x="685800" y="6473952"/>
-            <a:ext cx="8686800" cy="164592"/>
-          </a:xfrm>
-          <a:prstGeom prst="rect">
-            <a:avLst/>
-          </a:prstGeom>
-          <a:noFill/>
-        </p:spPr>
-        <p:txBody>
-          <a:bodyPr wrap="square" lIns="18288" rIns="18288" tIns="18288" bIns="18288">
-            <a:spAutoFit/>
-          </a:bodyPr>
-          <a:lstStyle/>
-          <a:p>
-            <a:r>
-              <a:rPr sz="660" b="0">
-                <a:solidFill>
-                  <a:srgbClr val="5C6C72"/>
-                </a:solidFill>
-                <a:latin typeface="Aptos"/>
-              </a:rPr>
-              <a:t>Live demo counts queried from Supabase on July 17, 2026.</a:t>
-            </a:r>
-          </a:p>
-        </p:txBody>
-      </p:sp>
-      <p:sp>
-        <p:nvSpPr>
-          <p:cNvPr id="53" name="TextBox 52"/>
-          <p:cNvSpPr txBox="1"/>
-          <p:nvPr/>
-        </p:nvSpPr>
-        <p:spPr>
-          <a:xfrm>
-            <a:off x="10972800" y="6473952"/>
-            <a:ext cx="640080" cy="164592"/>
-          </a:xfrm>
-          <a:prstGeom prst="rect">
-            <a:avLst/>
-          </a:prstGeom>
-          <a:noFill/>
-        </p:spPr>
-        <p:txBody>
-          <a:bodyPr wrap="square" lIns="18288" rIns="18288" tIns="18288" bIns="18288">
-            <a:spAutoFit/>
-          </a:bodyPr>
-          <a:lstStyle/>
-          <a:p>
-            <a:pPr algn="r"/>
-            <a:r>
-              <a:rPr sz="750" b="0">
-                <a:solidFill>
-                  <a:srgbClr val="5C6C72"/>
-                </a:solidFill>
-                <a:latin typeface="Aptos"/>
-              </a:rPr>
-              <a:t>03 / 05</a:t>
+              <a:t>03 / 04</a:t>
             </a:r>
           </a:p>
         </p:txBody>
@@ -6962,18 +6405,18 @@
         </p:nvSpPr>
         <p:spPr>
           <a:xfrm>
-            <a:off x="658368" y="420624"/>
-            <a:ext cx="1371600" cy="292608"/>
+            <a:off x="658368" y="438912"/>
+            <a:ext cx="1417320" cy="310896"/>
           </a:xfrm>
           <a:prstGeom prst="roundRect">
             <a:avLst/>
           </a:prstGeom>
           <a:solidFill>
-            <a:srgbClr val="E8F3EE"/>
+            <a:srgbClr val="E5F3EE"/>
           </a:solidFill>
           <a:ln>
             <a:solidFill>
-              <a:srgbClr val="D2E0DC"/>
+              <a:srgbClr val="CCDED8"/>
             </a:solidFill>
           </a:ln>
         </p:spPr>
@@ -6999,11 +6442,11 @@
             <a:r>
               <a:rPr sz="850" b="1">
                 <a:solidFill>
-                  <a:srgbClr val="005B52"/>
+                  <a:srgbClr val="005A52"/>
                 </a:solidFill>
                 <a:latin typeface="Aptos"/>
               </a:rPr>
-              <a:t>IMPACT LOGIC</a:t>
+              <a:t>IMPACT</a:t>
             </a:r>
           </a:p>
         </p:txBody>
@@ -7016,8 +6459,8 @@
         </p:nvSpPr>
         <p:spPr>
           <a:xfrm>
-            <a:off x="658368" y="822960"/>
-            <a:ext cx="9601200" cy="566928"/>
+            <a:off x="658368" y="896112"/>
+            <a:ext cx="9052560" cy="658368"/>
           </a:xfrm>
           <a:prstGeom prst="rect">
             <a:avLst/>
@@ -7031,13 +6474,13 @@
           <a:lstStyle/>
           <a:p>
             <a:r>
-              <a:rPr sz="2500" b="1">
+              <a:rPr sz="2800" b="1">
                 <a:solidFill>
                   <a:srgbClr val="121F23"/>
                 </a:solidFill>
                 <a:latin typeface="Aptos"/>
               </a:rPr>
-              <a:t>Why this should improve efficiency.</a:t>
+              <a:t>Why this is worth building.</a:t>
             </a:r>
           </a:p>
         </p:txBody>
@@ -7050,8 +6493,8 @@
         </p:nvSpPr>
         <p:spPr>
           <a:xfrm>
-            <a:off x="676656" y="1417320"/>
-            <a:ext cx="9692640" cy="329184"/>
+            <a:off x="685800" y="1581912"/>
+            <a:ext cx="8686800" cy="402336"/>
           </a:xfrm>
           <a:prstGeom prst="rect">
             <a:avLst/>
@@ -7065,13 +6508,13 @@
           <a:lstStyle/>
           <a:p>
             <a:r>
-              <a:rPr sz="1250" b="0">
-                <a:solidFill>
-                  <a:srgbClr val="5C6C72"/>
+              <a:rPr sz="1320" b="0">
+                <a:solidFill>
+                  <a:srgbClr val="58696F"/>
                 </a:solidFill>
                 <a:latin typeface="Aptos"/>
               </a:rPr>
-              <a:t>The claim is not AI fixes food banks. The claim is inventory sharing reduces mismatch when supply and demand differ across spokes.</a:t>
+              <a:t>Lateral inventory sharing reduces mismatch when one pantry has surplus and another has shortage.</a:t>
             </a:r>
           </a:p>
         </p:txBody>
@@ -7084,8 +6527,8 @@
         </p:nvSpPr>
         <p:spPr>
           <a:xfrm>
-            <a:off x="777240" y="1828800"/>
-            <a:ext cx="3383280" cy="2057400"/>
+            <a:off x="777240" y="1874519"/>
+            <a:ext cx="3273552" cy="1993392"/>
           </a:xfrm>
           <a:prstGeom prst="roundRect">
             <a:avLst/>
@@ -7095,7 +6538,7 @@
           </a:solidFill>
           <a:ln w="12700">
             <a:solidFill>
-              <a:srgbClr val="D2E0DC"/>
+              <a:srgbClr val="CCDED8"/>
             </a:solidFill>
           </a:ln>
         </p:spPr>
@@ -7129,8 +6572,8 @@
         </p:nvSpPr>
         <p:spPr>
           <a:xfrm>
-            <a:off x="1024128" y="2084831"/>
-            <a:ext cx="2743200" cy="237744"/>
+            <a:off x="1024128" y="2121408"/>
+            <a:ext cx="2651760" cy="237744"/>
           </a:xfrm>
           <a:prstGeom prst="rect">
             <a:avLst/>
@@ -7144,13 +6587,13 @@
           <a:lstStyle/>
           <a:p>
             <a:r>
-              <a:rPr sz="1600" b="1">
-                <a:solidFill>
-                  <a:srgbClr val="B24141"/>
+              <a:rPr sz="1550" b="1">
+                <a:solidFill>
+                  <a:srgbClr val="B54242"/>
                 </a:solidFill>
                 <a:latin typeface="Aptos"/>
               </a:rPr>
-              <a:t>Without GoodCo</a:t>
+              <a:t>Current system</a:t>
             </a:r>
           </a:p>
         </p:txBody>
@@ -7163,8 +6606,8 @@
         </p:nvSpPr>
         <p:spPr>
           <a:xfrm>
-            <a:off x="1024128" y="2523744"/>
-            <a:ext cx="2743200" cy="914400"/>
+            <a:off x="1024128" y="2542032"/>
+            <a:ext cx="2697480" cy="914400"/>
           </a:xfrm>
           <a:prstGeom prst="rect">
             <a:avLst/>
@@ -7179,7 +6622,7 @@
           <a:p>
             <a:pPr>
               <a:spcAft>
-                <a:spcPts val="500"/>
+                <a:spcPts val="600"/>
               </a:spcAft>
               <a:defRPr sz="1080">
                 <a:solidFill>
@@ -7189,13 +6632,13 @@
               </a:defRPr>
             </a:pPr>
             <a:r>
-              <a:t>surplus visible only locally</a:t>
+              <a:t>Surplus is visible locally.</a:t>
             </a:r>
           </a:p>
           <a:p>
             <a:pPr>
               <a:spcAft>
-                <a:spcPts val="500"/>
+                <a:spcPts val="600"/>
               </a:spcAft>
               <a:defRPr sz="1080">
                 <a:solidFill>
@@ -7205,13 +6648,13 @@
               </a:defRPr>
             </a:pPr>
             <a:r>
-              <a:t>shortage solved through calls/texts</a:t>
+              <a:t>Need is discovered by calls or texts.</a:t>
             </a:r>
           </a:p>
           <a:p>
             <a:pPr>
               <a:spcAft>
-                <a:spcPts val="500"/>
+                <a:spcPts val="600"/>
               </a:spcAft>
               <a:defRPr sz="1080">
                 <a:solidFill>
@@ -7221,13 +6664,13 @@
               </a:defRPr>
             </a:pPr>
             <a:r>
-              <a:t>hub remains the default coordinator</a:t>
+              <a:t>The hub remains the default coordinator.</a:t>
             </a:r>
           </a:p>
           <a:p>
             <a:pPr>
               <a:spcAft>
-                <a:spcPts val="500"/>
+                <a:spcPts val="600"/>
               </a:spcAft>
               <a:defRPr sz="1080">
                 <a:solidFill>
@@ -7237,7 +6680,7 @@
               </a:defRPr>
             </a:pPr>
             <a:r>
-              <a:t>perishable items lose time</a:t>
+              <a:t>Perishable food loses time.</a:t>
             </a:r>
           </a:p>
         </p:txBody>
@@ -7250,8 +6693,8 @@
         </p:nvSpPr>
         <p:spPr>
           <a:xfrm>
-            <a:off x="4434840" y="1828800"/>
-            <a:ext cx="3383280" cy="2057400"/>
+            <a:off x="4462272" y="1874519"/>
+            <a:ext cx="3273552" cy="1993392"/>
           </a:xfrm>
           <a:prstGeom prst="roundRect">
             <a:avLst/>
@@ -7261,7 +6704,7 @@
           </a:solidFill>
           <a:ln w="12700">
             <a:solidFill>
-              <a:srgbClr val="D2E0DC"/>
+              <a:srgbClr val="CCDED8"/>
             </a:solidFill>
           </a:ln>
         </p:spPr>
@@ -7295,8 +6738,8 @@
         </p:nvSpPr>
         <p:spPr>
           <a:xfrm>
-            <a:off x="4681728" y="2084831"/>
-            <a:ext cx="2743200" cy="237744"/>
+            <a:off x="4709160" y="2121408"/>
+            <a:ext cx="2651760" cy="237744"/>
           </a:xfrm>
           <a:prstGeom prst="rect">
             <a:avLst/>
@@ -7310,13 +6753,13 @@
           <a:lstStyle/>
           <a:p>
             <a:r>
-              <a:rPr sz="1600" b="1">
+              <a:rPr sz="1550" b="1">
                 <a:solidFill>
                   <a:srgbClr val="00897B"/>
                 </a:solidFill>
                 <a:latin typeface="Aptos"/>
               </a:rPr>
-              <a:t>With GoodCo</a:t>
+              <a:t>GoodCo system</a:t>
             </a:r>
           </a:p>
         </p:txBody>
@@ -7329,8 +6772,8 @@
         </p:nvSpPr>
         <p:spPr>
           <a:xfrm>
-            <a:off x="4681728" y="2523744"/>
-            <a:ext cx="2743200" cy="914400"/>
+            <a:off x="4709160" y="2542032"/>
+            <a:ext cx="2697480" cy="914400"/>
           </a:xfrm>
           <a:prstGeom prst="rect">
             <a:avLst/>
@@ -7345,7 +6788,7 @@
           <a:p>
             <a:pPr>
               <a:spcAft>
-                <a:spcPts val="500"/>
+                <a:spcPts val="600"/>
               </a:spcAft>
               <a:defRPr sz="1080">
                 <a:solidFill>
@@ -7355,13 +6798,13 @@
               </a:defRPr>
             </a:pPr>
             <a:r>
-              <a:t>eligible surplus visible to network</a:t>
+              <a:t>Eligible surplus is visible.</a:t>
             </a:r>
           </a:p>
           <a:p>
             <a:pPr>
               <a:spcAft>
-                <a:spcPts val="500"/>
+                <a:spcPts val="600"/>
               </a:spcAft>
               <a:defRPr sz="1080">
                 <a:solidFill>
@@ -7371,13 +6814,13 @@
               </a:defRPr>
             </a:pPr>
             <a:r>
-              <a:t>requests reserve quantity</a:t>
+              <a:t>Requests reserve quantity.</a:t>
             </a:r>
           </a:p>
           <a:p>
             <a:pPr>
               <a:spcAft>
-                <a:spcPts val="500"/>
+                <a:spcPts val="600"/>
               </a:spcAft>
               <a:defRPr sz="1080">
                 <a:solidFill>
@@ -7387,13 +6830,13 @@
               </a:defRPr>
             </a:pPr>
             <a:r>
-              <a:t>transfers leave audit trail</a:t>
+              <a:t>Transfers keep audit trail.</a:t>
             </a:r>
           </a:p>
           <a:p>
             <a:pPr>
               <a:spcAft>
-                <a:spcPts val="500"/>
+                <a:spcPts val="600"/>
               </a:spcAft>
               <a:defRPr sz="1080">
                 <a:solidFill>
@@ -7403,7 +6846,7 @@
               </a:defRPr>
             </a:pPr>
             <a:r>
-              <a:t>hub can focus on bulk flow</a:t>
+              <a:t>Hub can focus on bulk flow.</a:t>
             </a:r>
           </a:p>
         </p:txBody>
@@ -7416,8 +6859,8 @@
         </p:nvSpPr>
         <p:spPr>
           <a:xfrm>
-            <a:off x="8092440" y="1828800"/>
-            <a:ext cx="3383280" cy="2057400"/>
+            <a:off x="8147304" y="1874519"/>
+            <a:ext cx="3273552" cy="1993392"/>
           </a:xfrm>
           <a:prstGeom prst="roundRect">
             <a:avLst/>
@@ -7427,7 +6870,7 @@
           </a:solidFill>
           <a:ln w="12700">
             <a:solidFill>
-              <a:srgbClr val="D2E0DC"/>
+              <a:srgbClr val="CCDED8"/>
             </a:solidFill>
           </a:ln>
         </p:spPr>
@@ -7461,8 +6904,8 @@
         </p:nvSpPr>
         <p:spPr>
           <a:xfrm>
-            <a:off x="8339327" y="2084831"/>
-            <a:ext cx="2743200" cy="237744"/>
+            <a:off x="8394192" y="2121408"/>
+            <a:ext cx="2651760" cy="237744"/>
           </a:xfrm>
           <a:prstGeom prst="rect">
             <a:avLst/>
@@ -7476,13 +6919,13 @@
           <a:lstStyle/>
           <a:p>
             <a:r>
-              <a:rPr sz="1600" b="1">
-                <a:solidFill>
-                  <a:srgbClr val="25638C"/>
+              <a:rPr sz="1550" b="1">
+                <a:solidFill>
+                  <a:srgbClr val="266796"/>
                 </a:solidFill>
                 <a:latin typeface="Aptos"/>
               </a:rPr>
-              <a:t>Pilot metrics</a:t>
+              <a:t>What we measure</a:t>
             </a:r>
           </a:p>
         </p:txBody>
@@ -7495,8 +6938,8 @@
         </p:nvSpPr>
         <p:spPr>
           <a:xfrm>
-            <a:off x="8339327" y="2523744"/>
-            <a:ext cx="2743200" cy="914400"/>
+            <a:off x="8394192" y="2542032"/>
+            <a:ext cx="2697480" cy="914400"/>
           </a:xfrm>
           <a:prstGeom prst="rect">
             <a:avLst/>
@@ -7511,7 +6954,7 @@
           <a:p>
             <a:pPr>
               <a:spcAft>
-                <a:spcPts val="500"/>
+                <a:spcPts val="600"/>
               </a:spcAft>
               <a:defRPr sz="1080">
                 <a:solidFill>
@@ -7521,13 +6964,13 @@
               </a:defRPr>
             </a:pPr>
             <a:r>
-              <a:t>lots moved before move-by</a:t>
+              <a:t>Lots moved before move-by date.</a:t>
             </a:r>
           </a:p>
           <a:p>
             <a:pPr>
               <a:spcAft>
-                <a:spcPts val="500"/>
+                <a:spcPts val="600"/>
               </a:spcAft>
               <a:defRPr sz="1080">
                 <a:solidFill>
@@ -7537,13 +6980,13 @@
               </a:defRPr>
             </a:pPr>
             <a:r>
-              <a:t>requests fulfilled</a:t>
+              <a:t>Requests fulfilled.</a:t>
             </a:r>
           </a:p>
           <a:p>
             <a:pPr>
               <a:spcAft>
-                <a:spcPts val="500"/>
+                <a:spcPts val="600"/>
               </a:spcAft>
               <a:defRPr sz="1080">
                 <a:solidFill>
@@ -7553,13 +6996,13 @@
               </a:defRPr>
             </a:pPr>
             <a:r>
-              <a:t>expired lots avoided</a:t>
+              <a:t>Expired lots avoided.</a:t>
             </a:r>
           </a:p>
           <a:p>
             <a:pPr>
               <a:spcAft>
-                <a:spcPts val="500"/>
+                <a:spcPts val="600"/>
               </a:spcAft>
               <a:defRPr sz="1080">
                 <a:solidFill>
@@ -7569,56 +7012,21 @@
               </a:defRPr>
             </a:pPr>
             <a:r>
-              <a:t>hub interventions avoided</a:t>
-            </a:r>
-          </a:p>
-        </p:txBody>
-      </p:sp>
-      <p:sp>
-        <p:nvSpPr>
-          <p:cNvPr id="14" name="TextBox 13"/>
-          <p:cNvSpPr txBox="1"/>
-          <p:nvPr/>
-        </p:nvSpPr>
-        <p:spPr>
-          <a:xfrm>
-            <a:off x="914400" y="4709160"/>
-            <a:ext cx="9966960" cy="658368"/>
-          </a:xfrm>
-          <a:prstGeom prst="rect">
-            <a:avLst/>
-          </a:prstGeom>
-          <a:noFill/>
-        </p:spPr>
-        <p:txBody>
-          <a:bodyPr wrap="square" lIns="18288" rIns="18288" tIns="18288" bIns="18288">
-            <a:spAutoFit/>
-          </a:bodyPr>
-          <a:lstStyle/>
-          <a:p>
-            <a:pPr algn="ctr"/>
-            <a:r>
-              <a:rPr sz="1500" b="1">
-                <a:solidFill>
-                  <a:srgbClr val="121F23"/>
-                </a:solidFill>
-                <a:latin typeface="Aptos"/>
-              </a:rPr>
-              <a:t>Evidence base: operations research on inventory sharing/lateral transshipment finds that sharing stock across same-level nodes can reduce holding, shipping, and waiting costs. We still need a pantry pilot to quantify GoodCo's exact effect.</a:t>
-            </a:r>
-          </a:p>
-        </p:txBody>
-      </p:sp>
-      <p:sp>
-        <p:nvSpPr>
-          <p:cNvPr id="15" name="Rounded Rectangle 14"/>
+              <a:t>Hub interventions avoided.</a:t>
+            </a:r>
+          </a:p>
+        </p:txBody>
+      </p:sp>
+      <p:sp>
+        <p:nvSpPr>
+          <p:cNvPr id="14" name="Rounded Rectangle 13"/>
           <p:cNvSpPr/>
           <p:nvPr/>
         </p:nvSpPr>
         <p:spPr>
           <a:xfrm>
-            <a:off x="1874519" y="5687568"/>
-            <a:ext cx="2148840" cy="960120"/>
+            <a:off x="1234440" y="4681728"/>
+            <a:ext cx="2240280" cy="941832"/>
           </a:xfrm>
           <a:prstGeom prst="roundRect">
             <a:avLst/>
@@ -7628,7 +7036,7 @@
           </a:solidFill>
           <a:ln w="12700">
             <a:solidFill>
-              <a:srgbClr val="D2E0DC"/>
+              <a:srgbClr val="CCDED8"/>
             </a:solidFill>
           </a:ln>
         </p:spPr>
@@ -7656,14 +7064,14 @@
       </p:sp>
       <p:sp>
         <p:nvSpPr>
-          <p:cNvPr id="16" name="TextBox 15"/>
+          <p:cNvPr id="15" name="TextBox 14"/>
           <p:cNvSpPr txBox="1"/>
           <p:nvPr/>
         </p:nvSpPr>
         <p:spPr>
           <a:xfrm>
-            <a:off x="2039112" y="5815583"/>
-            <a:ext cx="1874520" cy="292608"/>
+            <a:off x="1399032" y="4809744"/>
+            <a:ext cx="1947672" cy="292608"/>
           </a:xfrm>
           <a:prstGeom prst="rect">
             <a:avLst/>
@@ -7679,7 +7087,7 @@
             <a:r>
               <a:rPr sz="2200" b="1">
                 <a:solidFill>
-                  <a:srgbClr val="B24141"/>
+                  <a:srgbClr val="B54242"/>
                 </a:solidFill>
                 <a:latin typeface="Aptos"/>
               </a:rPr>
@@ -7690,14 +7098,14 @@
       </p:sp>
       <p:sp>
         <p:nvSpPr>
-          <p:cNvPr id="17" name="TextBox 16"/>
+          <p:cNvPr id="16" name="TextBox 15"/>
           <p:cNvSpPr txBox="1"/>
           <p:nvPr/>
         </p:nvSpPr>
         <p:spPr>
           <a:xfrm>
-            <a:off x="2039112" y="6199631"/>
-            <a:ext cx="1856232" cy="292608"/>
+            <a:off x="1399032" y="5193792"/>
+            <a:ext cx="1929384" cy="292608"/>
           </a:xfrm>
           <a:prstGeom prst="rect">
             <a:avLst/>
@@ -7711,9 +7119,9 @@
           <a:lstStyle/>
           <a:p>
             <a:r>
-              <a:rPr sz="819" b="0">
-                <a:solidFill>
-                  <a:srgbClr val="5C6C72"/>
+              <a:rPr sz="840" b="0">
+                <a:solidFill>
+                  <a:srgbClr val="58696F"/>
                 </a:solidFill>
                 <a:latin typeface="Aptos"/>
               </a:rPr>
@@ -7724,14 +7132,14 @@
       </p:sp>
       <p:sp>
         <p:nvSpPr>
-          <p:cNvPr id="18" name="Rounded Rectangle 17"/>
+          <p:cNvPr id="17" name="Rounded Rectangle 16"/>
           <p:cNvSpPr/>
           <p:nvPr/>
         </p:nvSpPr>
         <p:spPr>
           <a:xfrm>
-            <a:off x="4983480" y="5687568"/>
-            <a:ext cx="2331720" cy="960120"/>
+            <a:off x="4956048" y="4681728"/>
+            <a:ext cx="2240280" cy="941832"/>
           </a:xfrm>
           <a:prstGeom prst="roundRect">
             <a:avLst/>
@@ -7741,7 +7149,7 @@
           </a:solidFill>
           <a:ln w="12700">
             <a:solidFill>
-              <a:srgbClr val="D2E0DC"/>
+              <a:srgbClr val="CCDED8"/>
             </a:solidFill>
           </a:ln>
         </p:spPr>
@@ -7769,14 +7177,14 @@
       </p:sp>
       <p:sp>
         <p:nvSpPr>
-          <p:cNvPr id="19" name="TextBox 18"/>
+          <p:cNvPr id="18" name="TextBox 17"/>
           <p:cNvSpPr txBox="1"/>
           <p:nvPr/>
         </p:nvSpPr>
         <p:spPr>
           <a:xfrm>
-            <a:off x="5148072" y="5815583"/>
-            <a:ext cx="2057400" cy="292608"/>
+            <a:off x="5120640" y="4809744"/>
+            <a:ext cx="1947672" cy="292608"/>
           </a:xfrm>
           <a:prstGeom prst="rect">
             <a:avLst/>
@@ -7792,7 +7200,7 @@
             <a:r>
               <a:rPr sz="2200" b="1">
                 <a:solidFill>
-                  <a:srgbClr val="25638C"/>
+                  <a:srgbClr val="266796"/>
                 </a:solidFill>
                 <a:latin typeface="Aptos"/>
               </a:rPr>
@@ -7803,14 +7211,14 @@
       </p:sp>
       <p:sp>
         <p:nvSpPr>
-          <p:cNvPr id="20" name="TextBox 19"/>
+          <p:cNvPr id="19" name="TextBox 18"/>
           <p:cNvSpPr txBox="1"/>
           <p:nvPr/>
         </p:nvSpPr>
         <p:spPr>
           <a:xfrm>
-            <a:off x="5148072" y="6199631"/>
-            <a:ext cx="2039112" cy="292608"/>
+            <a:off x="5120640" y="5193792"/>
+            <a:ext cx="1929384" cy="292608"/>
           </a:xfrm>
           <a:prstGeom prst="rect">
             <a:avLst/>
@@ -7824,27 +7232,27 @@
           <a:lstStyle/>
           <a:p>
             <a:r>
-              <a:rPr sz="819" b="0">
-                <a:solidFill>
-                  <a:srgbClr val="5C6C72"/>
+              <a:rPr sz="840" b="0">
+                <a:solidFill>
+                  <a:srgbClr val="58696F"/>
                 </a:solidFill>
                 <a:latin typeface="Aptos"/>
               </a:rPr>
-              <a:t>cost reduction in one MIT lateral-transshipment study</a:t>
-            </a:r>
-          </a:p>
-        </p:txBody>
-      </p:sp>
-      <p:sp>
-        <p:nvSpPr>
-          <p:cNvPr id="21" name="Rounded Rectangle 20"/>
+              <a:t>Cost reduction in one lateral-transshipment study</a:t>
+            </a:r>
+          </a:p>
+        </p:txBody>
+      </p:sp>
+      <p:sp>
+        <p:nvSpPr>
+          <p:cNvPr id="20" name="Rounded Rectangle 19"/>
           <p:cNvSpPr/>
           <p:nvPr/>
         </p:nvSpPr>
         <p:spPr>
           <a:xfrm>
-            <a:off x="8275320" y="5687568"/>
-            <a:ext cx="2148840" cy="960120"/>
+            <a:off x="8650224" y="4681728"/>
+            <a:ext cx="2240280" cy="941832"/>
           </a:xfrm>
           <a:prstGeom prst="roundRect">
             <a:avLst/>
@@ -7854,7 +7262,7 @@
           </a:solidFill>
           <a:ln w="12700">
             <a:solidFill>
-              <a:srgbClr val="D2E0DC"/>
+              <a:srgbClr val="CCDED8"/>
             </a:solidFill>
           </a:ln>
         </p:spPr>
@@ -7882,14 +7290,14 @@
       </p:sp>
       <p:sp>
         <p:nvSpPr>
-          <p:cNvPr id="22" name="TextBox 21"/>
+          <p:cNvPr id="21" name="TextBox 20"/>
           <p:cNvSpPr txBox="1"/>
           <p:nvPr/>
         </p:nvSpPr>
         <p:spPr>
           <a:xfrm>
-            <a:off x="8439912" y="5815583"/>
-            <a:ext cx="1874520" cy="292608"/>
+            <a:off x="8814816" y="4809744"/>
+            <a:ext cx="1947672" cy="292608"/>
           </a:xfrm>
           <a:prstGeom prst="rect">
             <a:avLst/>
@@ -7916,14 +7324,14 @@
       </p:sp>
       <p:sp>
         <p:nvSpPr>
-          <p:cNvPr id="23" name="TextBox 22"/>
+          <p:cNvPr id="22" name="TextBox 21"/>
           <p:cNvSpPr txBox="1"/>
           <p:nvPr/>
         </p:nvSpPr>
         <p:spPr>
           <a:xfrm>
-            <a:off x="8439912" y="6199631"/>
-            <a:ext cx="1856232" cy="292608"/>
+            <a:off x="8814816" y="5193792"/>
+            <a:ext cx="1929384" cy="292608"/>
           </a:xfrm>
           <a:prstGeom prst="rect">
             <a:avLst/>
@@ -7937,27 +7345,27 @@
           <a:lstStyle/>
           <a:p>
             <a:r>
-              <a:rPr sz="819" b="0">
-                <a:solidFill>
-                  <a:srgbClr val="5C6C72"/>
+              <a:rPr sz="840" b="0">
+                <a:solidFill>
+                  <a:srgbClr val="58696F"/>
                 </a:solidFill>
                 <a:latin typeface="Aptos"/>
               </a:rPr>
-              <a:t>needed before claiming real savings</a:t>
-            </a:r>
-          </a:p>
-        </p:txBody>
-      </p:sp>
-      <p:sp>
-        <p:nvSpPr>
-          <p:cNvPr id="24" name="TextBox 23"/>
+              <a:t>Needed before claiming GoodCo savings</a:t>
+            </a:r>
+          </a:p>
+        </p:txBody>
+      </p:sp>
+      <p:sp>
+        <p:nvSpPr>
+          <p:cNvPr id="23" name="TextBox 22"/>
           <p:cNvSpPr txBox="1"/>
           <p:nvPr/>
         </p:nvSpPr>
         <p:spPr>
           <a:xfrm>
-            <a:off x="685800" y="6473952"/>
-            <a:ext cx="8686800" cy="164592"/>
+            <a:off x="914400" y="5925312"/>
+            <a:ext cx="10012680" cy="292608"/>
           </a:xfrm>
           <a:prstGeom prst="rect">
             <a:avLst/>
@@ -7970,28 +7378,29 @@
           </a:bodyPr>
           <a:lstStyle/>
           <a:p>
-            <a:r>
-              <a:rPr sz="660" b="0">
-                <a:solidFill>
-                  <a:srgbClr val="5C6C72"/>
+            <a:pPr algn="ctr"/>
+            <a:r>
+              <a:rPr sz="1550" b="1">
+                <a:solidFill>
+                  <a:srgbClr val="121F23"/>
                 </a:solidFill>
                 <a:latin typeface="Aptos"/>
               </a:rPr>
-              <a:t>Sources: USDA food waste FAQ; lateral-transshipment / inventory-sharing literature. GoodCo impact is not yet pilot-measured.</a:t>
-            </a:r>
-          </a:p>
-        </p:txBody>
-      </p:sp>
-      <p:sp>
-        <p:nvSpPr>
-          <p:cNvPr id="25" name="TextBox 24"/>
+              <a:t>Honest claim: the product creates the data and workflow needed to test this efficiency gain in real pantry operations.</a:t>
+            </a:r>
+          </a:p>
+        </p:txBody>
+      </p:sp>
+      <p:sp>
+        <p:nvSpPr>
+          <p:cNvPr id="24" name="TextBox 23"/>
           <p:cNvSpPr txBox="1"/>
           <p:nvPr/>
         </p:nvSpPr>
         <p:spPr>
           <a:xfrm>
-            <a:off x="10972800" y="6473952"/>
-            <a:ext cx="640080" cy="164592"/>
+            <a:off x="658368" y="6473952"/>
+            <a:ext cx="8778240" cy="164592"/>
           </a:xfrm>
           <a:prstGeom prst="rect">
             <a:avLst/>
@@ -8004,109 +7413,28 @@
           </a:bodyPr>
           <a:lstStyle/>
           <a:p>
-            <a:pPr algn="r"/>
-            <a:r>
-              <a:rPr sz="750" b="0">
-                <a:solidFill>
-                  <a:srgbClr val="5C6C72"/>
+            <a:r>
+              <a:rPr sz="650" b="0">
+                <a:solidFill>
+                  <a:srgbClr val="58696F"/>
                 </a:solidFill>
                 <a:latin typeface="Aptos"/>
               </a:rPr>
-              <a:t>04 / 05</a:t>
-            </a:r>
-          </a:p>
-        </p:txBody>
-      </p:sp>
-    </p:spTree>
-  </p:cSld>
-  <p:clrMapOvr>
-    <a:masterClrMapping/>
-  </p:clrMapOvr>
-</p:sld>
-</file>
-
-<file path=ppt/slides/slide5.xml><?xml version="1.0" encoding="utf-8"?>
-<p:sld xmlns:a="http://schemas.openxmlformats.org/drawingml/2006/main" xmlns:p="http://schemas.openxmlformats.org/presentationml/2006/main" xmlns:r="http://schemas.openxmlformats.org/officeDocument/2006/relationships">
-  <p:cSld>
-    <p:bg>
-      <p:bgPr>
-        <a:solidFill>
-          <a:srgbClr val="F7FAF8"/>
-        </a:solidFill>
-        <a:effectLst/>
-      </p:bgPr>
-    </p:bg>
-    <p:spTree>
-      <p:nvGrpSpPr>
-        <p:cNvPr id="1" name=""/>
-        <p:cNvGrpSpPr/>
-        <p:nvPr/>
-      </p:nvGrpSpPr>
-      <p:grpSpPr/>
-      <p:sp>
-        <p:nvSpPr>
-          <p:cNvPr id="2" name="Rounded Rectangle 1"/>
-          <p:cNvSpPr/>
-          <p:nvPr/>
-        </p:nvSpPr>
-        <p:spPr>
-          <a:xfrm>
-            <a:off x="658368" y="420624"/>
-            <a:ext cx="1371600" cy="292608"/>
-          </a:xfrm>
-          <a:prstGeom prst="roundRect">
-            <a:avLst/>
-          </a:prstGeom>
-          <a:solidFill>
-            <a:srgbClr val="E8F3EE"/>
-          </a:solidFill>
-          <a:ln>
-            <a:solidFill>
-              <a:srgbClr val="D2E0DC"/>
-            </a:solidFill>
-          </a:ln>
-        </p:spPr>
-        <p:style>
-          <a:lnRef idx="1">
-            <a:schemeClr val="accent1"/>
-          </a:lnRef>
-          <a:fillRef idx="3">
-            <a:schemeClr val="accent1"/>
-          </a:fillRef>
-          <a:effectRef idx="2">
-            <a:schemeClr val="accent1"/>
-          </a:effectRef>
-          <a:fontRef idx="minor">
-            <a:schemeClr val="lt1"/>
-          </a:fontRef>
-        </p:style>
-        <p:txBody>
-          <a:bodyPr rtlCol="0" anchor="ctr"/>
-          <a:lstStyle/>
-          <a:p>
-            <a:pPr algn="ctr"/>
-            <a:r>
-              <a:rPr sz="850" b="1">
-                <a:solidFill>
-                  <a:srgbClr val="005B52"/>
-                </a:solidFill>
-                <a:latin typeface="Aptos"/>
-              </a:rPr>
-              <a:t>COUNTERARGUMENTS</a:t>
-            </a:r>
-          </a:p>
-        </p:txBody>
-      </p:sp>
-      <p:sp>
-        <p:nvSpPr>
-          <p:cNvPr id="3" name="TextBox 2"/>
+              <a:t>Sources: USDA food waste FAQ; inventory sharing / lateral-transshipment literature. GoodCo impact is not yet pilot-measured.</a:t>
+            </a:r>
+          </a:p>
+        </p:txBody>
+      </p:sp>
+      <p:sp>
+        <p:nvSpPr>
+          <p:cNvPr id="25" name="TextBox 24"/>
           <p:cNvSpPr txBox="1"/>
           <p:nvPr/>
         </p:nvSpPr>
         <p:spPr>
           <a:xfrm>
-            <a:off x="658368" y="822960"/>
-            <a:ext cx="9601200" cy="566928"/>
+            <a:off x="10927080" y="6473952"/>
+            <a:ext cx="658368" cy="164592"/>
           </a:xfrm>
           <a:prstGeom prst="rect">
             <a:avLst/>
@@ -8119,955 +7447,15 @@
           </a:bodyPr>
           <a:lstStyle/>
           <a:p>
-            <a:r>
-              <a:rPr sz="2500" b="1">
-                <a:solidFill>
-                  <a:srgbClr val="121F23"/>
+            <a:pPr algn="r"/>
+            <a:r>
+              <a:rPr sz="750" b="0">
+                <a:solidFill>
+                  <a:srgbClr val="58696F"/>
                 </a:solidFill>
                 <a:latin typeface="Aptos"/>
               </a:rPr>
-              <a:t>What judges may challenge, and the answer.</a:t>
-            </a:r>
-          </a:p>
-        </p:txBody>
-      </p:sp>
-      <p:sp>
-        <p:nvSpPr>
-          <p:cNvPr id="4" name="TextBox 3"/>
-          <p:cNvSpPr txBox="1"/>
-          <p:nvPr/>
-        </p:nvSpPr>
-        <p:spPr>
-          <a:xfrm>
-            <a:off x="676656" y="1417320"/>
-            <a:ext cx="9692640" cy="329184"/>
-          </a:xfrm>
-          <a:prstGeom prst="rect">
-            <a:avLst/>
-          </a:prstGeom>
-          <a:noFill/>
-        </p:spPr>
-        <p:txBody>
-          <a:bodyPr wrap="square" lIns="18288" rIns="18288" tIns="18288" bIns="18288">
-            <a:spAutoFit/>
-          </a:bodyPr>
-          <a:lstStyle/>
-          <a:p>
-            <a:r>
-              <a:rPr sz="1250" b="0">
-                <a:solidFill>
-                  <a:srgbClr val="5C6C72"/>
-                </a:solidFill>
-                <a:latin typeface="Aptos"/>
-              </a:rPr>
-              <a:t>Address these before they become objections.</a:t>
-            </a:r>
-          </a:p>
-        </p:txBody>
-      </p:sp>
-      <p:sp>
-        <p:nvSpPr>
-          <p:cNvPr id="5" name="TextBox 4"/>
-          <p:cNvSpPr txBox="1"/>
-          <p:nvPr/>
-        </p:nvSpPr>
-        <p:spPr>
-          <a:xfrm>
-            <a:off x="822960" y="1874519"/>
-            <a:ext cx="2148840" cy="201168"/>
-          </a:xfrm>
-          <a:prstGeom prst="rect">
-            <a:avLst/>
-          </a:prstGeom>
-          <a:noFill/>
-        </p:spPr>
-        <p:txBody>
-          <a:bodyPr wrap="square" lIns="18288" rIns="18288" tIns="18288" bIns="18288">
-            <a:spAutoFit/>
-          </a:bodyPr>
-          <a:lstStyle/>
-          <a:p>
-            <a:r>
-              <a:rPr sz="950" b="1">
-                <a:solidFill>
-                  <a:srgbClr val="5C6C72"/>
-                </a:solidFill>
-                <a:latin typeface="Aptos"/>
-              </a:rPr>
-              <a:t>Objection</a:t>
-            </a:r>
-          </a:p>
-        </p:txBody>
-      </p:sp>
-      <p:sp>
-        <p:nvSpPr>
-          <p:cNvPr id="6" name="TextBox 5"/>
-          <p:cNvSpPr txBox="1"/>
-          <p:nvPr/>
-        </p:nvSpPr>
-        <p:spPr>
-          <a:xfrm>
-            <a:off x="2971800" y="1874519"/>
-            <a:ext cx="4206240" cy="201168"/>
-          </a:xfrm>
-          <a:prstGeom prst="rect">
-            <a:avLst/>
-          </a:prstGeom>
-          <a:noFill/>
-        </p:spPr>
-        <p:txBody>
-          <a:bodyPr wrap="square" lIns="18288" rIns="18288" tIns="18288" bIns="18288">
-            <a:spAutoFit/>
-          </a:bodyPr>
-          <a:lstStyle/>
-          <a:p>
-            <a:r>
-              <a:rPr sz="950" b="1">
-                <a:solidFill>
-                  <a:srgbClr val="5C6C72"/>
-                </a:solidFill>
-                <a:latin typeface="Aptos"/>
-              </a:rPr>
-              <a:t>Why it is fair</a:t>
-            </a:r>
-          </a:p>
-        </p:txBody>
-      </p:sp>
-      <p:sp>
-        <p:nvSpPr>
-          <p:cNvPr id="7" name="TextBox 6"/>
-          <p:cNvSpPr txBox="1"/>
-          <p:nvPr/>
-        </p:nvSpPr>
-        <p:spPr>
-          <a:xfrm>
-            <a:off x="7178040" y="1874519"/>
-            <a:ext cx="4297680" cy="201168"/>
-          </a:xfrm>
-          <a:prstGeom prst="rect">
-            <a:avLst/>
-          </a:prstGeom>
-          <a:noFill/>
-        </p:spPr>
-        <p:txBody>
-          <a:bodyPr wrap="square" lIns="18288" rIns="18288" tIns="18288" bIns="18288">
-            <a:spAutoFit/>
-          </a:bodyPr>
-          <a:lstStyle/>
-          <a:p>
-            <a:r>
-              <a:rPr sz="950" b="1">
-                <a:solidFill>
-                  <a:srgbClr val="5C6C72"/>
-                </a:solidFill>
-                <a:latin typeface="Aptos"/>
-              </a:rPr>
-              <a:t>GoodCo answer</a:t>
-            </a:r>
-          </a:p>
-        </p:txBody>
-      </p:sp>
-      <p:sp>
-        <p:nvSpPr>
-          <p:cNvPr id="8" name="Rounded Rectangle 7"/>
-          <p:cNvSpPr/>
-          <p:nvPr/>
-        </p:nvSpPr>
-        <p:spPr>
-          <a:xfrm>
-            <a:off x="777240" y="2212848"/>
-            <a:ext cx="10652760" cy="493776"/>
-          </a:xfrm>
-          <a:prstGeom prst="roundRect">
-            <a:avLst/>
-          </a:prstGeom>
-          <a:solidFill>
-            <a:srgbClr val="FFFFFF"/>
-          </a:solidFill>
-          <a:ln w="12700">
-            <a:solidFill>
-              <a:srgbClr val="D2E0DC"/>
-            </a:solidFill>
-          </a:ln>
-        </p:spPr>
-        <p:style>
-          <a:lnRef idx="1">
-            <a:schemeClr val="accent1"/>
-          </a:lnRef>
-          <a:fillRef idx="3">
-            <a:schemeClr val="accent1"/>
-          </a:fillRef>
-          <a:effectRef idx="2">
-            <a:schemeClr val="accent1"/>
-          </a:effectRef>
-          <a:fontRef idx="minor">
-            <a:schemeClr val="lt1"/>
-          </a:fontRef>
-        </p:style>
-        <p:txBody>
-          <a:bodyPr rtlCol="0" anchor="ctr"/>
-          <a:lstStyle/>
-          <a:p>
-            <a:pPr algn="ctr"/>
-          </a:p>
-        </p:txBody>
-      </p:sp>
-      <p:sp>
-        <p:nvSpPr>
-          <p:cNvPr id="9" name="TextBox 8"/>
-          <p:cNvSpPr txBox="1"/>
-          <p:nvPr/>
-        </p:nvSpPr>
-        <p:spPr>
-          <a:xfrm>
-            <a:off x="850392" y="2350008"/>
-            <a:ext cx="2039112" cy="164592"/>
-          </a:xfrm>
-          <a:prstGeom prst="rect">
-            <a:avLst/>
-          </a:prstGeom>
-          <a:noFill/>
-        </p:spPr>
-        <p:txBody>
-          <a:bodyPr wrap="square" lIns="18288" rIns="18288" tIns="18288" bIns="18288">
-            <a:spAutoFit/>
-          </a:bodyPr>
-          <a:lstStyle/>
-          <a:p>
-            <a:r>
-              <a:rPr sz="980" b="1">
-                <a:solidFill>
-                  <a:srgbClr val="B24141"/>
-                </a:solidFill>
-                <a:latin typeface="Aptos"/>
-              </a:rPr>
-              <a:t>Is this just a marketplace?</a:t>
-            </a:r>
-          </a:p>
-        </p:txBody>
-      </p:sp>
-      <p:sp>
-        <p:nvSpPr>
-          <p:cNvPr id="10" name="TextBox 9"/>
-          <p:cNvSpPr txBox="1"/>
-          <p:nvPr/>
-        </p:nvSpPr>
-        <p:spPr>
-          <a:xfrm>
-            <a:off x="2999232" y="2350008"/>
-            <a:ext cx="4096511" cy="164592"/>
-          </a:xfrm>
-          <a:prstGeom prst="rect">
-            <a:avLst/>
-          </a:prstGeom>
-          <a:noFill/>
-        </p:spPr>
-        <p:txBody>
-          <a:bodyPr wrap="square" lIns="18288" rIns="18288" tIns="18288" bIns="18288">
-            <a:spAutoFit/>
-          </a:bodyPr>
-          <a:lstStyle/>
-          <a:p>
-            <a:r>
-              <a:rPr sz="980" b="0">
-                <a:solidFill>
-                  <a:srgbClr val="121F23"/>
-                </a:solidFill>
-                <a:latin typeface="Aptos"/>
-              </a:rPr>
-              <a:t>A marketplace with fake or stale food would be useless.</a:t>
-            </a:r>
-          </a:p>
-        </p:txBody>
-      </p:sp>
-      <p:sp>
-        <p:nvSpPr>
-          <p:cNvPr id="11" name="TextBox 10"/>
-          <p:cNvSpPr txBox="1"/>
-          <p:nvPr/>
-        </p:nvSpPr>
-        <p:spPr>
-          <a:xfrm>
-            <a:off x="7205471" y="2350008"/>
-            <a:ext cx="4187952" cy="164592"/>
-          </a:xfrm>
-          <a:prstGeom prst="rect">
-            <a:avLst/>
-          </a:prstGeom>
-          <a:noFill/>
-        </p:spPr>
-        <p:txBody>
-          <a:bodyPr wrap="square" lIns="18288" rIns="18288" tIns="18288" bIns="18288">
-            <a:spAutoFit/>
-          </a:bodyPr>
-          <a:lstStyle/>
-          <a:p>
-            <a:r>
-              <a:rPr sz="980" b="1">
-                <a:solidFill>
-                  <a:srgbClr val="00897B"/>
-                </a:solidFill>
-                <a:latin typeface="Aptos"/>
-              </a:rPr>
-              <a:t>Listings must come from confirmed inventory lots; no synthetic surplus.</a:t>
-            </a:r>
-          </a:p>
-        </p:txBody>
-      </p:sp>
-      <p:sp>
-        <p:nvSpPr>
-          <p:cNvPr id="12" name="Rounded Rectangle 11"/>
-          <p:cNvSpPr/>
-          <p:nvPr/>
-        </p:nvSpPr>
-        <p:spPr>
-          <a:xfrm>
-            <a:off x="777240" y="2926080"/>
-            <a:ext cx="10652760" cy="493776"/>
-          </a:xfrm>
-          <a:prstGeom prst="roundRect">
-            <a:avLst/>
-          </a:prstGeom>
-          <a:solidFill>
-            <a:srgbClr val="FFFFFF"/>
-          </a:solidFill>
-          <a:ln w="12700">
-            <a:solidFill>
-              <a:srgbClr val="D2E0DC"/>
-            </a:solidFill>
-          </a:ln>
-        </p:spPr>
-        <p:style>
-          <a:lnRef idx="1">
-            <a:schemeClr val="accent1"/>
-          </a:lnRef>
-          <a:fillRef idx="3">
-            <a:schemeClr val="accent1"/>
-          </a:fillRef>
-          <a:effectRef idx="2">
-            <a:schemeClr val="accent1"/>
-          </a:effectRef>
-          <a:fontRef idx="minor">
-            <a:schemeClr val="lt1"/>
-          </a:fontRef>
-        </p:style>
-        <p:txBody>
-          <a:bodyPr rtlCol="0" anchor="ctr"/>
-          <a:lstStyle/>
-          <a:p>
-            <a:pPr algn="ctr"/>
-          </a:p>
-        </p:txBody>
-      </p:sp>
-      <p:sp>
-        <p:nvSpPr>
-          <p:cNvPr id="13" name="TextBox 12"/>
-          <p:cNvSpPr txBox="1"/>
-          <p:nvPr/>
-        </p:nvSpPr>
-        <p:spPr>
-          <a:xfrm>
-            <a:off x="850392" y="3063240"/>
-            <a:ext cx="2039112" cy="164592"/>
-          </a:xfrm>
-          <a:prstGeom prst="rect">
-            <a:avLst/>
-          </a:prstGeom>
-          <a:noFill/>
-        </p:spPr>
-        <p:txBody>
-          <a:bodyPr wrap="square" lIns="18288" rIns="18288" tIns="18288" bIns="18288">
-            <a:spAutoFit/>
-          </a:bodyPr>
-          <a:lstStyle/>
-          <a:p>
-            <a:r>
-              <a:rPr sz="980" b="1">
-                <a:solidFill>
-                  <a:srgbClr val="B24141"/>
-                </a:solidFill>
-                <a:latin typeface="Aptos"/>
-              </a:rPr>
-              <a:t>Will pantries enter data?</a:t>
-            </a:r>
-          </a:p>
-        </p:txBody>
-      </p:sp>
-      <p:sp>
-        <p:nvSpPr>
-          <p:cNvPr id="14" name="TextBox 13"/>
-          <p:cNvSpPr txBox="1"/>
-          <p:nvPr/>
-        </p:nvSpPr>
-        <p:spPr>
-          <a:xfrm>
-            <a:off x="2999232" y="3063240"/>
-            <a:ext cx="4096511" cy="164592"/>
-          </a:xfrm>
-          <a:prstGeom prst="rect">
-            <a:avLst/>
-          </a:prstGeom>
-          <a:noFill/>
-        </p:spPr>
-        <p:txBody>
-          <a:bodyPr wrap="square" lIns="18288" rIns="18288" tIns="18288" bIns="18288">
-            <a:spAutoFit/>
-          </a:bodyPr>
-          <a:lstStyle/>
-          <a:p>
-            <a:r>
-              <a:rPr sz="980" b="0">
-                <a:solidFill>
-                  <a:srgbClr val="121F23"/>
-                </a:solidFill>
-                <a:latin typeface="Aptos"/>
-              </a:rPr>
-              <a:t>Adoption is the biggest risk.</a:t>
-            </a:r>
-          </a:p>
-        </p:txBody>
-      </p:sp>
-      <p:sp>
-        <p:nvSpPr>
-          <p:cNvPr id="15" name="TextBox 14"/>
-          <p:cNvSpPr txBox="1"/>
-          <p:nvPr/>
-        </p:nvSpPr>
-        <p:spPr>
-          <a:xfrm>
-            <a:off x="7205471" y="3063240"/>
-            <a:ext cx="4187952" cy="164592"/>
-          </a:xfrm>
-          <a:prstGeom prst="rect">
-            <a:avLst/>
-          </a:prstGeom>
-          <a:noFill/>
-        </p:spPr>
-        <p:txBody>
-          <a:bodyPr wrap="square" lIns="18288" rIns="18288" tIns="18288" bIns="18288">
-            <a:spAutoFit/>
-          </a:bodyPr>
-          <a:lstStyle/>
-          <a:p>
-            <a:r>
-              <a:rPr sz="980" b="1">
-                <a:solidFill>
-                  <a:srgbClr val="00897B"/>
-                </a:solidFill>
-                <a:latin typeface="Aptos"/>
-              </a:rPr>
-              <a:t>Receiving is kept short; publish can happen from existing inventory.</a:t>
-            </a:r>
-          </a:p>
-        </p:txBody>
-      </p:sp>
-      <p:sp>
-        <p:nvSpPr>
-          <p:cNvPr id="16" name="Rounded Rectangle 15"/>
-          <p:cNvSpPr/>
-          <p:nvPr/>
-        </p:nvSpPr>
-        <p:spPr>
-          <a:xfrm>
-            <a:off x="777240" y="3639312"/>
-            <a:ext cx="10652760" cy="493776"/>
-          </a:xfrm>
-          <a:prstGeom prst="roundRect">
-            <a:avLst/>
-          </a:prstGeom>
-          <a:solidFill>
-            <a:srgbClr val="FFFFFF"/>
-          </a:solidFill>
-          <a:ln w="12700">
-            <a:solidFill>
-              <a:srgbClr val="D2E0DC"/>
-            </a:solidFill>
-          </a:ln>
-        </p:spPr>
-        <p:style>
-          <a:lnRef idx="1">
-            <a:schemeClr val="accent1"/>
-          </a:lnRef>
-          <a:fillRef idx="3">
-            <a:schemeClr val="accent1"/>
-          </a:fillRef>
-          <a:effectRef idx="2">
-            <a:schemeClr val="accent1"/>
-          </a:effectRef>
-          <a:fontRef idx="minor">
-            <a:schemeClr val="lt1"/>
-          </a:fontRef>
-        </p:style>
-        <p:txBody>
-          <a:bodyPr rtlCol="0" anchor="ctr"/>
-          <a:lstStyle/>
-          <a:p>
-            <a:pPr algn="ctr"/>
-          </a:p>
-        </p:txBody>
-      </p:sp>
-      <p:sp>
-        <p:nvSpPr>
-          <p:cNvPr id="17" name="TextBox 16"/>
-          <p:cNvSpPr txBox="1"/>
-          <p:nvPr/>
-        </p:nvSpPr>
-        <p:spPr>
-          <a:xfrm>
-            <a:off x="850392" y="3776472"/>
-            <a:ext cx="2039112" cy="164592"/>
-          </a:xfrm>
-          <a:prstGeom prst="rect">
-            <a:avLst/>
-          </a:prstGeom>
-          <a:noFill/>
-        </p:spPr>
-        <p:txBody>
-          <a:bodyPr wrap="square" lIns="18288" rIns="18288" tIns="18288" bIns="18288">
-            <a:spAutoFit/>
-          </a:bodyPr>
-          <a:lstStyle/>
-          <a:p>
-            <a:r>
-              <a:rPr sz="980" b="1">
-                <a:solidFill>
-                  <a:srgbClr val="B24141"/>
-                </a:solidFill>
-                <a:latin typeface="Aptos"/>
-              </a:rPr>
-              <a:t>What about restricted food?</a:t>
-            </a:r>
-          </a:p>
-        </p:txBody>
-      </p:sp>
-      <p:sp>
-        <p:nvSpPr>
-          <p:cNvPr id="18" name="TextBox 17"/>
-          <p:cNvSpPr txBox="1"/>
-          <p:nvPr/>
-        </p:nvSpPr>
-        <p:spPr>
-          <a:xfrm>
-            <a:off x="2999232" y="3776472"/>
-            <a:ext cx="4096511" cy="164592"/>
-          </a:xfrm>
-          <a:prstGeom prst="rect">
-            <a:avLst/>
-          </a:prstGeom>
-          <a:noFill/>
-        </p:spPr>
-        <p:txBody>
-          <a:bodyPr wrap="square" lIns="18288" rIns="18288" tIns="18288" bIns="18288">
-            <a:spAutoFit/>
-          </a:bodyPr>
-          <a:lstStyle/>
-          <a:p>
-            <a:r>
-              <a:rPr sz="980" b="0">
-                <a:solidFill>
-                  <a:srgbClr val="121F23"/>
-                </a:solidFill>
-                <a:latin typeface="Aptos"/>
-              </a:rPr>
-              <a:t>Food assistance has policy constraints.</a:t>
-            </a:r>
-          </a:p>
-        </p:txBody>
-      </p:sp>
-      <p:sp>
-        <p:nvSpPr>
-          <p:cNvPr id="19" name="TextBox 18"/>
-          <p:cNvSpPr txBox="1"/>
-          <p:nvPr/>
-        </p:nvSpPr>
-        <p:spPr>
-          <a:xfrm>
-            <a:off x="7205471" y="3776472"/>
-            <a:ext cx="4187952" cy="164592"/>
-          </a:xfrm>
-          <a:prstGeom prst="rect">
-            <a:avLst/>
-          </a:prstGeom>
-          <a:noFill/>
-        </p:spPr>
-        <p:txBody>
-          <a:bodyPr wrap="square" lIns="18288" rIns="18288" tIns="18288" bIns="18288">
-            <a:spAutoFit/>
-          </a:bodyPr>
-          <a:lstStyle/>
-          <a:p>
-            <a:r>
-              <a:rPr sz="980" b="1">
-                <a:solidFill>
-                  <a:srgbClr val="00897B"/>
-                </a:solidFill>
-                <a:latin typeface="Aptos"/>
-              </a:rPr>
-              <a:t>TEFAP blocked by default; redistributable flag required; no payments.</a:t>
-            </a:r>
-          </a:p>
-        </p:txBody>
-      </p:sp>
-      <p:sp>
-        <p:nvSpPr>
-          <p:cNvPr id="20" name="Rounded Rectangle 19"/>
-          <p:cNvSpPr/>
-          <p:nvPr/>
-        </p:nvSpPr>
-        <p:spPr>
-          <a:xfrm>
-            <a:off x="777240" y="4352544"/>
-            <a:ext cx="10652760" cy="493776"/>
-          </a:xfrm>
-          <a:prstGeom prst="roundRect">
-            <a:avLst/>
-          </a:prstGeom>
-          <a:solidFill>
-            <a:srgbClr val="FFFFFF"/>
-          </a:solidFill>
-          <a:ln w="12700">
-            <a:solidFill>
-              <a:srgbClr val="D2E0DC"/>
-            </a:solidFill>
-          </a:ln>
-        </p:spPr>
-        <p:style>
-          <a:lnRef idx="1">
-            <a:schemeClr val="accent1"/>
-          </a:lnRef>
-          <a:fillRef idx="3">
-            <a:schemeClr val="accent1"/>
-          </a:fillRef>
-          <a:effectRef idx="2">
-            <a:schemeClr val="accent1"/>
-          </a:effectRef>
-          <a:fontRef idx="minor">
-            <a:schemeClr val="lt1"/>
-          </a:fontRef>
-        </p:style>
-        <p:txBody>
-          <a:bodyPr rtlCol="0" anchor="ctr"/>
-          <a:lstStyle/>
-          <a:p>
-            <a:pPr algn="ctr"/>
-          </a:p>
-        </p:txBody>
-      </p:sp>
-      <p:sp>
-        <p:nvSpPr>
-          <p:cNvPr id="21" name="TextBox 20"/>
-          <p:cNvSpPr txBox="1"/>
-          <p:nvPr/>
-        </p:nvSpPr>
-        <p:spPr>
-          <a:xfrm>
-            <a:off x="850392" y="4489704"/>
-            <a:ext cx="2039112" cy="164592"/>
-          </a:xfrm>
-          <a:prstGeom prst="rect">
-            <a:avLst/>
-          </a:prstGeom>
-          <a:noFill/>
-        </p:spPr>
-        <p:txBody>
-          <a:bodyPr wrap="square" lIns="18288" rIns="18288" tIns="18288" bIns="18288">
-            <a:spAutoFit/>
-          </a:bodyPr>
-          <a:lstStyle/>
-          <a:p>
-            <a:r>
-              <a:rPr sz="980" b="1">
-                <a:solidFill>
-                  <a:srgbClr val="B24141"/>
-                </a:solidFill>
-                <a:latin typeface="Aptos"/>
-              </a:rPr>
-              <a:t>Can AI hallucinate inventory?</a:t>
-            </a:r>
-          </a:p>
-        </p:txBody>
-      </p:sp>
-      <p:sp>
-        <p:nvSpPr>
-          <p:cNvPr id="22" name="TextBox 21"/>
-          <p:cNvSpPr txBox="1"/>
-          <p:nvPr/>
-        </p:nvSpPr>
-        <p:spPr>
-          <a:xfrm>
-            <a:off x="2999232" y="4489704"/>
-            <a:ext cx="4096511" cy="164592"/>
-          </a:xfrm>
-          <a:prstGeom prst="rect">
-            <a:avLst/>
-          </a:prstGeom>
-          <a:noFill/>
-        </p:spPr>
-        <p:txBody>
-          <a:bodyPr wrap="square" lIns="18288" rIns="18288" tIns="18288" bIns="18288">
-            <a:spAutoFit/>
-          </a:bodyPr>
-          <a:lstStyle/>
-          <a:p>
-            <a:r>
-              <a:rPr sz="980" b="0">
-                <a:solidFill>
-                  <a:srgbClr val="121F23"/>
-                </a:solidFill>
-                <a:latin typeface="Aptos"/>
-              </a:rPr>
-              <a:t>Yes, if allowed to write directly.</a:t>
-            </a:r>
-          </a:p>
-        </p:txBody>
-      </p:sp>
-      <p:sp>
-        <p:nvSpPr>
-          <p:cNvPr id="23" name="TextBox 22"/>
-          <p:cNvSpPr txBox="1"/>
-          <p:nvPr/>
-        </p:nvSpPr>
-        <p:spPr>
-          <a:xfrm>
-            <a:off x="7205471" y="4489704"/>
-            <a:ext cx="4187952" cy="164592"/>
-          </a:xfrm>
-          <a:prstGeom prst="rect">
-            <a:avLst/>
-          </a:prstGeom>
-          <a:noFill/>
-        </p:spPr>
-        <p:txBody>
-          <a:bodyPr wrap="square" lIns="18288" rIns="18288" tIns="18288" bIns="18288">
-            <a:spAutoFit/>
-          </a:bodyPr>
-          <a:lstStyle/>
-          <a:p>
-            <a:r>
-              <a:rPr sz="980" b="1">
-                <a:solidFill>
-                  <a:srgbClr val="00897B"/>
-                </a:solidFill>
-                <a:latin typeface="Aptos"/>
-              </a:rPr>
-              <a:t>AI only drafts category/date; humans confirm before save.</a:t>
-            </a:r>
-          </a:p>
-        </p:txBody>
-      </p:sp>
-      <p:sp>
-        <p:nvSpPr>
-          <p:cNvPr id="24" name="Rounded Rectangle 23"/>
-          <p:cNvSpPr/>
-          <p:nvPr/>
-        </p:nvSpPr>
-        <p:spPr>
-          <a:xfrm>
-            <a:off x="777240" y="5065776"/>
-            <a:ext cx="10652760" cy="493776"/>
-          </a:xfrm>
-          <a:prstGeom prst="roundRect">
-            <a:avLst/>
-          </a:prstGeom>
-          <a:solidFill>
-            <a:srgbClr val="FFFFFF"/>
-          </a:solidFill>
-          <a:ln w="12700">
-            <a:solidFill>
-              <a:srgbClr val="D2E0DC"/>
-            </a:solidFill>
-          </a:ln>
-        </p:spPr>
-        <p:style>
-          <a:lnRef idx="1">
-            <a:schemeClr val="accent1"/>
-          </a:lnRef>
-          <a:fillRef idx="3">
-            <a:schemeClr val="accent1"/>
-          </a:fillRef>
-          <a:effectRef idx="2">
-            <a:schemeClr val="accent1"/>
-          </a:effectRef>
-          <a:fontRef idx="minor">
-            <a:schemeClr val="lt1"/>
-          </a:fontRef>
-        </p:style>
-        <p:txBody>
-          <a:bodyPr rtlCol="0" anchor="ctr"/>
-          <a:lstStyle/>
-          <a:p>
-            <a:pPr algn="ctr"/>
-          </a:p>
-        </p:txBody>
-      </p:sp>
-      <p:sp>
-        <p:nvSpPr>
-          <p:cNvPr id="25" name="TextBox 24"/>
-          <p:cNvSpPr txBox="1"/>
-          <p:nvPr/>
-        </p:nvSpPr>
-        <p:spPr>
-          <a:xfrm>
-            <a:off x="850392" y="5202936"/>
-            <a:ext cx="2039112" cy="164592"/>
-          </a:xfrm>
-          <a:prstGeom prst="rect">
-            <a:avLst/>
-          </a:prstGeom>
-          <a:noFill/>
-        </p:spPr>
-        <p:txBody>
-          <a:bodyPr wrap="square" lIns="18288" rIns="18288" tIns="18288" bIns="18288">
-            <a:spAutoFit/>
-          </a:bodyPr>
-          <a:lstStyle/>
-          <a:p>
-            <a:r>
-              <a:rPr sz="980" b="1">
-                <a:solidFill>
-                  <a:srgbClr val="B24141"/>
-                </a:solidFill>
-                <a:latin typeface="Aptos"/>
-              </a:rPr>
-              <a:t>Does listing reduce stock?</a:t>
-            </a:r>
-          </a:p>
-        </p:txBody>
-      </p:sp>
-      <p:sp>
-        <p:nvSpPr>
-          <p:cNvPr id="26" name="TextBox 25"/>
-          <p:cNvSpPr txBox="1"/>
-          <p:nvPr/>
-        </p:nvSpPr>
-        <p:spPr>
-          <a:xfrm>
-            <a:off x="2999232" y="5202936"/>
-            <a:ext cx="4096511" cy="164592"/>
-          </a:xfrm>
-          <a:prstGeom prst="rect">
-            <a:avLst/>
-          </a:prstGeom>
-          <a:noFill/>
-        </p:spPr>
-        <p:txBody>
-          <a:bodyPr wrap="square" lIns="18288" rIns="18288" tIns="18288" bIns="18288">
-            <a:spAutoFit/>
-          </a:bodyPr>
-          <a:lstStyle/>
-          <a:p>
-            <a:r>
-              <a:rPr sz="980" b="0">
-                <a:solidFill>
-                  <a:srgbClr val="121F23"/>
-                </a:solidFill>
-                <a:latin typeface="Aptos"/>
-              </a:rPr>
-              <a:t>It should not. Listing is not a claim.</a:t>
-            </a:r>
-          </a:p>
-        </p:txBody>
-      </p:sp>
-      <p:sp>
-        <p:nvSpPr>
-          <p:cNvPr id="27" name="TextBox 26"/>
-          <p:cNvSpPr txBox="1"/>
-          <p:nvPr/>
-        </p:nvSpPr>
-        <p:spPr>
-          <a:xfrm>
-            <a:off x="7205471" y="5202936"/>
-            <a:ext cx="4187952" cy="164592"/>
-          </a:xfrm>
-          <a:prstGeom prst="rect">
-            <a:avLst/>
-          </a:prstGeom>
-          <a:noFill/>
-        </p:spPr>
-        <p:txBody>
-          <a:bodyPr wrap="square" lIns="18288" rIns="18288" tIns="18288" bIns="18288">
-            <a:spAutoFit/>
-          </a:bodyPr>
-          <a:lstStyle/>
-          <a:p>
-            <a:r>
-              <a:rPr sz="980" b="1">
-                <a:solidFill>
-                  <a:srgbClr val="00897B"/>
-                </a:solidFill>
-                <a:latin typeface="Aptos"/>
-              </a:rPr>
-              <a:t>On-hand stays same; reserve lowers availability; transfer decrements stock.</a:t>
-            </a:r>
-          </a:p>
-        </p:txBody>
-      </p:sp>
-      <p:sp>
-        <p:nvSpPr>
-          <p:cNvPr id="28" name="TextBox 27"/>
-          <p:cNvSpPr txBox="1"/>
-          <p:nvPr/>
-        </p:nvSpPr>
-        <p:spPr>
-          <a:xfrm>
-            <a:off x="914400" y="6016752"/>
-            <a:ext cx="10058400" cy="274320"/>
-          </a:xfrm>
-          <a:prstGeom prst="rect">
-            <a:avLst/>
-          </a:prstGeom>
-          <a:noFill/>
-        </p:spPr>
-        <p:txBody>
-          <a:bodyPr wrap="square" lIns="18288" rIns="18288" tIns="18288" bIns="18288">
-            <a:spAutoFit/>
-          </a:bodyPr>
-          <a:lstStyle/>
-          <a:p>
-            <a:pPr algn="ctr"/>
-            <a:r>
-              <a:rPr sz="1600" b="1">
-                <a:solidFill>
-                  <a:srgbClr val="121F23"/>
-                </a:solidFill>
-                <a:latin typeface="Aptos"/>
-              </a:rPr>
-              <a:t>Bottom line: GoodCo does not replace the hub. It makes every spoke visible enough to share resources safely.</a:t>
-            </a:r>
-          </a:p>
-        </p:txBody>
-      </p:sp>
-      <p:sp>
-        <p:nvSpPr>
-          <p:cNvPr id="29" name="TextBox 28"/>
-          <p:cNvSpPr txBox="1"/>
-          <p:nvPr/>
-        </p:nvSpPr>
-        <p:spPr>
-          <a:xfrm>
-            <a:off x="10972800" y="6473952"/>
-            <a:ext cx="640080" cy="164592"/>
-          </a:xfrm>
-          <a:prstGeom prst="rect">
-            <a:avLst/>
-          </a:prstGeom>
-          <a:noFill/>
-        </p:spPr>
-        <p:txBody>
-          <a:bodyPr wrap="square" lIns="18288" rIns="18288" tIns="18288" bIns="18288">
-            <a:spAutoFit/>
-          </a:bodyPr>
-          <a:lstStyle/>
-          <a:p>
-            <a:pPr algn="r"/>
-            <a:r>
-              <a:rPr sz="750" b="0">
-                <a:solidFill>
-                  <a:srgbClr val="5C6C72"/>
-                </a:solidFill>
-                <a:latin typeface="Aptos"/>
-              </a:rPr>
-              <a:t>05 / 05</a:t>
+              <a:t>04 / 04</a:t>
             </a:r>
           </a:p>
         </p:txBody>

--- a/goodco-project-overview.pptx
+++ b/goodco-project-overview.pptx
@@ -4321,7 +4321,7 @@
                 </a:solidFill>
                 <a:latin typeface="Aptos"/>
               </a:rPr>
-              <a:t>The inventory work is not a side quest. It is the trust layer required before pantries can share food.</a:t>
+              <a:t>Inventory is the trust layer that makes pantry-to-pantry movement safe enough to use.</a:t>
             </a:r>
           </a:p>
         </p:txBody>
@@ -4400,7 +4400,7 @@
                 </a:solidFill>
                 <a:latin typeface="Aptos"/>
               </a:rPr>
-              <a:t>Primary fit</a:t>
+              <a:t>Primary problem</a:t>
             </a:r>
           </a:p>
         </p:txBody>
@@ -4507,7 +4507,7 @@
               </a:defRPr>
             </a:pPr>
             <a:r>
-              <a:t>GoodCo applies this at the pantry level.</a:t>
+              <a:t>GoodCo solves this at the pantry level.</a:t>
             </a:r>
           </a:p>
           <a:p>
@@ -4618,7 +4618,7 @@
                 </a:solidFill>
                 <a:latin typeface="Aptos"/>
               </a:rPr>
-              <a:t>Supporting fit</a:t>
+              <a:t>Enabling foundation</a:t>
             </a:r>
           </a:p>
         </p:txBody>
@@ -4691,7 +4691,7 @@
               </a:defRPr>
             </a:pPr>
             <a:r>
-              <a:t>6: receiving creates the trusted lot.</a:t>
+              <a:t>Receiving creates the trusted lot.</a:t>
             </a:r>
           </a:p>
           <a:p>
@@ -4707,7 +4707,7 @@
               </a:defRPr>
             </a:pPr>
             <a:r>
-              <a:t>9: date and shelf-life capture at receiving.</a:t>
+              <a:t>Date and shelf-life capture show urgency.</a:t>
             </a:r>
           </a:p>
           <a:p>
@@ -4723,7 +4723,7 @@
               </a:defRPr>
             </a:pPr>
             <a:r>
-              <a:t>10: expiring view shows what should move.</a:t>
+              <a:t>Expiring view shows what should move.</a:t>
             </a:r>
           </a:p>
           <a:p>
@@ -4774,7 +4774,7 @@
                 </a:solidFill>
                 <a:latin typeface="Aptos"/>
               </a:rPr>
-              <a:t>Positioning: not a broad food-bank AI system, not all 35 problems, and not a generic marketplace.</a:t>
+              <a:t>Positioning: one focused movement problem, solved with inventory-backed listings.</a:t>
             </a:r>
           </a:p>
         </p:txBody>
@@ -4808,7 +4808,7 @@
                 </a:solidFill>
                 <a:latin typeface="Aptos"/>
               </a:rPr>
-              <a:t>Track mapping from local hackathon problem list: Theme 7 Problem 34; Theme 2 Problems 6, 9, 10.</a:t>
+              <a:t>Track mapping: Primary = Theme 7 Problem 34. Enabler = Theme 2 Problems 6, 9, 10.</a:t>
             </a:r>
           </a:p>
         </p:txBody>

--- a/goodco-project-overview.pptx
+++ b/goodco-project-overview.pptx
@@ -9,8 +9,9 @@
     <p:sldId id="257" r:id="rId8"/>
     <p:sldId id="258" r:id="rId9"/>
     <p:sldId id="259" r:id="rId10"/>
+    <p:sldId id="260" r:id="rId11"/>
   </p:sldIdLst>
-  <p:sldSz cx="12191695" cy="6858000" type="screen4x3"/>
+  <p:sldSz cx="12191999" cy="6858000" type="screen4x3"/>
   <p:notesSz cx="6858000" cy="9144000"/>
   <p:defaultTextStyle>
     <a:defPPr>
@@ -3087,7 +3088,7 @@
     <p:bg>
       <p:bgPr>
         <a:solidFill>
-          <a:srgbClr val="0D2226"/>
+          <a:srgbClr val="0C2628"/>
         </a:solidFill>
         <a:effectLst/>
       </p:bgPr>
@@ -3107,8 +3108,8 @@
         </p:nvSpPr>
         <p:spPr>
           <a:xfrm>
-            <a:off x="658368" y="502920"/>
-            <a:ext cx="1115568" cy="310896"/>
+            <a:off x="658368" y="566928"/>
+            <a:ext cx="1371600" cy="384048"/>
           </a:xfrm>
           <a:prstGeom prst="roundRect">
             <a:avLst/>
@@ -3116,9 +3117,9 @@
           <a:solidFill>
             <a:srgbClr val="FFFFFF"/>
           </a:solidFill>
-          <a:ln>
+          <a:ln w="12700">
             <a:solidFill>
-              <a:srgbClr val="CCDED8"/>
+              <a:srgbClr val="DBEFEA"/>
             </a:solidFill>
           </a:ln>
         </p:spPr>
@@ -3137,14 +3138,14 @@
           </a:fontRef>
         </p:style>
         <p:txBody>
-          <a:bodyPr rtlCol="0" anchor="ctr"/>
+          <a:bodyPr rtlCol="0" anchor="ctr" wrap="none" lIns="73152" rIns="73152" tIns="18288" bIns="18288"/>
           <a:lstStyle/>
           <a:p>
             <a:pPr algn="ctr"/>
             <a:r>
-              <a:rPr sz="850" b="1">
-                <a:solidFill>
-                  <a:srgbClr val="005A52"/>
+              <a:rPr sz="1050" b="1">
+                <a:solidFill>
+                  <a:srgbClr val="005E53"/>
                 </a:solidFill>
                 <a:latin typeface="Aptos"/>
               </a:rPr>
@@ -3161,8 +3162,8 @@
         </p:nvSpPr>
         <p:spPr>
           <a:xfrm>
-            <a:off x="658368" y="1024128"/>
-            <a:ext cx="6309360" cy="868680"/>
+            <a:off x="658368" y="1234440"/>
+            <a:ext cx="5303520" cy="640080"/>
           </a:xfrm>
           <a:prstGeom prst="rect">
             <a:avLst/>
@@ -3170,19 +3171,27 @@
           <a:noFill/>
         </p:spPr>
         <p:txBody>
-          <a:bodyPr wrap="square" lIns="18288" rIns="18288" tIns="18288" bIns="18288">
+          <a:bodyPr wrap="square" lIns="0" rIns="0" tIns="0" bIns="0">
             <a:spAutoFit/>
           </a:bodyPr>
           <a:lstStyle/>
           <a:p>
-            <a:r>
-              <a:rPr sz="3100" b="1">
+            <a:pPr algn="l">
+              <a:spcBef>
+                <a:spcPts val="0"/>
+              </a:spcBef>
+              <a:spcAft>
+                <a:spcPts val="0"/>
+              </a:spcAft>
+            </a:pPr>
+            <a:r>
+              <a:rPr sz="4000" b="1">
                 <a:solidFill>
                   <a:srgbClr val="FFFFFF"/>
                 </a:solidFill>
-                <a:latin typeface="Aptos"/>
-              </a:rPr>
-              <a:t>Pantries cannot rebalance food they cannot see.</a:t>
+                <a:latin typeface="Aptos Display"/>
+              </a:rPr>
+              <a:t>Make the spokes talk.</a:t>
             </a:r>
           </a:p>
         </p:txBody>
@@ -3195,8 +3204,8 @@
         </p:nvSpPr>
         <p:spPr>
           <a:xfrm>
-            <a:off x="685800" y="1984248"/>
-            <a:ext cx="6080760" cy="530352"/>
+            <a:off x="694944" y="2084831"/>
+            <a:ext cx="5303520" cy="1097280"/>
           </a:xfrm>
           <a:prstGeom prst="rect">
             <a:avLst/>
@@ -3204,43 +3213,296 @@
           <a:noFill/>
         </p:spPr>
         <p:txBody>
-          <a:bodyPr wrap="square" lIns="18288" rIns="18288" tIns="18288" bIns="18288">
+          <a:bodyPr wrap="square" lIns="0" rIns="0" tIns="0" bIns="0">
             <a:spAutoFit/>
           </a:bodyPr>
           <a:lstStyle/>
           <a:p>
-            <a:r>
-              <a:rPr sz="1420" b="0">
-                <a:solidFill>
-                  <a:srgbClr val="CADEDA"/>
+            <a:pPr algn="l">
+              <a:spcBef>
+                <a:spcPts val="0"/>
+              </a:spcBef>
+              <a:spcAft>
+                <a:spcPts val="0"/>
+              </a:spcAft>
+            </a:pPr>
+            <a:r>
+              <a:rPr sz="2200" b="0">
+                <a:solidFill>
+                  <a:srgbClr val="D4E5E4"/>
                 </a:solidFill>
                 <a:latin typeface="Aptos"/>
               </a:rPr>
-              <a:t>Food banks are strong hubs. The weak point is the last-mile network: pantry inventory, surplus, and urgency usually stay local.</a:t>
-            </a:r>
-          </a:p>
-        </p:txBody>
-      </p:sp>
-      <p:sp>
-        <p:nvSpPr>
-          <p:cNvPr id="5" name="Oval 4"/>
+              <a:t>Food banks coordinate the hub. GoodCo gives pantries lateral visibility so eligible surplus can move before it expires.</a:t>
+            </a:r>
+          </a:p>
+        </p:txBody>
+      </p:sp>
+      <p:cxnSp>
+        <p:nvCxnSpPr>
+          <p:cNvPr id="5" name="Connector 4"/>
+          <p:cNvCxnSpPr/>
+          <p:nvPr/>
+        </p:nvCxnSpPr>
+        <p:spPr>
+          <a:xfrm flipH="1">
+            <a:off x="7818120" y="2093976"/>
+            <a:ext cx="1645920" cy="763524"/>
+          </a:xfrm>
+          <a:prstGeom prst="line">
+            <a:avLst/>
+          </a:prstGeom>
+          <a:ln w="13970">
+            <a:solidFill>
+              <a:srgbClr val="5C7C80"/>
+            </a:solidFill>
+          </a:ln>
+        </p:spPr>
+        <p:style>
+          <a:lnRef idx="2">
+            <a:schemeClr val="accent1"/>
+          </a:lnRef>
+          <a:fillRef idx="0">
+            <a:schemeClr val="accent1"/>
+          </a:fillRef>
+          <a:effectRef idx="1">
+            <a:schemeClr val="accent1"/>
+          </a:effectRef>
+          <a:fontRef idx="minor">
+            <a:schemeClr val="tx1"/>
+          </a:fontRef>
+        </p:style>
+      </p:cxnSp>
+      <p:cxnSp>
+        <p:nvCxnSpPr>
+          <p:cNvPr id="6" name="Connector 5"/>
+          <p:cNvCxnSpPr/>
+          <p:nvPr/>
+        </p:nvCxnSpPr>
+        <p:spPr>
+          <a:xfrm>
+            <a:off x="9464040" y="2093976"/>
+            <a:ext cx="1124712" cy="763524"/>
+          </a:xfrm>
+          <a:prstGeom prst="line">
+            <a:avLst/>
+          </a:prstGeom>
+          <a:ln w="13970">
+            <a:solidFill>
+              <a:srgbClr val="5C7C80"/>
+            </a:solidFill>
+          </a:ln>
+        </p:spPr>
+        <p:style>
+          <a:lnRef idx="2">
+            <a:schemeClr val="accent1"/>
+          </a:lnRef>
+          <a:fillRef idx="0">
+            <a:schemeClr val="accent1"/>
+          </a:fillRef>
+          <a:effectRef idx="1">
+            <a:schemeClr val="accent1"/>
+          </a:effectRef>
+          <a:fontRef idx="minor">
+            <a:schemeClr val="tx1"/>
+          </a:fontRef>
+        </p:style>
+      </p:cxnSp>
+      <p:cxnSp>
+        <p:nvCxnSpPr>
+          <p:cNvPr id="7" name="Connector 6"/>
+          <p:cNvCxnSpPr/>
+          <p:nvPr/>
+        </p:nvCxnSpPr>
+        <p:spPr>
+          <a:xfrm flipH="1">
+            <a:off x="8001000" y="2093976"/>
+            <a:ext cx="1463040" cy="2267712"/>
+          </a:xfrm>
+          <a:prstGeom prst="line">
+            <a:avLst/>
+          </a:prstGeom>
+          <a:ln w="13970">
+            <a:solidFill>
+              <a:srgbClr val="5C7C80"/>
+            </a:solidFill>
+          </a:ln>
+        </p:spPr>
+        <p:style>
+          <a:lnRef idx="2">
+            <a:schemeClr val="accent1"/>
+          </a:lnRef>
+          <a:fillRef idx="0">
+            <a:schemeClr val="accent1"/>
+          </a:fillRef>
+          <a:effectRef idx="1">
+            <a:schemeClr val="accent1"/>
+          </a:effectRef>
+          <a:fontRef idx="minor">
+            <a:schemeClr val="tx1"/>
+          </a:fontRef>
+        </p:style>
+      </p:cxnSp>
+      <p:cxnSp>
+        <p:nvCxnSpPr>
+          <p:cNvPr id="8" name="Connector 7"/>
+          <p:cNvCxnSpPr/>
+          <p:nvPr/>
+        </p:nvCxnSpPr>
+        <p:spPr>
+          <a:xfrm>
+            <a:off x="9464040" y="2093976"/>
+            <a:ext cx="1161288" cy="2226564"/>
+          </a:xfrm>
+          <a:prstGeom prst="line">
+            <a:avLst/>
+          </a:prstGeom>
+          <a:ln w="13970">
+            <a:solidFill>
+              <a:srgbClr val="5C7C80"/>
+            </a:solidFill>
+          </a:ln>
+        </p:spPr>
+        <p:style>
+          <a:lnRef idx="2">
+            <a:schemeClr val="accent1"/>
+          </a:lnRef>
+          <a:fillRef idx="0">
+            <a:schemeClr val="accent1"/>
+          </a:fillRef>
+          <a:effectRef idx="1">
+            <a:schemeClr val="accent1"/>
+          </a:effectRef>
+          <a:fontRef idx="minor">
+            <a:schemeClr val="tx1"/>
+          </a:fontRef>
+        </p:style>
+      </p:cxnSp>
+      <p:cxnSp>
+        <p:nvCxnSpPr>
+          <p:cNvPr id="9" name="Connector 8"/>
+          <p:cNvCxnSpPr/>
+          <p:nvPr/>
+        </p:nvCxnSpPr>
+        <p:spPr>
+          <a:xfrm>
+            <a:off x="8202168" y="3246120"/>
+            <a:ext cx="2002536" cy="0"/>
+          </a:xfrm>
+          <a:prstGeom prst="line">
+            <a:avLst/>
+          </a:prstGeom>
+          <a:ln w="36830">
+            <a:solidFill>
+              <a:srgbClr val="F6B23C"/>
+            </a:solidFill>
+          </a:ln>
+        </p:spPr>
+        <p:style>
+          <a:lnRef idx="2">
+            <a:schemeClr val="accent1"/>
+          </a:lnRef>
+          <a:fillRef idx="0">
+            <a:schemeClr val="accent1"/>
+          </a:fillRef>
+          <a:effectRef idx="1">
+            <a:schemeClr val="accent1"/>
+          </a:effectRef>
+          <a:fontRef idx="minor">
+            <a:schemeClr val="tx1"/>
+          </a:fontRef>
+        </p:style>
+      </p:cxnSp>
+      <p:cxnSp>
+        <p:nvCxnSpPr>
+          <p:cNvPr id="10" name="Connector 9"/>
+          <p:cNvCxnSpPr/>
+          <p:nvPr/>
+        </p:nvCxnSpPr>
+        <p:spPr>
+          <a:xfrm>
+            <a:off x="7818120" y="3639312"/>
+            <a:ext cx="182880" cy="722376"/>
+          </a:xfrm>
+          <a:prstGeom prst="line">
+            <a:avLst/>
+          </a:prstGeom>
+          <a:ln w="36830">
+            <a:solidFill>
+              <a:srgbClr val="F6B23C"/>
+            </a:solidFill>
+          </a:ln>
+        </p:spPr>
+        <p:style>
+          <a:lnRef idx="2">
+            <a:schemeClr val="accent1"/>
+          </a:lnRef>
+          <a:fillRef idx="0">
+            <a:schemeClr val="accent1"/>
+          </a:fillRef>
+          <a:effectRef idx="1">
+            <a:schemeClr val="accent1"/>
+          </a:effectRef>
+          <a:fontRef idx="minor">
+            <a:schemeClr val="tx1"/>
+          </a:fontRef>
+        </p:style>
+      </p:cxnSp>
+      <p:cxnSp>
+        <p:nvCxnSpPr>
+          <p:cNvPr id="11" name="Connector 10"/>
+          <p:cNvCxnSpPr/>
+          <p:nvPr/>
+        </p:nvCxnSpPr>
+        <p:spPr>
+          <a:xfrm flipV="1">
+            <a:off x="8412480" y="4709160"/>
+            <a:ext cx="1819656" cy="64008"/>
+          </a:xfrm>
+          <a:prstGeom prst="line">
+            <a:avLst/>
+          </a:prstGeom>
+          <a:ln w="36830">
+            <a:solidFill>
+              <a:srgbClr val="F6B23C"/>
+            </a:solidFill>
+          </a:ln>
+        </p:spPr>
+        <p:style>
+          <a:lnRef idx="2">
+            <a:schemeClr val="accent1"/>
+          </a:lnRef>
+          <a:fillRef idx="0">
+            <a:schemeClr val="accent1"/>
+          </a:fillRef>
+          <a:effectRef idx="1">
+            <a:schemeClr val="accent1"/>
+          </a:effectRef>
+          <a:fontRef idx="minor">
+            <a:schemeClr val="tx1"/>
+          </a:fontRef>
+        </p:style>
+      </p:cxnSp>
+      <p:sp>
+        <p:nvSpPr>
+          <p:cNvPr id="12" name="Oval 11"/>
           <p:cNvSpPr/>
           <p:nvPr/>
         </p:nvSpPr>
         <p:spPr>
           <a:xfrm>
-            <a:off x="8823960" y="1143000"/>
-            <a:ext cx="960120" cy="960120"/>
+            <a:off x="8970263" y="1106424"/>
+            <a:ext cx="987552" cy="987552"/>
           </a:xfrm>
           <a:prstGeom prst="ellipse">
             <a:avLst/>
           </a:prstGeom>
           <a:solidFill>
-            <a:srgbClr val="00897B"/>
+            <a:srgbClr val="008B7A"/>
           </a:solidFill>
           <a:ln>
             <a:solidFill>
-              <a:srgbClr val="00897B"/>
+              <a:srgbClr val="008B7A"/>
             </a:solidFill>
           </a:ln>
         </p:spPr>
@@ -3259,16 +3521,16 @@
           </a:fontRef>
         </p:style>
         <p:txBody>
-          <a:bodyPr rtlCol="0" anchor="ctr"/>
+          <a:bodyPr rtlCol="0" anchor="ctr" wrap="none" lIns="18288" rIns="18288" tIns="0" bIns="0"/>
           <a:lstStyle/>
           <a:p>
             <a:pPr algn="ctr"/>
             <a:r>
-              <a:rPr sz="1300" b="1">
+              <a:rPr sz="1500" b="1">
                 <a:solidFill>
                   <a:srgbClr val="FFFFFF"/>
                 </a:solidFill>
-                <a:latin typeface="Aptos"/>
+                <a:latin typeface="Aptos Display"/>
               </a:rPr>
               <a:t>Hub</a:t>
             </a:r>
@@ -3277,14 +3539,14 @@
       </p:sp>
       <p:sp>
         <p:nvSpPr>
-          <p:cNvPr id="6" name="Oval 5"/>
+          <p:cNvPr id="13" name="Oval 12"/>
           <p:cNvSpPr/>
           <p:nvPr/>
         </p:nvSpPr>
         <p:spPr>
           <a:xfrm>
-            <a:off x="7452360" y="2880360"/>
-            <a:ext cx="603504" cy="603504"/>
+            <a:off x="7429500" y="2857500"/>
+            <a:ext cx="777240" cy="777240"/>
           </a:xfrm>
           <a:prstGeom prst="ellipse">
             <a:avLst/>
@@ -3313,67 +3575,32 @@
           </a:fontRef>
         </p:style>
         <p:txBody>
-          <a:bodyPr rtlCol="0" anchor="ctr"/>
+          <a:bodyPr rtlCol="0" anchor="ctr" wrap="none" lIns="18288" rIns="18288" tIns="0" bIns="0"/>
           <a:lstStyle/>
           <a:p>
             <a:pPr algn="ctr"/>
             <a:r>
-              <a:rPr sz="850" b="1">
-                <a:solidFill>
-                  <a:srgbClr val="0D2226"/>
-                </a:solidFill>
-                <a:latin typeface="Aptos"/>
+              <a:rPr sz="1150" b="1">
+                <a:solidFill>
+                  <a:srgbClr val="0F2023"/>
+                </a:solidFill>
+                <a:latin typeface="Aptos Display"/>
               </a:rPr>
               <a:t>SF</a:t>
             </a:r>
           </a:p>
         </p:txBody>
       </p:sp>
-      <p:cxnSp>
-        <p:nvCxnSpPr>
-          <p:cNvPr id="7" name="Connector 6"/>
-          <p:cNvCxnSpPr/>
-          <p:nvPr/>
-        </p:nvCxnSpPr>
-        <p:spPr>
-          <a:xfrm flipH="1">
-            <a:off x="7754112" y="2075688"/>
-            <a:ext cx="1554480" cy="804672"/>
-          </a:xfrm>
-          <a:prstGeom prst="line">
-            <a:avLst/>
-          </a:prstGeom>
-          <a:ln w="12700">
-            <a:solidFill>
-              <a:srgbClr val="587678"/>
-            </a:solidFill>
-          </a:ln>
-        </p:spPr>
-        <p:style>
-          <a:lnRef idx="2">
-            <a:schemeClr val="accent1"/>
-          </a:lnRef>
-          <a:fillRef idx="0">
-            <a:schemeClr val="accent1"/>
-          </a:fillRef>
-          <a:effectRef idx="1">
-            <a:schemeClr val="accent1"/>
-          </a:effectRef>
-          <a:fontRef idx="minor">
-            <a:schemeClr val="tx1"/>
-          </a:fontRef>
-        </p:style>
-      </p:cxnSp>
-      <p:sp>
-        <p:nvSpPr>
-          <p:cNvPr id="8" name="Oval 7"/>
+      <p:sp>
+        <p:nvSpPr>
+          <p:cNvPr id="14" name="Oval 13"/>
           <p:cNvSpPr/>
           <p:nvPr/>
         </p:nvSpPr>
         <p:spPr>
           <a:xfrm>
-            <a:off x="10012680" y="2880360"/>
-            <a:ext cx="603504" cy="603504"/>
+            <a:off x="10200132" y="2857500"/>
+            <a:ext cx="777240" cy="777240"/>
           </a:xfrm>
           <a:prstGeom prst="ellipse">
             <a:avLst/>
@@ -3402,67 +3629,32 @@
           </a:fontRef>
         </p:style>
         <p:txBody>
-          <a:bodyPr rtlCol="0" anchor="ctr"/>
+          <a:bodyPr rtlCol="0" anchor="ctr" wrap="none" lIns="18288" rIns="18288" tIns="0" bIns="0"/>
           <a:lstStyle/>
           <a:p>
             <a:pPr algn="ctr"/>
             <a:r>
-              <a:rPr sz="850" b="1">
-                <a:solidFill>
-                  <a:srgbClr val="0D2226"/>
-                </a:solidFill>
-                <a:latin typeface="Aptos"/>
+              <a:rPr sz="1150" b="1">
+                <a:solidFill>
+                  <a:srgbClr val="0F2023"/>
+                </a:solidFill>
+                <a:latin typeface="Aptos Display"/>
               </a:rPr>
               <a:t>Oak</a:t>
             </a:r>
           </a:p>
         </p:txBody>
       </p:sp>
-      <p:cxnSp>
-        <p:nvCxnSpPr>
-          <p:cNvPr id="9" name="Connector 8"/>
-          <p:cNvCxnSpPr/>
-          <p:nvPr/>
-        </p:nvCxnSpPr>
-        <p:spPr>
-          <a:xfrm>
-            <a:off x="9308592" y="2075688"/>
-            <a:ext cx="1005840" cy="804672"/>
-          </a:xfrm>
-          <a:prstGeom prst="line">
-            <a:avLst/>
-          </a:prstGeom>
-          <a:ln w="12700">
-            <a:solidFill>
-              <a:srgbClr val="587678"/>
-            </a:solidFill>
-          </a:ln>
-        </p:spPr>
-        <p:style>
-          <a:lnRef idx="2">
-            <a:schemeClr val="accent1"/>
-          </a:lnRef>
-          <a:fillRef idx="0">
-            <a:schemeClr val="accent1"/>
-          </a:fillRef>
-          <a:effectRef idx="1">
-            <a:schemeClr val="accent1"/>
-          </a:effectRef>
-          <a:fontRef idx="minor">
-            <a:schemeClr val="tx1"/>
-          </a:fontRef>
-        </p:style>
-      </p:cxnSp>
-      <p:sp>
-        <p:nvSpPr>
-          <p:cNvPr id="10" name="Oval 9"/>
+      <p:sp>
+        <p:nvSpPr>
+          <p:cNvPr id="15" name="Oval 14"/>
           <p:cNvSpPr/>
           <p:nvPr/>
         </p:nvSpPr>
         <p:spPr>
           <a:xfrm>
-            <a:off x="7726679" y="4645152"/>
-            <a:ext cx="603504" cy="603504"/>
+            <a:off x="7589520" y="4361688"/>
+            <a:ext cx="822960" cy="822960"/>
           </a:xfrm>
           <a:prstGeom prst="ellipse">
             <a:avLst/>
@@ -3491,67 +3683,32 @@
           </a:fontRef>
         </p:style>
         <p:txBody>
-          <a:bodyPr rtlCol="0" anchor="ctr"/>
+          <a:bodyPr rtlCol="0" anchor="ctr" wrap="none" lIns="18288" rIns="18288" tIns="0" bIns="0"/>
           <a:lstStyle/>
           <a:p>
             <a:pPr algn="ctr"/>
             <a:r>
-              <a:rPr sz="850" b="1">
-                <a:solidFill>
-                  <a:srgbClr val="0D2226"/>
-                </a:solidFill>
-                <a:latin typeface="Aptos"/>
+              <a:rPr sz="1150" b="1">
+                <a:solidFill>
+                  <a:srgbClr val="0F2023"/>
+                </a:solidFill>
+                <a:latin typeface="Aptos Display"/>
               </a:rPr>
               <a:t>Marin</a:t>
             </a:r>
           </a:p>
         </p:txBody>
       </p:sp>
-      <p:cxnSp>
-        <p:nvCxnSpPr>
-          <p:cNvPr id="11" name="Connector 10"/>
-          <p:cNvCxnSpPr/>
-          <p:nvPr/>
-        </p:nvCxnSpPr>
-        <p:spPr>
-          <a:xfrm flipH="1">
-            <a:off x="8028431" y="2075688"/>
-            <a:ext cx="1280161" cy="2569464"/>
-          </a:xfrm>
-          <a:prstGeom prst="line">
-            <a:avLst/>
-          </a:prstGeom>
-          <a:ln w="12700">
-            <a:solidFill>
-              <a:srgbClr val="587678"/>
-            </a:solidFill>
-          </a:ln>
-        </p:spPr>
-        <p:style>
-          <a:lnRef idx="2">
-            <a:schemeClr val="accent1"/>
-          </a:lnRef>
-          <a:fillRef idx="0">
-            <a:schemeClr val="accent1"/>
-          </a:fillRef>
-          <a:effectRef idx="1">
-            <a:schemeClr val="accent1"/>
-          </a:effectRef>
-          <a:fontRef idx="minor">
-            <a:schemeClr val="tx1"/>
-          </a:fontRef>
-        </p:style>
-      </p:cxnSp>
-      <p:sp>
-        <p:nvSpPr>
-          <p:cNvPr id="12" name="Oval 11"/>
+      <p:sp>
+        <p:nvSpPr>
+          <p:cNvPr id="16" name="Oval 15"/>
           <p:cNvSpPr/>
           <p:nvPr/>
         </p:nvSpPr>
         <p:spPr>
           <a:xfrm>
-            <a:off x="10287000" y="4645152"/>
-            <a:ext cx="603504" cy="603504"/>
+            <a:off x="10236707" y="4320540"/>
+            <a:ext cx="777240" cy="777240"/>
           </a:xfrm>
           <a:prstGeom prst="ellipse">
             <a:avLst/>
@@ -3580,162 +3737,22 @@
           </a:fontRef>
         </p:style>
         <p:txBody>
-          <a:bodyPr rtlCol="0" anchor="ctr"/>
+          <a:bodyPr rtlCol="0" anchor="ctr" wrap="none" lIns="18288" rIns="18288" tIns="0" bIns="0"/>
           <a:lstStyle/>
           <a:p>
             <a:pPr algn="ctr"/>
             <a:r>
-              <a:rPr sz="850" b="1">
-                <a:solidFill>
-                  <a:srgbClr val="0D2226"/>
-                </a:solidFill>
-                <a:latin typeface="Aptos"/>
+              <a:rPr sz="1150" b="1">
+                <a:solidFill>
+                  <a:srgbClr val="0F2023"/>
+                </a:solidFill>
+                <a:latin typeface="Aptos Display"/>
               </a:rPr>
               <a:t>SJ</a:t>
             </a:r>
           </a:p>
         </p:txBody>
       </p:sp>
-      <p:cxnSp>
-        <p:nvCxnSpPr>
-          <p:cNvPr id="13" name="Connector 12"/>
-          <p:cNvCxnSpPr/>
-          <p:nvPr/>
-        </p:nvCxnSpPr>
-        <p:spPr>
-          <a:xfrm>
-            <a:off x="9308592" y="2075688"/>
-            <a:ext cx="1280160" cy="2569464"/>
-          </a:xfrm>
-          <a:prstGeom prst="line">
-            <a:avLst/>
-          </a:prstGeom>
-          <a:ln w="12700">
-            <a:solidFill>
-              <a:srgbClr val="587678"/>
-            </a:solidFill>
-          </a:ln>
-        </p:spPr>
-        <p:style>
-          <a:lnRef idx="2">
-            <a:schemeClr val="accent1"/>
-          </a:lnRef>
-          <a:fillRef idx="0">
-            <a:schemeClr val="accent1"/>
-          </a:fillRef>
-          <a:effectRef idx="1">
-            <a:schemeClr val="accent1"/>
-          </a:effectRef>
-          <a:fontRef idx="minor">
-            <a:schemeClr val="tx1"/>
-          </a:fontRef>
-        </p:style>
-      </p:cxnSp>
-      <p:cxnSp>
-        <p:nvCxnSpPr>
-          <p:cNvPr id="14" name="Connector 13"/>
-          <p:cNvCxnSpPr/>
-          <p:nvPr/>
-        </p:nvCxnSpPr>
-        <p:spPr>
-          <a:xfrm>
-            <a:off x="8055864" y="3182112"/>
-            <a:ext cx="1956816" cy="0"/>
-          </a:xfrm>
-          <a:prstGeom prst="line">
-            <a:avLst/>
-          </a:prstGeom>
-          <a:ln w="40640">
-            <a:solidFill>
-              <a:srgbClr val="F4B146"/>
-            </a:solidFill>
-          </a:ln>
-        </p:spPr>
-        <p:style>
-          <a:lnRef idx="2">
-            <a:schemeClr val="accent1"/>
-          </a:lnRef>
-          <a:fillRef idx="0">
-            <a:schemeClr val="accent1"/>
-          </a:fillRef>
-          <a:effectRef idx="1">
-            <a:schemeClr val="accent1"/>
-          </a:effectRef>
-          <a:fontRef idx="minor">
-            <a:schemeClr val="tx1"/>
-          </a:fontRef>
-        </p:style>
-      </p:cxnSp>
-      <p:cxnSp>
-        <p:nvCxnSpPr>
-          <p:cNvPr id="15" name="Connector 14"/>
-          <p:cNvCxnSpPr/>
-          <p:nvPr/>
-        </p:nvCxnSpPr>
-        <p:spPr>
-          <a:xfrm>
-            <a:off x="8028431" y="4956048"/>
-            <a:ext cx="2258569" cy="0"/>
-          </a:xfrm>
-          <a:prstGeom prst="line">
-            <a:avLst/>
-          </a:prstGeom>
-          <a:ln w="40640">
-            <a:solidFill>
-              <a:srgbClr val="F4B146"/>
-            </a:solidFill>
-          </a:ln>
-        </p:spPr>
-        <p:style>
-          <a:lnRef idx="2">
-            <a:schemeClr val="accent1"/>
-          </a:lnRef>
-          <a:fillRef idx="0">
-            <a:schemeClr val="accent1"/>
-          </a:fillRef>
-          <a:effectRef idx="1">
-            <a:schemeClr val="accent1"/>
-          </a:effectRef>
-          <a:fontRef idx="minor">
-            <a:schemeClr val="tx1"/>
-          </a:fontRef>
-        </p:style>
-      </p:cxnSp>
-      <p:cxnSp>
-        <p:nvCxnSpPr>
-          <p:cNvPr id="16" name="Connector 15"/>
-          <p:cNvCxnSpPr/>
-          <p:nvPr/>
-        </p:nvCxnSpPr>
-        <p:spPr>
-          <a:xfrm>
-            <a:off x="7744968" y="3483864"/>
-            <a:ext cx="283463" cy="1161288"/>
-          </a:xfrm>
-          <a:prstGeom prst="line">
-            <a:avLst/>
-          </a:prstGeom>
-          <a:ln w="30480">
-            <a:solidFill>
-              <a:srgbClr val="F4B146"/>
-            </a:solidFill>
-          </a:ln>
-        </p:spPr>
-        <p:style>
-          <a:lnRef idx="2">
-            <a:schemeClr val="accent1"/>
-          </a:lnRef>
-          <a:fillRef idx="0">
-            <a:schemeClr val="accent1"/>
-          </a:fillRef>
-          <a:effectRef idx="1">
-            <a:schemeClr val="accent1"/>
-          </a:effectRef>
-          <a:fontRef idx="minor">
-            <a:schemeClr val="tx1"/>
-          </a:fontRef>
-        </p:style>
-      </p:cxnSp>
       <p:sp>
         <p:nvSpPr>
           <p:cNvPr id="17" name="Rounded Rectangle 16"/>
@@ -3744,8 +3761,8 @@
         </p:nvSpPr>
         <p:spPr>
           <a:xfrm>
-            <a:off x="713232" y="4041648"/>
-            <a:ext cx="2057400" cy="941832"/>
+            <a:off x="694944" y="3767328"/>
+            <a:ext cx="1737360" cy="822960"/>
           </a:xfrm>
           <a:prstGeom prst="roundRect">
             <a:avLst/>
@@ -3755,7 +3772,7 @@
           </a:solidFill>
           <a:ln w="12700">
             <a:solidFill>
-              <a:srgbClr val="CCDED8"/>
+              <a:srgbClr val="C3D7D2"/>
             </a:solidFill>
           </a:ln>
         </p:spPr>
@@ -3774,91 +3791,48 @@
           </a:fontRef>
         </p:style>
         <p:txBody>
-          <a:bodyPr rtlCol="0" anchor="ctr"/>
+          <a:bodyPr rtlCol="0" anchor="ctr" wrap="square" lIns="164592" rIns="146304" tIns="109728" bIns="73152"/>
           <a:lstStyle/>
           <a:p>
             <a:pPr algn="ctr"/>
-          </a:p>
-        </p:txBody>
-      </p:sp>
-      <p:sp>
-        <p:nvSpPr>
-          <p:cNvPr id="18" name="TextBox 17"/>
-          <p:cNvSpPr txBox="1"/>
-          <p:nvPr/>
-        </p:nvSpPr>
-        <p:spPr>
-          <a:xfrm>
-            <a:off x="877824" y="4169663"/>
-            <a:ext cx="1764792" cy="292608"/>
-          </a:xfrm>
-          <a:prstGeom prst="rect">
-            <a:avLst/>
-          </a:prstGeom>
-          <a:noFill/>
-        </p:spPr>
-        <p:txBody>
-          <a:bodyPr wrap="square" lIns="18288" rIns="18288" tIns="18288" bIns="18288">
-            <a:spAutoFit/>
-          </a:bodyPr>
-          <a:lstStyle/>
-          <a:p>
-            <a:r>
-              <a:rPr sz="2200" b="1">
-                <a:solidFill>
-                  <a:srgbClr val="F4B146"/>
+            <a:r>
+              <a:rPr sz="2600" b="1">
+                <a:solidFill>
+                  <a:srgbClr val="F6B23C"/>
+                </a:solidFill>
+                <a:latin typeface="Aptos Display"/>
+              </a:rPr>
+              <a:t>60k</a:t>
+            </a:r>
+          </a:p>
+          <a:p>
+            <a:pPr>
+              <a:spcBef>
+                <a:spcPts val="200"/>
+              </a:spcBef>
+            </a:pPr>
+            <a:r>
+              <a:rPr sz="1150">
+                <a:solidFill>
+                  <a:srgbClr val="4F6369"/>
                 </a:solidFill>
                 <a:latin typeface="Aptos"/>
               </a:rPr>
-              <a:t>60k</a:t>
-            </a:r>
-          </a:p>
-        </p:txBody>
-      </p:sp>
-      <p:sp>
-        <p:nvSpPr>
-          <p:cNvPr id="19" name="TextBox 18"/>
-          <p:cNvSpPr txBox="1"/>
-          <p:nvPr/>
-        </p:nvSpPr>
-        <p:spPr>
-          <a:xfrm>
-            <a:off x="877824" y="4553712"/>
-            <a:ext cx="1746504" cy="292608"/>
-          </a:xfrm>
-          <a:prstGeom prst="rect">
-            <a:avLst/>
-          </a:prstGeom>
-          <a:noFill/>
-        </p:spPr>
-        <p:txBody>
-          <a:bodyPr wrap="square" lIns="18288" rIns="18288" tIns="18288" bIns="18288">
-            <a:spAutoFit/>
-          </a:bodyPr>
-          <a:lstStyle/>
-          <a:p>
-            <a:r>
-              <a:rPr sz="840" b="0">
-                <a:solidFill>
-                  <a:srgbClr val="58696F"/>
-                </a:solidFill>
-                <a:latin typeface="Aptos"/>
-              </a:rPr>
-              <a:t>U.S. pantry and meal-program network scale</a:t>
-            </a:r>
-          </a:p>
-        </p:txBody>
-      </p:sp>
-      <p:sp>
-        <p:nvSpPr>
-          <p:cNvPr id="20" name="Rounded Rectangle 19"/>
+              <a:t>U.S. pantry / meal-program network</a:t>
+            </a:r>
+          </a:p>
+        </p:txBody>
+      </p:sp>
+      <p:sp>
+        <p:nvSpPr>
+          <p:cNvPr id="18" name="Rounded Rectangle 17"/>
           <p:cNvSpPr/>
           <p:nvPr/>
         </p:nvSpPr>
         <p:spPr>
           <a:xfrm>
-            <a:off x="2944368" y="4041648"/>
-            <a:ext cx="2057400" cy="941832"/>
+            <a:off x="2651760" y="3767328"/>
+            <a:ext cx="1828800" cy="822960"/>
           </a:xfrm>
           <a:prstGeom prst="roundRect">
             <a:avLst/>
@@ -3868,7 +3842,7 @@
           </a:solidFill>
           <a:ln w="12700">
             <a:solidFill>
-              <a:srgbClr val="CCDED8"/>
+              <a:srgbClr val="C3D7D2"/>
             </a:solidFill>
           </a:ln>
         </p:spPr>
@@ -3887,91 +3861,48 @@
           </a:fontRef>
         </p:style>
         <p:txBody>
-          <a:bodyPr rtlCol="0" anchor="ctr"/>
+          <a:bodyPr rtlCol="0" anchor="ctr" wrap="square" lIns="164592" rIns="146304" tIns="109728" bIns="73152"/>
           <a:lstStyle/>
           <a:p>
             <a:pPr algn="ctr"/>
-          </a:p>
-        </p:txBody>
-      </p:sp>
-      <p:sp>
-        <p:nvSpPr>
-          <p:cNvPr id="21" name="TextBox 20"/>
-          <p:cNvSpPr txBox="1"/>
-          <p:nvPr/>
-        </p:nvSpPr>
-        <p:spPr>
-          <a:xfrm>
-            <a:off x="3108960" y="4169663"/>
-            <a:ext cx="1764792" cy="292608"/>
-          </a:xfrm>
-          <a:prstGeom prst="rect">
-            <a:avLst/>
-          </a:prstGeom>
-          <a:noFill/>
-        </p:spPr>
-        <p:txBody>
-          <a:bodyPr wrap="square" lIns="18288" rIns="18288" tIns="18288" bIns="18288">
-            <a:spAutoFit/>
-          </a:bodyPr>
-          <a:lstStyle/>
-          <a:p>
-            <a:r>
-              <a:rPr sz="2200" b="1">
-                <a:solidFill>
-                  <a:srgbClr val="F4B146"/>
+            <a:r>
+              <a:rPr sz="2600" b="1">
+                <a:solidFill>
+                  <a:srgbClr val="F6B23C"/>
+                </a:solidFill>
+                <a:latin typeface="Aptos Display"/>
+              </a:rPr>
+              <a:t>350+</a:t>
+            </a:r>
+          </a:p>
+          <a:p>
+            <a:pPr>
+              <a:spcBef>
+                <a:spcPts val="200"/>
+              </a:spcBef>
+            </a:pPr>
+            <a:r>
+              <a:rPr sz="1150">
+                <a:solidFill>
+                  <a:srgbClr val="4F6369"/>
                 </a:solidFill>
                 <a:latin typeface="Aptos"/>
               </a:rPr>
-              <a:t>350+</a:t>
-            </a:r>
-          </a:p>
-        </p:txBody>
-      </p:sp>
-      <p:sp>
-        <p:nvSpPr>
-          <p:cNvPr id="22" name="TextBox 21"/>
-          <p:cNvSpPr txBox="1"/>
-          <p:nvPr/>
-        </p:nvSpPr>
-        <p:spPr>
-          <a:xfrm>
-            <a:off x="3108960" y="4553712"/>
-            <a:ext cx="1746504" cy="292608"/>
-          </a:xfrm>
-          <a:prstGeom prst="rect">
-            <a:avLst/>
-          </a:prstGeom>
-          <a:noFill/>
-        </p:spPr>
-        <p:txBody>
-          <a:bodyPr wrap="square" lIns="18288" rIns="18288" tIns="18288" bIns="18288">
-            <a:spAutoFit/>
-          </a:bodyPr>
-          <a:lstStyle/>
-          <a:p>
-            <a:r>
-              <a:rPr sz="840" b="0">
-                <a:solidFill>
-                  <a:srgbClr val="58696F"/>
-                </a:solidFill>
-                <a:latin typeface="Aptos"/>
-              </a:rPr>
-              <a:t>Alameda County partner agencies</a:t>
-            </a:r>
-          </a:p>
-        </p:txBody>
-      </p:sp>
-      <p:sp>
-        <p:nvSpPr>
-          <p:cNvPr id="23" name="Rounded Rectangle 22"/>
+              <a:t>ACCFB Alameda partner agencies</a:t>
+            </a:r>
+          </a:p>
+        </p:txBody>
+      </p:sp>
+      <p:sp>
+        <p:nvSpPr>
+          <p:cNvPr id="19" name="Rounded Rectangle 18"/>
           <p:cNvSpPr/>
           <p:nvPr/>
         </p:nvSpPr>
         <p:spPr>
           <a:xfrm>
-            <a:off x="5175504" y="4041648"/>
-            <a:ext cx="2057400" cy="941832"/>
+            <a:off x="4709160" y="3767328"/>
+            <a:ext cx="1783080" cy="822960"/>
           </a:xfrm>
           <a:prstGeom prst="roundRect">
             <a:avLst/>
@@ -3981,7 +3912,7 @@
           </a:solidFill>
           <a:ln w="12700">
             <a:solidFill>
-              <a:srgbClr val="CCDED8"/>
+              <a:srgbClr val="C3D7D2"/>
             </a:solidFill>
           </a:ln>
         </p:spPr>
@@ -4000,23 +3931,48 @@
           </a:fontRef>
         </p:style>
         <p:txBody>
-          <a:bodyPr rtlCol="0" anchor="ctr"/>
+          <a:bodyPr rtlCol="0" anchor="ctr" wrap="square" lIns="164592" rIns="146304" tIns="109728" bIns="73152"/>
           <a:lstStyle/>
           <a:p>
             <a:pPr algn="ctr"/>
-          </a:p>
-        </p:txBody>
-      </p:sp>
-      <p:sp>
-        <p:nvSpPr>
-          <p:cNvPr id="24" name="TextBox 23"/>
+            <a:r>
+              <a:rPr sz="2600" b="1">
+                <a:solidFill>
+                  <a:srgbClr val="F6B23C"/>
+                </a:solidFill>
+                <a:latin typeface="Aptos Display"/>
+              </a:rPr>
+              <a:t>900+</a:t>
+            </a:r>
+          </a:p>
+          <a:p>
+            <a:pPr>
+              <a:spcBef>
+                <a:spcPts val="200"/>
+              </a:spcBef>
+            </a:pPr>
+            <a:r>
+              <a:rPr sz="1150">
+                <a:solidFill>
+                  <a:srgbClr val="4F6369"/>
+                </a:solidFill>
+                <a:latin typeface="Aptos"/>
+              </a:rPr>
+              <a:t>Second Harvest SV distribution sites</a:t>
+            </a:r>
+          </a:p>
+        </p:txBody>
+      </p:sp>
+      <p:sp>
+        <p:nvSpPr>
+          <p:cNvPr id="20" name="TextBox 19"/>
           <p:cNvSpPr txBox="1"/>
           <p:nvPr/>
         </p:nvSpPr>
         <p:spPr>
           <a:xfrm>
-            <a:off x="5340096" y="4169663"/>
-            <a:ext cx="1764792" cy="292608"/>
+            <a:off x="713232" y="5349240"/>
+            <a:ext cx="7680960" cy="640080"/>
           </a:xfrm>
           <a:prstGeom prst="rect">
             <a:avLst/>
@@ -4024,33 +3980,41 @@
           <a:noFill/>
         </p:spPr>
         <p:txBody>
-          <a:bodyPr wrap="square" lIns="18288" rIns="18288" tIns="18288" bIns="18288">
+          <a:bodyPr wrap="square" lIns="0" rIns="0" tIns="0" bIns="0">
             <a:spAutoFit/>
           </a:bodyPr>
           <a:lstStyle/>
           <a:p>
+            <a:pPr algn="l">
+              <a:spcBef>
+                <a:spcPts val="0"/>
+              </a:spcBef>
+              <a:spcAft>
+                <a:spcPts val="0"/>
+              </a:spcAft>
+            </a:pPr>
             <a:r>
               <a:rPr sz="2200" b="1">
                 <a:solidFill>
-                  <a:srgbClr val="F4B146"/>
-                </a:solidFill>
-                <a:latin typeface="Aptos"/>
-              </a:rPr>
-              <a:t>900+</a:t>
-            </a:r>
-          </a:p>
-        </p:txBody>
-      </p:sp>
-      <p:sp>
-        <p:nvSpPr>
-          <p:cNvPr id="25" name="TextBox 24"/>
+                  <a:srgbClr val="FFFFFF"/>
+                </a:solidFill>
+                <a:latin typeface="Aptos Display"/>
+              </a:rPr>
+              <a:t>One shared layer for inventory visibility and governed pantry-to-pantry movement.</a:t>
+            </a:r>
+          </a:p>
+        </p:txBody>
+      </p:sp>
+      <p:sp>
+        <p:nvSpPr>
+          <p:cNvPr id="21" name="TextBox 20"/>
           <p:cNvSpPr txBox="1"/>
           <p:nvPr/>
         </p:nvSpPr>
         <p:spPr>
           <a:xfrm>
-            <a:off x="5340096" y="4553712"/>
-            <a:ext cx="1746504" cy="292608"/>
+            <a:off x="658368" y="6446520"/>
+            <a:ext cx="9692640" cy="201168"/>
           </a:xfrm>
           <a:prstGeom prst="rect">
             <a:avLst/>
@@ -4058,33 +4022,41 @@
           <a:noFill/>
         </p:spPr>
         <p:txBody>
-          <a:bodyPr wrap="square" lIns="18288" rIns="18288" tIns="18288" bIns="18288">
+          <a:bodyPr wrap="square" lIns="0" rIns="0" tIns="0" bIns="0">
             <a:spAutoFit/>
           </a:bodyPr>
           <a:lstStyle/>
           <a:p>
-            <a:r>
-              <a:rPr sz="840" b="0">
-                <a:solidFill>
-                  <a:srgbClr val="58696F"/>
+            <a:pPr algn="l">
+              <a:spcBef>
+                <a:spcPts val="0"/>
+              </a:spcBef>
+              <a:spcAft>
+                <a:spcPts val="0"/>
+              </a:spcAft>
+            </a:pPr>
+            <a:r>
+              <a:rPr sz="1050" b="0">
+                <a:solidFill>
+                  <a:srgbClr val="779094"/>
                 </a:solidFill>
                 <a:latin typeface="Aptos"/>
               </a:rPr>
-              <a:t>Second Harvest SV distribution sites</a:t>
-            </a:r>
-          </a:p>
-        </p:txBody>
-      </p:sp>
-      <p:sp>
-        <p:nvSpPr>
-          <p:cNvPr id="26" name="TextBox 25"/>
+              <a:t>Sources: Feeding America, ACCFB, Second Harvest Silicon Valley</a:t>
+            </a:r>
+          </a:p>
+        </p:txBody>
+      </p:sp>
+      <p:sp>
+        <p:nvSpPr>
+          <p:cNvPr id="22" name="TextBox 21"/>
           <p:cNvSpPr txBox="1"/>
           <p:nvPr/>
         </p:nvSpPr>
         <p:spPr>
           <a:xfrm>
-            <a:off x="713232" y="5669280"/>
-            <a:ext cx="7498079" cy="310896"/>
+            <a:off x="11265408" y="6446520"/>
+            <a:ext cx="502920" cy="201168"/>
           </a:xfrm>
           <a:prstGeom prst="rect">
             <a:avLst/>
@@ -4092,88 +4064,27 @@
           <a:noFill/>
         </p:spPr>
         <p:txBody>
-          <a:bodyPr wrap="square" lIns="18288" rIns="18288" tIns="18288" bIns="18288">
+          <a:bodyPr wrap="square" lIns="0" rIns="0" tIns="0" bIns="0">
             <a:spAutoFit/>
           </a:bodyPr>
           <a:lstStyle/>
           <a:p>
-            <a:r>
-              <a:rPr sz="1550" b="1">
-                <a:solidFill>
-                  <a:srgbClr val="FFFFFF"/>
+            <a:pPr algn="r">
+              <a:spcBef>
+                <a:spcPts val="0"/>
+              </a:spcBef>
+              <a:spcAft>
+                <a:spcPts val="0"/>
+              </a:spcAft>
+            </a:pPr>
+            <a:r>
+              <a:rPr sz="1050" b="0">
+                <a:solidFill>
+                  <a:srgbClr val="779094"/>
                 </a:solidFill>
                 <a:latin typeface="Aptos"/>
               </a:rPr>
-              <a:t>GoodCo adds the missing lateral layer: inventory visibility plus governed pantry-to-pantry movement.</a:t>
-            </a:r>
-          </a:p>
-        </p:txBody>
-      </p:sp>
-      <p:sp>
-        <p:nvSpPr>
-          <p:cNvPr id="27" name="TextBox 26"/>
-          <p:cNvSpPr txBox="1"/>
-          <p:nvPr/>
-        </p:nvSpPr>
-        <p:spPr>
-          <a:xfrm>
-            <a:off x="658368" y="6473952"/>
-            <a:ext cx="8778240" cy="164592"/>
-          </a:xfrm>
-          <a:prstGeom prst="rect">
-            <a:avLst/>
-          </a:prstGeom>
-          <a:noFill/>
-        </p:spPr>
-        <p:txBody>
-          <a:bodyPr wrap="square" lIns="18288" rIns="18288" tIns="18288" bIns="18288">
-            <a:spAutoFit/>
-          </a:bodyPr>
-          <a:lstStyle/>
-          <a:p>
-            <a:r>
-              <a:rPr sz="650" b="0">
-                <a:solidFill>
-                  <a:srgbClr val="58696F"/>
-                </a:solidFill>
-                <a:latin typeface="Aptos"/>
-              </a:rPr>
-              <a:t>Sources: Feeding America, Alameda County Community Food Bank, Second Harvest Silicon Valley</a:t>
-            </a:r>
-          </a:p>
-        </p:txBody>
-      </p:sp>
-      <p:sp>
-        <p:nvSpPr>
-          <p:cNvPr id="28" name="TextBox 27"/>
-          <p:cNvSpPr txBox="1"/>
-          <p:nvPr/>
-        </p:nvSpPr>
-        <p:spPr>
-          <a:xfrm>
-            <a:off x="10927080" y="6473952"/>
-            <a:ext cx="658368" cy="164592"/>
-          </a:xfrm>
-          <a:prstGeom prst="rect">
-            <a:avLst/>
-          </a:prstGeom>
-          <a:noFill/>
-        </p:spPr>
-        <p:txBody>
-          <a:bodyPr wrap="square" lIns="18288" rIns="18288" tIns="18288" bIns="18288">
-            <a:spAutoFit/>
-          </a:bodyPr>
-          <a:lstStyle/>
-          <a:p>
-            <a:pPr algn="r"/>
-            <a:r>
-              <a:rPr sz="750" b="0">
-                <a:solidFill>
-                  <a:srgbClr val="58696F"/>
-                </a:solidFill>
-                <a:latin typeface="Aptos"/>
-              </a:rPr>
-              <a:t>01 / 04</a:t>
+              <a:t>01 / 05</a:t>
             </a:r>
           </a:p>
         </p:txBody>
@@ -4192,7 +4103,7 @@
     <p:bg>
       <p:bgPr>
         <a:solidFill>
-          <a:srgbClr val="F7FAF8"/>
+          <a:srgbClr val="F6FAF8"/>
         </a:solidFill>
         <a:effectLst/>
       </p:bgPr>
@@ -4212,18 +4123,18 @@
         </p:nvSpPr>
         <p:spPr>
           <a:xfrm>
-            <a:off x="658368" y="438912"/>
-            <a:ext cx="1417320" cy="310896"/>
+            <a:off x="658368" y="502920"/>
+            <a:ext cx="1371600" cy="384048"/>
           </a:xfrm>
           <a:prstGeom prst="roundRect">
             <a:avLst/>
           </a:prstGeom>
           <a:solidFill>
-            <a:srgbClr val="E5F3EE"/>
+            <a:srgbClr val="DBEFEA"/>
           </a:solidFill>
-          <a:ln>
+          <a:ln w="12700">
             <a:solidFill>
-              <a:srgbClr val="CCDED8"/>
+              <a:srgbClr val="C3D7D2"/>
             </a:solidFill>
           </a:ln>
         </p:spPr>
@@ -4242,14 +4153,14 @@
           </a:fontRef>
         </p:style>
         <p:txBody>
-          <a:bodyPr rtlCol="0" anchor="ctr"/>
+          <a:bodyPr rtlCol="0" anchor="ctr" wrap="none" lIns="73152" rIns="73152" tIns="18288" bIns="18288"/>
           <a:lstStyle/>
           <a:p>
             <a:pPr algn="ctr"/>
             <a:r>
-              <a:rPr sz="850" b="1">
-                <a:solidFill>
-                  <a:srgbClr val="005A52"/>
+              <a:rPr sz="1050" b="1">
+                <a:solidFill>
+                  <a:srgbClr val="005E53"/>
                 </a:solidFill>
                 <a:latin typeface="Aptos"/>
               </a:rPr>
@@ -4266,8 +4177,8 @@
         </p:nvSpPr>
         <p:spPr>
           <a:xfrm>
-            <a:off x="658368" y="896112"/>
-            <a:ext cx="9052560" cy="658368"/>
+            <a:off x="658368" y="1115568"/>
+            <a:ext cx="10515600" cy="566928"/>
           </a:xfrm>
           <a:prstGeom prst="rect">
             <a:avLst/>
@@ -4275,19 +4186,27 @@
           <a:noFill/>
         </p:spPr>
         <p:txBody>
-          <a:bodyPr wrap="square" lIns="18288" rIns="18288" tIns="18288" bIns="18288">
+          <a:bodyPr wrap="square" lIns="0" rIns="0" tIns="0" bIns="0">
             <a:spAutoFit/>
           </a:bodyPr>
           <a:lstStyle/>
           <a:p>
-            <a:r>
-              <a:rPr sz="2800" b="1">
-                <a:solidFill>
-                  <a:srgbClr val="121F23"/>
-                </a:solidFill>
-                <a:latin typeface="Aptos"/>
-              </a:rPr>
-              <a:t>We are solving one movement problem deeply.</a:t>
+            <a:pPr algn="l">
+              <a:spcBef>
+                <a:spcPts val="0"/>
+              </a:spcBef>
+              <a:spcAft>
+                <a:spcPts val="0"/>
+              </a:spcAft>
+            </a:pPr>
+            <a:r>
+              <a:rPr sz="3500" b="1">
+                <a:solidFill>
+                  <a:srgbClr val="0F2023"/>
+                </a:solidFill>
+                <a:latin typeface="Aptos Display"/>
+              </a:rPr>
+              <a:t>Theme 7 is the product. Theme 2 makes it trustworthy.</a:t>
             </a:r>
           </a:p>
         </p:txBody>
@@ -4300,8 +4219,8 @@
         </p:nvSpPr>
         <p:spPr>
           <a:xfrm>
-            <a:off x="685800" y="1581912"/>
-            <a:ext cx="8686800" cy="402336"/>
+            <a:off x="694944" y="1874519"/>
+            <a:ext cx="10241280" cy="384048"/>
           </a:xfrm>
           <a:prstGeom prst="rect">
             <a:avLst/>
@@ -4309,19 +4228,27 @@
           <a:noFill/>
         </p:spPr>
         <p:txBody>
-          <a:bodyPr wrap="square" lIns="18288" rIns="18288" tIns="18288" bIns="18288">
+          <a:bodyPr wrap="square" lIns="0" rIns="0" tIns="0" bIns="0">
             <a:spAutoFit/>
           </a:bodyPr>
           <a:lstStyle/>
           <a:p>
-            <a:r>
-              <a:rPr sz="1320" b="0">
-                <a:solidFill>
-                  <a:srgbClr val="58696F"/>
+            <a:pPr algn="l">
+              <a:spcBef>
+                <a:spcPts val="0"/>
+              </a:spcBef>
+              <a:spcAft>
+                <a:spcPts val="0"/>
+              </a:spcAft>
+            </a:pPr>
+            <a:r>
+              <a:rPr sz="2050" b="0">
+                <a:solidFill>
+                  <a:srgbClr val="4F6369"/>
                 </a:solidFill>
                 <a:latin typeface="Aptos"/>
               </a:rPr>
-              <a:t>Inventory is the trust layer that makes pantry-to-pantry movement safe enough to use.</a:t>
+              <a:t>The focus is lateral movement of food. Inventory is the control layer that keeps the movement safe.</a:t>
             </a:r>
           </a:p>
         </p:txBody>
@@ -4334,8 +4261,8 @@
         </p:nvSpPr>
         <p:spPr>
           <a:xfrm>
-            <a:off x="777240" y="1965960"/>
-            <a:ext cx="5120640" cy="3246120"/>
+            <a:off x="841248" y="2606040"/>
+            <a:ext cx="4983480" cy="1874519"/>
           </a:xfrm>
           <a:prstGeom prst="roundRect">
             <a:avLst/>
@@ -4343,9 +4270,9 @@
           <a:solidFill>
             <a:srgbClr val="FFFFFF"/>
           </a:solidFill>
-          <a:ln w="12700">
+          <a:ln w="15240">
             <a:solidFill>
-              <a:srgbClr val="CCDED8"/>
+              <a:srgbClr val="C3D7D2"/>
             </a:solidFill>
           </a:ln>
         </p:spPr>
@@ -4364,110 +4291,33 @@
           </a:fontRef>
         </p:style>
         <p:txBody>
-          <a:bodyPr rtlCol="0" anchor="ctr"/>
-          <a:lstStyle/>
-          <a:p>
-            <a:pPr algn="ctr"/>
-          </a:p>
-        </p:txBody>
-      </p:sp>
-      <p:sp>
-        <p:nvSpPr>
-          <p:cNvPr id="6" name="TextBox 5"/>
-          <p:cNvSpPr txBox="1"/>
-          <p:nvPr/>
-        </p:nvSpPr>
-        <p:spPr>
-          <a:xfrm>
-            <a:off x="1024128" y="2231136"/>
-            <a:ext cx="4389120" cy="256032"/>
-          </a:xfrm>
-          <a:prstGeom prst="rect">
-            <a:avLst/>
-          </a:prstGeom>
-          <a:noFill/>
-        </p:spPr>
-        <p:txBody>
-          <a:bodyPr wrap="square" lIns="18288" rIns="18288" tIns="18288" bIns="18288">
-            <a:spAutoFit/>
-          </a:bodyPr>
-          <a:lstStyle/>
-          <a:p>
-            <a:r>
-              <a:rPr sz="1400" b="1">
-                <a:solidFill>
-                  <a:srgbClr val="00897B"/>
+          <a:bodyPr rtlCol="0" anchor="ctr" wrap="square" lIns="201168" rIns="201168" tIns="164592" bIns="146304"/>
+          <a:lstStyle/>
+          <a:p>
+            <a:pPr algn="l"/>
+            <a:r>
+              <a:rPr sz="2200" b="1">
+                <a:solidFill>
+                  <a:srgbClr val="008B7A"/>
+                </a:solidFill>
+                <a:latin typeface="Aptos Display"/>
+              </a:rPr>
+              <a:t>Primary: Theme 7, Problem 34</a:t>
+            </a:r>
+          </a:p>
+          <a:p>
+            <a:pPr algn="l">
+              <a:spcBef>
+                <a:spcPts val="800"/>
+              </a:spcBef>
+            </a:pPr>
+            <a:r>
+              <a:rPr sz="2300" b="0">
+                <a:solidFill>
+                  <a:srgbClr val="0F2023"/>
                 </a:solidFill>
                 <a:latin typeface="Aptos"/>
               </a:rPr>
-              <a:t>Primary problem</a:t>
-            </a:r>
-          </a:p>
-        </p:txBody>
-      </p:sp>
-      <p:sp>
-        <p:nvSpPr>
-          <p:cNvPr id="7" name="TextBox 6"/>
-          <p:cNvSpPr txBox="1"/>
-          <p:nvPr/>
-        </p:nvSpPr>
-        <p:spPr>
-          <a:xfrm>
-            <a:off x="1024128" y="2633472"/>
-            <a:ext cx="4389120" cy="292608"/>
-          </a:xfrm>
-          <a:prstGeom prst="rect">
-            <a:avLst/>
-          </a:prstGeom>
-          <a:noFill/>
-        </p:spPr>
-        <p:txBody>
-          <a:bodyPr wrap="square" lIns="18288" rIns="18288" tIns="18288" bIns="18288">
-            <a:spAutoFit/>
-          </a:bodyPr>
-          <a:lstStyle/>
-          <a:p>
-            <a:r>
-              <a:rPr sz="2100" b="1">
-                <a:solidFill>
-                  <a:srgbClr val="121F23"/>
-                </a:solidFill>
-                <a:latin typeface="Aptos"/>
-              </a:rPr>
-              <a:t>Theme 7, Problem 34</a:t>
-            </a:r>
-          </a:p>
-        </p:txBody>
-      </p:sp>
-      <p:sp>
-        <p:nvSpPr>
-          <p:cNvPr id="8" name="TextBox 7"/>
-          <p:cNvSpPr txBox="1"/>
-          <p:nvPr/>
-        </p:nvSpPr>
-        <p:spPr>
-          <a:xfrm>
-            <a:off x="1024128" y="3090672"/>
-            <a:ext cx="4251960" cy="329184"/>
-          </a:xfrm>
-          <a:prstGeom prst="rect">
-            <a:avLst/>
-          </a:prstGeom>
-          <a:noFill/>
-        </p:spPr>
-        <p:txBody>
-          <a:bodyPr wrap="square" lIns="18288" rIns="18288" tIns="18288" bIns="18288">
-            <a:spAutoFit/>
-          </a:bodyPr>
-          <a:lstStyle/>
-          <a:p>
-            <a:r>
-              <a:rPr sz="1500" b="1">
-                <a:solidFill>
-                  <a:srgbClr val="121F23"/>
-                </a:solidFill>
-                <a:latin typeface="Aptos"/>
-              </a:rPr>
               <a:t>Match surplus to shortage before product ages out.</a:t>
             </a:r>
           </a:p>
@@ -4475,85 +4325,14 @@
       </p:sp>
       <p:sp>
         <p:nvSpPr>
-          <p:cNvPr id="9" name="TextBox 8"/>
-          <p:cNvSpPr txBox="1"/>
-          <p:nvPr/>
-        </p:nvSpPr>
-        <p:spPr>
-          <a:xfrm>
-            <a:off x="1024128" y="3675887"/>
-            <a:ext cx="4206240" cy="914400"/>
-          </a:xfrm>
-          <a:prstGeom prst="rect">
-            <a:avLst/>
-          </a:prstGeom>
-          <a:noFill/>
-        </p:spPr>
-        <p:txBody>
-          <a:bodyPr wrap="square">
-            <a:spAutoFit/>
-          </a:bodyPr>
-          <a:lstStyle/>
-          <a:p>
-            <a:pPr>
-              <a:spcAft>
-                <a:spcPts val="600"/>
-              </a:spcAft>
-              <a:defRPr sz="1170">
-                <a:solidFill>
-                  <a:srgbClr val="121F23"/>
-                </a:solidFill>
-                <a:latin typeface="Aptos"/>
-              </a:defRPr>
-            </a:pPr>
-            <a:r>
-              <a:t>GoodCo solves this at the pantry level.</a:t>
-            </a:r>
-          </a:p>
-          <a:p>
-            <a:pPr>
-              <a:spcAft>
-                <a:spcPts val="600"/>
-              </a:spcAft>
-              <a:defRPr sz="1170">
-                <a:solidFill>
-                  <a:srgbClr val="121F23"/>
-                </a:solidFill>
-                <a:latin typeface="Aptos"/>
-              </a:defRPr>
-            </a:pPr>
-            <a:r>
-              <a:t>Pantries publish eligible surplus.</a:t>
-            </a:r>
-          </a:p>
-          <a:p>
-            <a:pPr>
-              <a:spcAft>
-                <a:spcPts val="600"/>
-              </a:spcAft>
-              <a:defRPr sz="1170">
-                <a:solidFill>
-                  <a:srgbClr val="121F23"/>
-                </a:solidFill>
-                <a:latin typeface="Aptos"/>
-              </a:defRPr>
-            </a:pPr>
-            <a:r>
-              <a:t>Other pantries request it before it expires or sits idle.</a:t>
-            </a:r>
-          </a:p>
-        </p:txBody>
-      </p:sp>
-      <p:sp>
-        <p:nvSpPr>
-          <p:cNvPr id="10" name="Rounded Rectangle 9"/>
+          <p:cNvPr id="6" name="Rounded Rectangle 5"/>
           <p:cNvSpPr/>
           <p:nvPr/>
         </p:nvSpPr>
         <p:spPr>
           <a:xfrm>
-            <a:off x="6291072" y="1965960"/>
-            <a:ext cx="5120640" cy="3246120"/>
+            <a:off x="6291072" y="2606040"/>
+            <a:ext cx="4983480" cy="1874519"/>
           </a:xfrm>
           <a:prstGeom prst="roundRect">
             <a:avLst/>
@@ -4561,9 +4340,9 @@
           <a:solidFill>
             <a:srgbClr val="FFFFFF"/>
           </a:solidFill>
-          <a:ln w="12700">
+          <a:ln w="15240">
             <a:solidFill>
-              <a:srgbClr val="CCDED8"/>
+              <a:srgbClr val="C3D7D2"/>
             </a:solidFill>
           </a:ln>
         </p:spPr>
@@ -4582,23 +4361,48 @@
           </a:fontRef>
         </p:style>
         <p:txBody>
-          <a:bodyPr rtlCol="0" anchor="ctr"/>
-          <a:lstStyle/>
-          <a:p>
-            <a:pPr algn="ctr"/>
-          </a:p>
-        </p:txBody>
-      </p:sp>
-      <p:sp>
-        <p:nvSpPr>
-          <p:cNvPr id="11" name="TextBox 10"/>
+          <a:bodyPr rtlCol="0" anchor="ctr" wrap="square" lIns="201168" rIns="201168" tIns="164592" bIns="146304"/>
+          <a:lstStyle/>
+          <a:p>
+            <a:pPr algn="l"/>
+            <a:r>
+              <a:rPr sz="2200" b="1">
+                <a:solidFill>
+                  <a:srgbClr val="21608E"/>
+                </a:solidFill>
+                <a:latin typeface="Aptos Display"/>
+              </a:rPr>
+              <a:t>Supporting: Theme 2</a:t>
+            </a:r>
+          </a:p>
+          <a:p>
+            <a:pPr algn="l">
+              <a:spcBef>
+                <a:spcPts val="800"/>
+              </a:spcBef>
+            </a:pPr>
+            <a:r>
+              <a:rPr sz="2300" b="0">
+                <a:solidFill>
+                  <a:srgbClr val="0F2023"/>
+                </a:solidFill>
+                <a:latin typeface="Aptos"/>
+              </a:rPr>
+              <a:t>Verified receiving, shelf-life, and category data make each listing real.</a:t>
+            </a:r>
+          </a:p>
+        </p:txBody>
+      </p:sp>
+      <p:sp>
+        <p:nvSpPr>
+          <p:cNvPr id="7" name="TextBox 6"/>
           <p:cNvSpPr txBox="1"/>
           <p:nvPr/>
         </p:nvSpPr>
         <p:spPr>
           <a:xfrm>
-            <a:off x="6537960" y="2231136"/>
-            <a:ext cx="4389120" cy="256032"/>
+            <a:off x="1078992" y="5257800"/>
+            <a:ext cx="10058400" cy="502920"/>
           </a:xfrm>
           <a:prstGeom prst="rect">
             <a:avLst/>
@@ -4606,33 +4410,41 @@
           <a:noFill/>
         </p:spPr>
         <p:txBody>
-          <a:bodyPr wrap="square" lIns="18288" rIns="18288" tIns="18288" bIns="18288">
+          <a:bodyPr wrap="square" lIns="0" rIns="0" tIns="0" bIns="0">
             <a:spAutoFit/>
           </a:bodyPr>
           <a:lstStyle/>
           <a:p>
-            <a:r>
-              <a:rPr sz="1400" b="1">
-                <a:solidFill>
-                  <a:srgbClr val="00897B"/>
-                </a:solidFill>
-                <a:latin typeface="Aptos"/>
-              </a:rPr>
-              <a:t>Enabling foundation</a:t>
-            </a:r>
-          </a:p>
-        </p:txBody>
-      </p:sp>
-      <p:sp>
-        <p:nvSpPr>
-          <p:cNvPr id="12" name="TextBox 11"/>
+            <a:pPr algn="ctr">
+              <a:spcBef>
+                <a:spcPts val="0"/>
+              </a:spcBef>
+              <a:spcAft>
+                <a:spcPts val="0"/>
+              </a:spcAft>
+            </a:pPr>
+            <a:r>
+              <a:rPr sz="2300" b="1">
+                <a:solidFill>
+                  <a:srgbClr val="0F2023"/>
+                </a:solidFill>
+                <a:latin typeface="Aptos Display"/>
+              </a:rPr>
+              <a:t>One focused platform: pantry-to-pantry movement powered by confirmed pantry inventory.</a:t>
+            </a:r>
+          </a:p>
+        </p:txBody>
+      </p:sp>
+      <p:sp>
+        <p:nvSpPr>
+          <p:cNvPr id="8" name="TextBox 7"/>
           <p:cNvSpPr txBox="1"/>
           <p:nvPr/>
         </p:nvSpPr>
         <p:spPr>
           <a:xfrm>
-            <a:off x="6537960" y="2633472"/>
-            <a:ext cx="4389120" cy="292608"/>
+            <a:off x="658368" y="6446520"/>
+            <a:ext cx="9692640" cy="201168"/>
           </a:xfrm>
           <a:prstGeom prst="rect">
             <a:avLst/>
@@ -4640,33 +4452,41 @@
           <a:noFill/>
         </p:spPr>
         <p:txBody>
-          <a:bodyPr wrap="square" lIns="18288" rIns="18288" tIns="18288" bIns="18288">
+          <a:bodyPr wrap="square" lIns="0" rIns="0" tIns="0" bIns="0">
             <a:spAutoFit/>
           </a:bodyPr>
           <a:lstStyle/>
           <a:p>
-            <a:r>
-              <a:rPr sz="2100" b="1">
-                <a:solidFill>
-                  <a:srgbClr val="121F23"/>
+            <a:pPr algn="l">
+              <a:spcBef>
+                <a:spcPts val="0"/>
+              </a:spcBef>
+              <a:spcAft>
+                <a:spcPts val="0"/>
+              </a:spcAft>
+            </a:pPr>
+            <a:r>
+              <a:rPr sz="1050" b="0">
+                <a:solidFill>
+                  <a:srgbClr val="4F6369"/>
                 </a:solidFill>
                 <a:latin typeface="Aptos"/>
               </a:rPr>
-              <a:t>Theme 2, Problems 6, 9, 10</a:t>
-            </a:r>
-          </a:p>
-        </p:txBody>
-      </p:sp>
-      <p:sp>
-        <p:nvSpPr>
-          <p:cNvPr id="13" name="TextBox 12"/>
+              <a:t>Track mapping: primary problem = surplus-to-shortage matching; inventory work is the enabling foundation.</a:t>
+            </a:r>
+          </a:p>
+        </p:txBody>
+      </p:sp>
+      <p:sp>
+        <p:nvSpPr>
+          <p:cNvPr id="9" name="TextBox 8"/>
           <p:cNvSpPr txBox="1"/>
           <p:nvPr/>
         </p:nvSpPr>
         <p:spPr>
           <a:xfrm>
-            <a:off x="6537960" y="3136392"/>
-            <a:ext cx="4160520" cy="1298448"/>
+            <a:off x="11265408" y="6446520"/>
+            <a:ext cx="502920" cy="201168"/>
           </a:xfrm>
           <a:prstGeom prst="rect">
             <a:avLst/>
@@ -4674,176 +4494,27 @@
           <a:noFill/>
         </p:spPr>
         <p:txBody>
-          <a:bodyPr wrap="square">
+          <a:bodyPr wrap="square" lIns="0" rIns="0" tIns="0" bIns="0">
             <a:spAutoFit/>
           </a:bodyPr>
           <a:lstStyle/>
           <a:p>
-            <a:pPr>
+            <a:pPr algn="r">
+              <a:spcBef>
+                <a:spcPts val="0"/>
+              </a:spcBef>
               <a:spcAft>
-                <a:spcPts val="600"/>
+                <a:spcPts val="0"/>
               </a:spcAft>
-              <a:defRPr sz="1170">
-                <a:solidFill>
-                  <a:srgbClr val="121F23"/>
+            </a:pPr>
+            <a:r>
+              <a:rPr sz="1050" b="0">
+                <a:solidFill>
+                  <a:srgbClr val="4F6369"/>
                 </a:solidFill>
                 <a:latin typeface="Aptos"/>
-              </a:defRPr>
-            </a:pPr>
-            <a:r>
-              <a:t>Receiving creates the trusted lot.</a:t>
-            </a:r>
-          </a:p>
-          <a:p>
-            <a:pPr>
-              <a:spcAft>
-                <a:spcPts val="600"/>
-              </a:spcAft>
-              <a:defRPr sz="1170">
-                <a:solidFill>
-                  <a:srgbClr val="121F23"/>
-                </a:solidFill>
-                <a:latin typeface="Aptos"/>
-              </a:defRPr>
-            </a:pPr>
-            <a:r>
-              <a:t>Date and shelf-life capture show urgency.</a:t>
-            </a:r>
-          </a:p>
-          <a:p>
-            <a:pPr>
-              <a:spcAft>
-                <a:spcPts val="600"/>
-              </a:spcAft>
-              <a:defRPr sz="1170">
-                <a:solidFill>
-                  <a:srgbClr val="121F23"/>
-                </a:solidFill>
-                <a:latin typeface="Aptos"/>
-              </a:defRPr>
-            </a:pPr>
-            <a:r>
-              <a:t>Expiring view shows what should move.</a:t>
-            </a:r>
-          </a:p>
-          <a:p>
-            <a:pPr>
-              <a:spcAft>
-                <a:spcPts val="600"/>
-              </a:spcAft>
-              <a:defRPr sz="1170">
-                <a:solidFill>
-                  <a:srgbClr val="121F23"/>
-                </a:solidFill>
-                <a:latin typeface="Aptos"/>
-              </a:defRPr>
-            </a:pPr>
-            <a:r>
-              <a:t>Together, these stop the marketplace from becoming fake or stale.</a:t>
-            </a:r>
-          </a:p>
-        </p:txBody>
-      </p:sp>
-      <p:sp>
-        <p:nvSpPr>
-          <p:cNvPr id="14" name="TextBox 13"/>
-          <p:cNvSpPr txBox="1"/>
-          <p:nvPr/>
-        </p:nvSpPr>
-        <p:spPr>
-          <a:xfrm>
-            <a:off x="914400" y="5833872"/>
-            <a:ext cx="10058400" cy="310896"/>
-          </a:xfrm>
-          <a:prstGeom prst="rect">
-            <a:avLst/>
-          </a:prstGeom>
-          <a:noFill/>
-        </p:spPr>
-        <p:txBody>
-          <a:bodyPr wrap="square" lIns="18288" rIns="18288" tIns="18288" bIns="18288">
-            <a:spAutoFit/>
-          </a:bodyPr>
-          <a:lstStyle/>
-          <a:p>
-            <a:pPr algn="ctr"/>
-            <a:r>
-              <a:rPr sz="1550" b="1">
-                <a:solidFill>
-                  <a:srgbClr val="121F23"/>
-                </a:solidFill>
-                <a:latin typeface="Aptos"/>
-              </a:rPr>
-              <a:t>Positioning: one focused movement problem, solved with inventory-backed listings.</a:t>
-            </a:r>
-          </a:p>
-        </p:txBody>
-      </p:sp>
-      <p:sp>
-        <p:nvSpPr>
-          <p:cNvPr id="15" name="TextBox 14"/>
-          <p:cNvSpPr txBox="1"/>
-          <p:nvPr/>
-        </p:nvSpPr>
-        <p:spPr>
-          <a:xfrm>
-            <a:off x="658368" y="6473952"/>
-            <a:ext cx="8778240" cy="164592"/>
-          </a:xfrm>
-          <a:prstGeom prst="rect">
-            <a:avLst/>
-          </a:prstGeom>
-          <a:noFill/>
-        </p:spPr>
-        <p:txBody>
-          <a:bodyPr wrap="square" lIns="18288" rIns="18288" tIns="18288" bIns="18288">
-            <a:spAutoFit/>
-          </a:bodyPr>
-          <a:lstStyle/>
-          <a:p>
-            <a:r>
-              <a:rPr sz="650" b="0">
-                <a:solidFill>
-                  <a:srgbClr val="58696F"/>
-                </a:solidFill>
-                <a:latin typeface="Aptos"/>
-              </a:rPr>
-              <a:t>Track mapping: Primary = Theme 7 Problem 34. Enabler = Theme 2 Problems 6, 9, 10.</a:t>
-            </a:r>
-          </a:p>
-        </p:txBody>
-      </p:sp>
-      <p:sp>
-        <p:nvSpPr>
-          <p:cNvPr id="16" name="TextBox 15"/>
-          <p:cNvSpPr txBox="1"/>
-          <p:nvPr/>
-        </p:nvSpPr>
-        <p:spPr>
-          <a:xfrm>
-            <a:off x="10927080" y="6473952"/>
-            <a:ext cx="658368" cy="164592"/>
-          </a:xfrm>
-          <a:prstGeom prst="rect">
-            <a:avLst/>
-          </a:prstGeom>
-          <a:noFill/>
-        </p:spPr>
-        <p:txBody>
-          <a:bodyPr wrap="square" lIns="18288" rIns="18288" tIns="18288" bIns="18288">
-            <a:spAutoFit/>
-          </a:bodyPr>
-          <a:lstStyle/>
-          <a:p>
-            <a:pPr algn="r"/>
-            <a:r>
-              <a:rPr sz="750" b="0">
-                <a:solidFill>
-                  <a:srgbClr val="58696F"/>
-                </a:solidFill>
-                <a:latin typeface="Aptos"/>
-              </a:rPr>
-              <a:t>02 / 04</a:t>
+              </a:rPr>
+              <a:t>02 / 05</a:t>
             </a:r>
           </a:p>
         </p:txBody>
@@ -4862,7 +4533,7 @@
     <p:bg>
       <p:bgPr>
         <a:solidFill>
-          <a:srgbClr val="F7FAF8"/>
+          <a:srgbClr val="F6FAF8"/>
         </a:solidFill>
         <a:effectLst/>
       </p:bgPr>
@@ -4882,18 +4553,18 @@
         </p:nvSpPr>
         <p:spPr>
           <a:xfrm>
-            <a:off x="658368" y="438912"/>
-            <a:ext cx="1417320" cy="310896"/>
+            <a:off x="658368" y="502920"/>
+            <a:ext cx="1371600" cy="384048"/>
           </a:xfrm>
           <a:prstGeom prst="roundRect">
             <a:avLst/>
           </a:prstGeom>
           <a:solidFill>
-            <a:srgbClr val="E5F3EE"/>
+            <a:srgbClr val="DBEFEA"/>
           </a:solidFill>
-          <a:ln>
+          <a:ln w="12700">
             <a:solidFill>
-              <a:srgbClr val="CCDED8"/>
+              <a:srgbClr val="C3D7D2"/>
             </a:solidFill>
           </a:ln>
         </p:spPr>
@@ -4912,14 +4583,14 @@
           </a:fontRef>
         </p:style>
         <p:txBody>
-          <a:bodyPr rtlCol="0" anchor="ctr"/>
+          <a:bodyPr rtlCol="0" anchor="ctr" wrap="none" lIns="73152" rIns="73152" tIns="18288" bIns="18288"/>
           <a:lstStyle/>
           <a:p>
             <a:pPr algn="ctr"/>
             <a:r>
-              <a:rPr sz="850" b="1">
-                <a:solidFill>
-                  <a:srgbClr val="005A52"/>
+              <a:rPr sz="1050" b="1">
+                <a:solidFill>
+                  <a:srgbClr val="005E53"/>
                 </a:solidFill>
                 <a:latin typeface="Aptos"/>
               </a:rPr>
@@ -4936,8 +4607,8 @@
         </p:nvSpPr>
         <p:spPr>
           <a:xfrm>
-            <a:off x="658368" y="896112"/>
-            <a:ext cx="9052560" cy="658368"/>
+            <a:off x="658368" y="1097280"/>
+            <a:ext cx="10607040" cy="566928"/>
           </a:xfrm>
           <a:prstGeom prst="rect">
             <a:avLst/>
@@ -4945,19 +4616,27 @@
           <a:noFill/>
         </p:spPr>
         <p:txBody>
-          <a:bodyPr wrap="square" lIns="18288" rIns="18288" tIns="18288" bIns="18288">
+          <a:bodyPr wrap="square" lIns="0" rIns="0" tIns="0" bIns="0">
             <a:spAutoFit/>
           </a:bodyPr>
           <a:lstStyle/>
           <a:p>
-            <a:r>
-              <a:rPr sz="2800" b="1">
-                <a:solidFill>
-                  <a:srgbClr val="121F23"/>
-                </a:solidFill>
-                <a:latin typeface="Aptos"/>
-              </a:rPr>
-              <a:t>GoodCo creates inventory-backed transfer listings.</a:t>
+            <a:pPr algn="l">
+              <a:spcBef>
+                <a:spcPts val="0"/>
+              </a:spcBef>
+              <a:spcAft>
+                <a:spcPts val="0"/>
+              </a:spcAft>
+            </a:pPr>
+            <a:r>
+              <a:rPr sz="3400" b="1">
+                <a:solidFill>
+                  <a:srgbClr val="0F2023"/>
+                </a:solidFill>
+                <a:latin typeface="Aptos Display"/>
+              </a:rPr>
+              <a:t>Inventory-backed listings, not a generic marketplace.</a:t>
             </a:r>
           </a:p>
         </p:txBody>
@@ -4970,8 +4649,8 @@
         </p:nvSpPr>
         <p:spPr>
           <a:xfrm>
-            <a:off x="685800" y="1581912"/>
-            <a:ext cx="8686800" cy="402336"/>
+            <a:off x="694944" y="1865376"/>
+            <a:ext cx="10332720" cy="384048"/>
           </a:xfrm>
           <a:prstGeom prst="rect">
             <a:avLst/>
@@ -4979,708 +4658,48 @@
           <a:noFill/>
         </p:spPr>
         <p:txBody>
-          <a:bodyPr wrap="square" lIns="18288" rIns="18288" tIns="18288" bIns="18288">
+          <a:bodyPr wrap="square" lIns="0" rIns="0" tIns="0" bIns="0">
             <a:spAutoFit/>
           </a:bodyPr>
           <a:lstStyle/>
           <a:p>
-            <a:r>
-              <a:rPr sz="1320" b="0">
-                <a:solidFill>
-                  <a:srgbClr val="58696F"/>
+            <a:pPr algn="l">
+              <a:spcBef>
+                <a:spcPts val="0"/>
+              </a:spcBef>
+              <a:spcAft>
+                <a:spcPts val="0"/>
+              </a:spcAft>
+            </a:pPr>
+            <a:r>
+              <a:rPr sz="2050" b="0">
+                <a:solidFill>
+                  <a:srgbClr val="4F6369"/>
                 </a:solidFill>
                 <a:latin typeface="Aptos"/>
               </a:rPr>
-              <a:t>Every marketplace listing starts as a reviewed pantry inventory lot.</a:t>
-            </a:r>
-          </a:p>
-        </p:txBody>
-      </p:sp>
-      <p:sp>
-        <p:nvSpPr>
-          <p:cNvPr id="5" name="Rounded Rectangle 4"/>
-          <p:cNvSpPr/>
-          <p:nvPr/>
-        </p:nvSpPr>
-        <p:spPr>
-          <a:xfrm>
-            <a:off x="822960" y="2057400"/>
-            <a:ext cx="2395728" cy="987552"/>
-          </a:xfrm>
-          <a:prstGeom prst="roundRect">
-            <a:avLst/>
-          </a:prstGeom>
-          <a:solidFill>
-            <a:srgbClr val="FFFFFF"/>
-          </a:solidFill>
-          <a:ln w="12700">
-            <a:solidFill>
-              <a:srgbClr val="CCDED8"/>
-            </a:solidFill>
-          </a:ln>
-        </p:spPr>
-        <p:style>
-          <a:lnRef idx="1">
-            <a:schemeClr val="accent1"/>
-          </a:lnRef>
-          <a:fillRef idx="3">
-            <a:schemeClr val="accent1"/>
-          </a:fillRef>
-          <a:effectRef idx="2">
-            <a:schemeClr val="accent1"/>
-          </a:effectRef>
-          <a:fontRef idx="minor">
-            <a:schemeClr val="lt1"/>
-          </a:fontRef>
-        </p:style>
-        <p:txBody>
-          <a:bodyPr rtlCol="0" anchor="ctr"/>
-          <a:lstStyle/>
-          <a:p>
-            <a:pPr algn="ctr"/>
-          </a:p>
-        </p:txBody>
-      </p:sp>
-      <p:sp>
-        <p:nvSpPr>
-          <p:cNvPr id="6" name="Oval 5"/>
-          <p:cNvSpPr/>
-          <p:nvPr/>
-        </p:nvSpPr>
-        <p:spPr>
-          <a:xfrm>
-            <a:off x="987552" y="2313432"/>
-            <a:ext cx="438912" cy="438912"/>
-          </a:xfrm>
-          <a:prstGeom prst="ellipse">
-            <a:avLst/>
-          </a:prstGeom>
-          <a:solidFill>
-            <a:srgbClr val="E5F3EE"/>
-          </a:solidFill>
-          <a:ln>
-            <a:solidFill>
-              <a:srgbClr val="E5F3EE"/>
-            </a:solidFill>
-          </a:ln>
-        </p:spPr>
-        <p:style>
-          <a:lnRef idx="1">
-            <a:schemeClr val="accent1"/>
-          </a:lnRef>
-          <a:fillRef idx="3">
-            <a:schemeClr val="accent1"/>
-          </a:fillRef>
-          <a:effectRef idx="2">
-            <a:schemeClr val="accent1"/>
-          </a:effectRef>
-          <a:fontRef idx="minor">
-            <a:schemeClr val="lt1"/>
-          </a:fontRef>
-        </p:style>
-        <p:txBody>
-          <a:bodyPr rtlCol="0" anchor="ctr"/>
-          <a:lstStyle/>
-          <a:p>
-            <a:pPr algn="ctr"/>
-            <a:r>
-              <a:rPr sz="1000" b="1">
-                <a:solidFill>
-                  <a:srgbClr val="005A52"/>
-                </a:solidFill>
-                <a:latin typeface="Aptos"/>
-              </a:rPr>
-              <a:t>1</a:t>
-            </a:r>
-          </a:p>
-        </p:txBody>
-      </p:sp>
-      <p:sp>
-        <p:nvSpPr>
-          <p:cNvPr id="7" name="TextBox 6"/>
-          <p:cNvSpPr txBox="1"/>
-          <p:nvPr/>
-        </p:nvSpPr>
-        <p:spPr>
-          <a:xfrm>
-            <a:off x="1536192" y="2258568"/>
-            <a:ext cx="1481328" cy="228600"/>
-          </a:xfrm>
-          <a:prstGeom prst="rect">
-            <a:avLst/>
-          </a:prstGeom>
-          <a:noFill/>
-        </p:spPr>
-        <p:txBody>
-          <a:bodyPr wrap="square" lIns="18288" rIns="18288" tIns="18288" bIns="18288">
-            <a:spAutoFit/>
-          </a:bodyPr>
-          <a:lstStyle/>
-          <a:p>
-            <a:r>
-              <a:rPr sz="1350" b="1">
-                <a:solidFill>
-                  <a:srgbClr val="121F23"/>
-                </a:solidFill>
-                <a:latin typeface="Aptos"/>
-              </a:rPr>
-              <a:t>Receive</a:t>
-            </a:r>
-          </a:p>
-        </p:txBody>
-      </p:sp>
-      <p:sp>
-        <p:nvSpPr>
-          <p:cNvPr id="8" name="TextBox 7"/>
-          <p:cNvSpPr txBox="1"/>
-          <p:nvPr/>
-        </p:nvSpPr>
-        <p:spPr>
-          <a:xfrm>
-            <a:off x="1536192" y="2624328"/>
-            <a:ext cx="1481328" cy="219456"/>
-          </a:xfrm>
-          <a:prstGeom prst="rect">
-            <a:avLst/>
-          </a:prstGeom>
-          <a:noFill/>
-        </p:spPr>
-        <p:txBody>
-          <a:bodyPr wrap="square" lIns="18288" rIns="18288" tIns="18288" bIns="18288">
-            <a:spAutoFit/>
-          </a:bodyPr>
-          <a:lstStyle/>
-          <a:p>
-            <a:r>
-              <a:rPr sz="919" b="0">
-                <a:solidFill>
-                  <a:srgbClr val="58696F"/>
-                </a:solidFill>
-                <a:latin typeface="Aptos"/>
-              </a:rPr>
-              <a:t>Scan, type, photo, or speak item details.</a:t>
-            </a:r>
-          </a:p>
-        </p:txBody>
-      </p:sp>
-      <p:sp>
-        <p:nvSpPr>
-          <p:cNvPr id="9" name="Rounded Rectangle 8"/>
-          <p:cNvSpPr/>
-          <p:nvPr/>
-        </p:nvSpPr>
-        <p:spPr>
-          <a:xfrm>
-            <a:off x="3456432" y="2057400"/>
-            <a:ext cx="2395728" cy="987552"/>
-          </a:xfrm>
-          <a:prstGeom prst="roundRect">
-            <a:avLst/>
-          </a:prstGeom>
-          <a:solidFill>
-            <a:srgbClr val="FFFFFF"/>
-          </a:solidFill>
-          <a:ln w="12700">
-            <a:solidFill>
-              <a:srgbClr val="CCDED8"/>
-            </a:solidFill>
-          </a:ln>
-        </p:spPr>
-        <p:style>
-          <a:lnRef idx="1">
-            <a:schemeClr val="accent1"/>
-          </a:lnRef>
-          <a:fillRef idx="3">
-            <a:schemeClr val="accent1"/>
-          </a:fillRef>
-          <a:effectRef idx="2">
-            <a:schemeClr val="accent1"/>
-          </a:effectRef>
-          <a:fontRef idx="minor">
-            <a:schemeClr val="lt1"/>
-          </a:fontRef>
-        </p:style>
-        <p:txBody>
-          <a:bodyPr rtlCol="0" anchor="ctr"/>
-          <a:lstStyle/>
-          <a:p>
-            <a:pPr algn="ctr"/>
-          </a:p>
-        </p:txBody>
-      </p:sp>
-      <p:sp>
-        <p:nvSpPr>
-          <p:cNvPr id="10" name="Oval 9"/>
-          <p:cNvSpPr/>
-          <p:nvPr/>
-        </p:nvSpPr>
-        <p:spPr>
-          <a:xfrm>
-            <a:off x="3621024" y="2313432"/>
-            <a:ext cx="438912" cy="438912"/>
-          </a:xfrm>
-          <a:prstGeom prst="ellipse">
-            <a:avLst/>
-          </a:prstGeom>
-          <a:solidFill>
-            <a:srgbClr val="E5F3EE"/>
-          </a:solidFill>
-          <a:ln>
-            <a:solidFill>
-              <a:srgbClr val="E5F3EE"/>
-            </a:solidFill>
-          </a:ln>
-        </p:spPr>
-        <p:style>
-          <a:lnRef idx="1">
-            <a:schemeClr val="accent1"/>
-          </a:lnRef>
-          <a:fillRef idx="3">
-            <a:schemeClr val="accent1"/>
-          </a:fillRef>
-          <a:effectRef idx="2">
-            <a:schemeClr val="accent1"/>
-          </a:effectRef>
-          <a:fontRef idx="minor">
-            <a:schemeClr val="lt1"/>
-          </a:fontRef>
-        </p:style>
-        <p:txBody>
-          <a:bodyPr rtlCol="0" anchor="ctr"/>
-          <a:lstStyle/>
-          <a:p>
-            <a:pPr algn="ctr"/>
-            <a:r>
-              <a:rPr sz="1000" b="1">
-                <a:solidFill>
-                  <a:srgbClr val="005A52"/>
-                </a:solidFill>
-                <a:latin typeface="Aptos"/>
-              </a:rPr>
-              <a:t>2</a:t>
-            </a:r>
-          </a:p>
-        </p:txBody>
-      </p:sp>
-      <p:sp>
-        <p:nvSpPr>
-          <p:cNvPr id="11" name="TextBox 10"/>
-          <p:cNvSpPr txBox="1"/>
-          <p:nvPr/>
-        </p:nvSpPr>
-        <p:spPr>
-          <a:xfrm>
-            <a:off x="4169663" y="2258568"/>
-            <a:ext cx="1481328" cy="228600"/>
-          </a:xfrm>
-          <a:prstGeom prst="rect">
-            <a:avLst/>
-          </a:prstGeom>
-          <a:noFill/>
-        </p:spPr>
-        <p:txBody>
-          <a:bodyPr wrap="square" lIns="18288" rIns="18288" tIns="18288" bIns="18288">
-            <a:spAutoFit/>
-          </a:bodyPr>
-          <a:lstStyle/>
-          <a:p>
-            <a:r>
-              <a:rPr sz="1350" b="1">
-                <a:solidFill>
-                  <a:srgbClr val="121F23"/>
-                </a:solidFill>
-                <a:latin typeface="Aptos"/>
-              </a:rPr>
-              <a:t>Review</a:t>
-            </a:r>
-          </a:p>
-        </p:txBody>
-      </p:sp>
-      <p:sp>
-        <p:nvSpPr>
-          <p:cNvPr id="12" name="TextBox 11"/>
-          <p:cNvSpPr txBox="1"/>
-          <p:nvPr/>
-        </p:nvSpPr>
-        <p:spPr>
-          <a:xfrm>
-            <a:off x="4169663" y="2624328"/>
-            <a:ext cx="1481328" cy="219456"/>
-          </a:xfrm>
-          <a:prstGeom prst="rect">
-            <a:avLst/>
-          </a:prstGeom>
-          <a:noFill/>
-        </p:spPr>
-        <p:txBody>
-          <a:bodyPr wrap="square" lIns="18288" rIns="18288" tIns="18288" bIns="18288">
-            <a:spAutoFit/>
-          </a:bodyPr>
-          <a:lstStyle/>
-          <a:p>
-            <a:r>
-              <a:rPr sz="919" b="0">
-                <a:solidFill>
-                  <a:srgbClr val="58696F"/>
-                </a:solidFill>
-                <a:latin typeface="Aptos"/>
-              </a:rPr>
-              <a:t>Confirm category, date, source, quantity.</a:t>
-            </a:r>
-          </a:p>
-        </p:txBody>
-      </p:sp>
-      <p:sp>
-        <p:nvSpPr>
-          <p:cNvPr id="13" name="Rounded Rectangle 12"/>
-          <p:cNvSpPr/>
-          <p:nvPr/>
-        </p:nvSpPr>
-        <p:spPr>
-          <a:xfrm>
-            <a:off x="6089904" y="2057400"/>
-            <a:ext cx="2395728" cy="987552"/>
-          </a:xfrm>
-          <a:prstGeom prst="roundRect">
-            <a:avLst/>
-          </a:prstGeom>
-          <a:solidFill>
-            <a:srgbClr val="FFFFFF"/>
-          </a:solidFill>
-          <a:ln w="12700">
-            <a:solidFill>
-              <a:srgbClr val="CCDED8"/>
-            </a:solidFill>
-          </a:ln>
-        </p:spPr>
-        <p:style>
-          <a:lnRef idx="1">
-            <a:schemeClr val="accent1"/>
-          </a:lnRef>
-          <a:fillRef idx="3">
-            <a:schemeClr val="accent1"/>
-          </a:fillRef>
-          <a:effectRef idx="2">
-            <a:schemeClr val="accent1"/>
-          </a:effectRef>
-          <a:fontRef idx="minor">
-            <a:schemeClr val="lt1"/>
-          </a:fontRef>
-        </p:style>
-        <p:txBody>
-          <a:bodyPr rtlCol="0" anchor="ctr"/>
-          <a:lstStyle/>
-          <a:p>
-            <a:pPr algn="ctr"/>
-          </a:p>
-        </p:txBody>
-      </p:sp>
-      <p:sp>
-        <p:nvSpPr>
-          <p:cNvPr id="14" name="Oval 13"/>
-          <p:cNvSpPr/>
-          <p:nvPr/>
-        </p:nvSpPr>
-        <p:spPr>
-          <a:xfrm>
-            <a:off x="6254496" y="2313432"/>
-            <a:ext cx="438912" cy="438912"/>
-          </a:xfrm>
-          <a:prstGeom prst="ellipse">
-            <a:avLst/>
-          </a:prstGeom>
-          <a:solidFill>
-            <a:srgbClr val="E5F3EE"/>
-          </a:solidFill>
-          <a:ln>
-            <a:solidFill>
-              <a:srgbClr val="E5F3EE"/>
-            </a:solidFill>
-          </a:ln>
-        </p:spPr>
-        <p:style>
-          <a:lnRef idx="1">
-            <a:schemeClr val="accent1"/>
-          </a:lnRef>
-          <a:fillRef idx="3">
-            <a:schemeClr val="accent1"/>
-          </a:fillRef>
-          <a:effectRef idx="2">
-            <a:schemeClr val="accent1"/>
-          </a:effectRef>
-          <a:fontRef idx="minor">
-            <a:schemeClr val="lt1"/>
-          </a:fontRef>
-        </p:style>
-        <p:txBody>
-          <a:bodyPr rtlCol="0" anchor="ctr"/>
-          <a:lstStyle/>
-          <a:p>
-            <a:pPr algn="ctr"/>
-            <a:r>
-              <a:rPr sz="1000" b="1">
-                <a:solidFill>
-                  <a:srgbClr val="005A52"/>
-                </a:solidFill>
-                <a:latin typeface="Aptos"/>
-              </a:rPr>
-              <a:t>3</a:t>
-            </a:r>
-          </a:p>
-        </p:txBody>
-      </p:sp>
-      <p:sp>
-        <p:nvSpPr>
-          <p:cNvPr id="15" name="TextBox 14"/>
-          <p:cNvSpPr txBox="1"/>
-          <p:nvPr/>
-        </p:nvSpPr>
-        <p:spPr>
-          <a:xfrm>
-            <a:off x="6803136" y="2258568"/>
-            <a:ext cx="1481328" cy="228600"/>
-          </a:xfrm>
-          <a:prstGeom prst="rect">
-            <a:avLst/>
-          </a:prstGeom>
-          <a:noFill/>
-        </p:spPr>
-        <p:txBody>
-          <a:bodyPr wrap="square" lIns="18288" rIns="18288" tIns="18288" bIns="18288">
-            <a:spAutoFit/>
-          </a:bodyPr>
-          <a:lstStyle/>
-          <a:p>
-            <a:r>
-              <a:rPr sz="1350" b="1">
-                <a:solidFill>
-                  <a:srgbClr val="121F23"/>
-                </a:solidFill>
-                <a:latin typeface="Aptos"/>
-              </a:rPr>
-              <a:t>Publish</a:t>
-            </a:r>
-          </a:p>
-        </p:txBody>
-      </p:sp>
-      <p:sp>
-        <p:nvSpPr>
-          <p:cNvPr id="16" name="TextBox 15"/>
-          <p:cNvSpPr txBox="1"/>
-          <p:nvPr/>
-        </p:nvSpPr>
-        <p:spPr>
-          <a:xfrm>
-            <a:off x="6803136" y="2624328"/>
-            <a:ext cx="1481328" cy="219456"/>
-          </a:xfrm>
-          <a:prstGeom prst="rect">
-            <a:avLst/>
-          </a:prstGeom>
-          <a:noFill/>
-        </p:spPr>
-        <p:txBody>
-          <a:bodyPr wrap="square" lIns="18288" rIns="18288" tIns="18288" bIns="18288">
-            <a:spAutoFit/>
-          </a:bodyPr>
-          <a:lstStyle/>
-          <a:p>
-            <a:r>
-              <a:rPr sz="919" b="0">
-                <a:solidFill>
-                  <a:srgbClr val="58696F"/>
-                </a:solidFill>
-                <a:latin typeface="Aptos"/>
-              </a:rPr>
-              <a:t>List only eligible, redistributable lots.</a:t>
-            </a:r>
-          </a:p>
-        </p:txBody>
-      </p:sp>
-      <p:sp>
-        <p:nvSpPr>
-          <p:cNvPr id="17" name="Rounded Rectangle 16"/>
-          <p:cNvSpPr/>
-          <p:nvPr/>
-        </p:nvSpPr>
-        <p:spPr>
-          <a:xfrm>
-            <a:off x="8723376" y="2057400"/>
-            <a:ext cx="2395728" cy="987552"/>
-          </a:xfrm>
-          <a:prstGeom prst="roundRect">
-            <a:avLst/>
-          </a:prstGeom>
-          <a:solidFill>
-            <a:srgbClr val="FFFFFF"/>
-          </a:solidFill>
-          <a:ln w="12700">
-            <a:solidFill>
-              <a:srgbClr val="CCDED8"/>
-            </a:solidFill>
-          </a:ln>
-        </p:spPr>
-        <p:style>
-          <a:lnRef idx="1">
-            <a:schemeClr val="accent1"/>
-          </a:lnRef>
-          <a:fillRef idx="3">
-            <a:schemeClr val="accent1"/>
-          </a:fillRef>
-          <a:effectRef idx="2">
-            <a:schemeClr val="accent1"/>
-          </a:effectRef>
-          <a:fontRef idx="minor">
-            <a:schemeClr val="lt1"/>
-          </a:fontRef>
-        </p:style>
-        <p:txBody>
-          <a:bodyPr rtlCol="0" anchor="ctr"/>
-          <a:lstStyle/>
-          <a:p>
-            <a:pPr algn="ctr"/>
-          </a:p>
-        </p:txBody>
-      </p:sp>
-      <p:sp>
-        <p:nvSpPr>
-          <p:cNvPr id="18" name="Oval 17"/>
-          <p:cNvSpPr/>
-          <p:nvPr/>
-        </p:nvSpPr>
-        <p:spPr>
-          <a:xfrm>
-            <a:off x="8887967" y="2313432"/>
-            <a:ext cx="438912" cy="438912"/>
-          </a:xfrm>
-          <a:prstGeom prst="ellipse">
-            <a:avLst/>
-          </a:prstGeom>
-          <a:solidFill>
-            <a:srgbClr val="E5F3EE"/>
-          </a:solidFill>
-          <a:ln>
-            <a:solidFill>
-              <a:srgbClr val="E5F3EE"/>
-            </a:solidFill>
-          </a:ln>
-        </p:spPr>
-        <p:style>
-          <a:lnRef idx="1">
-            <a:schemeClr val="accent1"/>
-          </a:lnRef>
-          <a:fillRef idx="3">
-            <a:schemeClr val="accent1"/>
-          </a:fillRef>
-          <a:effectRef idx="2">
-            <a:schemeClr val="accent1"/>
-          </a:effectRef>
-          <a:fontRef idx="minor">
-            <a:schemeClr val="lt1"/>
-          </a:fontRef>
-        </p:style>
-        <p:txBody>
-          <a:bodyPr rtlCol="0" anchor="ctr"/>
-          <a:lstStyle/>
-          <a:p>
-            <a:pPr algn="ctr"/>
-            <a:r>
-              <a:rPr sz="1000" b="1">
-                <a:solidFill>
-                  <a:srgbClr val="005A52"/>
-                </a:solidFill>
-                <a:latin typeface="Aptos"/>
-              </a:rPr>
-              <a:t>4</a:t>
-            </a:r>
-          </a:p>
-        </p:txBody>
-      </p:sp>
-      <p:sp>
-        <p:nvSpPr>
-          <p:cNvPr id="19" name="TextBox 18"/>
-          <p:cNvSpPr txBox="1"/>
-          <p:nvPr/>
-        </p:nvSpPr>
-        <p:spPr>
-          <a:xfrm>
-            <a:off x="9436607" y="2258568"/>
-            <a:ext cx="1481328" cy="228600"/>
-          </a:xfrm>
-          <a:prstGeom prst="rect">
-            <a:avLst/>
-          </a:prstGeom>
-          <a:noFill/>
-        </p:spPr>
-        <p:txBody>
-          <a:bodyPr wrap="square" lIns="18288" rIns="18288" tIns="18288" bIns="18288">
-            <a:spAutoFit/>
-          </a:bodyPr>
-          <a:lstStyle/>
-          <a:p>
-            <a:r>
-              <a:rPr sz="1350" b="1">
-                <a:solidFill>
-                  <a:srgbClr val="121F23"/>
-                </a:solidFill>
-                <a:latin typeface="Aptos"/>
-              </a:rPr>
-              <a:t>Transfer</a:t>
-            </a:r>
-          </a:p>
-        </p:txBody>
-      </p:sp>
-      <p:sp>
-        <p:nvSpPr>
-          <p:cNvPr id="20" name="TextBox 19"/>
-          <p:cNvSpPr txBox="1"/>
-          <p:nvPr/>
-        </p:nvSpPr>
-        <p:spPr>
-          <a:xfrm>
-            <a:off x="9436607" y="2624328"/>
-            <a:ext cx="1481328" cy="219456"/>
-          </a:xfrm>
-          <a:prstGeom prst="rect">
-            <a:avLst/>
-          </a:prstGeom>
-          <a:noFill/>
-        </p:spPr>
-        <p:txBody>
-          <a:bodyPr wrap="square" lIns="18288" rIns="18288" tIns="18288" bIns="18288">
-            <a:spAutoFit/>
-          </a:bodyPr>
-          <a:lstStyle/>
-          <a:p>
-            <a:r>
-              <a:rPr sz="919" b="0">
-                <a:solidFill>
-                  <a:srgbClr val="58696F"/>
-                </a:solidFill>
-                <a:latin typeface="Aptos"/>
-              </a:rPr>
-              <a:t>Request, reserve, hand off, audit.</a:t>
+              <a:t>A pantry can only publish items it has already reviewed and confirmed.</a:t>
             </a:r>
           </a:p>
         </p:txBody>
       </p:sp>
       <p:cxnSp>
         <p:nvCxnSpPr>
-          <p:cNvPr id="21" name="Connector 20"/>
+          <p:cNvPr id="5" name="Connector 4"/>
           <p:cNvCxnSpPr/>
           <p:nvPr/>
         </p:nvCxnSpPr>
         <p:spPr>
           <a:xfrm>
-            <a:off x="3218688" y="2551176"/>
-            <a:ext cx="219456" cy="0"/>
+            <a:off x="1783080" y="3127248"/>
+            <a:ext cx="8503920" cy="0"/>
           </a:xfrm>
           <a:prstGeom prst="line">
             <a:avLst/>
           </a:prstGeom>
-          <a:ln w="27940">
+          <a:ln w="40640">
             <a:solidFill>
-              <a:srgbClr val="00897B"/>
+              <a:srgbClr val="008B7A"/>
             </a:solidFill>
           </a:ln>
         </p:spPr>
@@ -5699,86 +4718,16 @@
           </a:fontRef>
         </p:style>
       </p:cxnSp>
-      <p:cxnSp>
-        <p:nvCxnSpPr>
-          <p:cNvPr id="22" name="Connector 21"/>
-          <p:cNvCxnSpPr/>
-          <p:nvPr/>
-        </p:nvCxnSpPr>
-        <p:spPr>
-          <a:xfrm>
-            <a:off x="5852160" y="2551176"/>
-            <a:ext cx="219456" cy="0"/>
-          </a:xfrm>
-          <a:prstGeom prst="line">
-            <a:avLst/>
-          </a:prstGeom>
-          <a:ln w="27940">
-            <a:solidFill>
-              <a:srgbClr val="00897B"/>
-            </a:solidFill>
-          </a:ln>
-        </p:spPr>
-        <p:style>
-          <a:lnRef idx="2">
-            <a:schemeClr val="accent1"/>
-          </a:lnRef>
-          <a:fillRef idx="0">
-            <a:schemeClr val="accent1"/>
-          </a:fillRef>
-          <a:effectRef idx="1">
-            <a:schemeClr val="accent1"/>
-          </a:effectRef>
-          <a:fontRef idx="minor">
-            <a:schemeClr val="tx1"/>
-          </a:fontRef>
-        </p:style>
-      </p:cxnSp>
-      <p:cxnSp>
-        <p:nvCxnSpPr>
-          <p:cNvPr id="23" name="Connector 22"/>
-          <p:cNvCxnSpPr/>
-          <p:nvPr/>
-        </p:nvCxnSpPr>
-        <p:spPr>
-          <a:xfrm>
-            <a:off x="8485632" y="2551176"/>
-            <a:ext cx="219456" cy="0"/>
-          </a:xfrm>
-          <a:prstGeom prst="line">
-            <a:avLst/>
-          </a:prstGeom>
-          <a:ln w="27940">
-            <a:solidFill>
-              <a:srgbClr val="00897B"/>
-            </a:solidFill>
-          </a:ln>
-        </p:spPr>
-        <p:style>
-          <a:lnRef idx="2">
-            <a:schemeClr val="accent1"/>
-          </a:lnRef>
-          <a:fillRef idx="0">
-            <a:schemeClr val="accent1"/>
-          </a:fillRef>
-          <a:effectRef idx="1">
-            <a:schemeClr val="accent1"/>
-          </a:effectRef>
-          <a:fontRef idx="minor">
-            <a:schemeClr val="tx1"/>
-          </a:fontRef>
-        </p:style>
-      </p:cxnSp>
-      <p:sp>
-        <p:nvSpPr>
-          <p:cNvPr id="24" name="Rounded Rectangle 23"/>
+      <p:sp>
+        <p:nvSpPr>
+          <p:cNvPr id="6" name="Rounded Rectangle 5"/>
           <p:cNvSpPr/>
           <p:nvPr/>
         </p:nvSpPr>
         <p:spPr>
           <a:xfrm>
-            <a:off x="822960" y="3886200"/>
-            <a:ext cx="3246120" cy="1261872"/>
+            <a:off x="749808" y="2578608"/>
+            <a:ext cx="2423160" cy="1325880"/>
           </a:xfrm>
           <a:prstGeom prst="roundRect">
             <a:avLst/>
@@ -5786,9 +4735,9 @@
           <a:solidFill>
             <a:srgbClr val="FFFFFF"/>
           </a:solidFill>
-          <a:ln w="12700">
+          <a:ln w="15240">
             <a:solidFill>
-              <a:srgbClr val="CCDED8"/>
+              <a:srgbClr val="C3D7D2"/>
             </a:solidFill>
           </a:ln>
         </p:spPr>
@@ -5816,145 +4765,24 @@
       </p:sp>
       <p:sp>
         <p:nvSpPr>
-          <p:cNvPr id="25" name="TextBox 24"/>
-          <p:cNvSpPr txBox="1"/>
-          <p:nvPr/>
-        </p:nvSpPr>
-        <p:spPr>
-          <a:xfrm>
-            <a:off x="1078992" y="4133087"/>
-            <a:ext cx="2560320" cy="228600"/>
-          </a:xfrm>
-          <a:prstGeom prst="rect">
-            <a:avLst/>
-          </a:prstGeom>
-          <a:noFill/>
-        </p:spPr>
-        <p:txBody>
-          <a:bodyPr wrap="square" lIns="18288" rIns="18288" tIns="18288" bIns="18288">
-            <a:spAutoFit/>
-          </a:bodyPr>
-          <a:lstStyle/>
-          <a:p>
-            <a:r>
-              <a:rPr sz="1500" b="1">
-                <a:solidFill>
-                  <a:srgbClr val="00897B"/>
-                </a:solidFill>
-                <a:latin typeface="Aptos"/>
-              </a:rPr>
-              <a:t>Trust guardrails</a:t>
-            </a:r>
-          </a:p>
-        </p:txBody>
-      </p:sp>
-      <p:sp>
-        <p:nvSpPr>
-          <p:cNvPr id="26" name="TextBox 25"/>
-          <p:cNvSpPr txBox="1"/>
-          <p:nvPr/>
-        </p:nvSpPr>
-        <p:spPr>
-          <a:xfrm>
-            <a:off x="1078992" y="4498848"/>
-            <a:ext cx="2560320" cy="502920"/>
-          </a:xfrm>
-          <a:prstGeom prst="rect">
-            <a:avLst/>
-          </a:prstGeom>
-          <a:noFill/>
-        </p:spPr>
-        <p:txBody>
-          <a:bodyPr wrap="square">
-            <a:spAutoFit/>
-          </a:bodyPr>
-          <a:lstStyle/>
-          <a:p>
-            <a:pPr>
-              <a:spcAft>
-                <a:spcPts val="600"/>
-              </a:spcAft>
-              <a:defRPr sz="1060">
-                <a:solidFill>
-                  <a:srgbClr val="121F23"/>
-                </a:solidFill>
-                <a:latin typeface="Aptos"/>
-              </a:defRPr>
-            </a:pPr>
-            <a:r>
-              <a:t>Confirmed lot required.</a:t>
-            </a:r>
-          </a:p>
-          <a:p>
-            <a:pPr>
-              <a:spcAft>
-                <a:spcPts val="600"/>
-              </a:spcAft>
-              <a:defRPr sz="1060">
-                <a:solidFill>
-                  <a:srgbClr val="121F23"/>
-                </a:solidFill>
-                <a:latin typeface="Aptos"/>
-              </a:defRPr>
-            </a:pPr>
-            <a:r>
-              <a:t>Redistribution flag required.</a:t>
-            </a:r>
-          </a:p>
-          <a:p>
-            <a:pPr>
-              <a:spcAft>
-                <a:spcPts val="600"/>
-              </a:spcAft>
-              <a:defRPr sz="1060">
-                <a:solidFill>
-                  <a:srgbClr val="121F23"/>
-                </a:solidFill>
-                <a:latin typeface="Aptos"/>
-              </a:defRPr>
-            </a:pPr>
-            <a:r>
-              <a:t>TEFAP blocked by default.</a:t>
-            </a:r>
-          </a:p>
-          <a:p>
-            <a:pPr>
-              <a:spcAft>
-                <a:spcPts val="600"/>
-              </a:spcAft>
-              <a:defRPr sz="1060">
-                <a:solidFill>
-                  <a:srgbClr val="121F23"/>
-                </a:solidFill>
-                <a:latin typeface="Aptos"/>
-              </a:defRPr>
-            </a:pPr>
-            <a:r>
-              <a:t>No payment in MVP.</a:t>
-            </a:r>
-          </a:p>
-        </p:txBody>
-      </p:sp>
-      <p:sp>
-        <p:nvSpPr>
-          <p:cNvPr id="27" name="Rounded Rectangle 26"/>
+          <p:cNvPr id="7" name="Oval 6"/>
           <p:cNvSpPr/>
           <p:nvPr/>
         </p:nvSpPr>
         <p:spPr>
           <a:xfrm>
-            <a:off x="4462272" y="3886200"/>
-            <a:ext cx="3246120" cy="1261872"/>
-          </a:xfrm>
-          <a:prstGeom prst="roundRect">
+            <a:off x="896112" y="2706624"/>
+            <a:ext cx="475488" cy="475488"/>
+          </a:xfrm>
+          <a:prstGeom prst="ellipse">
             <a:avLst/>
           </a:prstGeom>
           <a:solidFill>
-            <a:srgbClr val="FFFFFF"/>
+            <a:srgbClr val="DBEFEA"/>
           </a:solidFill>
-          <a:ln w="12700">
+          <a:ln>
             <a:solidFill>
-              <a:srgbClr val="CCDED8"/>
+              <a:srgbClr val="DBEFEA"/>
             </a:solidFill>
           </a:ln>
         </p:spPr>
@@ -5973,23 +4801,32 @@
           </a:fontRef>
         </p:style>
         <p:txBody>
-          <a:bodyPr rtlCol="0" anchor="ctr"/>
+          <a:bodyPr rtlCol="0" anchor="ctr" wrap="none" lIns="0" rIns="0" tIns="0" bIns="0"/>
           <a:lstStyle/>
           <a:p>
             <a:pPr algn="ctr"/>
-          </a:p>
-        </p:txBody>
-      </p:sp>
-      <p:sp>
-        <p:nvSpPr>
-          <p:cNvPr id="28" name="TextBox 27"/>
+            <a:r>
+              <a:rPr sz="1100" b="1">
+                <a:solidFill>
+                  <a:srgbClr val="005E53"/>
+                </a:solidFill>
+                <a:latin typeface="Aptos Display"/>
+              </a:rPr>
+              <a:t>1</a:t>
+            </a:r>
+          </a:p>
+        </p:txBody>
+      </p:sp>
+      <p:sp>
+        <p:nvSpPr>
+          <p:cNvPr id="8" name="TextBox 7"/>
           <p:cNvSpPr txBox="1"/>
           <p:nvPr/>
         </p:nvSpPr>
         <p:spPr>
           <a:xfrm>
-            <a:off x="4718304" y="4133087"/>
-            <a:ext cx="2560320" cy="228600"/>
+            <a:off x="1554480" y="2834639"/>
+            <a:ext cx="1463039" cy="292608"/>
           </a:xfrm>
           <a:prstGeom prst="rect">
             <a:avLst/>
@@ -5997,33 +4834,41 @@
           <a:noFill/>
         </p:spPr>
         <p:txBody>
-          <a:bodyPr wrap="square" lIns="18288" rIns="18288" tIns="18288" bIns="18288">
+          <a:bodyPr wrap="square" lIns="0" rIns="0" tIns="0" bIns="0">
             <a:spAutoFit/>
           </a:bodyPr>
           <a:lstStyle/>
           <a:p>
-            <a:r>
-              <a:rPr sz="1500" b="1">
-                <a:solidFill>
-                  <a:srgbClr val="00897B"/>
-                </a:solidFill>
-                <a:latin typeface="Aptos"/>
-              </a:rPr>
-              <a:t>AI role</a:t>
-            </a:r>
-          </a:p>
-        </p:txBody>
-      </p:sp>
-      <p:sp>
-        <p:nvSpPr>
-          <p:cNvPr id="29" name="TextBox 28"/>
+            <a:pPr algn="l">
+              <a:spcBef>
+                <a:spcPts val="0"/>
+              </a:spcBef>
+              <a:spcAft>
+                <a:spcPts val="0"/>
+              </a:spcAft>
+            </a:pPr>
+            <a:r>
+              <a:rPr sz="2000" b="1">
+                <a:solidFill>
+                  <a:srgbClr val="0F2023"/>
+                </a:solidFill>
+                <a:latin typeface="Aptos Display"/>
+              </a:rPr>
+              <a:t>Receive</a:t>
+            </a:r>
+          </a:p>
+        </p:txBody>
+      </p:sp>
+      <p:sp>
+        <p:nvSpPr>
+          <p:cNvPr id="9" name="TextBox 8"/>
           <p:cNvSpPr txBox="1"/>
           <p:nvPr/>
         </p:nvSpPr>
         <p:spPr>
           <a:xfrm>
-            <a:off x="4718304" y="4498848"/>
-            <a:ext cx="2560320" cy="502920"/>
+            <a:off x="1024127" y="3346703"/>
+            <a:ext cx="1920239" cy="438912"/>
           </a:xfrm>
           <a:prstGeom prst="rect">
             <a:avLst/>
@@ -6031,86 +4876,41 @@
           <a:noFill/>
         </p:spPr>
         <p:txBody>
-          <a:bodyPr wrap="square">
+          <a:bodyPr wrap="square" lIns="0" rIns="0" tIns="0" bIns="0">
             <a:spAutoFit/>
           </a:bodyPr>
           <a:lstStyle/>
           <a:p>
-            <a:pPr>
+            <a:pPr algn="l">
+              <a:spcBef>
+                <a:spcPts val="0"/>
+              </a:spcBef>
               <a:spcAft>
-                <a:spcPts val="600"/>
+                <a:spcPts val="0"/>
               </a:spcAft>
-              <a:defRPr sz="1060">
-                <a:solidFill>
-                  <a:srgbClr val="121F23"/>
+            </a:pPr>
+            <a:r>
+              <a:rPr sz="1580" b="0">
+                <a:solidFill>
+                  <a:srgbClr val="0F2023"/>
                 </a:solidFill>
                 <a:latin typeface="Aptos"/>
-              </a:defRPr>
-            </a:pPr>
-            <a:r>
-              <a:t>Barcode lookup first.</a:t>
-            </a:r>
-          </a:p>
-          <a:p>
-            <a:pPr>
-              <a:spcAft>
-                <a:spcPts val="600"/>
-              </a:spcAft>
-              <a:defRPr sz="1060">
-                <a:solidFill>
-                  <a:srgbClr val="121F23"/>
-                </a:solidFill>
-                <a:latin typeface="Aptos"/>
-              </a:defRPr>
-            </a:pPr>
-            <a:r>
-              <a:t>OCR and voice draft fields.</a:t>
-            </a:r>
-          </a:p>
-          <a:p>
-            <a:pPr>
-              <a:spcAft>
-                <a:spcPts val="600"/>
-              </a:spcAft>
-              <a:defRPr sz="1060">
-                <a:solidFill>
-                  <a:srgbClr val="121F23"/>
-                </a:solidFill>
-                <a:latin typeface="Aptos"/>
-              </a:defRPr>
-            </a:pPr>
-            <a:r>
-              <a:t>LLM only for uncertain parsing.</a:t>
-            </a:r>
-          </a:p>
-          <a:p>
-            <a:pPr>
-              <a:spcAft>
-                <a:spcPts val="600"/>
-              </a:spcAft>
-              <a:defRPr sz="1060">
-                <a:solidFill>
-                  <a:srgbClr val="121F23"/>
-                </a:solidFill>
-                <a:latin typeface="Aptos"/>
-              </a:defRPr>
-            </a:pPr>
-            <a:r>
-              <a:t>Human confirms before save.</a:t>
-            </a:r>
-          </a:p>
-        </p:txBody>
-      </p:sp>
-      <p:sp>
-        <p:nvSpPr>
-          <p:cNvPr id="30" name="Rounded Rectangle 29"/>
+              </a:rPr>
+              <a:t>Scan, type, photo, or voice</a:t>
+            </a:r>
+          </a:p>
+        </p:txBody>
+      </p:sp>
+      <p:sp>
+        <p:nvSpPr>
+          <p:cNvPr id="10" name="Rounded Rectangle 9"/>
           <p:cNvSpPr/>
           <p:nvPr/>
         </p:nvSpPr>
         <p:spPr>
           <a:xfrm>
-            <a:off x="8101583" y="3886200"/>
-            <a:ext cx="3246120" cy="1261872"/>
+            <a:off x="3456432" y="2578608"/>
+            <a:ext cx="2423160" cy="1325880"/>
           </a:xfrm>
           <a:prstGeom prst="roundRect">
             <a:avLst/>
@@ -6118,9 +4918,9 @@
           <a:solidFill>
             <a:srgbClr val="FFFFFF"/>
           </a:solidFill>
-          <a:ln w="12700">
+          <a:ln w="15240">
             <a:solidFill>
-              <a:srgbClr val="CCDED8"/>
+              <a:srgbClr val="C3D7D2"/>
             </a:solidFill>
           </a:ln>
         </p:spPr>
@@ -6148,14 +4948,905 @@
       </p:sp>
       <p:sp>
         <p:nvSpPr>
+          <p:cNvPr id="11" name="Oval 10"/>
+          <p:cNvSpPr/>
+          <p:nvPr/>
+        </p:nvSpPr>
+        <p:spPr>
+          <a:xfrm>
+            <a:off x="3602736" y="2706624"/>
+            <a:ext cx="475488" cy="475488"/>
+          </a:xfrm>
+          <a:prstGeom prst="ellipse">
+            <a:avLst/>
+          </a:prstGeom>
+          <a:solidFill>
+            <a:srgbClr val="DBEFEA"/>
+          </a:solidFill>
+          <a:ln>
+            <a:solidFill>
+              <a:srgbClr val="DBEFEA"/>
+            </a:solidFill>
+          </a:ln>
+        </p:spPr>
+        <p:style>
+          <a:lnRef idx="1">
+            <a:schemeClr val="accent1"/>
+          </a:lnRef>
+          <a:fillRef idx="3">
+            <a:schemeClr val="accent1"/>
+          </a:fillRef>
+          <a:effectRef idx="2">
+            <a:schemeClr val="accent1"/>
+          </a:effectRef>
+          <a:fontRef idx="minor">
+            <a:schemeClr val="lt1"/>
+          </a:fontRef>
+        </p:style>
+        <p:txBody>
+          <a:bodyPr rtlCol="0" anchor="ctr" wrap="none" lIns="0" rIns="0" tIns="0" bIns="0"/>
+          <a:lstStyle/>
+          <a:p>
+            <a:pPr algn="ctr"/>
+            <a:r>
+              <a:rPr sz="1100" b="1">
+                <a:solidFill>
+                  <a:srgbClr val="005E53"/>
+                </a:solidFill>
+                <a:latin typeface="Aptos Display"/>
+              </a:rPr>
+              <a:t>2</a:t>
+            </a:r>
+          </a:p>
+        </p:txBody>
+      </p:sp>
+      <p:sp>
+        <p:nvSpPr>
+          <p:cNvPr id="12" name="TextBox 11"/>
+          <p:cNvSpPr txBox="1"/>
+          <p:nvPr/>
+        </p:nvSpPr>
+        <p:spPr>
+          <a:xfrm>
+            <a:off x="4261104" y="2834639"/>
+            <a:ext cx="1463039" cy="292608"/>
+          </a:xfrm>
+          <a:prstGeom prst="rect">
+            <a:avLst/>
+          </a:prstGeom>
+          <a:noFill/>
+        </p:spPr>
+        <p:txBody>
+          <a:bodyPr wrap="square" lIns="0" rIns="0" tIns="0" bIns="0">
+            <a:spAutoFit/>
+          </a:bodyPr>
+          <a:lstStyle/>
+          <a:p>
+            <a:pPr algn="l">
+              <a:spcBef>
+                <a:spcPts val="0"/>
+              </a:spcBef>
+              <a:spcAft>
+                <a:spcPts val="0"/>
+              </a:spcAft>
+            </a:pPr>
+            <a:r>
+              <a:rPr sz="2000" b="1">
+                <a:solidFill>
+                  <a:srgbClr val="0F2023"/>
+                </a:solidFill>
+                <a:latin typeface="Aptos Display"/>
+              </a:rPr>
+              <a:t>Review</a:t>
+            </a:r>
+          </a:p>
+        </p:txBody>
+      </p:sp>
+      <p:sp>
+        <p:nvSpPr>
+          <p:cNvPr id="13" name="TextBox 12"/>
+          <p:cNvSpPr txBox="1"/>
+          <p:nvPr/>
+        </p:nvSpPr>
+        <p:spPr>
+          <a:xfrm>
+            <a:off x="3730752" y="3346703"/>
+            <a:ext cx="1920239" cy="438912"/>
+          </a:xfrm>
+          <a:prstGeom prst="rect">
+            <a:avLst/>
+          </a:prstGeom>
+          <a:noFill/>
+        </p:spPr>
+        <p:txBody>
+          <a:bodyPr wrap="square" lIns="0" rIns="0" tIns="0" bIns="0">
+            <a:spAutoFit/>
+          </a:bodyPr>
+          <a:lstStyle/>
+          <a:p>
+            <a:pPr algn="l">
+              <a:spcBef>
+                <a:spcPts val="0"/>
+              </a:spcBef>
+              <a:spcAft>
+                <a:spcPts val="0"/>
+              </a:spcAft>
+            </a:pPr>
+            <a:r>
+              <a:rPr sz="1580" b="0">
+                <a:solidFill>
+                  <a:srgbClr val="0F2023"/>
+                </a:solidFill>
+                <a:latin typeface="Aptos"/>
+              </a:rPr>
+              <a:t>Confirm quantity, category, date</a:t>
+            </a:r>
+          </a:p>
+        </p:txBody>
+      </p:sp>
+      <p:sp>
+        <p:nvSpPr>
+          <p:cNvPr id="14" name="Rounded Rectangle 13"/>
+          <p:cNvSpPr/>
+          <p:nvPr/>
+        </p:nvSpPr>
+        <p:spPr>
+          <a:xfrm>
+            <a:off x="6163056" y="2578608"/>
+            <a:ext cx="2423160" cy="1325880"/>
+          </a:xfrm>
+          <a:prstGeom prst="roundRect">
+            <a:avLst/>
+          </a:prstGeom>
+          <a:solidFill>
+            <a:srgbClr val="FFFFFF"/>
+          </a:solidFill>
+          <a:ln w="15240">
+            <a:solidFill>
+              <a:srgbClr val="C3D7D2"/>
+            </a:solidFill>
+          </a:ln>
+        </p:spPr>
+        <p:style>
+          <a:lnRef idx="1">
+            <a:schemeClr val="accent1"/>
+          </a:lnRef>
+          <a:fillRef idx="3">
+            <a:schemeClr val="accent1"/>
+          </a:fillRef>
+          <a:effectRef idx="2">
+            <a:schemeClr val="accent1"/>
+          </a:effectRef>
+          <a:fontRef idx="minor">
+            <a:schemeClr val="lt1"/>
+          </a:fontRef>
+        </p:style>
+        <p:txBody>
+          <a:bodyPr rtlCol="0" anchor="ctr"/>
+          <a:lstStyle/>
+          <a:p>
+            <a:pPr algn="ctr"/>
+          </a:p>
+        </p:txBody>
+      </p:sp>
+      <p:sp>
+        <p:nvSpPr>
+          <p:cNvPr id="15" name="Oval 14"/>
+          <p:cNvSpPr/>
+          <p:nvPr/>
+        </p:nvSpPr>
+        <p:spPr>
+          <a:xfrm>
+            <a:off x="6309360" y="2706624"/>
+            <a:ext cx="475488" cy="475488"/>
+          </a:xfrm>
+          <a:prstGeom prst="ellipse">
+            <a:avLst/>
+          </a:prstGeom>
+          <a:solidFill>
+            <a:srgbClr val="DBEFEA"/>
+          </a:solidFill>
+          <a:ln>
+            <a:solidFill>
+              <a:srgbClr val="DBEFEA"/>
+            </a:solidFill>
+          </a:ln>
+        </p:spPr>
+        <p:style>
+          <a:lnRef idx="1">
+            <a:schemeClr val="accent1"/>
+          </a:lnRef>
+          <a:fillRef idx="3">
+            <a:schemeClr val="accent1"/>
+          </a:fillRef>
+          <a:effectRef idx="2">
+            <a:schemeClr val="accent1"/>
+          </a:effectRef>
+          <a:fontRef idx="minor">
+            <a:schemeClr val="lt1"/>
+          </a:fontRef>
+        </p:style>
+        <p:txBody>
+          <a:bodyPr rtlCol="0" anchor="ctr" wrap="none" lIns="0" rIns="0" tIns="0" bIns="0"/>
+          <a:lstStyle/>
+          <a:p>
+            <a:pPr algn="ctr"/>
+            <a:r>
+              <a:rPr sz="1100" b="1">
+                <a:solidFill>
+                  <a:srgbClr val="005E53"/>
+                </a:solidFill>
+                <a:latin typeface="Aptos Display"/>
+              </a:rPr>
+              <a:t>3</a:t>
+            </a:r>
+          </a:p>
+        </p:txBody>
+      </p:sp>
+      <p:sp>
+        <p:nvSpPr>
+          <p:cNvPr id="16" name="TextBox 15"/>
+          <p:cNvSpPr txBox="1"/>
+          <p:nvPr/>
+        </p:nvSpPr>
+        <p:spPr>
+          <a:xfrm>
+            <a:off x="6967728" y="2834639"/>
+            <a:ext cx="1463039" cy="292608"/>
+          </a:xfrm>
+          <a:prstGeom prst="rect">
+            <a:avLst/>
+          </a:prstGeom>
+          <a:noFill/>
+        </p:spPr>
+        <p:txBody>
+          <a:bodyPr wrap="square" lIns="0" rIns="0" tIns="0" bIns="0">
+            <a:spAutoFit/>
+          </a:bodyPr>
+          <a:lstStyle/>
+          <a:p>
+            <a:pPr algn="l">
+              <a:spcBef>
+                <a:spcPts val="0"/>
+              </a:spcBef>
+              <a:spcAft>
+                <a:spcPts val="0"/>
+              </a:spcAft>
+            </a:pPr>
+            <a:r>
+              <a:rPr sz="2000" b="1">
+                <a:solidFill>
+                  <a:srgbClr val="0F2023"/>
+                </a:solidFill>
+                <a:latin typeface="Aptos Display"/>
+              </a:rPr>
+              <a:t>Publish</a:t>
+            </a:r>
+          </a:p>
+        </p:txBody>
+      </p:sp>
+      <p:sp>
+        <p:nvSpPr>
+          <p:cNvPr id="17" name="TextBox 16"/>
+          <p:cNvSpPr txBox="1"/>
+          <p:nvPr/>
+        </p:nvSpPr>
+        <p:spPr>
+          <a:xfrm>
+            <a:off x="6437376" y="3346703"/>
+            <a:ext cx="1920239" cy="438912"/>
+          </a:xfrm>
+          <a:prstGeom prst="rect">
+            <a:avLst/>
+          </a:prstGeom>
+          <a:noFill/>
+        </p:spPr>
+        <p:txBody>
+          <a:bodyPr wrap="square" lIns="0" rIns="0" tIns="0" bIns="0">
+            <a:spAutoFit/>
+          </a:bodyPr>
+          <a:lstStyle/>
+          <a:p>
+            <a:pPr algn="l">
+              <a:spcBef>
+                <a:spcPts val="0"/>
+              </a:spcBef>
+              <a:spcAft>
+                <a:spcPts val="0"/>
+              </a:spcAft>
+            </a:pPr>
+            <a:r>
+              <a:rPr sz="1580" b="0">
+                <a:solidFill>
+                  <a:srgbClr val="0F2023"/>
+                </a:solidFill>
+                <a:latin typeface="Aptos"/>
+              </a:rPr>
+              <a:t>Only eligible surplus</a:t>
+            </a:r>
+          </a:p>
+        </p:txBody>
+      </p:sp>
+      <p:sp>
+        <p:nvSpPr>
+          <p:cNvPr id="18" name="Rounded Rectangle 17"/>
+          <p:cNvSpPr/>
+          <p:nvPr/>
+        </p:nvSpPr>
+        <p:spPr>
+          <a:xfrm>
+            <a:off x="8869680" y="2578608"/>
+            <a:ext cx="2423160" cy="1325880"/>
+          </a:xfrm>
+          <a:prstGeom prst="roundRect">
+            <a:avLst/>
+          </a:prstGeom>
+          <a:solidFill>
+            <a:srgbClr val="FFFFFF"/>
+          </a:solidFill>
+          <a:ln w="15240">
+            <a:solidFill>
+              <a:srgbClr val="C3D7D2"/>
+            </a:solidFill>
+          </a:ln>
+        </p:spPr>
+        <p:style>
+          <a:lnRef idx="1">
+            <a:schemeClr val="accent1"/>
+          </a:lnRef>
+          <a:fillRef idx="3">
+            <a:schemeClr val="accent1"/>
+          </a:fillRef>
+          <a:effectRef idx="2">
+            <a:schemeClr val="accent1"/>
+          </a:effectRef>
+          <a:fontRef idx="minor">
+            <a:schemeClr val="lt1"/>
+          </a:fontRef>
+        </p:style>
+        <p:txBody>
+          <a:bodyPr rtlCol="0" anchor="ctr"/>
+          <a:lstStyle/>
+          <a:p>
+            <a:pPr algn="ctr"/>
+          </a:p>
+        </p:txBody>
+      </p:sp>
+      <p:sp>
+        <p:nvSpPr>
+          <p:cNvPr id="19" name="Oval 18"/>
+          <p:cNvSpPr/>
+          <p:nvPr/>
+        </p:nvSpPr>
+        <p:spPr>
+          <a:xfrm>
+            <a:off x="9015984" y="2706624"/>
+            <a:ext cx="475488" cy="475488"/>
+          </a:xfrm>
+          <a:prstGeom prst="ellipse">
+            <a:avLst/>
+          </a:prstGeom>
+          <a:solidFill>
+            <a:srgbClr val="DBEFEA"/>
+          </a:solidFill>
+          <a:ln>
+            <a:solidFill>
+              <a:srgbClr val="DBEFEA"/>
+            </a:solidFill>
+          </a:ln>
+        </p:spPr>
+        <p:style>
+          <a:lnRef idx="1">
+            <a:schemeClr val="accent1"/>
+          </a:lnRef>
+          <a:fillRef idx="3">
+            <a:schemeClr val="accent1"/>
+          </a:fillRef>
+          <a:effectRef idx="2">
+            <a:schemeClr val="accent1"/>
+          </a:effectRef>
+          <a:fontRef idx="minor">
+            <a:schemeClr val="lt1"/>
+          </a:fontRef>
+        </p:style>
+        <p:txBody>
+          <a:bodyPr rtlCol="0" anchor="ctr" wrap="none" lIns="0" rIns="0" tIns="0" bIns="0"/>
+          <a:lstStyle/>
+          <a:p>
+            <a:pPr algn="ctr"/>
+            <a:r>
+              <a:rPr sz="1100" b="1">
+                <a:solidFill>
+                  <a:srgbClr val="005E53"/>
+                </a:solidFill>
+                <a:latin typeface="Aptos Display"/>
+              </a:rPr>
+              <a:t>4</a:t>
+            </a:r>
+          </a:p>
+        </p:txBody>
+      </p:sp>
+      <p:sp>
+        <p:nvSpPr>
+          <p:cNvPr id="20" name="TextBox 19"/>
+          <p:cNvSpPr txBox="1"/>
+          <p:nvPr/>
+        </p:nvSpPr>
+        <p:spPr>
+          <a:xfrm>
+            <a:off x="9674352" y="2834639"/>
+            <a:ext cx="1463039" cy="292608"/>
+          </a:xfrm>
+          <a:prstGeom prst="rect">
+            <a:avLst/>
+          </a:prstGeom>
+          <a:noFill/>
+        </p:spPr>
+        <p:txBody>
+          <a:bodyPr wrap="square" lIns="0" rIns="0" tIns="0" bIns="0">
+            <a:spAutoFit/>
+          </a:bodyPr>
+          <a:lstStyle/>
+          <a:p>
+            <a:pPr algn="l">
+              <a:spcBef>
+                <a:spcPts val="0"/>
+              </a:spcBef>
+              <a:spcAft>
+                <a:spcPts val="0"/>
+              </a:spcAft>
+            </a:pPr>
+            <a:r>
+              <a:rPr sz="2000" b="1">
+                <a:solidFill>
+                  <a:srgbClr val="0F2023"/>
+                </a:solidFill>
+                <a:latin typeface="Aptos Display"/>
+              </a:rPr>
+              <a:t>Transfer</a:t>
+            </a:r>
+          </a:p>
+        </p:txBody>
+      </p:sp>
+      <p:sp>
+        <p:nvSpPr>
+          <p:cNvPr id="21" name="TextBox 20"/>
+          <p:cNvSpPr txBox="1"/>
+          <p:nvPr/>
+        </p:nvSpPr>
+        <p:spPr>
+          <a:xfrm>
+            <a:off x="9144000" y="3346703"/>
+            <a:ext cx="1920239" cy="438912"/>
+          </a:xfrm>
+          <a:prstGeom prst="rect">
+            <a:avLst/>
+          </a:prstGeom>
+          <a:noFill/>
+        </p:spPr>
+        <p:txBody>
+          <a:bodyPr wrap="square" lIns="0" rIns="0" tIns="0" bIns="0">
+            <a:spAutoFit/>
+          </a:bodyPr>
+          <a:lstStyle/>
+          <a:p>
+            <a:pPr algn="l">
+              <a:spcBef>
+                <a:spcPts val="0"/>
+              </a:spcBef>
+              <a:spcAft>
+                <a:spcPts val="0"/>
+              </a:spcAft>
+            </a:pPr>
+            <a:r>
+              <a:rPr sz="1580" b="0">
+                <a:solidFill>
+                  <a:srgbClr val="0F2023"/>
+                </a:solidFill>
+                <a:latin typeface="Aptos"/>
+              </a:rPr>
+              <a:t>Request, reserve, hand off</a:t>
+            </a:r>
+          </a:p>
+        </p:txBody>
+      </p:sp>
+      <p:sp>
+        <p:nvSpPr>
+          <p:cNvPr id="22" name="Rounded Rectangle 21"/>
+          <p:cNvSpPr/>
+          <p:nvPr/>
+        </p:nvSpPr>
+        <p:spPr>
+          <a:xfrm>
+            <a:off x="841248" y="4617720"/>
+            <a:ext cx="3154680" cy="1207008"/>
+          </a:xfrm>
+          <a:prstGeom prst="roundRect">
+            <a:avLst/>
+          </a:prstGeom>
+          <a:solidFill>
+            <a:srgbClr val="FFFFFF"/>
+          </a:solidFill>
+          <a:ln w="15240">
+            <a:solidFill>
+              <a:srgbClr val="C3D7D2"/>
+            </a:solidFill>
+          </a:ln>
+        </p:spPr>
+        <p:style>
+          <a:lnRef idx="1">
+            <a:schemeClr val="accent1"/>
+          </a:lnRef>
+          <a:fillRef idx="3">
+            <a:schemeClr val="accent1"/>
+          </a:fillRef>
+          <a:effectRef idx="2">
+            <a:schemeClr val="accent1"/>
+          </a:effectRef>
+          <a:fontRef idx="minor">
+            <a:schemeClr val="lt1"/>
+          </a:fontRef>
+        </p:style>
+        <p:txBody>
+          <a:bodyPr rtlCol="0" anchor="ctr"/>
+          <a:lstStyle/>
+          <a:p>
+            <a:pPr algn="ctr"/>
+          </a:p>
+        </p:txBody>
+      </p:sp>
+      <p:sp>
+        <p:nvSpPr>
+          <p:cNvPr id="23" name="TextBox 22"/>
+          <p:cNvSpPr txBox="1"/>
+          <p:nvPr/>
+        </p:nvSpPr>
+        <p:spPr>
+          <a:xfrm>
+            <a:off x="1042416" y="4782312"/>
+            <a:ext cx="2752344" cy="274320"/>
+          </a:xfrm>
+          <a:prstGeom prst="rect">
+            <a:avLst/>
+          </a:prstGeom>
+          <a:noFill/>
+        </p:spPr>
+        <p:txBody>
+          <a:bodyPr wrap="square" lIns="0" rIns="0" tIns="0" bIns="0">
+            <a:spAutoFit/>
+          </a:bodyPr>
+          <a:lstStyle/>
+          <a:p>
+            <a:pPr algn="l">
+              <a:spcBef>
+                <a:spcPts val="0"/>
+              </a:spcBef>
+              <a:spcAft>
+                <a:spcPts val="0"/>
+              </a:spcAft>
+            </a:pPr>
+            <a:r>
+              <a:rPr sz="1900" b="1">
+                <a:solidFill>
+                  <a:srgbClr val="008B7A"/>
+                </a:solidFill>
+                <a:latin typeface="Aptos Display"/>
+              </a:rPr>
+              <a:t>Trust rules</a:t>
+            </a:r>
+          </a:p>
+        </p:txBody>
+      </p:sp>
+      <p:sp>
+        <p:nvSpPr>
+          <p:cNvPr id="24" name="TextBox 23"/>
+          <p:cNvSpPr txBox="1"/>
+          <p:nvPr/>
+        </p:nvSpPr>
+        <p:spPr>
+          <a:xfrm>
+            <a:off x="1042416" y="5184648"/>
+            <a:ext cx="2752344" cy="548640"/>
+          </a:xfrm>
+          <a:prstGeom prst="rect">
+            <a:avLst/>
+          </a:prstGeom>
+          <a:noFill/>
+        </p:spPr>
+        <p:txBody>
+          <a:bodyPr wrap="square" lIns="0" rIns="0" tIns="0" bIns="0">
+            <a:spAutoFit/>
+          </a:bodyPr>
+          <a:lstStyle/>
+          <a:p>
+            <a:pPr algn="l">
+              <a:spcBef>
+                <a:spcPts val="0"/>
+              </a:spcBef>
+              <a:spcAft>
+                <a:spcPts val="0"/>
+              </a:spcAft>
+            </a:pPr>
+            <a:r>
+              <a:rPr sz="1580" b="0">
+                <a:solidFill>
+                  <a:srgbClr val="0F2023"/>
+                </a:solidFill>
+                <a:latin typeface="Aptos"/>
+              </a:rPr>
+              <a:t>Confirmed lot. Redistributable. Non-TEFAP by default.</a:t>
+            </a:r>
+          </a:p>
+        </p:txBody>
+      </p:sp>
+      <p:sp>
+        <p:nvSpPr>
+          <p:cNvPr id="25" name="Rounded Rectangle 24"/>
+          <p:cNvSpPr/>
+          <p:nvPr/>
+        </p:nvSpPr>
+        <p:spPr>
+          <a:xfrm>
+            <a:off x="4517136" y="4617720"/>
+            <a:ext cx="3154680" cy="1207008"/>
+          </a:xfrm>
+          <a:prstGeom prst="roundRect">
+            <a:avLst/>
+          </a:prstGeom>
+          <a:solidFill>
+            <a:srgbClr val="FFFFFF"/>
+          </a:solidFill>
+          <a:ln w="15240">
+            <a:solidFill>
+              <a:srgbClr val="C3D7D2"/>
+            </a:solidFill>
+          </a:ln>
+        </p:spPr>
+        <p:style>
+          <a:lnRef idx="1">
+            <a:schemeClr val="accent1"/>
+          </a:lnRef>
+          <a:fillRef idx="3">
+            <a:schemeClr val="accent1"/>
+          </a:fillRef>
+          <a:effectRef idx="2">
+            <a:schemeClr val="accent1"/>
+          </a:effectRef>
+          <a:fontRef idx="minor">
+            <a:schemeClr val="lt1"/>
+          </a:fontRef>
+        </p:style>
+        <p:txBody>
+          <a:bodyPr rtlCol="0" anchor="ctr"/>
+          <a:lstStyle/>
+          <a:p>
+            <a:pPr algn="ctr"/>
+          </a:p>
+        </p:txBody>
+      </p:sp>
+      <p:sp>
+        <p:nvSpPr>
+          <p:cNvPr id="26" name="TextBox 25"/>
+          <p:cNvSpPr txBox="1"/>
+          <p:nvPr/>
+        </p:nvSpPr>
+        <p:spPr>
+          <a:xfrm>
+            <a:off x="4718304" y="4782312"/>
+            <a:ext cx="2752344" cy="274320"/>
+          </a:xfrm>
+          <a:prstGeom prst="rect">
+            <a:avLst/>
+          </a:prstGeom>
+          <a:noFill/>
+        </p:spPr>
+        <p:txBody>
+          <a:bodyPr wrap="square" lIns="0" rIns="0" tIns="0" bIns="0">
+            <a:spAutoFit/>
+          </a:bodyPr>
+          <a:lstStyle/>
+          <a:p>
+            <a:pPr algn="l">
+              <a:spcBef>
+                <a:spcPts val="0"/>
+              </a:spcBef>
+              <a:spcAft>
+                <a:spcPts val="0"/>
+              </a:spcAft>
+            </a:pPr>
+            <a:r>
+              <a:rPr sz="1900" b="1">
+                <a:solidFill>
+                  <a:srgbClr val="008B7A"/>
+                </a:solidFill>
+                <a:latin typeface="Aptos Display"/>
+              </a:rPr>
+              <a:t>AI role</a:t>
+            </a:r>
+          </a:p>
+        </p:txBody>
+      </p:sp>
+      <p:sp>
+        <p:nvSpPr>
+          <p:cNvPr id="27" name="TextBox 26"/>
+          <p:cNvSpPr txBox="1"/>
+          <p:nvPr/>
+        </p:nvSpPr>
+        <p:spPr>
+          <a:xfrm>
+            <a:off x="4718304" y="5184648"/>
+            <a:ext cx="2752344" cy="548640"/>
+          </a:xfrm>
+          <a:prstGeom prst="rect">
+            <a:avLst/>
+          </a:prstGeom>
+          <a:noFill/>
+        </p:spPr>
+        <p:txBody>
+          <a:bodyPr wrap="square" lIns="0" rIns="0" tIns="0" bIns="0">
+            <a:spAutoFit/>
+          </a:bodyPr>
+          <a:lstStyle/>
+          <a:p>
+            <a:pPr algn="l">
+              <a:spcBef>
+                <a:spcPts val="0"/>
+              </a:spcBef>
+              <a:spcAft>
+                <a:spcPts val="0"/>
+              </a:spcAft>
+            </a:pPr>
+            <a:r>
+              <a:rPr sz="1580" b="0">
+                <a:solidFill>
+                  <a:srgbClr val="0F2023"/>
+                </a:solidFill>
+                <a:latin typeface="Aptos"/>
+              </a:rPr>
+              <a:t>Draft category/date fields. Human confirms.</a:t>
+            </a:r>
+          </a:p>
+        </p:txBody>
+      </p:sp>
+      <p:sp>
+        <p:nvSpPr>
+          <p:cNvPr id="28" name="Rounded Rectangle 27"/>
+          <p:cNvSpPr/>
+          <p:nvPr/>
+        </p:nvSpPr>
+        <p:spPr>
+          <a:xfrm>
+            <a:off x="8193024" y="4617720"/>
+            <a:ext cx="3154680" cy="1207008"/>
+          </a:xfrm>
+          <a:prstGeom prst="roundRect">
+            <a:avLst/>
+          </a:prstGeom>
+          <a:solidFill>
+            <a:srgbClr val="FFFFFF"/>
+          </a:solidFill>
+          <a:ln w="15240">
+            <a:solidFill>
+              <a:srgbClr val="C3D7D2"/>
+            </a:solidFill>
+          </a:ln>
+        </p:spPr>
+        <p:style>
+          <a:lnRef idx="1">
+            <a:schemeClr val="accent1"/>
+          </a:lnRef>
+          <a:fillRef idx="3">
+            <a:schemeClr val="accent1"/>
+          </a:fillRef>
+          <a:effectRef idx="2">
+            <a:schemeClr val="accent1"/>
+          </a:effectRef>
+          <a:fontRef idx="minor">
+            <a:schemeClr val="lt1"/>
+          </a:fontRef>
+        </p:style>
+        <p:txBody>
+          <a:bodyPr rtlCol="0" anchor="ctr"/>
+          <a:lstStyle/>
+          <a:p>
+            <a:pPr algn="ctr"/>
+          </a:p>
+        </p:txBody>
+      </p:sp>
+      <p:sp>
+        <p:nvSpPr>
+          <p:cNvPr id="29" name="TextBox 28"/>
+          <p:cNvSpPr txBox="1"/>
+          <p:nvPr/>
+        </p:nvSpPr>
+        <p:spPr>
+          <a:xfrm>
+            <a:off x="8394192" y="4782312"/>
+            <a:ext cx="2752344" cy="274320"/>
+          </a:xfrm>
+          <a:prstGeom prst="rect">
+            <a:avLst/>
+          </a:prstGeom>
+          <a:noFill/>
+        </p:spPr>
+        <p:txBody>
+          <a:bodyPr wrap="square" lIns="0" rIns="0" tIns="0" bIns="0">
+            <a:spAutoFit/>
+          </a:bodyPr>
+          <a:lstStyle/>
+          <a:p>
+            <a:pPr algn="l">
+              <a:spcBef>
+                <a:spcPts val="0"/>
+              </a:spcBef>
+              <a:spcAft>
+                <a:spcPts val="0"/>
+              </a:spcAft>
+            </a:pPr>
+            <a:r>
+              <a:rPr sz="1900" b="1">
+                <a:solidFill>
+                  <a:srgbClr val="008B7A"/>
+                </a:solidFill>
+                <a:latin typeface="Aptos Display"/>
+              </a:rPr>
+              <a:t>Stock logic</a:t>
+            </a:r>
+          </a:p>
+        </p:txBody>
+      </p:sp>
+      <p:sp>
+        <p:nvSpPr>
+          <p:cNvPr id="30" name="TextBox 29"/>
+          <p:cNvSpPr txBox="1"/>
+          <p:nvPr/>
+        </p:nvSpPr>
+        <p:spPr>
+          <a:xfrm>
+            <a:off x="8394192" y="5184648"/>
+            <a:ext cx="2752344" cy="548640"/>
+          </a:xfrm>
+          <a:prstGeom prst="rect">
+            <a:avLst/>
+          </a:prstGeom>
+          <a:noFill/>
+        </p:spPr>
+        <p:txBody>
+          <a:bodyPr wrap="square" lIns="0" rIns="0" tIns="0" bIns="0">
+            <a:spAutoFit/>
+          </a:bodyPr>
+          <a:lstStyle/>
+          <a:p>
+            <a:pPr algn="l">
+              <a:spcBef>
+                <a:spcPts val="0"/>
+              </a:spcBef>
+              <a:spcAft>
+                <a:spcPts val="0"/>
+              </a:spcAft>
+            </a:pPr>
+            <a:r>
+              <a:rPr sz="1580" b="0">
+                <a:solidFill>
+                  <a:srgbClr val="0F2023"/>
+                </a:solidFill>
+                <a:latin typeface="Aptos"/>
+              </a:rPr>
+              <a:t>Publishing does not reduce stock. Reservation does.</a:t>
+            </a:r>
+          </a:p>
+        </p:txBody>
+      </p:sp>
+      <p:sp>
+        <p:nvSpPr>
           <p:cNvPr id="31" name="TextBox 30"/>
           <p:cNvSpPr txBox="1"/>
           <p:nvPr/>
         </p:nvSpPr>
         <p:spPr>
           <a:xfrm>
-            <a:off x="8357616" y="4133087"/>
-            <a:ext cx="2560320" cy="228600"/>
+            <a:off x="11265408" y="6446520"/>
+            <a:ext cx="502920" cy="201168"/>
           </a:xfrm>
           <a:prstGeom prst="rect">
             <a:avLst/>
@@ -6163,210 +5854,27 @@
           <a:noFill/>
         </p:spPr>
         <p:txBody>
-          <a:bodyPr wrap="square" lIns="18288" rIns="18288" tIns="18288" bIns="18288">
+          <a:bodyPr wrap="square" lIns="0" rIns="0" tIns="0" bIns="0">
             <a:spAutoFit/>
           </a:bodyPr>
           <a:lstStyle/>
           <a:p>
-            <a:r>
-              <a:rPr sz="1500" b="1">
-                <a:solidFill>
-                  <a:srgbClr val="00897B"/>
+            <a:pPr algn="r">
+              <a:spcBef>
+                <a:spcPts val="0"/>
+              </a:spcBef>
+              <a:spcAft>
+                <a:spcPts val="0"/>
+              </a:spcAft>
+            </a:pPr>
+            <a:r>
+              <a:rPr sz="1050" b="0">
+                <a:solidFill>
+                  <a:srgbClr val="4F6369"/>
                 </a:solidFill>
                 <a:latin typeface="Aptos"/>
               </a:rPr>
-              <a:t>Live demo state</a:t>
-            </a:r>
-          </a:p>
-        </p:txBody>
-      </p:sp>
-      <p:sp>
-        <p:nvSpPr>
-          <p:cNvPr id="32" name="TextBox 31"/>
-          <p:cNvSpPr txBox="1"/>
-          <p:nvPr/>
-        </p:nvSpPr>
-        <p:spPr>
-          <a:xfrm>
-            <a:off x="8357616" y="4498848"/>
-            <a:ext cx="2560320" cy="502920"/>
-          </a:xfrm>
-          <a:prstGeom prst="rect">
-            <a:avLst/>
-          </a:prstGeom>
-          <a:noFill/>
-        </p:spPr>
-        <p:txBody>
-          <a:bodyPr wrap="square">
-            <a:spAutoFit/>
-          </a:bodyPr>
-          <a:lstStyle/>
-          <a:p>
-            <a:pPr>
-              <a:spcAft>
-                <a:spcPts val="600"/>
-              </a:spcAft>
-              <a:defRPr sz="1060">
-                <a:solidFill>
-                  <a:srgbClr val="121F23"/>
-                </a:solidFill>
-                <a:latin typeface="Aptos"/>
-              </a:defRPr>
-            </a:pPr>
-            <a:r>
-              <a:t>149 inventory lots.</a:t>
-            </a:r>
-          </a:p>
-          <a:p>
-            <a:pPr>
-              <a:spcAft>
-                <a:spcPts val="600"/>
-              </a:spcAft>
-              <a:defRPr sz="1060">
-                <a:solidFill>
-                  <a:srgbClr val="121F23"/>
-                </a:solidFill>
-                <a:latin typeface="Aptos"/>
-              </a:defRPr>
-            </a:pPr>
-            <a:r>
-              <a:t>73 active listings.</a:t>
-            </a:r>
-          </a:p>
-          <a:p>
-            <a:pPr>
-              <a:spcAft>
-                <a:spcPts val="600"/>
-              </a:spcAft>
-              <a:defRPr sz="1060">
-                <a:solidFill>
-                  <a:srgbClr val="121F23"/>
-                </a:solidFill>
-                <a:latin typeface="Aptos"/>
-              </a:defRPr>
-            </a:pPr>
-            <a:r>
-              <a:t>13 pantry profiles.</a:t>
-            </a:r>
-          </a:p>
-          <a:p>
-            <a:pPr>
-              <a:spcAft>
-                <a:spcPts val="600"/>
-              </a:spcAft>
-              <a:defRPr sz="1060">
-                <a:solidFill>
-                  <a:srgbClr val="121F23"/>
-                </a:solidFill>
-                <a:latin typeface="Aptos"/>
-              </a:defRPr>
-            </a:pPr>
-            <a:r>
-              <a:t>0 payments required.</a:t>
-            </a:r>
-          </a:p>
-        </p:txBody>
-      </p:sp>
-      <p:sp>
-        <p:nvSpPr>
-          <p:cNvPr id="33" name="TextBox 32"/>
-          <p:cNvSpPr txBox="1"/>
-          <p:nvPr/>
-        </p:nvSpPr>
-        <p:spPr>
-          <a:xfrm>
-            <a:off x="914400" y="5779008"/>
-            <a:ext cx="10012680" cy="310896"/>
-          </a:xfrm>
-          <a:prstGeom prst="rect">
-            <a:avLst/>
-          </a:prstGeom>
-          <a:noFill/>
-        </p:spPr>
-        <p:txBody>
-          <a:bodyPr wrap="square" lIns="18288" rIns="18288" tIns="18288" bIns="18288">
-            <a:spAutoFit/>
-          </a:bodyPr>
-          <a:lstStyle/>
-          <a:p>
-            <a:pPr algn="ctr"/>
-            <a:r>
-              <a:rPr sz="1550" b="1">
-                <a:solidFill>
-                  <a:srgbClr val="121F23"/>
-                </a:solidFill>
-                <a:latin typeface="Aptos"/>
-              </a:rPr>
-              <a:t>Important logic: publishing does not reduce stock; requesting reserves stock; transfer decrements stock.</a:t>
-            </a:r>
-          </a:p>
-        </p:txBody>
-      </p:sp>
-      <p:sp>
-        <p:nvSpPr>
-          <p:cNvPr id="34" name="TextBox 33"/>
-          <p:cNvSpPr txBox="1"/>
-          <p:nvPr/>
-        </p:nvSpPr>
-        <p:spPr>
-          <a:xfrm>
-            <a:off x="658368" y="6473952"/>
-            <a:ext cx="8778240" cy="164592"/>
-          </a:xfrm>
-          <a:prstGeom prst="rect">
-            <a:avLst/>
-          </a:prstGeom>
-          <a:noFill/>
-        </p:spPr>
-        <p:txBody>
-          <a:bodyPr wrap="square" lIns="18288" rIns="18288" tIns="18288" bIns="18288">
-            <a:spAutoFit/>
-          </a:bodyPr>
-          <a:lstStyle/>
-          <a:p>
-            <a:r>
-              <a:rPr sz="650" b="0">
-                <a:solidFill>
-                  <a:srgbClr val="58696F"/>
-                </a:solidFill>
-                <a:latin typeface="Aptos"/>
-              </a:rPr>
-              <a:t>Live demo counts queried from Supabase on July 17, 2026.</a:t>
-            </a:r>
-          </a:p>
-        </p:txBody>
-      </p:sp>
-      <p:sp>
-        <p:nvSpPr>
-          <p:cNvPr id="35" name="TextBox 34"/>
-          <p:cNvSpPr txBox="1"/>
-          <p:nvPr/>
-        </p:nvSpPr>
-        <p:spPr>
-          <a:xfrm>
-            <a:off x="10927080" y="6473952"/>
-            <a:ext cx="658368" cy="164592"/>
-          </a:xfrm>
-          <a:prstGeom prst="rect">
-            <a:avLst/>
-          </a:prstGeom>
-          <a:noFill/>
-        </p:spPr>
-        <p:txBody>
-          <a:bodyPr wrap="square" lIns="18288" rIns="18288" tIns="18288" bIns="18288">
-            <a:spAutoFit/>
-          </a:bodyPr>
-          <a:lstStyle/>
-          <a:p>
-            <a:pPr algn="r"/>
-            <a:r>
-              <a:rPr sz="750" b="0">
-                <a:solidFill>
-                  <a:srgbClr val="58696F"/>
-                </a:solidFill>
-                <a:latin typeface="Aptos"/>
-              </a:rPr>
-              <a:t>03 / 04</a:t>
+              <a:t>03 / 05</a:t>
             </a:r>
           </a:p>
         </p:txBody>
@@ -6385,7 +5893,7 @@
     <p:bg>
       <p:bgPr>
         <a:solidFill>
-          <a:srgbClr val="F7FAF8"/>
+          <a:srgbClr val="F6FAF8"/>
         </a:solidFill>
         <a:effectLst/>
       </p:bgPr>
@@ -6405,18 +5913,18 @@
         </p:nvSpPr>
         <p:spPr>
           <a:xfrm>
-            <a:off x="658368" y="438912"/>
-            <a:ext cx="1417320" cy="310896"/>
+            <a:off x="658368" y="502920"/>
+            <a:ext cx="1371600" cy="384048"/>
           </a:xfrm>
           <a:prstGeom prst="roundRect">
             <a:avLst/>
           </a:prstGeom>
           <a:solidFill>
-            <a:srgbClr val="E5F3EE"/>
+            <a:srgbClr val="DBEFEA"/>
           </a:solidFill>
-          <a:ln>
+          <a:ln w="12700">
             <a:solidFill>
-              <a:srgbClr val="CCDED8"/>
+              <a:srgbClr val="C3D7D2"/>
             </a:solidFill>
           </a:ln>
         </p:spPr>
@@ -6435,18 +5943,18 @@
           </a:fontRef>
         </p:style>
         <p:txBody>
-          <a:bodyPr rtlCol="0" anchor="ctr"/>
+          <a:bodyPr rtlCol="0" anchor="ctr" wrap="none" lIns="73152" rIns="73152" tIns="18288" bIns="18288"/>
           <a:lstStyle/>
           <a:p>
             <a:pPr algn="ctr"/>
             <a:r>
-              <a:rPr sz="850" b="1">
-                <a:solidFill>
-                  <a:srgbClr val="005A52"/>
+              <a:rPr sz="1050" b="1">
+                <a:solidFill>
+                  <a:srgbClr val="005E53"/>
                 </a:solidFill>
                 <a:latin typeface="Aptos"/>
               </a:rPr>
-              <a:t>IMPACT</a:t>
+              <a:t>LIVE DEMO</a:t>
             </a:r>
           </a:p>
         </p:txBody>
@@ -6459,8 +5967,8 @@
         </p:nvSpPr>
         <p:spPr>
           <a:xfrm>
-            <a:off x="658368" y="896112"/>
-            <a:ext cx="9052560" cy="658368"/>
+            <a:off x="658368" y="1115568"/>
+            <a:ext cx="9601200" cy="566928"/>
           </a:xfrm>
           <a:prstGeom prst="rect">
             <a:avLst/>
@@ -6468,19 +5976,27 @@
           <a:noFill/>
         </p:spPr>
         <p:txBody>
-          <a:bodyPr wrap="square" lIns="18288" rIns="18288" tIns="18288" bIns="18288">
+          <a:bodyPr wrap="square" lIns="0" rIns="0" tIns="0" bIns="0">
             <a:spAutoFit/>
           </a:bodyPr>
           <a:lstStyle/>
           <a:p>
-            <a:r>
-              <a:rPr sz="2800" b="1">
-                <a:solidFill>
-                  <a:srgbClr val="121F23"/>
-                </a:solidFill>
-                <a:latin typeface="Aptos"/>
-              </a:rPr>
-              <a:t>Why this is worth building.</a:t>
+            <a:pPr algn="l">
+              <a:spcBef>
+                <a:spcPts val="0"/>
+              </a:spcBef>
+              <a:spcAft>
+                <a:spcPts val="0"/>
+              </a:spcAft>
+            </a:pPr>
+            <a:r>
+              <a:rPr sz="3600" b="1">
+                <a:solidFill>
+                  <a:srgbClr val="0F2023"/>
+                </a:solidFill>
+                <a:latin typeface="Aptos Display"/>
+              </a:rPr>
+              <a:t>This is already running.</a:t>
             </a:r>
           </a:p>
         </p:txBody>
@@ -6493,8 +6009,8 @@
         </p:nvSpPr>
         <p:spPr>
           <a:xfrm>
-            <a:off x="685800" y="1581912"/>
-            <a:ext cx="8686800" cy="402336"/>
+            <a:off x="694944" y="1865376"/>
+            <a:ext cx="10424160" cy="384048"/>
           </a:xfrm>
           <a:prstGeom prst="rect">
             <a:avLst/>
@@ -6502,19 +6018,27 @@
           <a:noFill/>
         </p:spPr>
         <p:txBody>
-          <a:bodyPr wrap="square" lIns="18288" rIns="18288" tIns="18288" bIns="18288">
+          <a:bodyPr wrap="square" lIns="0" rIns="0" tIns="0" bIns="0">
             <a:spAutoFit/>
           </a:bodyPr>
           <a:lstStyle/>
           <a:p>
-            <a:r>
-              <a:rPr sz="1320" b="0">
-                <a:solidFill>
-                  <a:srgbClr val="58696F"/>
+            <a:pPr algn="l">
+              <a:spcBef>
+                <a:spcPts val="0"/>
+              </a:spcBef>
+              <a:spcAft>
+                <a:spcPts val="0"/>
+              </a:spcAft>
+            </a:pPr>
+            <a:r>
+              <a:rPr sz="2050" b="0">
+                <a:solidFill>
+                  <a:srgbClr val="4F6369"/>
                 </a:solidFill>
                 <a:latin typeface="Aptos"/>
               </a:rPr>
-              <a:t>Lateral inventory sharing reduces mismatch when one pantry has surplus and another has shortage.</a:t>
+              <a:t>The deployed app uses Bay Area pantry seed data and inventory-backed transfer listings.</a:t>
             </a:r>
           </a:p>
         </p:txBody>
@@ -6527,8 +6051,8 @@
         </p:nvSpPr>
         <p:spPr>
           <a:xfrm>
-            <a:off x="777240" y="1874519"/>
-            <a:ext cx="3273552" cy="1993392"/>
+            <a:off x="868680" y="2514600"/>
+            <a:ext cx="2176272" cy="1078992"/>
           </a:xfrm>
           <a:prstGeom prst="roundRect">
             <a:avLst/>
@@ -6538,7 +6062,7 @@
           </a:solidFill>
           <a:ln w="12700">
             <a:solidFill>
-              <a:srgbClr val="CCDED8"/>
+              <a:srgbClr val="C3D7D2"/>
             </a:solidFill>
           </a:ln>
         </p:spPr>
@@ -6557,144 +6081,48 @@
           </a:fontRef>
         </p:style>
         <p:txBody>
-          <a:bodyPr rtlCol="0" anchor="ctr"/>
+          <a:bodyPr rtlCol="0" anchor="ctr" wrap="square" lIns="164592" rIns="146304" tIns="109728" bIns="73152"/>
           <a:lstStyle/>
           <a:p>
             <a:pPr algn="ctr"/>
-          </a:p>
-        </p:txBody>
-      </p:sp>
-      <p:sp>
-        <p:nvSpPr>
-          <p:cNvPr id="6" name="TextBox 5"/>
-          <p:cNvSpPr txBox="1"/>
-          <p:nvPr/>
-        </p:nvSpPr>
-        <p:spPr>
-          <a:xfrm>
-            <a:off x="1024128" y="2121408"/>
-            <a:ext cx="2651760" cy="237744"/>
-          </a:xfrm>
-          <a:prstGeom prst="rect">
-            <a:avLst/>
-          </a:prstGeom>
-          <a:noFill/>
-        </p:spPr>
-        <p:txBody>
-          <a:bodyPr wrap="square" lIns="18288" rIns="18288" tIns="18288" bIns="18288">
-            <a:spAutoFit/>
-          </a:bodyPr>
-          <a:lstStyle/>
-          <a:p>
-            <a:r>
-              <a:rPr sz="1550" b="1">
-                <a:solidFill>
-                  <a:srgbClr val="B54242"/>
+            <a:r>
+              <a:rPr sz="3100" b="1">
+                <a:solidFill>
+                  <a:srgbClr val="21608E"/>
+                </a:solidFill>
+                <a:latin typeface="Aptos Display"/>
+              </a:rPr>
+              <a:t>149</a:t>
+            </a:r>
+          </a:p>
+          <a:p>
+            <a:pPr>
+              <a:spcBef>
+                <a:spcPts val="200"/>
+              </a:spcBef>
+            </a:pPr>
+            <a:r>
+              <a:rPr sz="1350">
+                <a:solidFill>
+                  <a:srgbClr val="4F6369"/>
                 </a:solidFill>
                 <a:latin typeface="Aptos"/>
               </a:rPr>
-              <a:t>Current system</a:t>
-            </a:r>
-          </a:p>
-        </p:txBody>
-      </p:sp>
-      <p:sp>
-        <p:nvSpPr>
-          <p:cNvPr id="7" name="TextBox 6"/>
-          <p:cNvSpPr txBox="1"/>
-          <p:nvPr/>
-        </p:nvSpPr>
-        <p:spPr>
-          <a:xfrm>
-            <a:off x="1024128" y="2542032"/>
-            <a:ext cx="2697480" cy="914400"/>
-          </a:xfrm>
-          <a:prstGeom prst="rect">
-            <a:avLst/>
-          </a:prstGeom>
-          <a:noFill/>
-        </p:spPr>
-        <p:txBody>
-          <a:bodyPr wrap="square">
-            <a:spAutoFit/>
-          </a:bodyPr>
-          <a:lstStyle/>
-          <a:p>
-            <a:pPr>
-              <a:spcAft>
-                <a:spcPts val="600"/>
-              </a:spcAft>
-              <a:defRPr sz="1080">
-                <a:solidFill>
-                  <a:srgbClr val="121F23"/>
-                </a:solidFill>
-                <a:latin typeface="Aptos"/>
-              </a:defRPr>
-            </a:pPr>
-            <a:r>
-              <a:t>Surplus is visible locally.</a:t>
-            </a:r>
-          </a:p>
-          <a:p>
-            <a:pPr>
-              <a:spcAft>
-                <a:spcPts val="600"/>
-              </a:spcAft>
-              <a:defRPr sz="1080">
-                <a:solidFill>
-                  <a:srgbClr val="121F23"/>
-                </a:solidFill>
-                <a:latin typeface="Aptos"/>
-              </a:defRPr>
-            </a:pPr>
-            <a:r>
-              <a:t>Need is discovered by calls or texts.</a:t>
-            </a:r>
-          </a:p>
-          <a:p>
-            <a:pPr>
-              <a:spcAft>
-                <a:spcPts val="600"/>
-              </a:spcAft>
-              <a:defRPr sz="1080">
-                <a:solidFill>
-                  <a:srgbClr val="121F23"/>
-                </a:solidFill>
-                <a:latin typeface="Aptos"/>
-              </a:defRPr>
-            </a:pPr>
-            <a:r>
-              <a:t>The hub remains the default coordinator.</a:t>
-            </a:r>
-          </a:p>
-          <a:p>
-            <a:pPr>
-              <a:spcAft>
-                <a:spcPts val="600"/>
-              </a:spcAft>
-              <a:defRPr sz="1080">
-                <a:solidFill>
-                  <a:srgbClr val="121F23"/>
-                </a:solidFill>
-                <a:latin typeface="Aptos"/>
-              </a:defRPr>
-            </a:pPr>
-            <a:r>
-              <a:t>Perishable food loses time.</a:t>
-            </a:r>
-          </a:p>
-        </p:txBody>
-      </p:sp>
-      <p:sp>
-        <p:nvSpPr>
-          <p:cNvPr id="8" name="Rounded Rectangle 7"/>
+              <a:t>inventory lots</a:t>
+            </a:r>
+          </a:p>
+        </p:txBody>
+      </p:sp>
+      <p:sp>
+        <p:nvSpPr>
+          <p:cNvPr id="6" name="Rounded Rectangle 5"/>
           <p:cNvSpPr/>
           <p:nvPr/>
         </p:nvSpPr>
         <p:spPr>
           <a:xfrm>
-            <a:off x="4462272" y="1874519"/>
-            <a:ext cx="3273552" cy="1993392"/>
+            <a:off x="3401568" y="2514600"/>
+            <a:ext cx="2176272" cy="1078992"/>
           </a:xfrm>
           <a:prstGeom prst="roundRect">
             <a:avLst/>
@@ -6704,7 +6132,7 @@
           </a:solidFill>
           <a:ln w="12700">
             <a:solidFill>
-              <a:srgbClr val="CCDED8"/>
+              <a:srgbClr val="C3D7D2"/>
             </a:solidFill>
           </a:ln>
         </p:spPr>
@@ -6723,144 +6151,48 @@
           </a:fontRef>
         </p:style>
         <p:txBody>
-          <a:bodyPr rtlCol="0" anchor="ctr"/>
+          <a:bodyPr rtlCol="0" anchor="ctr" wrap="square" lIns="164592" rIns="146304" tIns="109728" bIns="73152"/>
           <a:lstStyle/>
           <a:p>
             <a:pPr algn="ctr"/>
-          </a:p>
-        </p:txBody>
-      </p:sp>
-      <p:sp>
-        <p:nvSpPr>
-          <p:cNvPr id="9" name="TextBox 8"/>
-          <p:cNvSpPr txBox="1"/>
-          <p:nvPr/>
-        </p:nvSpPr>
-        <p:spPr>
-          <a:xfrm>
-            <a:off x="4709160" y="2121408"/>
-            <a:ext cx="2651760" cy="237744"/>
-          </a:xfrm>
-          <a:prstGeom prst="rect">
-            <a:avLst/>
-          </a:prstGeom>
-          <a:noFill/>
-        </p:spPr>
-        <p:txBody>
-          <a:bodyPr wrap="square" lIns="18288" rIns="18288" tIns="18288" bIns="18288">
-            <a:spAutoFit/>
-          </a:bodyPr>
-          <a:lstStyle/>
-          <a:p>
-            <a:r>
-              <a:rPr sz="1550" b="1">
-                <a:solidFill>
-                  <a:srgbClr val="00897B"/>
+            <a:r>
+              <a:rPr sz="3100" b="1">
+                <a:solidFill>
+                  <a:srgbClr val="21608E"/>
+                </a:solidFill>
+                <a:latin typeface="Aptos Display"/>
+              </a:rPr>
+              <a:t>73</a:t>
+            </a:r>
+          </a:p>
+          <a:p>
+            <a:pPr>
+              <a:spcBef>
+                <a:spcPts val="200"/>
+              </a:spcBef>
+            </a:pPr>
+            <a:r>
+              <a:rPr sz="1350">
+                <a:solidFill>
+                  <a:srgbClr val="4F6369"/>
                 </a:solidFill>
                 <a:latin typeface="Aptos"/>
               </a:rPr>
-              <a:t>GoodCo system</a:t>
-            </a:r>
-          </a:p>
-        </p:txBody>
-      </p:sp>
-      <p:sp>
-        <p:nvSpPr>
-          <p:cNvPr id="10" name="TextBox 9"/>
-          <p:cNvSpPr txBox="1"/>
-          <p:nvPr/>
-        </p:nvSpPr>
-        <p:spPr>
-          <a:xfrm>
-            <a:off x="4709160" y="2542032"/>
-            <a:ext cx="2697480" cy="914400"/>
-          </a:xfrm>
-          <a:prstGeom prst="rect">
-            <a:avLst/>
-          </a:prstGeom>
-          <a:noFill/>
-        </p:spPr>
-        <p:txBody>
-          <a:bodyPr wrap="square">
-            <a:spAutoFit/>
-          </a:bodyPr>
-          <a:lstStyle/>
-          <a:p>
-            <a:pPr>
-              <a:spcAft>
-                <a:spcPts val="600"/>
-              </a:spcAft>
-              <a:defRPr sz="1080">
-                <a:solidFill>
-                  <a:srgbClr val="121F23"/>
-                </a:solidFill>
-                <a:latin typeface="Aptos"/>
-              </a:defRPr>
-            </a:pPr>
-            <a:r>
-              <a:t>Eligible surplus is visible.</a:t>
-            </a:r>
-          </a:p>
-          <a:p>
-            <a:pPr>
-              <a:spcAft>
-                <a:spcPts val="600"/>
-              </a:spcAft>
-              <a:defRPr sz="1080">
-                <a:solidFill>
-                  <a:srgbClr val="121F23"/>
-                </a:solidFill>
-                <a:latin typeface="Aptos"/>
-              </a:defRPr>
-            </a:pPr>
-            <a:r>
-              <a:t>Requests reserve quantity.</a:t>
-            </a:r>
-          </a:p>
-          <a:p>
-            <a:pPr>
-              <a:spcAft>
-                <a:spcPts val="600"/>
-              </a:spcAft>
-              <a:defRPr sz="1080">
-                <a:solidFill>
-                  <a:srgbClr val="121F23"/>
-                </a:solidFill>
-                <a:latin typeface="Aptos"/>
-              </a:defRPr>
-            </a:pPr>
-            <a:r>
-              <a:t>Transfers keep audit trail.</a:t>
-            </a:r>
-          </a:p>
-          <a:p>
-            <a:pPr>
-              <a:spcAft>
-                <a:spcPts val="600"/>
-              </a:spcAft>
-              <a:defRPr sz="1080">
-                <a:solidFill>
-                  <a:srgbClr val="121F23"/>
-                </a:solidFill>
-                <a:latin typeface="Aptos"/>
-              </a:defRPr>
-            </a:pPr>
-            <a:r>
-              <a:t>Hub can focus on bulk flow.</a:t>
-            </a:r>
-          </a:p>
-        </p:txBody>
-      </p:sp>
-      <p:sp>
-        <p:nvSpPr>
-          <p:cNvPr id="11" name="Rounded Rectangle 10"/>
+              <a:t>active listings</a:t>
+            </a:r>
+          </a:p>
+        </p:txBody>
+      </p:sp>
+      <p:sp>
+        <p:nvSpPr>
+          <p:cNvPr id="7" name="Rounded Rectangle 6"/>
           <p:cNvSpPr/>
           <p:nvPr/>
         </p:nvSpPr>
         <p:spPr>
           <a:xfrm>
-            <a:off x="8147304" y="1874519"/>
-            <a:ext cx="3273552" cy="1993392"/>
+            <a:off x="5934456" y="2514600"/>
+            <a:ext cx="2176272" cy="1078992"/>
           </a:xfrm>
           <a:prstGeom prst="roundRect">
             <a:avLst/>
@@ -6870,7 +6202,7 @@
           </a:solidFill>
           <a:ln w="12700">
             <a:solidFill>
-              <a:srgbClr val="CCDED8"/>
+              <a:srgbClr val="C3D7D2"/>
             </a:solidFill>
           </a:ln>
         </p:spPr>
@@ -6889,144 +6221,48 @@
           </a:fontRef>
         </p:style>
         <p:txBody>
-          <a:bodyPr rtlCol="0" anchor="ctr"/>
+          <a:bodyPr rtlCol="0" anchor="ctr" wrap="square" lIns="164592" rIns="146304" tIns="109728" bIns="73152"/>
           <a:lstStyle/>
           <a:p>
             <a:pPr algn="ctr"/>
-          </a:p>
-        </p:txBody>
-      </p:sp>
-      <p:sp>
-        <p:nvSpPr>
-          <p:cNvPr id="12" name="TextBox 11"/>
-          <p:cNvSpPr txBox="1"/>
-          <p:nvPr/>
-        </p:nvSpPr>
-        <p:spPr>
-          <a:xfrm>
-            <a:off x="8394192" y="2121408"/>
-            <a:ext cx="2651760" cy="237744"/>
-          </a:xfrm>
-          <a:prstGeom prst="rect">
-            <a:avLst/>
-          </a:prstGeom>
-          <a:noFill/>
-        </p:spPr>
-        <p:txBody>
-          <a:bodyPr wrap="square" lIns="18288" rIns="18288" tIns="18288" bIns="18288">
-            <a:spAutoFit/>
-          </a:bodyPr>
-          <a:lstStyle/>
-          <a:p>
-            <a:r>
-              <a:rPr sz="1550" b="1">
-                <a:solidFill>
-                  <a:srgbClr val="266796"/>
+            <a:r>
+              <a:rPr sz="3100" b="1">
+                <a:solidFill>
+                  <a:srgbClr val="21608E"/>
+                </a:solidFill>
+                <a:latin typeface="Aptos Display"/>
+              </a:rPr>
+              <a:t>13</a:t>
+            </a:r>
+          </a:p>
+          <a:p>
+            <a:pPr>
+              <a:spcBef>
+                <a:spcPts val="200"/>
+              </a:spcBef>
+            </a:pPr>
+            <a:r>
+              <a:rPr sz="1350">
+                <a:solidFill>
+                  <a:srgbClr val="4F6369"/>
                 </a:solidFill>
                 <a:latin typeface="Aptos"/>
               </a:rPr>
-              <a:t>What we measure</a:t>
-            </a:r>
-          </a:p>
-        </p:txBody>
-      </p:sp>
-      <p:sp>
-        <p:nvSpPr>
-          <p:cNvPr id="13" name="TextBox 12"/>
-          <p:cNvSpPr txBox="1"/>
-          <p:nvPr/>
-        </p:nvSpPr>
-        <p:spPr>
-          <a:xfrm>
-            <a:off x="8394192" y="2542032"/>
-            <a:ext cx="2697480" cy="914400"/>
-          </a:xfrm>
-          <a:prstGeom prst="rect">
-            <a:avLst/>
-          </a:prstGeom>
-          <a:noFill/>
-        </p:spPr>
-        <p:txBody>
-          <a:bodyPr wrap="square">
-            <a:spAutoFit/>
-          </a:bodyPr>
-          <a:lstStyle/>
-          <a:p>
-            <a:pPr>
-              <a:spcAft>
-                <a:spcPts val="600"/>
-              </a:spcAft>
-              <a:defRPr sz="1080">
-                <a:solidFill>
-                  <a:srgbClr val="121F23"/>
-                </a:solidFill>
-                <a:latin typeface="Aptos"/>
-              </a:defRPr>
-            </a:pPr>
-            <a:r>
-              <a:t>Lots moved before move-by date.</a:t>
-            </a:r>
-          </a:p>
-          <a:p>
-            <a:pPr>
-              <a:spcAft>
-                <a:spcPts val="600"/>
-              </a:spcAft>
-              <a:defRPr sz="1080">
-                <a:solidFill>
-                  <a:srgbClr val="121F23"/>
-                </a:solidFill>
-                <a:latin typeface="Aptos"/>
-              </a:defRPr>
-            </a:pPr>
-            <a:r>
-              <a:t>Requests fulfilled.</a:t>
-            </a:r>
-          </a:p>
-          <a:p>
-            <a:pPr>
-              <a:spcAft>
-                <a:spcPts val="600"/>
-              </a:spcAft>
-              <a:defRPr sz="1080">
-                <a:solidFill>
-                  <a:srgbClr val="121F23"/>
-                </a:solidFill>
-                <a:latin typeface="Aptos"/>
-              </a:defRPr>
-            </a:pPr>
-            <a:r>
-              <a:t>Expired lots avoided.</a:t>
-            </a:r>
-          </a:p>
-          <a:p>
-            <a:pPr>
-              <a:spcAft>
-                <a:spcPts val="600"/>
-              </a:spcAft>
-              <a:defRPr sz="1080">
-                <a:solidFill>
-                  <a:srgbClr val="121F23"/>
-                </a:solidFill>
-                <a:latin typeface="Aptos"/>
-              </a:defRPr>
-            </a:pPr>
-            <a:r>
-              <a:t>Hub interventions avoided.</a:t>
-            </a:r>
-          </a:p>
-        </p:txBody>
-      </p:sp>
-      <p:sp>
-        <p:nvSpPr>
-          <p:cNvPr id="14" name="Rounded Rectangle 13"/>
+              <a:t>pantry profiles</a:t>
+            </a:r>
+          </a:p>
+        </p:txBody>
+      </p:sp>
+      <p:sp>
+        <p:nvSpPr>
+          <p:cNvPr id="8" name="Rounded Rectangle 7"/>
           <p:cNvSpPr/>
           <p:nvPr/>
         </p:nvSpPr>
         <p:spPr>
           <a:xfrm>
-            <a:off x="1234440" y="4681728"/>
-            <a:ext cx="2240280" cy="941832"/>
+            <a:off x="8467344" y="2514600"/>
+            <a:ext cx="2176272" cy="1078992"/>
           </a:xfrm>
           <a:prstGeom prst="roundRect">
             <a:avLst/>
@@ -7036,7 +6272,7 @@
           </a:solidFill>
           <a:ln w="12700">
             <a:solidFill>
-              <a:srgbClr val="CCDED8"/>
+              <a:srgbClr val="C3D7D2"/>
             </a:solidFill>
           </a:ln>
         </p:spPr>
@@ -7055,91 +6291,48 @@
           </a:fontRef>
         </p:style>
         <p:txBody>
-          <a:bodyPr rtlCol="0" anchor="ctr"/>
+          <a:bodyPr rtlCol="0" anchor="ctr" wrap="square" lIns="164592" rIns="146304" tIns="109728" bIns="73152"/>
           <a:lstStyle/>
           <a:p>
             <a:pPr algn="ctr"/>
-          </a:p>
-        </p:txBody>
-      </p:sp>
-      <p:sp>
-        <p:nvSpPr>
-          <p:cNvPr id="15" name="TextBox 14"/>
-          <p:cNvSpPr txBox="1"/>
-          <p:nvPr/>
-        </p:nvSpPr>
-        <p:spPr>
-          <a:xfrm>
-            <a:off x="1399032" y="4809744"/>
-            <a:ext cx="1947672" cy="292608"/>
-          </a:xfrm>
-          <a:prstGeom prst="rect">
-            <a:avLst/>
-          </a:prstGeom>
-          <a:noFill/>
-        </p:spPr>
-        <p:txBody>
-          <a:bodyPr wrap="square" lIns="18288" rIns="18288" tIns="18288" bIns="18288">
-            <a:spAutoFit/>
-          </a:bodyPr>
-          <a:lstStyle/>
-          <a:p>
-            <a:r>
-              <a:rPr sz="2200" b="1">
-                <a:solidFill>
-                  <a:srgbClr val="B54242"/>
+            <a:r>
+              <a:rPr sz="3100" b="1">
+                <a:solidFill>
+                  <a:srgbClr val="21608E"/>
+                </a:solidFill>
+                <a:latin typeface="Aptos Display"/>
+              </a:rPr>
+              <a:t>0</a:t>
+            </a:r>
+          </a:p>
+          <a:p>
+            <a:pPr>
+              <a:spcBef>
+                <a:spcPts val="200"/>
+              </a:spcBef>
+            </a:pPr>
+            <a:r>
+              <a:rPr sz="1350">
+                <a:solidFill>
+                  <a:srgbClr val="4F6369"/>
                 </a:solidFill>
                 <a:latin typeface="Aptos"/>
               </a:rPr>
-              <a:t>30-40%</a:t>
-            </a:r>
-          </a:p>
-        </p:txBody>
-      </p:sp>
-      <p:sp>
-        <p:nvSpPr>
-          <p:cNvPr id="16" name="TextBox 15"/>
-          <p:cNvSpPr txBox="1"/>
-          <p:nvPr/>
-        </p:nvSpPr>
-        <p:spPr>
-          <a:xfrm>
-            <a:off x="1399032" y="5193792"/>
-            <a:ext cx="1929384" cy="292608"/>
-          </a:xfrm>
-          <a:prstGeom prst="rect">
-            <a:avLst/>
-          </a:prstGeom>
-          <a:noFill/>
-        </p:spPr>
-        <p:txBody>
-          <a:bodyPr wrap="square" lIns="18288" rIns="18288" tIns="18288" bIns="18288">
-            <a:spAutoFit/>
-          </a:bodyPr>
-          <a:lstStyle/>
-          <a:p>
-            <a:r>
-              <a:rPr sz="840" b="0">
-                <a:solidFill>
-                  <a:srgbClr val="58696F"/>
-                </a:solidFill>
-                <a:latin typeface="Aptos"/>
-              </a:rPr>
-              <a:t>U.S. food supply estimated wasted</a:t>
-            </a:r>
-          </a:p>
-        </p:txBody>
-      </p:sp>
-      <p:sp>
-        <p:nvSpPr>
-          <p:cNvPr id="17" name="Rounded Rectangle 16"/>
+              <a:t>payments required</a:t>
+            </a:r>
+          </a:p>
+        </p:txBody>
+      </p:sp>
+      <p:sp>
+        <p:nvSpPr>
+          <p:cNvPr id="9" name="Rounded Rectangle 8"/>
           <p:cNvSpPr/>
           <p:nvPr/>
         </p:nvSpPr>
         <p:spPr>
           <a:xfrm>
-            <a:off x="4956048" y="4681728"/>
-            <a:ext cx="2240280" cy="941832"/>
+            <a:off x="868680" y="4370832"/>
+            <a:ext cx="5074920" cy="1353312"/>
           </a:xfrm>
           <a:prstGeom prst="roundRect">
             <a:avLst/>
@@ -7147,9 +6340,9 @@
           <a:solidFill>
             <a:srgbClr val="FFFFFF"/>
           </a:solidFill>
-          <a:ln w="12700">
+          <a:ln w="15240">
             <a:solidFill>
-              <a:srgbClr val="CCDED8"/>
+              <a:srgbClr val="C3D7D2"/>
             </a:solidFill>
           </a:ln>
         </p:spPr>
@@ -7168,91 +6361,48 @@
           </a:fontRef>
         </p:style>
         <p:txBody>
-          <a:bodyPr rtlCol="0" anchor="ctr"/>
-          <a:lstStyle/>
-          <a:p>
-            <a:pPr algn="ctr"/>
-          </a:p>
-        </p:txBody>
-      </p:sp>
-      <p:sp>
-        <p:nvSpPr>
-          <p:cNvPr id="18" name="TextBox 17"/>
-          <p:cNvSpPr txBox="1"/>
-          <p:nvPr/>
-        </p:nvSpPr>
-        <p:spPr>
-          <a:xfrm>
-            <a:off x="5120640" y="4809744"/>
-            <a:ext cx="1947672" cy="292608"/>
-          </a:xfrm>
-          <a:prstGeom prst="rect">
-            <a:avLst/>
-          </a:prstGeom>
-          <a:noFill/>
-        </p:spPr>
-        <p:txBody>
-          <a:bodyPr wrap="square" lIns="18288" rIns="18288" tIns="18288" bIns="18288">
-            <a:spAutoFit/>
-          </a:bodyPr>
-          <a:lstStyle/>
-          <a:p>
-            <a:r>
-              <a:rPr sz="2200" b="1">
-                <a:solidFill>
-                  <a:srgbClr val="266796"/>
+          <a:bodyPr rtlCol="0" anchor="ctr" wrap="square" lIns="201168" rIns="201168" tIns="164592" bIns="146304"/>
+          <a:lstStyle/>
+          <a:p>
+            <a:pPr algn="l"/>
+            <a:r>
+              <a:rPr sz="2100" b="1">
+                <a:solidFill>
+                  <a:srgbClr val="008B7A"/>
+                </a:solidFill>
+                <a:latin typeface="Aptos Display"/>
+              </a:rPr>
+              <a:t>Demo flow</a:t>
+            </a:r>
+          </a:p>
+          <a:p>
+            <a:pPr algn="l">
+              <a:spcBef>
+                <a:spcPts val="800"/>
+              </a:spcBef>
+            </a:pPr>
+            <a:r>
+              <a:rPr sz="2000" b="0">
+                <a:solidFill>
+                  <a:srgbClr val="0F2023"/>
                 </a:solidFill>
                 <a:latin typeface="Aptos"/>
               </a:rPr>
-              <a:t>10-25%</a:t>
-            </a:r>
-          </a:p>
-        </p:txBody>
-      </p:sp>
-      <p:sp>
-        <p:nvSpPr>
-          <p:cNvPr id="19" name="TextBox 18"/>
-          <p:cNvSpPr txBox="1"/>
-          <p:nvPr/>
-        </p:nvSpPr>
-        <p:spPr>
-          <a:xfrm>
-            <a:off x="5120640" y="5193792"/>
-            <a:ext cx="1929384" cy="292608"/>
-          </a:xfrm>
-          <a:prstGeom prst="rect">
-            <a:avLst/>
-          </a:prstGeom>
-          <a:noFill/>
-        </p:spPr>
-        <p:txBody>
-          <a:bodyPr wrap="square" lIns="18288" rIns="18288" tIns="18288" bIns="18288">
-            <a:spAutoFit/>
-          </a:bodyPr>
-          <a:lstStyle/>
-          <a:p>
-            <a:r>
-              <a:rPr sz="840" b="0">
-                <a:solidFill>
-                  <a:srgbClr val="58696F"/>
-                </a:solidFill>
-                <a:latin typeface="Aptos"/>
-              </a:rPr>
-              <a:t>Cost reduction in one lateral-transshipment study</a:t>
-            </a:r>
-          </a:p>
-        </p:txBody>
-      </p:sp>
-      <p:sp>
-        <p:nvSpPr>
-          <p:cNvPr id="20" name="Rounded Rectangle 19"/>
+              <a:t>Receive item. Publish from Inventory. Request. Transfer. Audit.</a:t>
+            </a:r>
+          </a:p>
+        </p:txBody>
+      </p:sp>
+      <p:sp>
+        <p:nvSpPr>
+          <p:cNvPr id="10" name="Rounded Rectangle 9"/>
           <p:cNvSpPr/>
           <p:nvPr/>
         </p:nvSpPr>
         <p:spPr>
           <a:xfrm>
-            <a:off x="8650224" y="4681728"/>
-            <a:ext cx="2240280" cy="941832"/>
+            <a:off x="6309360" y="4370832"/>
+            <a:ext cx="5074920" cy="1353312"/>
           </a:xfrm>
           <a:prstGeom prst="roundRect">
             <a:avLst/>
@@ -7260,9 +6410,9 @@
           <a:solidFill>
             <a:srgbClr val="FFFFFF"/>
           </a:solidFill>
-          <a:ln w="12700">
+          <a:ln w="15240">
             <a:solidFill>
-              <a:srgbClr val="CCDED8"/>
+              <a:srgbClr val="C3D7D2"/>
             </a:solidFill>
           </a:ln>
         </p:spPr>
@@ -7281,6 +6431,969 @@
           </a:fontRef>
         </p:style>
         <p:txBody>
+          <a:bodyPr rtlCol="0" anchor="ctr" wrap="square" lIns="201168" rIns="201168" tIns="164592" bIns="146304"/>
+          <a:lstStyle/>
+          <a:p>
+            <a:pPr algn="l"/>
+            <a:r>
+              <a:rPr sz="2100" b="1">
+                <a:solidFill>
+                  <a:srgbClr val="008B7A"/>
+                </a:solidFill>
+                <a:latin typeface="Aptos Display"/>
+              </a:rPr>
+              <a:t>Credibility check</a:t>
+            </a:r>
+          </a:p>
+          <a:p>
+            <a:pPr algn="l">
+              <a:spcBef>
+                <a:spcPts val="800"/>
+              </a:spcBef>
+            </a:pPr>
+            <a:r>
+              <a:rPr sz="2000" b="0">
+                <a:solidFill>
+                  <a:srgbClr val="0F2023"/>
+                </a:solidFill>
+                <a:latin typeface="Aptos"/>
+              </a:rPr>
+              <a:t>Listings are tied to inventory lot records, not separate fake rows.</a:t>
+            </a:r>
+          </a:p>
+        </p:txBody>
+      </p:sp>
+      <p:sp>
+        <p:nvSpPr>
+          <p:cNvPr id="11" name="TextBox 10"/>
+          <p:cNvSpPr txBox="1"/>
+          <p:nvPr/>
+        </p:nvSpPr>
+        <p:spPr>
+          <a:xfrm>
+            <a:off x="658368" y="6446520"/>
+            <a:ext cx="9692640" cy="201168"/>
+          </a:xfrm>
+          <a:prstGeom prst="rect">
+            <a:avLst/>
+          </a:prstGeom>
+          <a:noFill/>
+        </p:spPr>
+        <p:txBody>
+          <a:bodyPr wrap="square" lIns="0" rIns="0" tIns="0" bIns="0">
+            <a:spAutoFit/>
+          </a:bodyPr>
+          <a:lstStyle/>
+          <a:p>
+            <a:pPr algn="l">
+              <a:spcBef>
+                <a:spcPts val="0"/>
+              </a:spcBef>
+              <a:spcAft>
+                <a:spcPts val="0"/>
+              </a:spcAft>
+            </a:pPr>
+            <a:r>
+              <a:rPr sz="1050" b="0">
+                <a:solidFill>
+                  <a:srgbClr val="4F6369"/>
+                </a:solidFill>
+                <a:latin typeface="Aptos"/>
+              </a:rPr>
+              <a:t>Live demo counts queried from Supabase on July 17, 2026</a:t>
+            </a:r>
+          </a:p>
+        </p:txBody>
+      </p:sp>
+      <p:sp>
+        <p:nvSpPr>
+          <p:cNvPr id="12" name="TextBox 11"/>
+          <p:cNvSpPr txBox="1"/>
+          <p:nvPr/>
+        </p:nvSpPr>
+        <p:spPr>
+          <a:xfrm>
+            <a:off x="11265408" y="6446520"/>
+            <a:ext cx="502920" cy="201168"/>
+          </a:xfrm>
+          <a:prstGeom prst="rect">
+            <a:avLst/>
+          </a:prstGeom>
+          <a:noFill/>
+        </p:spPr>
+        <p:txBody>
+          <a:bodyPr wrap="square" lIns="0" rIns="0" tIns="0" bIns="0">
+            <a:spAutoFit/>
+          </a:bodyPr>
+          <a:lstStyle/>
+          <a:p>
+            <a:pPr algn="r">
+              <a:spcBef>
+                <a:spcPts val="0"/>
+              </a:spcBef>
+              <a:spcAft>
+                <a:spcPts val="0"/>
+              </a:spcAft>
+            </a:pPr>
+            <a:r>
+              <a:rPr sz="1050" b="0">
+                <a:solidFill>
+                  <a:srgbClr val="4F6369"/>
+                </a:solidFill>
+                <a:latin typeface="Aptos"/>
+              </a:rPr>
+              <a:t>04 / 05</a:t>
+            </a:r>
+          </a:p>
+        </p:txBody>
+      </p:sp>
+    </p:spTree>
+  </p:cSld>
+  <p:clrMapOvr>
+    <a:masterClrMapping/>
+  </p:clrMapOvr>
+</p:sld>
+</file>
+
+<file path=ppt/slides/slide5.xml><?xml version="1.0" encoding="utf-8"?>
+<p:sld xmlns:a="http://schemas.openxmlformats.org/drawingml/2006/main" xmlns:p="http://schemas.openxmlformats.org/presentationml/2006/main" xmlns:r="http://schemas.openxmlformats.org/officeDocument/2006/relationships">
+  <p:cSld>
+    <p:bg>
+      <p:bgPr>
+        <a:solidFill>
+          <a:srgbClr val="F6FAF8"/>
+        </a:solidFill>
+        <a:effectLst/>
+      </p:bgPr>
+    </p:bg>
+    <p:spTree>
+      <p:nvGrpSpPr>
+        <p:cNvPr id="1" name=""/>
+        <p:cNvGrpSpPr/>
+        <p:nvPr/>
+      </p:nvGrpSpPr>
+      <p:grpSpPr/>
+      <p:sp>
+        <p:nvSpPr>
+          <p:cNvPr id="2" name="Rounded Rectangle 1"/>
+          <p:cNvSpPr/>
+          <p:nvPr/>
+        </p:nvSpPr>
+        <p:spPr>
+          <a:xfrm>
+            <a:off x="658368" y="502920"/>
+            <a:ext cx="1371600" cy="384048"/>
+          </a:xfrm>
+          <a:prstGeom prst="roundRect">
+            <a:avLst/>
+          </a:prstGeom>
+          <a:solidFill>
+            <a:srgbClr val="DBEFEA"/>
+          </a:solidFill>
+          <a:ln w="12700">
+            <a:solidFill>
+              <a:srgbClr val="C3D7D2"/>
+            </a:solidFill>
+          </a:ln>
+        </p:spPr>
+        <p:style>
+          <a:lnRef idx="1">
+            <a:schemeClr val="accent1"/>
+          </a:lnRef>
+          <a:fillRef idx="3">
+            <a:schemeClr val="accent1"/>
+          </a:fillRef>
+          <a:effectRef idx="2">
+            <a:schemeClr val="accent1"/>
+          </a:effectRef>
+          <a:fontRef idx="minor">
+            <a:schemeClr val="lt1"/>
+          </a:fontRef>
+        </p:style>
+        <p:txBody>
+          <a:bodyPr rtlCol="0" anchor="ctr" wrap="none"/>
+          <a:lstStyle/>
+          <a:p>
+            <a:pPr algn="ctr"/>
+            <a:r>
+              <a:rPr sz="1050" b="1">
+                <a:solidFill>
+                  <a:srgbClr val="005E53"/>
+                </a:solidFill>
+                <a:latin typeface="Aptos"/>
+              </a:rPr>
+              <a:t>IMPACT</a:t>
+            </a:r>
+          </a:p>
+        </p:txBody>
+      </p:sp>
+      <p:sp>
+        <p:nvSpPr>
+          <p:cNvPr id="3" name="TextBox 2"/>
+          <p:cNvSpPr txBox="1"/>
+          <p:nvPr/>
+        </p:nvSpPr>
+        <p:spPr>
+          <a:xfrm>
+            <a:off x="658368" y="1115568"/>
+            <a:ext cx="10515600" cy="566928"/>
+          </a:xfrm>
+          <a:prstGeom prst="rect">
+            <a:avLst/>
+          </a:prstGeom>
+          <a:noFill/>
+        </p:spPr>
+        <p:txBody>
+          <a:bodyPr wrap="square" lIns="0" rIns="0" tIns="0" bIns="0">
+            <a:spAutoFit/>
+          </a:bodyPr>
+          <a:lstStyle/>
+          <a:p>
+            <a:pPr algn="l">
+              <a:spcBef>
+                <a:spcPts val="0"/>
+              </a:spcBef>
+              <a:spcAft>
+                <a:spcPts val="0"/>
+              </a:spcAft>
+            </a:pPr>
+            <a:r>
+              <a:rPr sz="3600" b="1">
+                <a:solidFill>
+                  <a:srgbClr val="0F2023"/>
+                </a:solidFill>
+                <a:latin typeface="Aptos Display"/>
+              </a:rPr>
+              <a:t>The efficiency claim is measurable.</a:t>
+            </a:r>
+          </a:p>
+        </p:txBody>
+      </p:sp>
+      <p:sp>
+        <p:nvSpPr>
+          <p:cNvPr id="4" name="TextBox 3"/>
+          <p:cNvSpPr txBox="1"/>
+          <p:nvPr/>
+        </p:nvSpPr>
+        <p:spPr>
+          <a:xfrm>
+            <a:off x="694944" y="1865376"/>
+            <a:ext cx="10424160" cy="384048"/>
+          </a:xfrm>
+          <a:prstGeom prst="rect">
+            <a:avLst/>
+          </a:prstGeom>
+          <a:noFill/>
+        </p:spPr>
+        <p:txBody>
+          <a:bodyPr wrap="square" lIns="0" rIns="0" tIns="0" bIns="0">
+            <a:spAutoFit/>
+          </a:bodyPr>
+          <a:lstStyle/>
+          <a:p>
+            <a:pPr algn="l">
+              <a:spcBef>
+                <a:spcPts val="0"/>
+              </a:spcBef>
+              <a:spcAft>
+                <a:spcPts val="0"/>
+              </a:spcAft>
+            </a:pPr>
+            <a:r>
+              <a:rPr sz="2050" b="0">
+                <a:solidFill>
+                  <a:srgbClr val="4F6369"/>
+                </a:solidFill>
+                <a:latin typeface="Aptos"/>
+              </a:rPr>
+              <a:t>GoodCo should reduce mismatch when supply and need differ across pantries.</a:t>
+            </a:r>
+          </a:p>
+        </p:txBody>
+      </p:sp>
+      <p:sp>
+        <p:nvSpPr>
+          <p:cNvPr id="5" name="Rounded Rectangle 4"/>
+          <p:cNvSpPr/>
+          <p:nvPr/>
+        </p:nvSpPr>
+        <p:spPr>
+          <a:xfrm>
+            <a:off x="841248" y="2542032"/>
+            <a:ext cx="3246120" cy="1938528"/>
+          </a:xfrm>
+          <a:prstGeom prst="roundRect">
+            <a:avLst/>
+          </a:prstGeom>
+          <a:solidFill>
+            <a:srgbClr val="FFFFFF"/>
+          </a:solidFill>
+          <a:ln w="15240">
+            <a:solidFill>
+              <a:srgbClr val="C3D7D2"/>
+            </a:solidFill>
+          </a:ln>
+        </p:spPr>
+        <p:style>
+          <a:lnRef idx="1">
+            <a:schemeClr val="accent1"/>
+          </a:lnRef>
+          <a:fillRef idx="3">
+            <a:schemeClr val="accent1"/>
+          </a:fillRef>
+          <a:effectRef idx="2">
+            <a:schemeClr val="accent1"/>
+          </a:effectRef>
+          <a:fontRef idx="minor">
+            <a:schemeClr val="lt1"/>
+          </a:fontRef>
+        </p:style>
+        <p:txBody>
+          <a:bodyPr rtlCol="0" anchor="ctr"/>
+          <a:lstStyle/>
+          <a:p>
+            <a:pPr algn="ctr"/>
+          </a:p>
+        </p:txBody>
+      </p:sp>
+      <p:sp>
+        <p:nvSpPr>
+          <p:cNvPr id="6" name="TextBox 5"/>
+          <p:cNvSpPr txBox="1"/>
+          <p:nvPr/>
+        </p:nvSpPr>
+        <p:spPr>
+          <a:xfrm>
+            <a:off x="1042416" y="2706624"/>
+            <a:ext cx="2843784" cy="274320"/>
+          </a:xfrm>
+          <a:prstGeom prst="rect">
+            <a:avLst/>
+          </a:prstGeom>
+          <a:noFill/>
+        </p:spPr>
+        <p:txBody>
+          <a:bodyPr wrap="square" lIns="0" rIns="0" tIns="0" bIns="0">
+            <a:spAutoFit/>
+          </a:bodyPr>
+          <a:lstStyle/>
+          <a:p>
+            <a:pPr algn="l">
+              <a:spcBef>
+                <a:spcPts val="0"/>
+              </a:spcBef>
+              <a:spcAft>
+                <a:spcPts val="0"/>
+              </a:spcAft>
+            </a:pPr>
+            <a:r>
+              <a:rPr sz="2200" b="1">
+                <a:solidFill>
+                  <a:srgbClr val="B54146"/>
+                </a:solidFill>
+                <a:latin typeface="Aptos Display"/>
+              </a:rPr>
+              <a:t>Today</a:t>
+            </a:r>
+          </a:p>
+        </p:txBody>
+      </p:sp>
+      <p:sp>
+        <p:nvSpPr>
+          <p:cNvPr id="7" name="TextBox 6"/>
+          <p:cNvSpPr txBox="1"/>
+          <p:nvPr/>
+        </p:nvSpPr>
+        <p:spPr>
+          <a:xfrm>
+            <a:off x="1042416" y="3108960"/>
+            <a:ext cx="2843784" cy="1280160"/>
+          </a:xfrm>
+          <a:prstGeom prst="rect">
+            <a:avLst/>
+          </a:prstGeom>
+          <a:noFill/>
+        </p:spPr>
+        <p:txBody>
+          <a:bodyPr wrap="square" lIns="0" rIns="0" tIns="0" bIns="0">
+            <a:spAutoFit/>
+          </a:bodyPr>
+          <a:lstStyle/>
+          <a:p>
+            <a:pPr algn="l">
+              <a:spcBef>
+                <a:spcPts val="0"/>
+              </a:spcBef>
+              <a:spcAft>
+                <a:spcPts val="0"/>
+              </a:spcAft>
+            </a:pPr>
+            <a:r>
+              <a:rPr sz="1880" b="0">
+                <a:solidFill>
+                  <a:srgbClr val="0F2023"/>
+                </a:solidFill>
+                <a:latin typeface="Aptos"/>
+              </a:rPr>
+              <a:t>Surplus stays local. Need is found late. The hub becomes the default coordinator.</a:t>
+            </a:r>
+          </a:p>
+        </p:txBody>
+      </p:sp>
+      <p:sp>
+        <p:nvSpPr>
+          <p:cNvPr id="8" name="Rounded Rectangle 7"/>
+          <p:cNvSpPr/>
+          <p:nvPr/>
+        </p:nvSpPr>
+        <p:spPr>
+          <a:xfrm>
+            <a:off x="4462272" y="2542032"/>
+            <a:ext cx="3246120" cy="1938528"/>
+          </a:xfrm>
+          <a:prstGeom prst="roundRect">
+            <a:avLst/>
+          </a:prstGeom>
+          <a:solidFill>
+            <a:srgbClr val="FFFFFF"/>
+          </a:solidFill>
+          <a:ln w="15240">
+            <a:solidFill>
+              <a:srgbClr val="C3D7D2"/>
+            </a:solidFill>
+          </a:ln>
+        </p:spPr>
+        <p:style>
+          <a:lnRef idx="1">
+            <a:schemeClr val="accent1"/>
+          </a:lnRef>
+          <a:fillRef idx="3">
+            <a:schemeClr val="accent1"/>
+          </a:fillRef>
+          <a:effectRef idx="2">
+            <a:schemeClr val="accent1"/>
+          </a:effectRef>
+          <a:fontRef idx="minor">
+            <a:schemeClr val="lt1"/>
+          </a:fontRef>
+        </p:style>
+        <p:txBody>
+          <a:bodyPr rtlCol="0" anchor="ctr"/>
+          <a:lstStyle/>
+          <a:p>
+            <a:pPr algn="ctr"/>
+          </a:p>
+        </p:txBody>
+      </p:sp>
+      <p:sp>
+        <p:nvSpPr>
+          <p:cNvPr id="9" name="TextBox 8"/>
+          <p:cNvSpPr txBox="1"/>
+          <p:nvPr/>
+        </p:nvSpPr>
+        <p:spPr>
+          <a:xfrm>
+            <a:off x="4663440" y="2706624"/>
+            <a:ext cx="2843784" cy="274320"/>
+          </a:xfrm>
+          <a:prstGeom prst="rect">
+            <a:avLst/>
+          </a:prstGeom>
+          <a:noFill/>
+        </p:spPr>
+        <p:txBody>
+          <a:bodyPr wrap="square" lIns="0" rIns="0" tIns="0" bIns="0">
+            <a:spAutoFit/>
+          </a:bodyPr>
+          <a:lstStyle/>
+          <a:p>
+            <a:pPr algn="l">
+              <a:spcBef>
+                <a:spcPts val="0"/>
+              </a:spcBef>
+              <a:spcAft>
+                <a:spcPts val="0"/>
+              </a:spcAft>
+            </a:pPr>
+            <a:r>
+              <a:rPr sz="2200" b="1">
+                <a:solidFill>
+                  <a:srgbClr val="008B7A"/>
+                </a:solidFill>
+                <a:latin typeface="Aptos Display"/>
+              </a:rPr>
+              <a:t>With GoodCo</a:t>
+            </a:r>
+          </a:p>
+        </p:txBody>
+      </p:sp>
+      <p:sp>
+        <p:nvSpPr>
+          <p:cNvPr id="10" name="TextBox 9"/>
+          <p:cNvSpPr txBox="1"/>
+          <p:nvPr/>
+        </p:nvSpPr>
+        <p:spPr>
+          <a:xfrm>
+            <a:off x="4663440" y="3108960"/>
+            <a:ext cx="2843784" cy="1280160"/>
+          </a:xfrm>
+          <a:prstGeom prst="rect">
+            <a:avLst/>
+          </a:prstGeom>
+          <a:noFill/>
+        </p:spPr>
+        <p:txBody>
+          <a:bodyPr wrap="square" lIns="0" rIns="0" tIns="0" bIns="0">
+            <a:spAutoFit/>
+          </a:bodyPr>
+          <a:lstStyle/>
+          <a:p>
+            <a:pPr algn="l">
+              <a:spcBef>
+                <a:spcPts val="0"/>
+              </a:spcBef>
+              <a:spcAft>
+                <a:spcPts val="0"/>
+              </a:spcAft>
+            </a:pPr>
+            <a:r>
+              <a:rPr sz="1880" b="0">
+                <a:solidFill>
+                  <a:srgbClr val="0F2023"/>
+                </a:solidFill>
+                <a:latin typeface="Aptos"/>
+              </a:rPr>
+              <a:t>Eligible surplus is visible. Requests reserve quantity. Transfers leave an audit trail.</a:t>
+            </a:r>
+          </a:p>
+        </p:txBody>
+      </p:sp>
+      <p:sp>
+        <p:nvSpPr>
+          <p:cNvPr id="11" name="Rounded Rectangle 10"/>
+          <p:cNvSpPr/>
+          <p:nvPr/>
+        </p:nvSpPr>
+        <p:spPr>
+          <a:xfrm>
+            <a:off x="8083296" y="2542032"/>
+            <a:ext cx="3246120" cy="1938528"/>
+          </a:xfrm>
+          <a:prstGeom prst="roundRect">
+            <a:avLst/>
+          </a:prstGeom>
+          <a:solidFill>
+            <a:srgbClr val="FFFFFF"/>
+          </a:solidFill>
+          <a:ln w="15240">
+            <a:solidFill>
+              <a:srgbClr val="C3D7D2"/>
+            </a:solidFill>
+          </a:ln>
+        </p:spPr>
+        <p:style>
+          <a:lnRef idx="1">
+            <a:schemeClr val="accent1"/>
+          </a:lnRef>
+          <a:fillRef idx="3">
+            <a:schemeClr val="accent1"/>
+          </a:fillRef>
+          <a:effectRef idx="2">
+            <a:schemeClr val="accent1"/>
+          </a:effectRef>
+          <a:fontRef idx="minor">
+            <a:schemeClr val="lt1"/>
+          </a:fontRef>
+        </p:style>
+        <p:txBody>
+          <a:bodyPr rtlCol="0" anchor="ctr"/>
+          <a:lstStyle/>
+          <a:p>
+            <a:pPr algn="ctr"/>
+          </a:p>
+        </p:txBody>
+      </p:sp>
+      <p:sp>
+        <p:nvSpPr>
+          <p:cNvPr id="12" name="TextBox 11"/>
+          <p:cNvSpPr txBox="1"/>
+          <p:nvPr/>
+        </p:nvSpPr>
+        <p:spPr>
+          <a:xfrm>
+            <a:off x="8284464" y="2706624"/>
+            <a:ext cx="2843784" cy="274320"/>
+          </a:xfrm>
+          <a:prstGeom prst="rect">
+            <a:avLst/>
+          </a:prstGeom>
+          <a:noFill/>
+        </p:spPr>
+        <p:txBody>
+          <a:bodyPr wrap="square" lIns="0" rIns="0" tIns="0" bIns="0">
+            <a:spAutoFit/>
+          </a:bodyPr>
+          <a:lstStyle/>
+          <a:p>
+            <a:pPr algn="l">
+              <a:spcBef>
+                <a:spcPts val="0"/>
+              </a:spcBef>
+              <a:spcAft>
+                <a:spcPts val="0"/>
+              </a:spcAft>
+            </a:pPr>
+            <a:r>
+              <a:rPr sz="2200" b="1">
+                <a:solidFill>
+                  <a:srgbClr val="21608E"/>
+                </a:solidFill>
+                <a:latin typeface="Aptos Display"/>
+              </a:rPr>
+              <a:t>Pilot metrics</a:t>
+            </a:r>
+          </a:p>
+        </p:txBody>
+      </p:sp>
+      <p:sp>
+        <p:nvSpPr>
+          <p:cNvPr id="13" name="TextBox 12"/>
+          <p:cNvSpPr txBox="1"/>
+          <p:nvPr/>
+        </p:nvSpPr>
+        <p:spPr>
+          <a:xfrm>
+            <a:off x="8284464" y="3108960"/>
+            <a:ext cx="2843784" cy="1280160"/>
+          </a:xfrm>
+          <a:prstGeom prst="rect">
+            <a:avLst/>
+          </a:prstGeom>
+          <a:noFill/>
+        </p:spPr>
+        <p:txBody>
+          <a:bodyPr wrap="square" lIns="0" rIns="0" tIns="0" bIns="0">
+            <a:spAutoFit/>
+          </a:bodyPr>
+          <a:lstStyle/>
+          <a:p>
+            <a:pPr algn="l">
+              <a:spcBef>
+                <a:spcPts val="0"/>
+              </a:spcBef>
+              <a:spcAft>
+                <a:spcPts val="0"/>
+              </a:spcAft>
+            </a:pPr>
+            <a:r>
+              <a:rPr sz="1820" b="0">
+                <a:solidFill>
+                  <a:srgbClr val="0F2023"/>
+                </a:solidFill>
+                <a:latin typeface="Aptos"/>
+              </a:rPr>
+              <a:t>Move-before-expiry rate. Request fill rate. Expired lots avoided. Hub interventions avoided.</a:t>
+            </a:r>
+          </a:p>
+        </p:txBody>
+      </p:sp>
+      <p:sp>
+        <p:nvSpPr>
+          <p:cNvPr id="14" name="Rounded Rectangle 13"/>
+          <p:cNvSpPr/>
+          <p:nvPr/>
+        </p:nvSpPr>
+        <p:spPr>
+          <a:xfrm>
+            <a:off x="1024128" y="5047488"/>
+            <a:ext cx="2880360" cy="1060704"/>
+          </a:xfrm>
+          <a:prstGeom prst="roundRect">
+            <a:avLst/>
+          </a:prstGeom>
+          <a:solidFill>
+            <a:srgbClr val="FFFFFF"/>
+          </a:solidFill>
+          <a:ln w="15240">
+            <a:solidFill>
+              <a:srgbClr val="C3D7D2"/>
+            </a:solidFill>
+          </a:ln>
+        </p:spPr>
+        <p:style>
+          <a:lnRef idx="1">
+            <a:schemeClr val="accent1"/>
+          </a:lnRef>
+          <a:fillRef idx="3">
+            <a:schemeClr val="accent1"/>
+          </a:fillRef>
+          <a:effectRef idx="2">
+            <a:schemeClr val="accent1"/>
+          </a:effectRef>
+          <a:fontRef idx="minor">
+            <a:schemeClr val="lt1"/>
+          </a:fontRef>
+        </p:style>
+        <p:txBody>
+          <a:bodyPr rtlCol="0" anchor="ctr"/>
+          <a:lstStyle/>
+          <a:p>
+            <a:pPr algn="ctr"/>
+          </a:p>
+        </p:txBody>
+      </p:sp>
+      <p:sp>
+        <p:nvSpPr>
+          <p:cNvPr id="15" name="TextBox 14"/>
+          <p:cNvSpPr txBox="1"/>
+          <p:nvPr/>
+        </p:nvSpPr>
+        <p:spPr>
+          <a:xfrm>
+            <a:off x="1188720" y="5193792"/>
+            <a:ext cx="2551176" cy="310896"/>
+          </a:xfrm>
+          <a:prstGeom prst="rect">
+            <a:avLst/>
+          </a:prstGeom>
+          <a:noFill/>
+        </p:spPr>
+        <p:txBody>
+          <a:bodyPr wrap="square" lIns="0" rIns="0" tIns="0" bIns="0">
+            <a:spAutoFit/>
+          </a:bodyPr>
+          <a:lstStyle/>
+          <a:p>
+            <a:pPr algn="ctr">
+              <a:spcBef>
+                <a:spcPts val="0"/>
+              </a:spcBef>
+              <a:spcAft>
+                <a:spcPts val="0"/>
+              </a:spcAft>
+            </a:pPr>
+            <a:r>
+              <a:rPr sz="2800" b="1">
+                <a:solidFill>
+                  <a:srgbClr val="B54146"/>
+                </a:solidFill>
+                <a:latin typeface="Aptos Display"/>
+              </a:rPr>
+              <a:t>30-40%</a:t>
+            </a:r>
+          </a:p>
+        </p:txBody>
+      </p:sp>
+      <p:sp>
+        <p:nvSpPr>
+          <p:cNvPr id="16" name="TextBox 15"/>
+          <p:cNvSpPr txBox="1"/>
+          <p:nvPr/>
+        </p:nvSpPr>
+        <p:spPr>
+          <a:xfrm>
+            <a:off x="1188720" y="5650992"/>
+            <a:ext cx="2551176" cy="365760"/>
+          </a:xfrm>
+          <a:prstGeom prst="rect">
+            <a:avLst/>
+          </a:prstGeom>
+          <a:noFill/>
+        </p:spPr>
+        <p:txBody>
+          <a:bodyPr wrap="square" lIns="0" rIns="0" tIns="0" bIns="0">
+            <a:spAutoFit/>
+          </a:bodyPr>
+          <a:lstStyle/>
+          <a:p>
+            <a:pPr algn="ctr">
+              <a:spcBef>
+                <a:spcPts val="0"/>
+              </a:spcBef>
+              <a:spcAft>
+                <a:spcPts val="0"/>
+              </a:spcAft>
+            </a:pPr>
+            <a:r>
+              <a:rPr sz="1280" b="0">
+                <a:solidFill>
+                  <a:srgbClr val="4F6369"/>
+                </a:solidFill>
+                <a:latin typeface="Aptos"/>
+              </a:rPr>
+              <a:t>U.S. food supply wasted</a:t>
+            </a:r>
+          </a:p>
+        </p:txBody>
+      </p:sp>
+      <p:sp>
+        <p:nvSpPr>
+          <p:cNvPr id="17" name="Rounded Rectangle 16"/>
+          <p:cNvSpPr/>
+          <p:nvPr/>
+        </p:nvSpPr>
+        <p:spPr>
+          <a:xfrm>
+            <a:off x="4645152" y="5047488"/>
+            <a:ext cx="2880360" cy="1060704"/>
+          </a:xfrm>
+          <a:prstGeom prst="roundRect">
+            <a:avLst/>
+          </a:prstGeom>
+          <a:solidFill>
+            <a:srgbClr val="FFFFFF"/>
+          </a:solidFill>
+          <a:ln w="15240">
+            <a:solidFill>
+              <a:srgbClr val="C3D7D2"/>
+            </a:solidFill>
+          </a:ln>
+        </p:spPr>
+        <p:style>
+          <a:lnRef idx="1">
+            <a:schemeClr val="accent1"/>
+          </a:lnRef>
+          <a:fillRef idx="3">
+            <a:schemeClr val="accent1"/>
+          </a:fillRef>
+          <a:effectRef idx="2">
+            <a:schemeClr val="accent1"/>
+          </a:effectRef>
+          <a:fontRef idx="minor">
+            <a:schemeClr val="lt1"/>
+          </a:fontRef>
+        </p:style>
+        <p:txBody>
+          <a:bodyPr rtlCol="0" anchor="ctr"/>
+          <a:lstStyle/>
+          <a:p>
+            <a:pPr algn="ctr"/>
+          </a:p>
+        </p:txBody>
+      </p:sp>
+      <p:sp>
+        <p:nvSpPr>
+          <p:cNvPr id="18" name="TextBox 17"/>
+          <p:cNvSpPr txBox="1"/>
+          <p:nvPr/>
+        </p:nvSpPr>
+        <p:spPr>
+          <a:xfrm>
+            <a:off x="4809744" y="5193792"/>
+            <a:ext cx="2551176" cy="310896"/>
+          </a:xfrm>
+          <a:prstGeom prst="rect">
+            <a:avLst/>
+          </a:prstGeom>
+          <a:noFill/>
+        </p:spPr>
+        <p:txBody>
+          <a:bodyPr wrap="square" lIns="0" rIns="0" tIns="0" bIns="0">
+            <a:spAutoFit/>
+          </a:bodyPr>
+          <a:lstStyle/>
+          <a:p>
+            <a:pPr algn="ctr">
+              <a:spcBef>
+                <a:spcPts val="0"/>
+              </a:spcBef>
+              <a:spcAft>
+                <a:spcPts val="0"/>
+              </a:spcAft>
+            </a:pPr>
+            <a:r>
+              <a:rPr sz="2800" b="1">
+                <a:solidFill>
+                  <a:srgbClr val="21608E"/>
+                </a:solidFill>
+                <a:latin typeface="Aptos Display"/>
+              </a:rPr>
+              <a:t>10-25%</a:t>
+            </a:r>
+          </a:p>
+        </p:txBody>
+      </p:sp>
+      <p:sp>
+        <p:nvSpPr>
+          <p:cNvPr id="19" name="TextBox 18"/>
+          <p:cNvSpPr txBox="1"/>
+          <p:nvPr/>
+        </p:nvSpPr>
+        <p:spPr>
+          <a:xfrm>
+            <a:off x="4809744" y="5650992"/>
+            <a:ext cx="2551176" cy="365760"/>
+          </a:xfrm>
+          <a:prstGeom prst="rect">
+            <a:avLst/>
+          </a:prstGeom>
+          <a:noFill/>
+        </p:spPr>
+        <p:txBody>
+          <a:bodyPr wrap="square" lIns="0" rIns="0" tIns="0" bIns="0">
+            <a:spAutoFit/>
+          </a:bodyPr>
+          <a:lstStyle/>
+          <a:p>
+            <a:pPr algn="ctr">
+              <a:spcBef>
+                <a:spcPts val="0"/>
+              </a:spcBef>
+              <a:spcAft>
+                <a:spcPts val="0"/>
+              </a:spcAft>
+            </a:pPr>
+            <a:r>
+              <a:rPr sz="1280" b="0">
+                <a:solidFill>
+                  <a:srgbClr val="4F6369"/>
+                </a:solidFill>
+                <a:latin typeface="Aptos"/>
+              </a:rPr>
+              <a:t>One lateral-sharing cost study</a:t>
+            </a:r>
+          </a:p>
+        </p:txBody>
+      </p:sp>
+      <p:sp>
+        <p:nvSpPr>
+          <p:cNvPr id="20" name="Rounded Rectangle 19"/>
+          <p:cNvSpPr/>
+          <p:nvPr/>
+        </p:nvSpPr>
+        <p:spPr>
+          <a:xfrm>
+            <a:off x="8266175" y="5047488"/>
+            <a:ext cx="2880360" cy="1060704"/>
+          </a:xfrm>
+          <a:prstGeom prst="roundRect">
+            <a:avLst/>
+          </a:prstGeom>
+          <a:solidFill>
+            <a:srgbClr val="FFFFFF"/>
+          </a:solidFill>
+          <a:ln w="15240">
+            <a:solidFill>
+              <a:srgbClr val="C3D7D2"/>
+            </a:solidFill>
+          </a:ln>
+        </p:spPr>
+        <p:style>
+          <a:lnRef idx="1">
+            <a:schemeClr val="accent1"/>
+          </a:lnRef>
+          <a:fillRef idx="3">
+            <a:schemeClr val="accent1"/>
+          </a:fillRef>
+          <a:effectRef idx="2">
+            <a:schemeClr val="accent1"/>
+          </a:effectRef>
+          <a:fontRef idx="minor">
+            <a:schemeClr val="lt1"/>
+          </a:fontRef>
+        </p:style>
+        <p:txBody>
           <a:bodyPr rtlCol="0" anchor="ctr"/>
           <a:lstStyle/>
           <a:p>
@@ -7296,8 +7409,8 @@
         </p:nvSpPr>
         <p:spPr>
           <a:xfrm>
-            <a:off x="8814816" y="4809744"/>
-            <a:ext cx="1947672" cy="292608"/>
+            <a:off x="8430767" y="5193792"/>
+            <a:ext cx="2551176" cy="310896"/>
           </a:xfrm>
           <a:prstGeom prst="rect">
             <a:avLst/>
@@ -7305,17 +7418,25 @@
           <a:noFill/>
         </p:spPr>
         <p:txBody>
-          <a:bodyPr wrap="square" lIns="18288" rIns="18288" tIns="18288" bIns="18288">
+          <a:bodyPr wrap="square" lIns="0" rIns="0" tIns="0" bIns="0">
             <a:spAutoFit/>
           </a:bodyPr>
           <a:lstStyle/>
           <a:p>
-            <a:r>
-              <a:rPr sz="2200" b="1">
-                <a:solidFill>
-                  <a:srgbClr val="00897B"/>
-                </a:solidFill>
-                <a:latin typeface="Aptos"/>
+            <a:pPr algn="ctr">
+              <a:spcBef>
+                <a:spcPts val="0"/>
+              </a:spcBef>
+              <a:spcAft>
+                <a:spcPts val="0"/>
+              </a:spcAft>
+            </a:pPr>
+            <a:r>
+              <a:rPr sz="2800" b="1">
+                <a:solidFill>
+                  <a:srgbClr val="008B7A"/>
+                </a:solidFill>
+                <a:latin typeface="Aptos Display"/>
               </a:rPr>
               <a:t>Pilot</a:t>
             </a:r>
@@ -7330,8 +7451,8 @@
         </p:nvSpPr>
         <p:spPr>
           <a:xfrm>
-            <a:off x="8814816" y="5193792"/>
-            <a:ext cx="1929384" cy="292608"/>
+            <a:off x="8430767" y="5650992"/>
+            <a:ext cx="2551176" cy="365760"/>
           </a:xfrm>
           <a:prstGeom prst="rect">
             <a:avLst/>
@@ -7339,19 +7460,27 @@
           <a:noFill/>
         </p:spPr>
         <p:txBody>
-          <a:bodyPr wrap="square" lIns="18288" rIns="18288" tIns="18288" bIns="18288">
+          <a:bodyPr wrap="square" lIns="0" rIns="0" tIns="0" bIns="0">
             <a:spAutoFit/>
           </a:bodyPr>
           <a:lstStyle/>
           <a:p>
-            <a:r>
-              <a:rPr sz="840" b="0">
-                <a:solidFill>
-                  <a:srgbClr val="58696F"/>
+            <a:pPr algn="ctr">
+              <a:spcBef>
+                <a:spcPts val="0"/>
+              </a:spcBef>
+              <a:spcAft>
+                <a:spcPts val="0"/>
+              </a:spcAft>
+            </a:pPr>
+            <a:r>
+              <a:rPr sz="1280" b="0">
+                <a:solidFill>
+                  <a:srgbClr val="4F6369"/>
                 </a:solidFill>
                 <a:latin typeface="Aptos"/>
               </a:rPr>
-              <a:t>Needed before claiming GoodCo savings</a:t>
+              <a:t>GoodCo savings need pilot</a:t>
             </a:r>
           </a:p>
         </p:txBody>
@@ -7364,8 +7493,8 @@
         </p:nvSpPr>
         <p:spPr>
           <a:xfrm>
-            <a:off x="914400" y="5925312"/>
-            <a:ext cx="10012680" cy="292608"/>
+            <a:off x="658368" y="6446520"/>
+            <a:ext cx="9692640" cy="201168"/>
           </a:xfrm>
           <a:prstGeom prst="rect">
             <a:avLst/>
@@ -7373,20 +7502,27 @@
           <a:noFill/>
         </p:spPr>
         <p:txBody>
-          <a:bodyPr wrap="square" lIns="18288" rIns="18288" tIns="18288" bIns="18288">
+          <a:bodyPr wrap="square" lIns="0" rIns="0" tIns="0" bIns="0">
             <a:spAutoFit/>
           </a:bodyPr>
           <a:lstStyle/>
           <a:p>
-            <a:pPr algn="ctr"/>
-            <a:r>
-              <a:rPr sz="1550" b="1">
-                <a:solidFill>
-                  <a:srgbClr val="121F23"/>
+            <a:pPr algn="l">
+              <a:spcBef>
+                <a:spcPts val="0"/>
+              </a:spcBef>
+              <a:spcAft>
+                <a:spcPts val="0"/>
+              </a:spcAft>
+            </a:pPr>
+            <a:r>
+              <a:rPr sz="1050" b="0">
+                <a:solidFill>
+                  <a:srgbClr val="4F6369"/>
                 </a:solidFill>
                 <a:latin typeface="Aptos"/>
               </a:rPr>
-              <a:t>Honest claim: the product creates the data and workflow needed to test this efficiency gain in real pantry operations.</a:t>
+              <a:t>Sources: USDA food waste FAQ; inventory-sharing literature. GoodCo impact is not yet pilot-measured.</a:t>
             </a:r>
           </a:p>
         </p:txBody>
@@ -7399,8 +7535,8 @@
         </p:nvSpPr>
         <p:spPr>
           <a:xfrm>
-            <a:off x="658368" y="6473952"/>
-            <a:ext cx="8778240" cy="164592"/>
+            <a:off x="11265408" y="6446520"/>
+            <a:ext cx="502920" cy="201168"/>
           </a:xfrm>
           <a:prstGeom prst="rect">
             <a:avLst/>
@@ -7408,54 +7544,27 @@
           <a:noFill/>
         </p:spPr>
         <p:txBody>
-          <a:bodyPr wrap="square" lIns="18288" rIns="18288" tIns="18288" bIns="18288">
+          <a:bodyPr wrap="square" lIns="0" rIns="0" tIns="0" bIns="0">
             <a:spAutoFit/>
           </a:bodyPr>
           <a:lstStyle/>
           <a:p>
-            <a:r>
-              <a:rPr sz="650" b="0">
-                <a:solidFill>
-                  <a:srgbClr val="58696F"/>
+            <a:pPr algn="r">
+              <a:spcBef>
+                <a:spcPts val="0"/>
+              </a:spcBef>
+              <a:spcAft>
+                <a:spcPts val="0"/>
+              </a:spcAft>
+            </a:pPr>
+            <a:r>
+              <a:rPr sz="1050" b="0">
+                <a:solidFill>
+                  <a:srgbClr val="4F6369"/>
                 </a:solidFill>
                 <a:latin typeface="Aptos"/>
               </a:rPr>
-              <a:t>Sources: USDA food waste FAQ; inventory sharing / lateral-transshipment literature. GoodCo impact is not yet pilot-measured.</a:t>
-            </a:r>
-          </a:p>
-        </p:txBody>
-      </p:sp>
-      <p:sp>
-        <p:nvSpPr>
-          <p:cNvPr id="25" name="TextBox 24"/>
-          <p:cNvSpPr txBox="1"/>
-          <p:nvPr/>
-        </p:nvSpPr>
-        <p:spPr>
-          <a:xfrm>
-            <a:off x="10927080" y="6473952"/>
-            <a:ext cx="658368" cy="164592"/>
-          </a:xfrm>
-          <a:prstGeom prst="rect">
-            <a:avLst/>
-          </a:prstGeom>
-          <a:noFill/>
-        </p:spPr>
-        <p:txBody>
-          <a:bodyPr wrap="square" lIns="18288" rIns="18288" tIns="18288" bIns="18288">
-            <a:spAutoFit/>
-          </a:bodyPr>
-          <a:lstStyle/>
-          <a:p>
-            <a:pPr algn="r"/>
-            <a:r>
-              <a:rPr sz="750" b="0">
-                <a:solidFill>
-                  <a:srgbClr val="58696F"/>
-                </a:solidFill>
-                <a:latin typeface="Aptos"/>
-              </a:rPr>
-              <a:t>04 / 04</a:t>
+              <a:t>05 / 05</a:t>
             </a:r>
           </a:p>
         </p:txBody>
